--- a/CreditMind-Pitch-Deck.pptx
+++ b/CreditMind-Pitch-Deck.pptx
@@ -18,9 +18,10 @@
     <p:sldId id="266" r:id="rId12"/>
     <p:sldId id="267" r:id="rId13"/>
     <p:sldId id="268" r:id="rId14"/>
+    <p:sldId id="269" r:id="rId15"/>
   </p:sldIdLst>
   <p:notesMasterIdLst>
-    <p:notesMasterId r:id="rId15"/>
+    <p:notesMasterId r:id="rId16"/>
   </p:notesMasterIdLst>
   <p:sldSz cx="12192000" cy="6858000"/>
   <p:notesSz cx="6858000" cy="12192000"/>
@@ -890,6 +891,94 @@
             <a:fld id="{F7021451-1387-4CA6-816F-3879F97B5CBC}" type="slidenum">
               <a:rPr lang="en-US"/>
               <a:t>13</a:t>
+            </a:fld>
+            <a:endParaRPr lang="en-US"/>
+          </a:p>
+        </p:txBody>
+      </p:sp>
+    </p:spTree>
+    <p:extLst>
+      <p:ext uri="{BB962C8B-B14F-4D97-AF65-F5344CB8AC3E}">
+        <p14:creationId xmlns:p14="http://schemas.microsoft.com/office/powerpoint/2010/main" val="1024086991"/>
+      </p:ext>
+    </p:extLst>
+  </p:cSld>
+  <p:clrMapOvr>
+    <a:masterClrMapping/>
+  </p:clrMapOvr>
+</p:notes>
+</file>
+
+<file path=ppt/notesSlides/notesSlide14.xml><?xml version="1.0" encoding="utf-8"?>
+<p:notes xmlns:a="http://schemas.openxmlformats.org/drawingml/2006/main" xmlns:r="http://schemas.openxmlformats.org/officeDocument/2006/relationships" xmlns:p="http://schemas.openxmlformats.org/presentationml/2006/main">
+  <p:cSld>
+    <p:spTree>
+      <p:nvGrpSpPr>
+        <p:cNvPr id="1" name=""/>
+        <p:cNvGrpSpPr/>
+        <p:nvPr/>
+      </p:nvGrpSpPr>
+      <p:grpSpPr>
+        <a:xfrm>
+          <a:off x="0" y="0"/>
+          <a:ext cx="0" cy="0"/>
+          <a:chOff x="0" y="0"/>
+          <a:chExt cx="0" cy="0"/>
+        </a:xfrm>
+      </p:grpSpPr>
+      <p:sp>
+        <p:nvSpPr>
+          <p:cNvPr id="2" name="Slide Image Placeholder 1"/>
+          <p:cNvSpPr>
+            <a:spLocks noGrp="1" noRot="1" noChangeAspect="1"/>
+          </p:cNvSpPr>
+          <p:nvPr>
+            <p:ph type="sldImg"/>
+          </p:nvPr>
+        </p:nvSpPr>
+        <p:spPr/>
+      </p:sp>
+      <p:sp>
+        <p:nvSpPr>
+          <p:cNvPr id="3" name="Notes Placeholder 2"/>
+          <p:cNvSpPr>
+            <a:spLocks noGrp="1"/>
+          </p:cNvSpPr>
+          <p:nvPr>
+            <p:ph type="body" idx="1"/>
+          </p:nvPr>
+        </p:nvSpPr>
+        <p:spPr/>
+        <p:txBody>
+          <a:bodyPr/>
+          <a:lstStyle/>
+          <a:p>
+            <a:r>
+              <a:rPr lang="en-US" dirty="0"/>
+              <a:t/>
+            </a:r>
+            <a:endParaRPr lang="en-US" dirty="0"/>
+          </a:p>
+        </p:txBody>
+      </p:sp>
+      <p:sp>
+        <p:nvSpPr>
+          <p:cNvPr id="4" name="Slide Number Placeholder 3"/>
+          <p:cNvSpPr>
+            <a:spLocks noGrp="1"/>
+          </p:cNvSpPr>
+          <p:nvPr>
+            <p:ph type="sldNum" sz="quarter" idx="10"/>
+          </p:nvPr>
+        </p:nvSpPr>
+        <p:spPr/>
+        <p:txBody>
+          <a:bodyPr/>
+          <a:lstStyle/>
+          <a:p>
+            <a:fld id="{F7021451-1387-4CA6-816F-3879F97B5CBC}" type="slidenum">
+              <a:rPr lang="en-US"/>
+              <a:t>14</a:t>
             </a:fld>
             <a:endParaRPr lang="en-US"/>
           </a:p>
@@ -2254,7 +2343,7 @@
     <p:bg>
       <p:bgPr>
         <a:solidFill>
-          <a:srgbClr val="F8FAFC"/>
+          <a:srgbClr val="21295C"/>
         </a:solidFill>
       </p:bgPr>
     </p:bg>
@@ -2281,7 +2370,7 @@
         <p:spPr>
           <a:xfrm>
             <a:off x="0" y="0"/>
-            <a:ext cx="12161520" cy="73152"/>
+            <a:ext cx="12161520" cy="137160"/>
           </a:xfrm>
           <a:prstGeom prst="rect">
             <a:avLst/>
@@ -2300,34 +2389,34 @@
         </p:nvSpPr>
         <p:spPr>
           <a:xfrm>
-            <a:off x="548640" y="274320"/>
-            <a:ext cx="10972800" cy="548640"/>
-          </a:xfrm>
-          <a:prstGeom prst="rect">
-            <a:avLst/>
-          </a:prstGeom>
-          <a:noFill/>
-          <a:ln/>
-        </p:spPr>
-        <p:txBody>
-          <a:bodyPr wrap="square" lIns="0" tIns="0" rIns="0" bIns="0" rtlCol="0" anchor="ctr"/>
-          <a:lstStyle/>
-          <a:p>
-            <a:pPr indent="0" marL="0">
-              <a:buNone/>
-            </a:pPr>
-            <a:r>
-              <a:rPr lang="en-US" sz="2800" b="1" dirty="0">
-                <a:solidFill>
-                  <a:srgbClr val="21295C"/>
+            <a:off x="548640" y="365760"/>
+            <a:ext cx="10972800" cy="640080"/>
+          </a:xfrm>
+          <a:prstGeom prst="rect">
+            <a:avLst/>
+          </a:prstGeom>
+          <a:noFill/>
+          <a:ln/>
+        </p:spPr>
+        <p:txBody>
+          <a:bodyPr wrap="square" lIns="0" tIns="0" rIns="0" bIns="0" rtlCol="0" anchor="ctr"/>
+          <a:lstStyle/>
+          <a:p>
+            <a:pPr indent="0" marL="0">
+              <a:buNone/>
+            </a:pPr>
+            <a:r>
+              <a:rPr lang="en-US" sz="3200" b="1" dirty="0">
+                <a:solidFill>
+                  <a:srgbClr val="FFFFFF"/>
                 </a:solidFill>
                 <a:latin typeface="Georgia" pitchFamily="34" charset="0"/>
                 <a:ea typeface="Georgia" pitchFamily="34" charset="-122"/>
                 <a:cs typeface="Georgia" pitchFamily="34" charset="-120"/>
               </a:rPr>
-              <a:t>团队与学术背书</a:t>
-            </a:r>
-            <a:endParaRPr lang="en-US" sz="2800" dirty="0"/>
+              <a:t>现场 Demo</a:t>
+            </a:r>
+            <a:endParaRPr lang="en-US" sz="3200" dirty="0"/>
           </a:p>
         </p:txBody>
       </p:sp>
@@ -2339,103 +2428,67 @@
         </p:nvSpPr>
         <p:spPr>
           <a:xfrm>
-            <a:off x="457200" y="6400800"/>
-            <a:ext cx="5486400" cy="274320"/>
-          </a:xfrm>
-          <a:prstGeom prst="rect">
-            <a:avLst/>
-          </a:prstGeom>
-          <a:noFill/>
-          <a:ln/>
-        </p:spPr>
-        <p:txBody>
-          <a:bodyPr wrap="square" lIns="0" tIns="0" rIns="0" bIns="0" rtlCol="0" anchor="ctr"/>
-          <a:lstStyle/>
-          <a:p>
-            <a:pPr indent="0" marL="0">
-              <a:buNone/>
-            </a:pPr>
-            <a:r>
-              <a:rPr lang="en-US" sz="900" dirty="0">
-                <a:solidFill>
-                  <a:srgbClr val="64748B"/>
-                </a:solidFill>
-                <a:latin typeface="Calibri" pitchFamily="34" charset="0"/>
-                <a:ea typeface="Calibri" pitchFamily="34" charset="-122"/>
-                <a:cs typeface="Calibri" pitchFamily="34" charset="-120"/>
-              </a:rPr>
-              <a:t>CreditMind · AI 信贷风控大脑</a:t>
-            </a:r>
-            <a:endParaRPr lang="en-US" sz="900" dirty="0"/>
-          </a:p>
-        </p:txBody>
-      </p:sp>
-      <p:sp>
-        <p:nvSpPr>
-          <p:cNvPr id="5" name="Text 3"/>
-          <p:cNvSpPr/>
-          <p:nvPr/>
-        </p:nvSpPr>
-        <p:spPr>
-          <a:xfrm>
-            <a:off x="11247120" y="6400800"/>
-            <a:ext cx="457200" cy="274320"/>
-          </a:xfrm>
-          <a:prstGeom prst="rect">
-            <a:avLst/>
-          </a:prstGeom>
-          <a:noFill/>
-          <a:ln/>
-        </p:spPr>
-        <p:txBody>
-          <a:bodyPr wrap="square" lIns="0" tIns="0" rIns="0" bIns="0" rtlCol="0" anchor="ctr"/>
-          <a:lstStyle/>
-          <a:p>
-            <a:pPr algn="r" indent="0" marL="0">
-              <a:buNone/>
-            </a:pPr>
-            <a:r>
-              <a:rPr lang="en-US" sz="900" dirty="0">
-                <a:solidFill>
-                  <a:srgbClr val="64748B"/>
-                </a:solidFill>
-              </a:rPr>
-              <a:t>10 / 13</a:t>
-            </a:r>
-            <a:endParaRPr lang="en-US" sz="900" dirty="0"/>
-          </a:p>
-        </p:txBody>
-      </p:sp>
-      <p:sp>
-        <p:nvSpPr>
-          <p:cNvPr id="6" name="Shape 4"/>
-          <p:cNvSpPr/>
-          <p:nvPr/>
-        </p:nvSpPr>
-        <p:spPr>
-          <a:xfrm>
-            <a:off x="914400" y="1371600"/>
-            <a:ext cx="2011680" cy="2011680"/>
+            <a:off x="548640" y="1005840"/>
+            <a:ext cx="10972800" cy="457200"/>
+          </a:xfrm>
+          <a:prstGeom prst="rect">
+            <a:avLst/>
+          </a:prstGeom>
+          <a:noFill/>
+          <a:ln/>
+        </p:spPr>
+        <p:txBody>
+          <a:bodyPr wrap="square" lIns="0" tIns="0" rIns="0" bIns="0" rtlCol="0" anchor="ctr"/>
+          <a:lstStyle/>
+          <a:p>
+            <a:pPr indent="0" marL="0">
+              <a:buNone/>
+            </a:pPr>
+            <a:r>
+              <a:rPr lang="en-US" sz="1800" dirty="0">
+                <a:solidFill>
+                  <a:srgbClr val="14B8A6"/>
+                </a:solidFill>
+                <a:latin typeface="Calibri" pitchFamily="34" charset="0"/>
+                <a:ea typeface="Calibri" pitchFamily="34" charset="-122"/>
+                <a:cs typeface="Calibri" pitchFamily="34" charset="-120"/>
+              </a:rPr>
+              <a:t>35 岁深圳电商老板借 20 万</a:t>
+            </a:r>
+            <a:endParaRPr lang="en-US" sz="1800" dirty="0"/>
+          </a:p>
+        </p:txBody>
+      </p:sp>
+      <p:sp>
+        <p:nvSpPr>
+          <p:cNvPr id="5" name="Shape 3"/>
+          <p:cNvSpPr/>
+          <p:nvPr/>
+        </p:nvSpPr>
+        <p:spPr>
+          <a:xfrm>
+            <a:off x="914400" y="1828800"/>
+            <a:ext cx="640080" cy="640080"/>
           </a:xfrm>
           <a:prstGeom prst="ellipse">
             <a:avLst/>
           </a:prstGeom>
           <a:solidFill>
-            <a:srgbClr val="065A82"/>
+            <a:srgbClr val="14B8A6"/>
           </a:solidFill>
           <a:ln/>
         </p:spPr>
       </p:sp>
       <p:sp>
         <p:nvSpPr>
-          <p:cNvPr id="7" name="Text 5"/>
-          <p:cNvSpPr/>
-          <p:nvPr/>
-        </p:nvSpPr>
-        <p:spPr>
-          <a:xfrm>
-            <a:off x="914400" y="1371600"/>
-            <a:ext cx="2011680" cy="2011680"/>
+          <p:cNvPr id="6" name="Text 4"/>
+          <p:cNvSpPr/>
+          <p:nvPr/>
+        </p:nvSpPr>
+        <p:spPr>
+          <a:xfrm>
+            <a:off x="914400" y="1828800"/>
+            <a:ext cx="640080" cy="640080"/>
           </a:xfrm>
           <a:prstGeom prst="rect">
             <a:avLst/>
@@ -2451,76 +2504,414 @@
               <a:buNone/>
             </a:pPr>
             <a:r>
-              <a:rPr lang="en-US" sz="2800" b="1" dirty="0">
-                <a:solidFill>
-                  <a:srgbClr val="FFFFFF"/>
+              <a:rPr lang="en-US" sz="2400" b="1" dirty="0">
+                <a:solidFill>
+                  <a:srgbClr val="21295C"/>
                 </a:solidFill>
                 <a:latin typeface="Georgia" pitchFamily="34" charset="0"/>
                 <a:ea typeface="Georgia" pitchFamily="34" charset="-122"/>
                 <a:cs typeface="Georgia" pitchFamily="34" charset="-120"/>
               </a:rPr>
-              <a:t>尹</a:t>
-            </a:r>
-            <a:endParaRPr lang="en-US" sz="2800" dirty="0"/>
-          </a:p>
+              <a:t>1</a:t>
+            </a:r>
+            <a:endParaRPr lang="en-US" sz="2400" dirty="0"/>
+          </a:p>
+        </p:txBody>
+      </p:sp>
+      <p:sp>
+        <p:nvSpPr>
+          <p:cNvPr id="7" name="Text 5"/>
+          <p:cNvSpPr/>
+          <p:nvPr/>
+        </p:nvSpPr>
+        <p:spPr>
+          <a:xfrm>
+            <a:off x="1828800" y="1828800"/>
+            <a:ext cx="3657600" cy="320040"/>
+          </a:xfrm>
+          <a:prstGeom prst="rect">
+            <a:avLst/>
+          </a:prstGeom>
+          <a:noFill/>
+          <a:ln/>
+        </p:spPr>
+        <p:txBody>
+          <a:bodyPr wrap="square" lIns="0" tIns="0" rIns="0" bIns="0" rtlCol="0" anchor="ctr"/>
+          <a:lstStyle/>
+          <a:p>
+            <a:pPr indent="0" marL="0">
+              <a:buNone/>
+            </a:pPr>
+            <a:r>
+              <a:rPr lang="en-US" sz="1800" b="1" dirty="0">
+                <a:solidFill>
+                  <a:srgbClr val="FFFFFF"/>
+                </a:solidFill>
+                <a:latin typeface="Calibri" pitchFamily="34" charset="0"/>
+                <a:ea typeface="Calibri" pitchFamily="34" charset="-122"/>
+                <a:cs typeface="Calibri" pitchFamily="34" charset="-120"/>
+              </a:rPr>
+              <a:t>启动 Agent</a:t>
+            </a:r>
+            <a:endParaRPr lang="en-US" sz="1800" dirty="0"/>
+          </a:p>
+        </p:txBody>
+      </p:sp>
+      <p:sp>
+        <p:nvSpPr>
+          <p:cNvPr id="8" name="Text 6"/>
+          <p:cNvSpPr/>
+          <p:nvPr/>
+        </p:nvSpPr>
+        <p:spPr>
+          <a:xfrm>
+            <a:off x="1828800" y="2148840"/>
+            <a:ext cx="7315200" cy="320040"/>
+          </a:xfrm>
+          <a:prstGeom prst="rect">
+            <a:avLst/>
+          </a:prstGeom>
+          <a:noFill/>
+          <a:ln/>
+        </p:spPr>
+        <p:txBody>
+          <a:bodyPr wrap="square" lIns="0" tIns="0" rIns="0" bIns="0" rtlCol="0" anchor="ctr"/>
+          <a:lstStyle/>
+          <a:p>
+            <a:pPr indent="0" marL="0">
+              <a:buNone/>
+            </a:pPr>
+            <a:r>
+              <a:rPr lang="en-US" sz="1400" dirty="0">
+                <a:solidFill>
+                  <a:srgbClr val="E2E8F0"/>
+                </a:solidFill>
+                <a:latin typeface="Calibri" pitchFamily="34" charset="0"/>
+                <a:ea typeface="Calibri" pitchFamily="34" charset="-122"/>
+                <a:cs typeface="Calibri" pitchFamily="34" charset="-120"/>
+              </a:rPr>
+              <a:t>输入客户基本信息</a:t>
+            </a:r>
+            <a:endParaRPr lang="en-US" sz="1400" dirty="0"/>
+          </a:p>
+        </p:txBody>
+      </p:sp>
+      <p:sp>
+        <p:nvSpPr>
+          <p:cNvPr id="9" name="Shape 7"/>
+          <p:cNvSpPr/>
+          <p:nvPr/>
+        </p:nvSpPr>
+        <p:spPr>
+          <a:xfrm>
+            <a:off x="914400" y="2834640"/>
+            <a:ext cx="640080" cy="640080"/>
+          </a:xfrm>
+          <a:prstGeom prst="ellipse">
+            <a:avLst/>
+          </a:prstGeom>
+          <a:solidFill>
+            <a:srgbClr val="14B8A6"/>
+          </a:solidFill>
+          <a:ln/>
+        </p:spPr>
+      </p:sp>
+      <p:sp>
+        <p:nvSpPr>
+          <p:cNvPr id="10" name="Text 8"/>
+          <p:cNvSpPr/>
+          <p:nvPr/>
+        </p:nvSpPr>
+        <p:spPr>
+          <a:xfrm>
+            <a:off x="914400" y="2834640"/>
+            <a:ext cx="640080" cy="640080"/>
+          </a:xfrm>
+          <a:prstGeom prst="rect">
+            <a:avLst/>
+          </a:prstGeom>
+          <a:noFill/>
+          <a:ln/>
+        </p:spPr>
+        <p:txBody>
+          <a:bodyPr wrap="square" lIns="0" tIns="0" rIns="0" bIns="0" rtlCol="0" anchor="ctr"/>
+          <a:lstStyle/>
           <a:p>
             <a:pPr algn="ctr" indent="0" marL="0">
               <a:buNone/>
             </a:pPr>
             <a:r>
-              <a:rPr lang="en-US" sz="2800" b="1" dirty="0">
-                <a:solidFill>
-                  <a:srgbClr val="FFFFFF"/>
+              <a:rPr lang="en-US" sz="2400" b="1" dirty="0">
+                <a:solidFill>
+                  <a:srgbClr val="21295C"/>
                 </a:solidFill>
                 <a:latin typeface="Georgia" pitchFamily="34" charset="0"/>
                 <a:ea typeface="Georgia" pitchFamily="34" charset="-122"/>
                 <a:cs typeface="Georgia" pitchFamily="34" charset="-120"/>
               </a:rPr>
-              <a:t>红</a:t>
-            </a:r>
-            <a:endParaRPr lang="en-US" sz="2800" dirty="0"/>
-          </a:p>
+              <a:t>2</a:t>
+            </a:r>
+            <a:endParaRPr lang="en-US" sz="2400" dirty="0"/>
+          </a:p>
+        </p:txBody>
+      </p:sp>
+      <p:sp>
+        <p:nvSpPr>
+          <p:cNvPr id="11" name="Text 9"/>
+          <p:cNvSpPr/>
+          <p:nvPr/>
+        </p:nvSpPr>
+        <p:spPr>
+          <a:xfrm>
+            <a:off x="1828800" y="2834640"/>
+            <a:ext cx="3657600" cy="320040"/>
+          </a:xfrm>
+          <a:prstGeom prst="rect">
+            <a:avLst/>
+          </a:prstGeom>
+          <a:noFill/>
+          <a:ln/>
+        </p:spPr>
+        <p:txBody>
+          <a:bodyPr wrap="square" lIns="0" tIns="0" rIns="0" bIns="0" rtlCol="0" anchor="ctr"/>
+          <a:lstStyle/>
+          <a:p>
+            <a:pPr indent="0" marL="0">
+              <a:buNone/>
+            </a:pPr>
+            <a:r>
+              <a:rPr lang="en-US" sz="1800" b="1" dirty="0">
+                <a:solidFill>
+                  <a:srgbClr val="FFFFFF"/>
+                </a:solidFill>
+                <a:latin typeface="Calibri" pitchFamily="34" charset="0"/>
+                <a:ea typeface="Calibri" pitchFamily="34" charset="-122"/>
+                <a:cs typeface="Calibri" pitchFamily="34" charset="-120"/>
+              </a:rPr>
+              <a:t>多轮访谈</a:t>
+            </a:r>
+            <a:endParaRPr lang="en-US" sz="1800" dirty="0"/>
+          </a:p>
+        </p:txBody>
+      </p:sp>
+      <p:sp>
+        <p:nvSpPr>
+          <p:cNvPr id="12" name="Text 10"/>
+          <p:cNvSpPr/>
+          <p:nvPr/>
+        </p:nvSpPr>
+        <p:spPr>
+          <a:xfrm>
+            <a:off x="1828800" y="3154680"/>
+            <a:ext cx="7315200" cy="320040"/>
+          </a:xfrm>
+          <a:prstGeom prst="rect">
+            <a:avLst/>
+          </a:prstGeom>
+          <a:noFill/>
+          <a:ln/>
+        </p:spPr>
+        <p:txBody>
+          <a:bodyPr wrap="square" lIns="0" tIns="0" rIns="0" bIns="0" rtlCol="0" anchor="ctr"/>
+          <a:lstStyle/>
+          <a:p>
+            <a:pPr indent="0" marL="0">
+              <a:buNone/>
+            </a:pPr>
+            <a:r>
+              <a:rPr lang="en-US" sz="1400" dirty="0">
+                <a:solidFill>
+                  <a:srgbClr val="E2E8F0"/>
+                </a:solidFill>
+                <a:latin typeface="Calibri" pitchFamily="34" charset="0"/>
+                <a:ea typeface="Calibri" pitchFamily="34" charset="-122"/>
+                <a:cs typeface="Calibri" pitchFamily="34" charset="-120"/>
+              </a:rPr>
+              <a:t>Agent 自动提问 19 项特征</a:t>
+            </a:r>
+            <a:endParaRPr lang="en-US" sz="1400" dirty="0"/>
+          </a:p>
+        </p:txBody>
+      </p:sp>
+      <p:sp>
+        <p:nvSpPr>
+          <p:cNvPr id="13" name="Shape 11"/>
+          <p:cNvSpPr/>
+          <p:nvPr/>
+        </p:nvSpPr>
+        <p:spPr>
+          <a:xfrm>
+            <a:off x="914400" y="3840480"/>
+            <a:ext cx="640080" cy="640080"/>
+          </a:xfrm>
+          <a:prstGeom prst="ellipse">
+            <a:avLst/>
+          </a:prstGeom>
+          <a:solidFill>
+            <a:srgbClr val="14B8A6"/>
+          </a:solidFill>
+          <a:ln/>
+        </p:spPr>
+      </p:sp>
+      <p:sp>
+        <p:nvSpPr>
+          <p:cNvPr id="14" name="Text 12"/>
+          <p:cNvSpPr/>
+          <p:nvPr/>
+        </p:nvSpPr>
+        <p:spPr>
+          <a:xfrm>
+            <a:off x="914400" y="3840480"/>
+            <a:ext cx="640080" cy="640080"/>
+          </a:xfrm>
+          <a:prstGeom prst="rect">
+            <a:avLst/>
+          </a:prstGeom>
+          <a:noFill/>
+          <a:ln/>
+        </p:spPr>
+        <p:txBody>
+          <a:bodyPr wrap="square" lIns="0" tIns="0" rIns="0" bIns="0" rtlCol="0" anchor="ctr"/>
+          <a:lstStyle/>
           <a:p>
             <a:pPr algn="ctr" indent="0" marL="0">
               <a:buNone/>
             </a:pPr>
             <a:r>
-              <a:rPr lang="en-US" sz="2800" b="1" dirty="0">
-                <a:solidFill>
-                  <a:srgbClr val="FFFFFF"/>
+              <a:rPr lang="en-US" sz="2400" b="1" dirty="0">
+                <a:solidFill>
+                  <a:srgbClr val="21295C"/>
                 </a:solidFill>
                 <a:latin typeface="Georgia" pitchFamily="34" charset="0"/>
                 <a:ea typeface="Georgia" pitchFamily="34" charset="-122"/>
                 <a:cs typeface="Georgia" pitchFamily="34" charset="-120"/>
               </a:rPr>
-              <a:t>艳</a:t>
-            </a:r>
-            <a:endParaRPr lang="en-US" sz="2800" dirty="0"/>
-          </a:p>
-        </p:txBody>
-      </p:sp>
-      <p:sp>
-        <p:nvSpPr>
-          <p:cNvPr id="8" name="Text 6"/>
-          <p:cNvSpPr/>
-          <p:nvPr/>
-        </p:nvSpPr>
-        <p:spPr>
-          <a:xfrm>
-            <a:off x="3200400" y="1371600"/>
-            <a:ext cx="7772400" cy="457200"/>
-          </a:xfrm>
-          <a:prstGeom prst="rect">
-            <a:avLst/>
-          </a:prstGeom>
-          <a:noFill/>
-          <a:ln/>
-        </p:spPr>
-        <p:txBody>
-          <a:bodyPr wrap="square" lIns="0" tIns="0" rIns="0" bIns="0" rtlCol="0" anchor="ctr"/>
-          <a:lstStyle/>
-          <a:p>
-            <a:pPr indent="0" marL="0">
+              <a:t>3</a:t>
+            </a:r>
+            <a:endParaRPr lang="en-US" sz="2400" dirty="0"/>
+          </a:p>
+        </p:txBody>
+      </p:sp>
+      <p:sp>
+        <p:nvSpPr>
+          <p:cNvPr id="15" name="Text 13"/>
+          <p:cNvSpPr/>
+          <p:nvPr/>
+        </p:nvSpPr>
+        <p:spPr>
+          <a:xfrm>
+            <a:off x="1828800" y="3840480"/>
+            <a:ext cx="3657600" cy="320040"/>
+          </a:xfrm>
+          <a:prstGeom prst="rect">
+            <a:avLst/>
+          </a:prstGeom>
+          <a:noFill/>
+          <a:ln/>
+        </p:spPr>
+        <p:txBody>
+          <a:bodyPr wrap="square" lIns="0" tIns="0" rIns="0" bIns="0" rtlCol="0" anchor="ctr"/>
+          <a:lstStyle/>
+          <a:p>
+            <a:pPr indent="0" marL="0">
+              <a:buNone/>
+            </a:pPr>
+            <a:r>
+              <a:rPr lang="en-US" sz="1800" b="1" dirty="0">
+                <a:solidFill>
+                  <a:srgbClr val="FFFFFF"/>
+                </a:solidFill>
+                <a:latin typeface="Calibri" pitchFamily="34" charset="0"/>
+                <a:ea typeface="Calibri" pitchFamily="34" charset="-122"/>
+                <a:cs typeface="Calibri" pitchFamily="34" charset="-120"/>
+              </a:rPr>
+              <a:t>模型推理</a:t>
+            </a:r>
+            <a:endParaRPr lang="en-US" sz="1800" dirty="0"/>
+          </a:p>
+        </p:txBody>
+      </p:sp>
+      <p:sp>
+        <p:nvSpPr>
+          <p:cNvPr id="16" name="Text 14"/>
+          <p:cNvSpPr/>
+          <p:nvPr/>
+        </p:nvSpPr>
+        <p:spPr>
+          <a:xfrm>
+            <a:off x="1828800" y="4160520"/>
+            <a:ext cx="7315200" cy="320040"/>
+          </a:xfrm>
+          <a:prstGeom prst="rect">
+            <a:avLst/>
+          </a:prstGeom>
+          <a:noFill/>
+          <a:ln/>
+        </p:spPr>
+        <p:txBody>
+          <a:bodyPr wrap="square" lIns="0" tIns="0" rIns="0" bIns="0" rtlCol="0" anchor="ctr"/>
+          <a:lstStyle/>
+          <a:p>
+            <a:pPr indent="0" marL="0">
+              <a:buNone/>
+            </a:pPr>
+            <a:r>
+              <a:rPr lang="en-US" sz="1400" dirty="0">
+                <a:solidFill>
+                  <a:srgbClr val="E2E8F0"/>
+                </a:solidFill>
+                <a:latin typeface="Calibri" pitchFamily="34" charset="0"/>
+                <a:ea typeface="Calibri" pitchFamily="34" charset="-122"/>
+                <a:cs typeface="Calibri" pitchFamily="34" charset="-120"/>
+              </a:rPr>
+              <a:t>实时输出违约概率</a:t>
+            </a:r>
+            <a:endParaRPr lang="en-US" sz="1400" dirty="0"/>
+          </a:p>
+        </p:txBody>
+      </p:sp>
+      <p:sp>
+        <p:nvSpPr>
+          <p:cNvPr id="17" name="Shape 15"/>
+          <p:cNvSpPr/>
+          <p:nvPr/>
+        </p:nvSpPr>
+        <p:spPr>
+          <a:xfrm>
+            <a:off x="914400" y="4846320"/>
+            <a:ext cx="640080" cy="640080"/>
+          </a:xfrm>
+          <a:prstGeom prst="ellipse">
+            <a:avLst/>
+          </a:prstGeom>
+          <a:solidFill>
+            <a:srgbClr val="14B8A6"/>
+          </a:solidFill>
+          <a:ln/>
+        </p:spPr>
+      </p:sp>
+      <p:sp>
+        <p:nvSpPr>
+          <p:cNvPr id="18" name="Text 16"/>
+          <p:cNvSpPr/>
+          <p:nvPr/>
+        </p:nvSpPr>
+        <p:spPr>
+          <a:xfrm>
+            <a:off x="914400" y="4846320"/>
+            <a:ext cx="640080" cy="640080"/>
+          </a:xfrm>
+          <a:prstGeom prst="rect">
+            <a:avLst/>
+          </a:prstGeom>
+          <a:noFill/>
+          <a:ln/>
+        </p:spPr>
+        <p:txBody>
+          <a:bodyPr wrap="square" lIns="0" tIns="0" rIns="0" bIns="0" rtlCol="0" anchor="ctr"/>
+          <a:lstStyle/>
+          <a:p>
+            <a:pPr algn="ctr" indent="0" marL="0">
               <a:buNone/>
             </a:pPr>
             <a:r>
@@ -2532,7 +2923,7 @@
                 <a:ea typeface="Georgia" pitchFamily="34" charset="-122"/>
                 <a:cs typeface="Georgia" pitchFamily="34" charset="-120"/>
               </a:rPr>
-              <a:t>尹红艳（Yolanda）</a:t>
+              <a:t>4</a:t>
             </a:r>
             <a:endParaRPr lang="en-US" sz="2400" dirty="0"/>
           </a:p>
@@ -2540,14 +2931,53 @@
       </p:sp>
       <p:sp>
         <p:nvSpPr>
-          <p:cNvPr id="9" name="Text 7"/>
-          <p:cNvSpPr/>
-          <p:nvPr/>
-        </p:nvSpPr>
-        <p:spPr>
-          <a:xfrm>
-            <a:off x="3200400" y="1828800"/>
-            <a:ext cx="7772400" cy="365760"/>
+          <p:cNvPr id="19" name="Text 17"/>
+          <p:cNvSpPr/>
+          <p:nvPr/>
+        </p:nvSpPr>
+        <p:spPr>
+          <a:xfrm>
+            <a:off x="1828800" y="4846320"/>
+            <a:ext cx="3657600" cy="320040"/>
+          </a:xfrm>
+          <a:prstGeom prst="rect">
+            <a:avLst/>
+          </a:prstGeom>
+          <a:noFill/>
+          <a:ln/>
+        </p:spPr>
+        <p:txBody>
+          <a:bodyPr wrap="square" lIns="0" tIns="0" rIns="0" bIns="0" rtlCol="0" anchor="ctr"/>
+          <a:lstStyle/>
+          <a:p>
+            <a:pPr indent="0" marL="0">
+              <a:buNone/>
+            </a:pPr>
+            <a:r>
+              <a:rPr lang="en-US" sz="1800" b="1" dirty="0">
+                <a:solidFill>
+                  <a:srgbClr val="FFFFFF"/>
+                </a:solidFill>
+                <a:latin typeface="Calibri" pitchFamily="34" charset="0"/>
+                <a:ea typeface="Calibri" pitchFamily="34" charset="-122"/>
+                <a:cs typeface="Calibri" pitchFamily="34" charset="-120"/>
+              </a:rPr>
+              <a:t>报告生成</a:t>
+            </a:r>
+            <a:endParaRPr lang="en-US" sz="1800" dirty="0"/>
+          </a:p>
+        </p:txBody>
+      </p:sp>
+      <p:sp>
+        <p:nvSpPr>
+          <p:cNvPr id="20" name="Text 18"/>
+          <p:cNvSpPr/>
+          <p:nvPr/>
+        </p:nvSpPr>
+        <p:spPr>
+          <a:xfrm>
+            <a:off x="1828800" y="5166360"/>
+            <a:ext cx="7315200" cy="320040"/>
           </a:xfrm>
           <a:prstGeom prst="rect">
             <a:avLst/>
@@ -2565,13 +2995,13 @@
             <a:r>
               <a:rPr lang="en-US" sz="1400" dirty="0">
                 <a:solidFill>
-                  <a:srgbClr val="64748B"/>
-                </a:solidFill>
-                <a:latin typeface="Calibri" pitchFamily="34" charset="0"/>
-                <a:ea typeface="Calibri" pitchFamily="34" charset="-122"/>
-                <a:cs typeface="Calibri" pitchFamily="34" charset="-120"/>
-              </a:rPr>
-              <a:t>深圳大学南特金融科技学院 · 金融科技与风险控制硕士（2025.09 入学）</a:t>
+                  <a:srgbClr val="E2E8F0"/>
+                </a:solidFill>
+                <a:latin typeface="Calibri" pitchFamily="34" charset="0"/>
+                <a:ea typeface="Calibri" pitchFamily="34" charset="-122"/>
+                <a:cs typeface="Calibri" pitchFamily="34" charset="-120"/>
+              </a:rPr>
+              <a:t>Markdown 尽调报告 + SHAP Top3</a:t>
             </a:r>
             <a:endParaRPr lang="en-US" sz="1400" dirty="0"/>
           </a:p>
@@ -2579,321 +3009,40 @@
       </p:sp>
       <p:sp>
         <p:nvSpPr>
-          <p:cNvPr id="10" name="Text 8"/>
-          <p:cNvSpPr/>
-          <p:nvPr/>
-        </p:nvSpPr>
-        <p:spPr>
-          <a:xfrm>
-            <a:off x="3200400" y="2377440"/>
-            <a:ext cx="7772400" cy="365760"/>
-          </a:xfrm>
-          <a:prstGeom prst="rect">
-            <a:avLst/>
-          </a:prstGeom>
-          <a:noFill/>
-          <a:ln/>
-        </p:spPr>
-        <p:txBody>
-          <a:bodyPr wrap="square" lIns="0" tIns="0" rIns="0" bIns="0" rtlCol="0" anchor="ctr"/>
-          <a:lstStyle/>
-          <a:p>
-            <a:pPr indent="0" marL="0">
-              <a:buNone/>
-            </a:pPr>
-            <a:r>
-              <a:rPr lang="en-US" sz="1400" dirty="0">
-                <a:solidFill>
-                  <a:srgbClr val="1E293B"/>
-                </a:solidFill>
-                <a:latin typeface="Calibri" pitchFamily="34" charset="0"/>
-                <a:ea typeface="Calibri" pitchFamily="34" charset="-122"/>
-                <a:cs typeface="Calibri" pitchFamily="34" charset="-120"/>
-              </a:rPr>
-              <a:t>🎓 深圳大学南特金融科技学院 · 金融科技与风险控制硕士</a:t>
+          <p:cNvPr id="21" name="Text 19"/>
+          <p:cNvSpPr/>
+          <p:nvPr/>
+        </p:nvSpPr>
+        <p:spPr>
+          <a:xfrm>
+            <a:off x="548640" y="5943600"/>
+            <a:ext cx="10972800" cy="365760"/>
+          </a:xfrm>
+          <a:prstGeom prst="rect">
+            <a:avLst/>
+          </a:prstGeom>
+          <a:noFill/>
+          <a:ln/>
+        </p:spPr>
+        <p:txBody>
+          <a:bodyPr wrap="square" lIns="0" tIns="0" rIns="0" bIns="0" rtlCol="0" anchor="ctr"/>
+          <a:lstStyle/>
+          <a:p>
+            <a:pPr indent="0" marL="0">
+              <a:buNone/>
+            </a:pPr>
+            <a:r>
+              <a:rPr lang="en-US" sz="1400" i="1" dirty="0">
+                <a:solidFill>
+                  <a:srgbClr val="14B8A6"/>
+                </a:solidFill>
+                <a:latin typeface="Calibri" pitchFamily="34" charset="0"/>
+                <a:ea typeface="Calibri" pitchFamily="34" charset="-122"/>
+                <a:cs typeface="Calibri" pitchFamily="34" charset="-120"/>
+              </a:rPr>
+              <a:t>预期时长：5-10 分钟</a:t>
             </a:r>
             <a:endParaRPr lang="en-US" sz="1400" dirty="0"/>
-          </a:p>
-        </p:txBody>
-      </p:sp>
-      <p:sp>
-        <p:nvSpPr>
-          <p:cNvPr id="11" name="Text 9"/>
-          <p:cNvSpPr/>
-          <p:nvPr/>
-        </p:nvSpPr>
-        <p:spPr>
-          <a:xfrm>
-            <a:off x="3200400" y="2788920"/>
-            <a:ext cx="7772400" cy="365760"/>
-          </a:xfrm>
-          <a:prstGeom prst="rect">
-            <a:avLst/>
-          </a:prstGeom>
-          <a:noFill/>
-          <a:ln/>
-        </p:spPr>
-        <p:txBody>
-          <a:bodyPr wrap="square" lIns="0" tIns="0" rIns="0" bIns="0" rtlCol="0" anchor="ctr"/>
-          <a:lstStyle/>
-          <a:p>
-            <a:pPr indent="0" marL="0">
-              <a:buNone/>
-            </a:pPr>
-            <a:r>
-              <a:rPr lang="en-US" sz="1400" dirty="0">
-                <a:solidFill>
-                  <a:srgbClr val="1E293B"/>
-                </a:solidFill>
-                <a:latin typeface="Calibri" pitchFamily="34" charset="0"/>
-                <a:ea typeface="Calibri" pitchFamily="34" charset="-122"/>
-                <a:cs typeface="Calibri" pitchFamily="34" charset="-120"/>
-              </a:rPr>
-              <a:t>📜 CFA 持证 · CQF 考生 · PMP 认证 · 腾讯云 AI 认证</a:t>
-            </a:r>
-            <a:endParaRPr lang="en-US" sz="1400" dirty="0"/>
-          </a:p>
-        </p:txBody>
-      </p:sp>
-      <p:sp>
-        <p:nvSpPr>
-          <p:cNvPr id="12" name="Text 10"/>
-          <p:cNvSpPr/>
-          <p:nvPr/>
-        </p:nvSpPr>
-        <p:spPr>
-          <a:xfrm>
-            <a:off x="3200400" y="3200400"/>
-            <a:ext cx="7772400" cy="365760"/>
-          </a:xfrm>
-          <a:prstGeom prst="rect">
-            <a:avLst/>
-          </a:prstGeom>
-          <a:noFill/>
-          <a:ln/>
-        </p:spPr>
-        <p:txBody>
-          <a:bodyPr wrap="square" lIns="0" tIns="0" rIns="0" bIns="0" rtlCol="0" anchor="ctr"/>
-          <a:lstStyle/>
-          <a:p>
-            <a:pPr indent="0" marL="0">
-              <a:buNone/>
-            </a:pPr>
-            <a:r>
-              <a:rPr lang="en-US" sz="1400" dirty="0">
-                <a:solidFill>
-                  <a:srgbClr val="1E293B"/>
-                </a:solidFill>
-                <a:latin typeface="Calibri" pitchFamily="34" charset="0"/>
-                <a:ea typeface="Calibri" pitchFamily="34" charset="-122"/>
-                <a:cs typeface="Calibri" pitchFamily="34" charset="-120"/>
-              </a:rPr>
-              <a:t>💼 5 年家族办公室渠道经理 + 5 年万科/招商地产 ERP 业务分析师</a:t>
-            </a:r>
-            <a:endParaRPr lang="en-US" sz="1400" dirty="0"/>
-          </a:p>
-        </p:txBody>
-      </p:sp>
-      <p:sp>
-        <p:nvSpPr>
-          <p:cNvPr id="13" name="Text 11"/>
-          <p:cNvSpPr/>
-          <p:nvPr/>
-        </p:nvSpPr>
-        <p:spPr>
-          <a:xfrm>
-            <a:off x="3200400" y="3611880"/>
-            <a:ext cx="7772400" cy="365760"/>
-          </a:xfrm>
-          <a:prstGeom prst="rect">
-            <a:avLst/>
-          </a:prstGeom>
-          <a:noFill/>
-          <a:ln/>
-        </p:spPr>
-        <p:txBody>
-          <a:bodyPr wrap="square" lIns="0" tIns="0" rIns="0" bIns="0" rtlCol="0" anchor="ctr"/>
-          <a:lstStyle/>
-          <a:p>
-            <a:pPr indent="0" marL="0">
-              <a:buNone/>
-            </a:pPr>
-            <a:r>
-              <a:rPr lang="en-US" sz="1400" dirty="0">
-                <a:solidFill>
-                  <a:srgbClr val="1E293B"/>
-                </a:solidFill>
-                <a:latin typeface="Calibri" pitchFamily="34" charset="0"/>
-                <a:ea typeface="Calibri" pitchFamily="34" charset="-122"/>
-                <a:cs typeface="Calibri" pitchFamily="34" charset="-120"/>
-              </a:rPr>
-              <a:t>🔬 硕士课题：信贷违约预测模型（本项目核心引擎）</a:t>
-            </a:r>
-            <a:endParaRPr lang="en-US" sz="1400" dirty="0"/>
-          </a:p>
-        </p:txBody>
-      </p:sp>
-      <p:sp>
-        <p:nvSpPr>
-          <p:cNvPr id="14" name="Shape 12"/>
-          <p:cNvSpPr/>
-          <p:nvPr/>
-        </p:nvSpPr>
-        <p:spPr>
-          <a:xfrm>
-            <a:off x="914400" y="4572000"/>
-            <a:ext cx="10332720" cy="1371600"/>
-          </a:xfrm>
-          <a:prstGeom prst="rect">
-            <a:avLst/>
-          </a:prstGeom>
-          <a:solidFill>
-            <a:srgbClr val="FFFFFF"/>
-          </a:solidFill>
-          <a:ln w="12700">
-            <a:solidFill>
-              <a:srgbClr val="E2E8F0"/>
-            </a:solidFill>
-            <a:prstDash val="solid"/>
-          </a:ln>
-          <a:effectLst>
-            <a:outerShdw sx="100000" sy="100000" kx="0" ky="0" algn="bl" rotWithShape="0" blurRad="76200" dist="25400" dir="8100000">
-              <a:srgbClr val="000000">
-                <a:alpha val="8000"/>
-              </a:srgbClr>
-            </a:outerShdw>
-          </a:effectLst>
-        </p:spPr>
-      </p:sp>
-      <p:sp>
-        <p:nvSpPr>
-          <p:cNvPr id="15" name="Shape 13"/>
-          <p:cNvSpPr/>
-          <p:nvPr/>
-        </p:nvSpPr>
-        <p:spPr>
-          <a:xfrm>
-            <a:off x="914400" y="4572000"/>
-            <a:ext cx="91440" cy="1371600"/>
-          </a:xfrm>
-          <a:prstGeom prst="rect">
-            <a:avLst/>
-          </a:prstGeom>
-          <a:solidFill>
-            <a:srgbClr val="14B8A6"/>
-          </a:solidFill>
-          <a:ln/>
-        </p:spPr>
-      </p:sp>
-      <p:sp>
-        <p:nvSpPr>
-          <p:cNvPr id="16" name="Text 14"/>
-          <p:cNvSpPr/>
-          <p:nvPr/>
-        </p:nvSpPr>
-        <p:spPr>
-          <a:xfrm>
-            <a:off x="1188720" y="4663440"/>
-            <a:ext cx="9784080" cy="365760"/>
-          </a:xfrm>
-          <a:prstGeom prst="rect">
-            <a:avLst/>
-          </a:prstGeom>
-          <a:noFill/>
-          <a:ln/>
-        </p:spPr>
-        <p:txBody>
-          <a:bodyPr wrap="square" lIns="0" tIns="0" rIns="0" bIns="0" rtlCol="0" anchor="ctr"/>
-          <a:lstStyle/>
-          <a:p>
-            <a:pPr indent="0" marL="0">
-              <a:buNone/>
-            </a:pPr>
-            <a:r>
-              <a:rPr lang="en-US" sz="1600" b="1" dirty="0">
-                <a:solidFill>
-                  <a:srgbClr val="21295C"/>
-                </a:solidFill>
-                <a:latin typeface="Calibri" pitchFamily="34" charset="0"/>
-                <a:ea typeface="Calibri" pitchFamily="34" charset="-122"/>
-                <a:cs typeface="Calibri" pitchFamily="34" charset="-120"/>
-              </a:rPr>
-              <a:t>学术 IP</a:t>
-            </a:r>
-            <a:endParaRPr lang="en-US" sz="1600" dirty="0"/>
-          </a:p>
-        </p:txBody>
-      </p:sp>
-      <p:sp>
-        <p:nvSpPr>
-          <p:cNvPr id="17" name="Text 15"/>
-          <p:cNvSpPr/>
-          <p:nvPr/>
-        </p:nvSpPr>
-        <p:spPr>
-          <a:xfrm>
-            <a:off x="1188720" y="5029200"/>
-            <a:ext cx="9784080" cy="1097280"/>
-          </a:xfrm>
-          <a:prstGeom prst="rect">
-            <a:avLst/>
-          </a:prstGeom>
-          <a:noFill/>
-          <a:ln/>
-        </p:spPr>
-        <p:txBody>
-          <a:bodyPr wrap="square" lIns="0" tIns="0" rIns="0" bIns="0" rtlCol="0" anchor="ctr"/>
-          <a:lstStyle/>
-          <a:p>
-            <a:pPr indent="0" marL="0">
-              <a:buNone/>
-            </a:pPr>
-            <a:r>
-              <a:rPr lang="en-US" sz="1300" dirty="0">
-                <a:solidFill>
-                  <a:srgbClr val="64748B"/>
-                </a:solidFill>
-                <a:latin typeface="Calibri" pitchFamily="34" charset="0"/>
-                <a:ea typeface="Calibri" pitchFamily="34" charset="-122"/>
-                <a:cs typeface="Calibri" pitchFamily="34" charset="-120"/>
-              </a:rPr>
-              <a:t>硕士课题方向：信贷违约预测模型</a:t>
-            </a:r>
-            <a:endParaRPr lang="en-US" sz="1300" dirty="0"/>
-          </a:p>
-          <a:p>
-            <a:pPr indent="0" marL="0">
-              <a:buNone/>
-            </a:pPr>
-            <a:r>
-              <a:rPr lang="en-US" sz="1300" dirty="0">
-                <a:solidFill>
-                  <a:srgbClr val="64748B"/>
-                </a:solidFill>
-                <a:latin typeface="Calibri" pitchFamily="34" charset="0"/>
-                <a:ea typeface="Calibri" pitchFamily="34" charset="-122"/>
-                <a:cs typeface="Calibri" pitchFamily="34" charset="-120"/>
-              </a:rPr>
-              <a:t>已完成：LendingClub 2018-2019 数据完整建模流程（V1.ipynb + V2.md）</a:t>
-            </a:r>
-            <a:endParaRPr lang="en-US" sz="1300" dirty="0"/>
-          </a:p>
-          <a:p>
-            <a:pPr indent="0" marL="0">
-              <a:buNone/>
-            </a:pPr>
-            <a:r>
-              <a:rPr lang="en-US" sz="1300" dirty="0">
-                <a:solidFill>
-                  <a:srgbClr val="64748B"/>
-                </a:solidFill>
-                <a:latin typeface="Calibri" pitchFamily="34" charset="0"/>
-                <a:ea typeface="Calibri" pitchFamily="34" charset="-122"/>
-                <a:cs typeface="Calibri" pitchFamily="34" charset="-120"/>
-              </a:rPr>
-              <a:t>本次路演核心：把课题成果产品化为 CreditMind Agent</a:t>
-            </a:r>
-            <a:endParaRPr lang="en-US" sz="1300" dirty="0"/>
           </a:p>
         </p:txBody>
       </p:sp>
@@ -2982,7 +3131,7 @@
                 <a:ea typeface="Georgia" pitchFamily="34" charset="-122"/>
                 <a:cs typeface="Georgia" pitchFamily="34" charset="-120"/>
               </a:rPr>
-              <a:t>Roadmap</a:t>
+              <a:t>团队与学术背书</a:t>
             </a:r>
             <a:endParaRPr lang="en-US" sz="2800" dirty="0"/>
           </a:p>
@@ -3057,7 +3206,7 @@
                   <a:srgbClr val="64748B"/>
                 </a:solidFill>
               </a:rPr>
-              <a:t>11 / 13</a:t>
+              <a:t>11 / 14</a:t>
             </a:r>
             <a:endParaRPr lang="en-US" sz="900" dirty="0"/>
           </a:p>
@@ -3071,8 +3220,335 @@
         </p:nvSpPr>
         <p:spPr>
           <a:xfrm>
-            <a:off x="548640" y="1371600"/>
-            <a:ext cx="3566160" cy="4114800"/>
+            <a:off x="914400" y="1371600"/>
+            <a:ext cx="2011680" cy="2011680"/>
+          </a:xfrm>
+          <a:prstGeom prst="ellipse">
+            <a:avLst/>
+          </a:prstGeom>
+          <a:solidFill>
+            <a:srgbClr val="065A82"/>
+          </a:solidFill>
+          <a:ln/>
+        </p:spPr>
+      </p:sp>
+      <p:sp>
+        <p:nvSpPr>
+          <p:cNvPr id="7" name="Text 5"/>
+          <p:cNvSpPr/>
+          <p:nvPr/>
+        </p:nvSpPr>
+        <p:spPr>
+          <a:xfrm>
+            <a:off x="914400" y="1371600"/>
+            <a:ext cx="2011680" cy="2011680"/>
+          </a:xfrm>
+          <a:prstGeom prst="rect">
+            <a:avLst/>
+          </a:prstGeom>
+          <a:noFill/>
+          <a:ln/>
+        </p:spPr>
+        <p:txBody>
+          <a:bodyPr wrap="square" lIns="0" tIns="0" rIns="0" bIns="0" rtlCol="0" anchor="ctr"/>
+          <a:lstStyle/>
+          <a:p>
+            <a:pPr algn="ctr" indent="0" marL="0">
+              <a:buNone/>
+            </a:pPr>
+            <a:r>
+              <a:rPr lang="en-US" sz="2800" b="1" dirty="0">
+                <a:solidFill>
+                  <a:srgbClr val="FFFFFF"/>
+                </a:solidFill>
+                <a:latin typeface="Georgia" pitchFamily="34" charset="0"/>
+                <a:ea typeface="Georgia" pitchFamily="34" charset="-122"/>
+                <a:cs typeface="Georgia" pitchFamily="34" charset="-120"/>
+              </a:rPr>
+              <a:t>尹</a:t>
+            </a:r>
+            <a:endParaRPr lang="en-US" sz="2800" dirty="0"/>
+          </a:p>
+          <a:p>
+            <a:pPr algn="ctr" indent="0" marL="0">
+              <a:buNone/>
+            </a:pPr>
+            <a:r>
+              <a:rPr lang="en-US" sz="2800" b="1" dirty="0">
+                <a:solidFill>
+                  <a:srgbClr val="FFFFFF"/>
+                </a:solidFill>
+                <a:latin typeface="Georgia" pitchFamily="34" charset="0"/>
+                <a:ea typeface="Georgia" pitchFamily="34" charset="-122"/>
+                <a:cs typeface="Georgia" pitchFamily="34" charset="-120"/>
+              </a:rPr>
+              <a:t>红</a:t>
+            </a:r>
+            <a:endParaRPr lang="en-US" sz="2800" dirty="0"/>
+          </a:p>
+          <a:p>
+            <a:pPr algn="ctr" indent="0" marL="0">
+              <a:buNone/>
+            </a:pPr>
+            <a:r>
+              <a:rPr lang="en-US" sz="2800" b="1" dirty="0">
+                <a:solidFill>
+                  <a:srgbClr val="FFFFFF"/>
+                </a:solidFill>
+                <a:latin typeface="Georgia" pitchFamily="34" charset="0"/>
+                <a:ea typeface="Georgia" pitchFamily="34" charset="-122"/>
+                <a:cs typeface="Georgia" pitchFamily="34" charset="-120"/>
+              </a:rPr>
+              <a:t>艳</a:t>
+            </a:r>
+            <a:endParaRPr lang="en-US" sz="2800" dirty="0"/>
+          </a:p>
+        </p:txBody>
+      </p:sp>
+      <p:sp>
+        <p:nvSpPr>
+          <p:cNvPr id="8" name="Text 6"/>
+          <p:cNvSpPr/>
+          <p:nvPr/>
+        </p:nvSpPr>
+        <p:spPr>
+          <a:xfrm>
+            <a:off x="3200400" y="1371600"/>
+            <a:ext cx="7772400" cy="457200"/>
+          </a:xfrm>
+          <a:prstGeom prst="rect">
+            <a:avLst/>
+          </a:prstGeom>
+          <a:noFill/>
+          <a:ln/>
+        </p:spPr>
+        <p:txBody>
+          <a:bodyPr wrap="square" lIns="0" tIns="0" rIns="0" bIns="0" rtlCol="0" anchor="ctr"/>
+          <a:lstStyle/>
+          <a:p>
+            <a:pPr indent="0" marL="0">
+              <a:buNone/>
+            </a:pPr>
+            <a:r>
+              <a:rPr lang="en-US" sz="2400" b="1" dirty="0">
+                <a:solidFill>
+                  <a:srgbClr val="21295C"/>
+                </a:solidFill>
+                <a:latin typeface="Georgia" pitchFamily="34" charset="0"/>
+                <a:ea typeface="Georgia" pitchFamily="34" charset="-122"/>
+                <a:cs typeface="Georgia" pitchFamily="34" charset="-120"/>
+              </a:rPr>
+              <a:t>尹红艳（Yolanda）</a:t>
+            </a:r>
+            <a:endParaRPr lang="en-US" sz="2400" dirty="0"/>
+          </a:p>
+        </p:txBody>
+      </p:sp>
+      <p:sp>
+        <p:nvSpPr>
+          <p:cNvPr id="9" name="Text 7"/>
+          <p:cNvSpPr/>
+          <p:nvPr/>
+        </p:nvSpPr>
+        <p:spPr>
+          <a:xfrm>
+            <a:off x="3200400" y="1828800"/>
+            <a:ext cx="7772400" cy="365760"/>
+          </a:xfrm>
+          <a:prstGeom prst="rect">
+            <a:avLst/>
+          </a:prstGeom>
+          <a:noFill/>
+          <a:ln/>
+        </p:spPr>
+        <p:txBody>
+          <a:bodyPr wrap="square" lIns="0" tIns="0" rIns="0" bIns="0" rtlCol="0" anchor="ctr"/>
+          <a:lstStyle/>
+          <a:p>
+            <a:pPr indent="0" marL="0">
+              <a:buNone/>
+            </a:pPr>
+            <a:r>
+              <a:rPr lang="en-US" sz="1400" dirty="0">
+                <a:solidFill>
+                  <a:srgbClr val="64748B"/>
+                </a:solidFill>
+                <a:latin typeface="Calibri" pitchFamily="34" charset="0"/>
+                <a:ea typeface="Calibri" pitchFamily="34" charset="-122"/>
+                <a:cs typeface="Calibri" pitchFamily="34" charset="-120"/>
+              </a:rPr>
+              <a:t>深圳大学南特金融科技学院 · 金融科技与风险控制硕士（2025.09 入学）</a:t>
+            </a:r>
+            <a:endParaRPr lang="en-US" sz="1400" dirty="0"/>
+          </a:p>
+        </p:txBody>
+      </p:sp>
+      <p:sp>
+        <p:nvSpPr>
+          <p:cNvPr id="10" name="Text 8"/>
+          <p:cNvSpPr/>
+          <p:nvPr/>
+        </p:nvSpPr>
+        <p:spPr>
+          <a:xfrm>
+            <a:off x="3200400" y="2377440"/>
+            <a:ext cx="7772400" cy="365760"/>
+          </a:xfrm>
+          <a:prstGeom prst="rect">
+            <a:avLst/>
+          </a:prstGeom>
+          <a:noFill/>
+          <a:ln/>
+        </p:spPr>
+        <p:txBody>
+          <a:bodyPr wrap="square" lIns="0" tIns="0" rIns="0" bIns="0" rtlCol="0" anchor="ctr"/>
+          <a:lstStyle/>
+          <a:p>
+            <a:pPr indent="0" marL="0">
+              <a:buNone/>
+            </a:pPr>
+            <a:r>
+              <a:rPr lang="en-US" sz="1400" dirty="0">
+                <a:solidFill>
+                  <a:srgbClr val="1E293B"/>
+                </a:solidFill>
+                <a:latin typeface="Calibri" pitchFamily="34" charset="0"/>
+                <a:ea typeface="Calibri" pitchFamily="34" charset="-122"/>
+                <a:cs typeface="Calibri" pitchFamily="34" charset="-120"/>
+              </a:rPr>
+              <a:t>🎓 深圳大学南特金融科技学院 · 金融科技与风险控制硕士</a:t>
+            </a:r>
+            <a:endParaRPr lang="en-US" sz="1400" dirty="0"/>
+          </a:p>
+        </p:txBody>
+      </p:sp>
+      <p:sp>
+        <p:nvSpPr>
+          <p:cNvPr id="11" name="Text 9"/>
+          <p:cNvSpPr/>
+          <p:nvPr/>
+        </p:nvSpPr>
+        <p:spPr>
+          <a:xfrm>
+            <a:off x="3200400" y="2788920"/>
+            <a:ext cx="7772400" cy="365760"/>
+          </a:xfrm>
+          <a:prstGeom prst="rect">
+            <a:avLst/>
+          </a:prstGeom>
+          <a:noFill/>
+          <a:ln/>
+        </p:spPr>
+        <p:txBody>
+          <a:bodyPr wrap="square" lIns="0" tIns="0" rIns="0" bIns="0" rtlCol="0" anchor="ctr"/>
+          <a:lstStyle/>
+          <a:p>
+            <a:pPr indent="0" marL="0">
+              <a:buNone/>
+            </a:pPr>
+            <a:r>
+              <a:rPr lang="en-US" sz="1400" dirty="0">
+                <a:solidFill>
+                  <a:srgbClr val="1E293B"/>
+                </a:solidFill>
+                <a:latin typeface="Calibri" pitchFamily="34" charset="0"/>
+                <a:ea typeface="Calibri" pitchFamily="34" charset="-122"/>
+                <a:cs typeface="Calibri" pitchFamily="34" charset="-120"/>
+              </a:rPr>
+              <a:t>📜 CFA 持证 · CQF 考生 · PMP 认证 · 腾讯云 AI 认证</a:t>
+            </a:r>
+            <a:endParaRPr lang="en-US" sz="1400" dirty="0"/>
+          </a:p>
+        </p:txBody>
+      </p:sp>
+      <p:sp>
+        <p:nvSpPr>
+          <p:cNvPr id="12" name="Text 10"/>
+          <p:cNvSpPr/>
+          <p:nvPr/>
+        </p:nvSpPr>
+        <p:spPr>
+          <a:xfrm>
+            <a:off x="3200400" y="3200400"/>
+            <a:ext cx="7772400" cy="365760"/>
+          </a:xfrm>
+          <a:prstGeom prst="rect">
+            <a:avLst/>
+          </a:prstGeom>
+          <a:noFill/>
+          <a:ln/>
+        </p:spPr>
+        <p:txBody>
+          <a:bodyPr wrap="square" lIns="0" tIns="0" rIns="0" bIns="0" rtlCol="0" anchor="ctr"/>
+          <a:lstStyle/>
+          <a:p>
+            <a:pPr indent="0" marL="0">
+              <a:buNone/>
+            </a:pPr>
+            <a:r>
+              <a:rPr lang="en-US" sz="1400" dirty="0">
+                <a:solidFill>
+                  <a:srgbClr val="1E293B"/>
+                </a:solidFill>
+                <a:latin typeface="Calibri" pitchFamily="34" charset="0"/>
+                <a:ea typeface="Calibri" pitchFamily="34" charset="-122"/>
+                <a:cs typeface="Calibri" pitchFamily="34" charset="-120"/>
+              </a:rPr>
+              <a:t>💼 5 年家族办公室渠道经理 + 5 年万科/招商地产 ERP 业务分析师</a:t>
+            </a:r>
+            <a:endParaRPr lang="en-US" sz="1400" dirty="0"/>
+          </a:p>
+        </p:txBody>
+      </p:sp>
+      <p:sp>
+        <p:nvSpPr>
+          <p:cNvPr id="13" name="Text 11"/>
+          <p:cNvSpPr/>
+          <p:nvPr/>
+        </p:nvSpPr>
+        <p:spPr>
+          <a:xfrm>
+            <a:off x="3200400" y="3611880"/>
+            <a:ext cx="7772400" cy="365760"/>
+          </a:xfrm>
+          <a:prstGeom prst="rect">
+            <a:avLst/>
+          </a:prstGeom>
+          <a:noFill/>
+          <a:ln/>
+        </p:spPr>
+        <p:txBody>
+          <a:bodyPr wrap="square" lIns="0" tIns="0" rIns="0" bIns="0" rtlCol="0" anchor="ctr"/>
+          <a:lstStyle/>
+          <a:p>
+            <a:pPr indent="0" marL="0">
+              <a:buNone/>
+            </a:pPr>
+            <a:r>
+              <a:rPr lang="en-US" sz="1400" dirty="0">
+                <a:solidFill>
+                  <a:srgbClr val="1E293B"/>
+                </a:solidFill>
+                <a:latin typeface="Calibri" pitchFamily="34" charset="0"/>
+                <a:ea typeface="Calibri" pitchFamily="34" charset="-122"/>
+                <a:cs typeface="Calibri" pitchFamily="34" charset="-120"/>
+              </a:rPr>
+              <a:t>🔬 硕士课题：信贷违约预测模型（本项目核心引擎）</a:t>
+            </a:r>
+            <a:endParaRPr lang="en-US" sz="1400" dirty="0"/>
+          </a:p>
+        </p:txBody>
+      </p:sp>
+      <p:sp>
+        <p:nvSpPr>
+          <p:cNvPr id="14" name="Shape 12"/>
+          <p:cNvSpPr/>
+          <p:nvPr/>
+        </p:nvSpPr>
+        <p:spPr>
+          <a:xfrm>
+            <a:off x="914400" y="4572000"/>
+            <a:ext cx="10332720" cy="1371600"/>
           </a:xfrm>
           <a:prstGeom prst="rect">
             <a:avLst/>
@@ -3097,34 +3573,34 @@
       </p:sp>
       <p:sp>
         <p:nvSpPr>
-          <p:cNvPr id="7" name="Shape 5"/>
-          <p:cNvSpPr/>
-          <p:nvPr/>
-        </p:nvSpPr>
-        <p:spPr>
-          <a:xfrm>
-            <a:off x="548640" y="1371600"/>
-            <a:ext cx="3566160" cy="548640"/>
+          <p:cNvPr id="15" name="Shape 13"/>
+          <p:cNvSpPr/>
+          <p:nvPr/>
+        </p:nvSpPr>
+        <p:spPr>
+          <a:xfrm>
+            <a:off x="914400" y="4572000"/>
+            <a:ext cx="91440" cy="1371600"/>
           </a:xfrm>
           <a:prstGeom prst="rect">
             <a:avLst/>
           </a:prstGeom>
           <a:solidFill>
-            <a:srgbClr val="065A82"/>
+            <a:srgbClr val="14B8A6"/>
           </a:solidFill>
           <a:ln/>
         </p:spPr>
       </p:sp>
       <p:sp>
         <p:nvSpPr>
-          <p:cNvPr id="8" name="Text 6"/>
-          <p:cNvSpPr/>
-          <p:nvPr/>
-        </p:nvSpPr>
-        <p:spPr>
-          <a:xfrm>
-            <a:off x="731520" y="1371600"/>
-            <a:ext cx="3200400" cy="548640"/>
+          <p:cNvPr id="16" name="Text 14"/>
+          <p:cNvSpPr/>
+          <p:nvPr/>
+        </p:nvSpPr>
+        <p:spPr>
+          <a:xfrm>
+            <a:off x="1188720" y="4663440"/>
+            <a:ext cx="9784080" cy="365760"/>
           </a:xfrm>
           <a:prstGeom prst="rect">
             <a:avLst/>
@@ -3142,13 +3618,13 @@
             <a:r>
               <a:rPr lang="en-US" sz="1600" b="1" dirty="0">
                 <a:solidFill>
-                  <a:srgbClr val="FFFFFF"/>
-                </a:solidFill>
-                <a:latin typeface="Calibri" pitchFamily="34" charset="0"/>
-                <a:ea typeface="Calibri" pitchFamily="34" charset="-122"/>
-                <a:cs typeface="Calibri" pitchFamily="34" charset="-120"/>
-              </a:rPr>
-              <a:t>Phase 1: MVP</a:t>
+                  <a:srgbClr val="21295C"/>
+                </a:solidFill>
+                <a:latin typeface="Calibri" pitchFamily="34" charset="0"/>
+                <a:ea typeface="Calibri" pitchFamily="34" charset="-122"/>
+                <a:cs typeface="Calibri" pitchFamily="34" charset="-120"/>
+              </a:rPr>
+              <a:t>学术 IP</a:t>
             </a:r>
             <a:endParaRPr lang="en-US" sz="1600" dirty="0"/>
           </a:p>
@@ -3156,30 +3632,30 @@
       </p:sp>
       <p:sp>
         <p:nvSpPr>
-          <p:cNvPr id="9" name="Text 7"/>
-          <p:cNvSpPr/>
-          <p:nvPr/>
-        </p:nvSpPr>
-        <p:spPr>
-          <a:xfrm>
-            <a:off x="731520" y="2011680"/>
-            <a:ext cx="3200400" cy="320040"/>
-          </a:xfrm>
-          <a:prstGeom prst="rect">
-            <a:avLst/>
-          </a:prstGeom>
-          <a:noFill/>
-          <a:ln/>
-        </p:spPr>
-        <p:txBody>
-          <a:bodyPr wrap="square" lIns="0" tIns="0" rIns="0" bIns="0" rtlCol="0" anchor="ctr"/>
-          <a:lstStyle/>
-          <a:p>
-            <a:pPr indent="0" marL="0">
-              <a:buNone/>
-            </a:pPr>
-            <a:r>
-              <a:rPr lang="en-US" sz="1200" dirty="0">
+          <p:cNvPr id="17" name="Text 15"/>
+          <p:cNvSpPr/>
+          <p:nvPr/>
+        </p:nvSpPr>
+        <p:spPr>
+          <a:xfrm>
+            <a:off x="1188720" y="5029200"/>
+            <a:ext cx="9784080" cy="1097280"/>
+          </a:xfrm>
+          <a:prstGeom prst="rect">
+            <a:avLst/>
+          </a:prstGeom>
+          <a:noFill/>
+          <a:ln/>
+        </p:spPr>
+        <p:txBody>
+          <a:bodyPr wrap="square" lIns="0" tIns="0" rIns="0" bIns="0" rtlCol="0" anchor="ctr"/>
+          <a:lstStyle/>
+          <a:p>
+            <a:pPr indent="0" marL="0">
+              <a:buNone/>
+            </a:pPr>
+            <a:r>
+              <a:rPr lang="en-US" sz="1300" dirty="0">
                 <a:solidFill>
                   <a:srgbClr val="64748B"/>
                 </a:solidFill>
@@ -3187,32 +3663,10 @@
                 <a:ea typeface="Calibri" pitchFamily="34" charset="-122"/>
                 <a:cs typeface="Calibri" pitchFamily="34" charset="-120"/>
               </a:rPr>
-              <a:t>5 天（模块四+五）</a:t>
-            </a:r>
-            <a:endParaRPr lang="en-US" sz="1200" dirty="0"/>
-          </a:p>
-        </p:txBody>
-      </p:sp>
-      <p:sp>
-        <p:nvSpPr>
-          <p:cNvPr id="10" name="Text 8"/>
-          <p:cNvSpPr/>
-          <p:nvPr/>
-        </p:nvSpPr>
-        <p:spPr>
-          <a:xfrm>
-            <a:off x="731520" y="2468880"/>
-            <a:ext cx="3200400" cy="365760"/>
-          </a:xfrm>
-          <a:prstGeom prst="rect">
-            <a:avLst/>
-          </a:prstGeom>
-          <a:noFill/>
-          <a:ln/>
-        </p:spPr>
-        <p:txBody>
-          <a:bodyPr wrap="square" lIns="0" tIns="0" rIns="0" bIns="0" rtlCol="0" anchor="ctr"/>
-          <a:lstStyle/>
+              <a:t>硕士课题方向：信贷违约预测模型</a:t>
+            </a:r>
+            <a:endParaRPr lang="en-US" sz="1300" dirty="0"/>
+          </a:p>
           <a:p>
             <a:pPr indent="0" marL="0">
               <a:buNone/>
@@ -3220,38 +3674,16 @@
             <a:r>
               <a:rPr lang="en-US" sz="1300" dirty="0">
                 <a:solidFill>
-                  <a:srgbClr val="1E293B"/>
-                </a:solidFill>
-                <a:latin typeface="Calibri" pitchFamily="34" charset="0"/>
-                <a:ea typeface="Calibri" pitchFamily="34" charset="-122"/>
-                <a:cs typeface="Calibri" pitchFamily="34" charset="-120"/>
-              </a:rPr>
-              <a:t>• 单轮输入 + Agent 访谈</a:t>
+                  <a:srgbClr val="64748B"/>
+                </a:solidFill>
+                <a:latin typeface="Calibri" pitchFamily="34" charset="0"/>
+                <a:ea typeface="Calibri" pitchFamily="34" charset="-122"/>
+                <a:cs typeface="Calibri" pitchFamily="34" charset="-120"/>
+              </a:rPr>
+              <a:t>已完成：LendingClub 2018-2019 数据完整建模流程（V1.ipynb + V2.md）</a:t>
             </a:r>
             <a:endParaRPr lang="en-US" sz="1300" dirty="0"/>
           </a:p>
-        </p:txBody>
-      </p:sp>
-      <p:sp>
-        <p:nvSpPr>
-          <p:cNvPr id="11" name="Text 9"/>
-          <p:cNvSpPr/>
-          <p:nvPr/>
-        </p:nvSpPr>
-        <p:spPr>
-          <a:xfrm>
-            <a:off x="731520" y="2880360"/>
-            <a:ext cx="3200400" cy="365760"/>
-          </a:xfrm>
-          <a:prstGeom prst="rect">
-            <a:avLst/>
-          </a:prstGeom>
-          <a:noFill/>
-          <a:ln/>
-        </p:spPr>
-        <p:txBody>
-          <a:bodyPr wrap="square" lIns="0" tIns="0" rIns="0" bIns="0" rtlCol="0" anchor="ctr"/>
-          <a:lstStyle/>
           <a:p>
             <a:pPr indent="0" marL="0">
               <a:buNone/>
@@ -3259,879 +3691,13 @@
             <a:r>
               <a:rPr lang="en-US" sz="1300" dirty="0">
                 <a:solidFill>
-                  <a:srgbClr val="1E293B"/>
-                </a:solidFill>
-                <a:latin typeface="Calibri" pitchFamily="34" charset="0"/>
-                <a:ea typeface="Calibri" pitchFamily="34" charset="-122"/>
-                <a:cs typeface="Calibri" pitchFamily="34" charset="-120"/>
-              </a:rPr>
-              <a:t>• 模型推理 + 报告生成</a:t>
-            </a:r>
-            <a:endParaRPr lang="en-US" sz="1300" dirty="0"/>
-          </a:p>
-        </p:txBody>
-      </p:sp>
-      <p:sp>
-        <p:nvSpPr>
-          <p:cNvPr id="12" name="Text 10"/>
-          <p:cNvSpPr/>
-          <p:nvPr/>
-        </p:nvSpPr>
-        <p:spPr>
-          <a:xfrm>
-            <a:off x="731520" y="3291840"/>
-            <a:ext cx="3200400" cy="365760"/>
-          </a:xfrm>
-          <a:prstGeom prst="rect">
-            <a:avLst/>
-          </a:prstGeom>
-          <a:noFill/>
-          <a:ln/>
-        </p:spPr>
-        <p:txBody>
-          <a:bodyPr wrap="square" lIns="0" tIns="0" rIns="0" bIns="0" rtlCol="0" anchor="ctr"/>
-          <a:lstStyle/>
-          <a:p>
-            <a:pPr indent="0" marL="0">
-              <a:buNone/>
-            </a:pPr>
-            <a:r>
-              <a:rPr lang="en-US" sz="1300" dirty="0">
-                <a:solidFill>
-                  <a:srgbClr val="1E293B"/>
-                </a:solidFill>
-                <a:latin typeface="Calibri" pitchFamily="34" charset="0"/>
-                <a:ea typeface="Calibri" pitchFamily="34" charset="-122"/>
-                <a:cs typeface="Calibri" pitchFamily="34" charset="-120"/>
-              </a:rPr>
-              <a:t>• Streamlit Web Demo</a:t>
-            </a:r>
-            <a:endParaRPr lang="en-US" sz="1300" dirty="0"/>
-          </a:p>
-        </p:txBody>
-      </p:sp>
-      <p:sp>
-        <p:nvSpPr>
-          <p:cNvPr id="13" name="Text 11"/>
-          <p:cNvSpPr/>
-          <p:nvPr/>
-        </p:nvSpPr>
-        <p:spPr>
-          <a:xfrm>
-            <a:off x="731520" y="3703320"/>
-            <a:ext cx="3200400" cy="365760"/>
-          </a:xfrm>
-          <a:prstGeom prst="rect">
-            <a:avLst/>
-          </a:prstGeom>
-          <a:noFill/>
-          <a:ln/>
-        </p:spPr>
-        <p:txBody>
-          <a:bodyPr wrap="square" lIns="0" tIns="0" rIns="0" bIns="0" rtlCol="0" anchor="ctr"/>
-          <a:lstStyle/>
-          <a:p>
-            <a:pPr indent="0" marL="0">
-              <a:buNone/>
-            </a:pPr>
-            <a:r>
-              <a:rPr lang="en-US" sz="1300" dirty="0">
-                <a:solidFill>
-                  <a:srgbClr val="1E293B"/>
-                </a:solidFill>
-                <a:latin typeface="Calibri" pitchFamily="34" charset="0"/>
-                <a:ea typeface="Calibri" pitchFamily="34" charset="-122"/>
-                <a:cs typeface="Calibri" pitchFamily="34" charset="-120"/>
-              </a:rPr>
-              <a:t>• 3 个预设 Case</a:t>
-            </a:r>
-            <a:endParaRPr lang="en-US" sz="1300" dirty="0"/>
-          </a:p>
-        </p:txBody>
-      </p:sp>
-      <p:sp>
-        <p:nvSpPr>
-          <p:cNvPr id="14" name="Shape 12"/>
-          <p:cNvSpPr/>
-          <p:nvPr/>
-        </p:nvSpPr>
-        <p:spPr>
-          <a:xfrm>
-            <a:off x="731520" y="4937760"/>
-            <a:ext cx="3200400" cy="365760"/>
-          </a:xfrm>
-          <a:prstGeom prst="rect">
-            <a:avLst/>
-          </a:prstGeom>
-          <a:solidFill>
-            <a:srgbClr val="F8FAFC"/>
-          </a:solidFill>
-          <a:ln/>
-        </p:spPr>
-      </p:sp>
-      <p:sp>
-        <p:nvSpPr>
-          <p:cNvPr id="15" name="Text 13"/>
-          <p:cNvSpPr/>
-          <p:nvPr/>
-        </p:nvSpPr>
-        <p:spPr>
-          <a:xfrm>
-            <a:off x="731520" y="4937760"/>
-            <a:ext cx="3200400" cy="365760"/>
-          </a:xfrm>
-          <a:prstGeom prst="rect">
-            <a:avLst/>
-          </a:prstGeom>
-          <a:noFill/>
-          <a:ln/>
-        </p:spPr>
-        <p:txBody>
-          <a:bodyPr wrap="square" lIns="0" tIns="0" rIns="0" bIns="0" rtlCol="0" anchor="ctr"/>
-          <a:lstStyle/>
-          <a:p>
-            <a:pPr algn="ctr" indent="0" marL="0">
-              <a:buNone/>
-            </a:pPr>
-            <a:r>
-              <a:rPr lang="en-US" sz="1300" b="1" dirty="0">
-                <a:solidFill>
-                  <a:srgbClr val="065A82"/>
-                </a:solidFill>
-                <a:latin typeface="Calibri" pitchFamily="34" charset="0"/>
-                <a:ea typeface="Calibri" pitchFamily="34" charset="-122"/>
-                <a:cs typeface="Calibri" pitchFamily="34" charset="-120"/>
-              </a:rPr>
-              <a:t>✅ 已完成</a:t>
-            </a:r>
-            <a:endParaRPr lang="en-US" sz="1300" dirty="0"/>
-          </a:p>
-        </p:txBody>
-      </p:sp>
-      <p:sp>
-        <p:nvSpPr>
-          <p:cNvPr id="16" name="Shape 14"/>
-          <p:cNvSpPr/>
-          <p:nvPr/>
-        </p:nvSpPr>
-        <p:spPr>
-          <a:xfrm>
-            <a:off x="4389120" y="1371600"/>
-            <a:ext cx="3566160" cy="4114800"/>
-          </a:xfrm>
-          <a:prstGeom prst="rect">
-            <a:avLst/>
-          </a:prstGeom>
-          <a:solidFill>
-            <a:srgbClr val="FFFFFF"/>
-          </a:solidFill>
-          <a:ln w="12700">
-            <a:solidFill>
-              <a:srgbClr val="E2E8F0"/>
-            </a:solidFill>
-            <a:prstDash val="solid"/>
-          </a:ln>
-          <a:effectLst>
-            <a:outerShdw sx="100000" sy="100000" kx="0" ky="0" algn="bl" rotWithShape="0" blurRad="76200" dist="25400" dir="8100000">
-              <a:srgbClr val="000000">
-                <a:alpha val="8000"/>
-              </a:srgbClr>
-            </a:outerShdw>
-          </a:effectLst>
-        </p:spPr>
-      </p:sp>
-      <p:sp>
-        <p:nvSpPr>
-          <p:cNvPr id="17" name="Shape 15"/>
-          <p:cNvSpPr/>
-          <p:nvPr/>
-        </p:nvSpPr>
-        <p:spPr>
-          <a:xfrm>
-            <a:off x="4389120" y="1371600"/>
-            <a:ext cx="3566160" cy="548640"/>
-          </a:xfrm>
-          <a:prstGeom prst="rect">
-            <a:avLst/>
-          </a:prstGeom>
-          <a:solidFill>
-            <a:srgbClr val="1C7293"/>
-          </a:solidFill>
-          <a:ln/>
-        </p:spPr>
-      </p:sp>
-      <p:sp>
-        <p:nvSpPr>
-          <p:cNvPr id="18" name="Text 16"/>
-          <p:cNvSpPr/>
-          <p:nvPr/>
-        </p:nvSpPr>
-        <p:spPr>
-          <a:xfrm>
-            <a:off x="4572000" y="1371600"/>
-            <a:ext cx="3200400" cy="548640"/>
-          </a:xfrm>
-          <a:prstGeom prst="rect">
-            <a:avLst/>
-          </a:prstGeom>
-          <a:noFill/>
-          <a:ln/>
-        </p:spPr>
-        <p:txBody>
-          <a:bodyPr wrap="square" lIns="0" tIns="0" rIns="0" bIns="0" rtlCol="0" anchor="ctr"/>
-          <a:lstStyle/>
-          <a:p>
-            <a:pPr indent="0" marL="0">
-              <a:buNone/>
-            </a:pPr>
-            <a:r>
-              <a:rPr lang="en-US" sz="1600" b="1" dirty="0">
-                <a:solidFill>
-                  <a:srgbClr val="FFFFFF"/>
-                </a:solidFill>
-                <a:latin typeface="Calibri" pitchFamily="34" charset="0"/>
-                <a:ea typeface="Calibri" pitchFamily="34" charset="-122"/>
-                <a:cs typeface="Calibri" pitchFamily="34" charset="-120"/>
-              </a:rPr>
-              <a:t>Phase 2: 产品化</a:t>
-            </a:r>
-            <a:endParaRPr lang="en-US" sz="1600" dirty="0"/>
-          </a:p>
-        </p:txBody>
-      </p:sp>
-      <p:sp>
-        <p:nvSpPr>
-          <p:cNvPr id="19" name="Text 17"/>
-          <p:cNvSpPr/>
-          <p:nvPr/>
-        </p:nvSpPr>
-        <p:spPr>
-          <a:xfrm>
-            <a:off x="4572000" y="2011680"/>
-            <a:ext cx="3200400" cy="320040"/>
-          </a:xfrm>
-          <a:prstGeom prst="rect">
-            <a:avLst/>
-          </a:prstGeom>
-          <a:noFill/>
-          <a:ln/>
-        </p:spPr>
-        <p:txBody>
-          <a:bodyPr wrap="square" lIns="0" tIns="0" rIns="0" bIns="0" rtlCol="0" anchor="ctr"/>
-          <a:lstStyle/>
-          <a:p>
-            <a:pPr indent="0" marL="0">
-              <a:buNone/>
-            </a:pPr>
-            <a:r>
-              <a:rPr lang="en-US" sz="1200" dirty="0">
-                <a:solidFill>
                   <a:srgbClr val="64748B"/>
                 </a:solidFill>
                 <a:latin typeface="Calibri" pitchFamily="34" charset="0"/>
                 <a:ea typeface="Calibri" pitchFamily="34" charset="-122"/>
                 <a:cs typeface="Calibri" pitchFamily="34" charset="-120"/>
               </a:rPr>
-              <a:t>1-2 个月</a:t>
-            </a:r>
-            <a:endParaRPr lang="en-US" sz="1200" dirty="0"/>
-          </a:p>
-        </p:txBody>
-      </p:sp>
-      <p:sp>
-        <p:nvSpPr>
-          <p:cNvPr id="20" name="Text 18"/>
-          <p:cNvSpPr/>
-          <p:nvPr/>
-        </p:nvSpPr>
-        <p:spPr>
-          <a:xfrm>
-            <a:off x="4572000" y="2468880"/>
-            <a:ext cx="3200400" cy="365760"/>
-          </a:xfrm>
-          <a:prstGeom prst="rect">
-            <a:avLst/>
-          </a:prstGeom>
-          <a:noFill/>
-          <a:ln/>
-        </p:spPr>
-        <p:txBody>
-          <a:bodyPr wrap="square" lIns="0" tIns="0" rIns="0" bIns="0" rtlCol="0" anchor="ctr"/>
-          <a:lstStyle/>
-          <a:p>
-            <a:pPr indent="0" marL="0">
-              <a:buNone/>
-            </a:pPr>
-            <a:r>
-              <a:rPr lang="en-US" sz="1300" dirty="0">
-                <a:solidFill>
-                  <a:srgbClr val="1E293B"/>
-                </a:solidFill>
-                <a:latin typeface="Calibri" pitchFamily="34" charset="0"/>
-                <a:ea typeface="Calibri" pitchFamily="34" charset="-122"/>
-                <a:cs typeface="Calibri" pitchFamily="34" charset="-120"/>
-              </a:rPr>
-              <a:t>• FastAPI + Docker</a:t>
-            </a:r>
-            <a:endParaRPr lang="en-US" sz="1300" dirty="0"/>
-          </a:p>
-        </p:txBody>
-      </p:sp>
-      <p:sp>
-        <p:nvSpPr>
-          <p:cNvPr id="21" name="Text 19"/>
-          <p:cNvSpPr/>
-          <p:nvPr/>
-        </p:nvSpPr>
-        <p:spPr>
-          <a:xfrm>
-            <a:off x="4572000" y="2880360"/>
-            <a:ext cx="3200400" cy="365760"/>
-          </a:xfrm>
-          <a:prstGeom prst="rect">
-            <a:avLst/>
-          </a:prstGeom>
-          <a:noFill/>
-          <a:ln/>
-        </p:spPr>
-        <p:txBody>
-          <a:bodyPr wrap="square" lIns="0" tIns="0" rIns="0" bIns="0" rtlCol="0" anchor="ctr"/>
-          <a:lstStyle/>
-          <a:p>
-            <a:pPr indent="0" marL="0">
-              <a:buNone/>
-            </a:pPr>
-            <a:r>
-              <a:rPr lang="en-US" sz="1300" dirty="0">
-                <a:solidFill>
-                  <a:srgbClr val="1E293B"/>
-                </a:solidFill>
-                <a:latin typeface="Calibri" pitchFamily="34" charset="0"/>
-                <a:ea typeface="Calibri" pitchFamily="34" charset="-122"/>
-                <a:cs typeface="Calibri" pitchFamily="34" charset="-120"/>
-              </a:rPr>
-              <a:t>• OCR 多模态采集</a:t>
-            </a:r>
-            <a:endParaRPr lang="en-US" sz="1300" dirty="0"/>
-          </a:p>
-        </p:txBody>
-      </p:sp>
-      <p:sp>
-        <p:nvSpPr>
-          <p:cNvPr id="22" name="Text 20"/>
-          <p:cNvSpPr/>
-          <p:nvPr/>
-        </p:nvSpPr>
-        <p:spPr>
-          <a:xfrm>
-            <a:off x="4572000" y="3291840"/>
-            <a:ext cx="3200400" cy="365760"/>
-          </a:xfrm>
-          <a:prstGeom prst="rect">
-            <a:avLst/>
-          </a:prstGeom>
-          <a:noFill/>
-          <a:ln/>
-        </p:spPr>
-        <p:txBody>
-          <a:bodyPr wrap="square" lIns="0" tIns="0" rIns="0" bIns="0" rtlCol="0" anchor="ctr"/>
-          <a:lstStyle/>
-          <a:p>
-            <a:pPr indent="0" marL="0">
-              <a:buNone/>
-            </a:pPr>
-            <a:r>
-              <a:rPr lang="en-US" sz="1300" dirty="0">
-                <a:solidFill>
-                  <a:srgbClr val="1E293B"/>
-                </a:solidFill>
-                <a:latin typeface="Calibri" pitchFamily="34" charset="0"/>
-                <a:ea typeface="Calibri" pitchFamily="34" charset="-122"/>
-                <a:cs typeface="Calibri" pitchFamily="34" charset="-120"/>
-              </a:rPr>
-              <a:t>• 模型校准（Isotonic）</a:t>
-            </a:r>
-            <a:endParaRPr lang="en-US" sz="1300" dirty="0"/>
-          </a:p>
-        </p:txBody>
-      </p:sp>
-      <p:sp>
-        <p:nvSpPr>
-          <p:cNvPr id="23" name="Text 21"/>
-          <p:cNvSpPr/>
-          <p:nvPr/>
-        </p:nvSpPr>
-        <p:spPr>
-          <a:xfrm>
-            <a:off x="4572000" y="3703320"/>
-            <a:ext cx="3200400" cy="365760"/>
-          </a:xfrm>
-          <a:prstGeom prst="rect">
-            <a:avLst/>
-          </a:prstGeom>
-          <a:noFill/>
-          <a:ln/>
-        </p:spPr>
-        <p:txBody>
-          <a:bodyPr wrap="square" lIns="0" tIns="0" rIns="0" bIns="0" rtlCol="0" anchor="ctr"/>
-          <a:lstStyle/>
-          <a:p>
-            <a:pPr indent="0" marL="0">
-              <a:buNone/>
-            </a:pPr>
-            <a:r>
-              <a:rPr lang="en-US" sz="1300" dirty="0">
-                <a:solidFill>
-                  <a:srgbClr val="1E293B"/>
-                </a:solidFill>
-                <a:latin typeface="Calibri" pitchFamily="34" charset="0"/>
-                <a:ea typeface="Calibri" pitchFamily="34" charset="-122"/>
-                <a:cs typeface="Calibri" pitchFamily="34" charset="-120"/>
-              </a:rPr>
-              <a:t>• Word/PDF 导出</a:t>
-            </a:r>
-            <a:endParaRPr lang="en-US" sz="1300" dirty="0"/>
-          </a:p>
-        </p:txBody>
-      </p:sp>
-      <p:sp>
-        <p:nvSpPr>
-          <p:cNvPr id="24" name="Shape 22"/>
-          <p:cNvSpPr/>
-          <p:nvPr/>
-        </p:nvSpPr>
-        <p:spPr>
-          <a:xfrm>
-            <a:off x="4572000" y="4937760"/>
-            <a:ext cx="3200400" cy="365760"/>
-          </a:xfrm>
-          <a:prstGeom prst="rect">
-            <a:avLst/>
-          </a:prstGeom>
-          <a:solidFill>
-            <a:srgbClr val="F8FAFC"/>
-          </a:solidFill>
-          <a:ln/>
-        </p:spPr>
-      </p:sp>
-      <p:sp>
-        <p:nvSpPr>
-          <p:cNvPr id="25" name="Text 23"/>
-          <p:cNvSpPr/>
-          <p:nvPr/>
-        </p:nvSpPr>
-        <p:spPr>
-          <a:xfrm>
-            <a:off x="4572000" y="4937760"/>
-            <a:ext cx="3200400" cy="365760"/>
-          </a:xfrm>
-          <a:prstGeom prst="rect">
-            <a:avLst/>
-          </a:prstGeom>
-          <a:noFill/>
-          <a:ln/>
-        </p:spPr>
-        <p:txBody>
-          <a:bodyPr wrap="square" lIns="0" tIns="0" rIns="0" bIns="0" rtlCol="0" anchor="ctr"/>
-          <a:lstStyle/>
-          <a:p>
-            <a:pPr algn="ctr" indent="0" marL="0">
-              <a:buNone/>
-            </a:pPr>
-            <a:r>
-              <a:rPr lang="en-US" sz="1300" b="1" dirty="0">
-                <a:solidFill>
-                  <a:srgbClr val="1C7293"/>
-                </a:solidFill>
-                <a:latin typeface="Calibri" pitchFamily="34" charset="0"/>
-                <a:ea typeface="Calibri" pitchFamily="34" charset="-122"/>
-                <a:cs typeface="Calibri" pitchFamily="34" charset="-120"/>
-              </a:rPr>
-              <a:t>⏳ 计划中</a:t>
-            </a:r>
-            <a:endParaRPr lang="en-US" sz="1300" dirty="0"/>
-          </a:p>
-        </p:txBody>
-      </p:sp>
-      <p:sp>
-        <p:nvSpPr>
-          <p:cNvPr id="26" name="Shape 24"/>
-          <p:cNvSpPr/>
-          <p:nvPr/>
-        </p:nvSpPr>
-        <p:spPr>
-          <a:xfrm>
-            <a:off x="8229600" y="1371600"/>
-            <a:ext cx="3566160" cy="4114800"/>
-          </a:xfrm>
-          <a:prstGeom prst="rect">
-            <a:avLst/>
-          </a:prstGeom>
-          <a:solidFill>
-            <a:srgbClr val="FFFFFF"/>
-          </a:solidFill>
-          <a:ln w="12700">
-            <a:solidFill>
-              <a:srgbClr val="E2E8F0"/>
-            </a:solidFill>
-            <a:prstDash val="solid"/>
-          </a:ln>
-          <a:effectLst>
-            <a:outerShdw sx="100000" sy="100000" kx="0" ky="0" algn="bl" rotWithShape="0" blurRad="76200" dist="25400" dir="8100000">
-              <a:srgbClr val="000000">
-                <a:alpha val="8000"/>
-              </a:srgbClr>
-            </a:outerShdw>
-          </a:effectLst>
-        </p:spPr>
-      </p:sp>
-      <p:sp>
-        <p:nvSpPr>
-          <p:cNvPr id="27" name="Shape 25"/>
-          <p:cNvSpPr/>
-          <p:nvPr/>
-        </p:nvSpPr>
-        <p:spPr>
-          <a:xfrm>
-            <a:off x="8229600" y="1371600"/>
-            <a:ext cx="3566160" cy="548640"/>
-          </a:xfrm>
-          <a:prstGeom prst="rect">
-            <a:avLst/>
-          </a:prstGeom>
-          <a:solidFill>
-            <a:srgbClr val="21295C"/>
-          </a:solidFill>
-          <a:ln/>
-        </p:spPr>
-      </p:sp>
-      <p:sp>
-        <p:nvSpPr>
-          <p:cNvPr id="28" name="Text 26"/>
-          <p:cNvSpPr/>
-          <p:nvPr/>
-        </p:nvSpPr>
-        <p:spPr>
-          <a:xfrm>
-            <a:off x="8412480" y="1371600"/>
-            <a:ext cx="3200400" cy="548640"/>
-          </a:xfrm>
-          <a:prstGeom prst="rect">
-            <a:avLst/>
-          </a:prstGeom>
-          <a:noFill/>
-          <a:ln/>
-        </p:spPr>
-        <p:txBody>
-          <a:bodyPr wrap="square" lIns="0" tIns="0" rIns="0" bIns="0" rtlCol="0" anchor="ctr"/>
-          <a:lstStyle/>
-          <a:p>
-            <a:pPr indent="0" marL="0">
-              <a:buNone/>
-            </a:pPr>
-            <a:r>
-              <a:rPr lang="en-US" sz="1600" b="1" dirty="0">
-                <a:solidFill>
-                  <a:srgbClr val="FFFFFF"/>
-                </a:solidFill>
-                <a:latin typeface="Calibri" pitchFamily="34" charset="0"/>
-                <a:ea typeface="Calibri" pitchFamily="34" charset="-122"/>
-                <a:cs typeface="Calibri" pitchFamily="34" charset="-120"/>
-              </a:rPr>
-              <a:t>Phase 3: 企业级</a:t>
-            </a:r>
-            <a:endParaRPr lang="en-US" sz="1600" dirty="0"/>
-          </a:p>
-        </p:txBody>
-      </p:sp>
-      <p:sp>
-        <p:nvSpPr>
-          <p:cNvPr id="29" name="Text 27"/>
-          <p:cNvSpPr/>
-          <p:nvPr/>
-        </p:nvSpPr>
-        <p:spPr>
-          <a:xfrm>
-            <a:off x="8412480" y="2011680"/>
-            <a:ext cx="3200400" cy="320040"/>
-          </a:xfrm>
-          <a:prstGeom prst="rect">
-            <a:avLst/>
-          </a:prstGeom>
-          <a:noFill/>
-          <a:ln/>
-        </p:spPr>
-        <p:txBody>
-          <a:bodyPr wrap="square" lIns="0" tIns="0" rIns="0" bIns="0" rtlCol="0" anchor="ctr"/>
-          <a:lstStyle/>
-          <a:p>
-            <a:pPr indent="0" marL="0">
-              <a:buNone/>
-            </a:pPr>
-            <a:r>
-              <a:rPr lang="en-US" sz="1200" dirty="0">
-                <a:solidFill>
-                  <a:srgbClr val="64748B"/>
-                </a:solidFill>
-                <a:latin typeface="Calibri" pitchFamily="34" charset="0"/>
-                <a:ea typeface="Calibri" pitchFamily="34" charset="-122"/>
-                <a:cs typeface="Calibri" pitchFamily="34" charset="-120"/>
-              </a:rPr>
-              <a:t>3-6 个月</a:t>
-            </a:r>
-            <a:endParaRPr lang="en-US" sz="1200" dirty="0"/>
-          </a:p>
-        </p:txBody>
-      </p:sp>
-      <p:sp>
-        <p:nvSpPr>
-          <p:cNvPr id="30" name="Text 28"/>
-          <p:cNvSpPr/>
-          <p:nvPr/>
-        </p:nvSpPr>
-        <p:spPr>
-          <a:xfrm>
-            <a:off x="8412480" y="2468880"/>
-            <a:ext cx="3200400" cy="365760"/>
-          </a:xfrm>
-          <a:prstGeom prst="rect">
-            <a:avLst/>
-          </a:prstGeom>
-          <a:noFill/>
-          <a:ln/>
-        </p:spPr>
-        <p:txBody>
-          <a:bodyPr wrap="square" lIns="0" tIns="0" rIns="0" bIns="0" rtlCol="0" anchor="ctr"/>
-          <a:lstStyle/>
-          <a:p>
-            <a:pPr indent="0" marL="0">
-              <a:buNone/>
-            </a:pPr>
-            <a:r>
-              <a:rPr lang="en-US" sz="1300" dirty="0">
-                <a:solidFill>
-                  <a:srgbClr val="1E293B"/>
-                </a:solidFill>
-                <a:latin typeface="Calibri" pitchFamily="34" charset="0"/>
-                <a:ea typeface="Calibri" pitchFamily="34" charset="-122"/>
-                <a:cs typeface="Calibri" pitchFamily="34" charset="-120"/>
-              </a:rPr>
-              <a:t>• 多用户并发</a:t>
-            </a:r>
-            <a:endParaRPr lang="en-US" sz="1300" dirty="0"/>
-          </a:p>
-        </p:txBody>
-      </p:sp>
-      <p:sp>
-        <p:nvSpPr>
-          <p:cNvPr id="31" name="Text 29"/>
-          <p:cNvSpPr/>
-          <p:nvPr/>
-        </p:nvSpPr>
-        <p:spPr>
-          <a:xfrm>
-            <a:off x="8412480" y="2880360"/>
-            <a:ext cx="3200400" cy="365760"/>
-          </a:xfrm>
-          <a:prstGeom prst="rect">
-            <a:avLst/>
-          </a:prstGeom>
-          <a:noFill/>
-          <a:ln/>
-        </p:spPr>
-        <p:txBody>
-          <a:bodyPr wrap="square" lIns="0" tIns="0" rIns="0" bIns="0" rtlCol="0" anchor="ctr"/>
-          <a:lstStyle/>
-          <a:p>
-            <a:pPr indent="0" marL="0">
-              <a:buNone/>
-            </a:pPr>
-            <a:r>
-              <a:rPr lang="en-US" sz="1300" dirty="0">
-                <a:solidFill>
-                  <a:srgbClr val="1E293B"/>
-                </a:solidFill>
-                <a:latin typeface="Calibri" pitchFamily="34" charset="0"/>
-                <a:ea typeface="Calibri" pitchFamily="34" charset="-122"/>
-                <a:cs typeface="Calibri" pitchFamily="34" charset="-120"/>
-              </a:rPr>
-              <a:t>• 企业级 SaaS</a:t>
-            </a:r>
-            <a:endParaRPr lang="en-US" sz="1300" dirty="0"/>
-          </a:p>
-        </p:txBody>
-      </p:sp>
-      <p:sp>
-        <p:nvSpPr>
-          <p:cNvPr id="32" name="Text 30"/>
-          <p:cNvSpPr/>
-          <p:nvPr/>
-        </p:nvSpPr>
-        <p:spPr>
-          <a:xfrm>
-            <a:off x="8412480" y="3291840"/>
-            <a:ext cx="3200400" cy="365760"/>
-          </a:xfrm>
-          <a:prstGeom prst="rect">
-            <a:avLst/>
-          </a:prstGeom>
-          <a:noFill/>
-          <a:ln/>
-        </p:spPr>
-        <p:txBody>
-          <a:bodyPr wrap="square" lIns="0" tIns="0" rIns="0" bIns="0" rtlCol="0" anchor="ctr"/>
-          <a:lstStyle/>
-          <a:p>
-            <a:pPr indent="0" marL="0">
-              <a:buNone/>
-            </a:pPr>
-            <a:r>
-              <a:rPr lang="en-US" sz="1300" dirty="0">
-                <a:solidFill>
-                  <a:srgbClr val="1E293B"/>
-                </a:solidFill>
-                <a:latin typeface="Calibri" pitchFamily="34" charset="0"/>
-                <a:ea typeface="Calibri" pitchFamily="34" charset="-122"/>
-                <a:cs typeface="Calibri" pitchFamily="34" charset="-120"/>
-              </a:rPr>
-              <a:t>• 实时交易系统对接</a:t>
-            </a:r>
-            <a:endParaRPr lang="en-US" sz="1300" dirty="0"/>
-          </a:p>
-        </p:txBody>
-      </p:sp>
-      <p:sp>
-        <p:nvSpPr>
-          <p:cNvPr id="33" name="Text 31"/>
-          <p:cNvSpPr/>
-          <p:nvPr/>
-        </p:nvSpPr>
-        <p:spPr>
-          <a:xfrm>
-            <a:off x="8412480" y="3703320"/>
-            <a:ext cx="3200400" cy="365760"/>
-          </a:xfrm>
-          <a:prstGeom prst="rect">
-            <a:avLst/>
-          </a:prstGeom>
-          <a:noFill/>
-          <a:ln/>
-        </p:spPr>
-        <p:txBody>
-          <a:bodyPr wrap="square" lIns="0" tIns="0" rIns="0" bIns="0" rtlCol="0" anchor="ctr"/>
-          <a:lstStyle/>
-          <a:p>
-            <a:pPr indent="0" marL="0">
-              <a:buNone/>
-            </a:pPr>
-            <a:r>
-              <a:rPr lang="en-US" sz="1300" dirty="0">
-                <a:solidFill>
-                  <a:srgbClr val="1E293B"/>
-                </a:solidFill>
-                <a:latin typeface="Calibri" pitchFamily="34" charset="0"/>
-                <a:ea typeface="Calibri" pitchFamily="34" charset="-122"/>
-                <a:cs typeface="Calibri" pitchFamily="34" charset="-120"/>
-              </a:rPr>
-              <a:t>• 多产品线支持</a:t>
-            </a:r>
-            <a:endParaRPr lang="en-US" sz="1300" dirty="0"/>
-          </a:p>
-        </p:txBody>
-      </p:sp>
-      <p:sp>
-        <p:nvSpPr>
-          <p:cNvPr id="34" name="Shape 32"/>
-          <p:cNvSpPr/>
-          <p:nvPr/>
-        </p:nvSpPr>
-        <p:spPr>
-          <a:xfrm>
-            <a:off x="8412480" y="4937760"/>
-            <a:ext cx="3200400" cy="365760"/>
-          </a:xfrm>
-          <a:prstGeom prst="rect">
-            <a:avLst/>
-          </a:prstGeom>
-          <a:solidFill>
-            <a:srgbClr val="F8FAFC"/>
-          </a:solidFill>
-          <a:ln/>
-        </p:spPr>
-      </p:sp>
-      <p:sp>
-        <p:nvSpPr>
-          <p:cNvPr id="35" name="Text 33"/>
-          <p:cNvSpPr/>
-          <p:nvPr/>
-        </p:nvSpPr>
-        <p:spPr>
-          <a:xfrm>
-            <a:off x="8412480" y="4937760"/>
-            <a:ext cx="3200400" cy="365760"/>
-          </a:xfrm>
-          <a:prstGeom prst="rect">
-            <a:avLst/>
-          </a:prstGeom>
-          <a:noFill/>
-          <a:ln/>
-        </p:spPr>
-        <p:txBody>
-          <a:bodyPr wrap="square" lIns="0" tIns="0" rIns="0" bIns="0" rtlCol="0" anchor="ctr"/>
-          <a:lstStyle/>
-          <a:p>
-            <a:pPr algn="ctr" indent="0" marL="0">
-              <a:buNone/>
-            </a:pPr>
-            <a:r>
-              <a:rPr lang="en-US" sz="1300" b="1" dirty="0">
-                <a:solidFill>
-                  <a:srgbClr val="21295C"/>
-                </a:solidFill>
-                <a:latin typeface="Calibri" pitchFamily="34" charset="0"/>
-                <a:ea typeface="Calibri" pitchFamily="34" charset="-122"/>
-                <a:cs typeface="Calibri" pitchFamily="34" charset="-120"/>
-              </a:rPr>
-              <a:t>📋 远期</a:t>
-            </a:r>
-            <a:endParaRPr lang="en-US" sz="1300" dirty="0"/>
-          </a:p>
-        </p:txBody>
-      </p:sp>
-      <p:sp>
-        <p:nvSpPr>
-          <p:cNvPr id="36" name="Text 34"/>
-          <p:cNvSpPr/>
-          <p:nvPr/>
-        </p:nvSpPr>
-        <p:spPr>
-          <a:xfrm>
-            <a:off x="548640" y="5760720"/>
-            <a:ext cx="11064240" cy="365760"/>
-          </a:xfrm>
-          <a:prstGeom prst="rect">
-            <a:avLst/>
-          </a:prstGeom>
-          <a:noFill/>
-          <a:ln/>
-        </p:spPr>
-        <p:txBody>
-          <a:bodyPr wrap="square" lIns="0" tIns="0" rIns="0" bIns="0" rtlCol="0" anchor="ctr"/>
-          <a:lstStyle/>
-          <a:p>
-            <a:pPr algn="ctr" indent="0" marL="0">
-              <a:buNone/>
-            </a:pPr>
-            <a:r>
-              <a:rPr lang="en-US" sz="1300" i="1" dirty="0">
-                <a:solidFill>
-                  <a:srgbClr val="64748B"/>
-                </a:solidFill>
-                <a:latin typeface="Calibri" pitchFamily="34" charset="0"/>
-                <a:ea typeface="Calibri" pitchFamily="34" charset="-122"/>
-                <a:cs typeface="Calibri" pitchFamily="34" charset="-120"/>
-              </a:rPr>
-              <a:t>Phase 2 会进一步丰富信贷特征工程与多模态采集，覆盖更多消费贷细分场景。</a:t>
+              <a:t>本次路演核心：把课题成果产品化为 CreditMind Agent</a:t>
             </a:r>
             <a:endParaRPr lang="en-US" sz="1300" dirty="0"/>
           </a:p>
@@ -4222,7 +3788,7 @@
                 <a:ea typeface="Georgia" pitchFamily="34" charset="-122"/>
                 <a:cs typeface="Georgia" pitchFamily="34" charset="-120"/>
               </a:rPr>
-              <a:t>诚实短板与 Ask</a:t>
+              <a:t>Roadmap</a:t>
             </a:r>
             <a:endParaRPr lang="en-US" sz="2800" dirty="0"/>
           </a:p>
@@ -4297,7 +3863,7 @@
                   <a:srgbClr val="64748B"/>
                 </a:solidFill>
               </a:rPr>
-              <a:t>12 / 13</a:t>
+              <a:t>12 / 14</a:t>
             </a:r>
             <a:endParaRPr lang="en-US" sz="900" dirty="0"/>
           </a:p>
@@ -4305,53 +3871,14 @@
       </p:sp>
       <p:sp>
         <p:nvSpPr>
-          <p:cNvPr id="6" name="Text 4"/>
-          <p:cNvSpPr/>
-          <p:nvPr/>
-        </p:nvSpPr>
-        <p:spPr>
-          <a:xfrm>
-            <a:off x="548640" y="1097280"/>
-            <a:ext cx="5486400" cy="365760"/>
-          </a:xfrm>
-          <a:prstGeom prst="rect">
-            <a:avLst/>
-          </a:prstGeom>
-          <a:noFill/>
-          <a:ln/>
-        </p:spPr>
-        <p:txBody>
-          <a:bodyPr wrap="square" lIns="0" tIns="0" rIns="0" bIns="0" rtlCol="0" anchor="ctr"/>
-          <a:lstStyle/>
-          <a:p>
-            <a:pPr indent="0" marL="0">
-              <a:buNone/>
-            </a:pPr>
-            <a:r>
-              <a:rPr lang="en-US" sz="1800" b="1" dirty="0">
-                <a:solidFill>
-                  <a:srgbClr val="21295C"/>
-                </a:solidFill>
-                <a:latin typeface="Calibri" pitchFamily="34" charset="0"/>
-                <a:ea typeface="Calibri" pitchFamily="34" charset="-122"/>
-                <a:cs typeface="Calibri" pitchFamily="34" charset="-120"/>
-              </a:rPr>
-              <a:t>已知短板（主动说明）</a:t>
-            </a:r>
-            <a:endParaRPr lang="en-US" sz="1800" dirty="0"/>
-          </a:p>
-        </p:txBody>
-      </p:sp>
-      <p:sp>
-        <p:nvSpPr>
-          <p:cNvPr id="7" name="Shape 5"/>
-          <p:cNvSpPr/>
-          <p:nvPr/>
-        </p:nvSpPr>
-        <p:spPr>
-          <a:xfrm>
-            <a:off x="548640" y="1554480"/>
-            <a:ext cx="5303520" cy="548640"/>
+          <p:cNvPr id="6" name="Shape 4"/>
+          <p:cNvSpPr/>
+          <p:nvPr/>
+        </p:nvSpPr>
+        <p:spPr>
+          <a:xfrm>
+            <a:off x="548640" y="1371600"/>
+            <a:ext cx="3566160" cy="4114800"/>
           </a:xfrm>
           <a:prstGeom prst="rect">
             <a:avLst/>
@@ -4365,6 +3892,33 @@
             </a:solidFill>
             <a:prstDash val="solid"/>
           </a:ln>
+          <a:effectLst>
+            <a:outerShdw sx="100000" sy="100000" kx="0" ky="0" algn="bl" rotWithShape="0" blurRad="76200" dist="25400" dir="8100000">
+              <a:srgbClr val="000000">
+                <a:alpha val="8000"/>
+              </a:srgbClr>
+            </a:outerShdw>
+          </a:effectLst>
+        </p:spPr>
+      </p:sp>
+      <p:sp>
+        <p:nvSpPr>
+          <p:cNvPr id="7" name="Shape 5"/>
+          <p:cNvSpPr/>
+          <p:nvPr/>
+        </p:nvSpPr>
+        <p:spPr>
+          <a:xfrm>
+            <a:off x="548640" y="1371600"/>
+            <a:ext cx="3566160" cy="548640"/>
+          </a:xfrm>
+          <a:prstGeom prst="rect">
+            <a:avLst/>
+          </a:prstGeom>
+          <a:solidFill>
+            <a:srgbClr val="065A82"/>
+          </a:solidFill>
+          <a:ln/>
         </p:spPr>
       </p:sp>
       <p:sp>
@@ -4375,8 +3929,86 @@
         </p:nvSpPr>
         <p:spPr>
           <a:xfrm>
-            <a:off x="731520" y="1554480"/>
-            <a:ext cx="2743200" cy="548640"/>
+            <a:off x="731520" y="1371600"/>
+            <a:ext cx="3200400" cy="548640"/>
+          </a:xfrm>
+          <a:prstGeom prst="rect">
+            <a:avLst/>
+          </a:prstGeom>
+          <a:noFill/>
+          <a:ln/>
+        </p:spPr>
+        <p:txBody>
+          <a:bodyPr wrap="square" lIns="0" tIns="0" rIns="0" bIns="0" rtlCol="0" anchor="ctr"/>
+          <a:lstStyle/>
+          <a:p>
+            <a:pPr indent="0" marL="0">
+              <a:buNone/>
+            </a:pPr>
+            <a:r>
+              <a:rPr lang="en-US" sz="1600" b="1" dirty="0">
+                <a:solidFill>
+                  <a:srgbClr val="FFFFFF"/>
+                </a:solidFill>
+                <a:latin typeface="Calibri" pitchFamily="34" charset="0"/>
+                <a:ea typeface="Calibri" pitchFamily="34" charset="-122"/>
+                <a:cs typeface="Calibri" pitchFamily="34" charset="-120"/>
+              </a:rPr>
+              <a:t>Phase 1: MVP</a:t>
+            </a:r>
+            <a:endParaRPr lang="en-US" sz="1600" dirty="0"/>
+          </a:p>
+        </p:txBody>
+      </p:sp>
+      <p:sp>
+        <p:nvSpPr>
+          <p:cNvPr id="9" name="Text 7"/>
+          <p:cNvSpPr/>
+          <p:nvPr/>
+        </p:nvSpPr>
+        <p:spPr>
+          <a:xfrm>
+            <a:off x="731520" y="2011680"/>
+            <a:ext cx="3200400" cy="320040"/>
+          </a:xfrm>
+          <a:prstGeom prst="rect">
+            <a:avLst/>
+          </a:prstGeom>
+          <a:noFill/>
+          <a:ln/>
+        </p:spPr>
+        <p:txBody>
+          <a:bodyPr wrap="square" lIns="0" tIns="0" rIns="0" bIns="0" rtlCol="0" anchor="ctr"/>
+          <a:lstStyle/>
+          <a:p>
+            <a:pPr indent="0" marL="0">
+              <a:buNone/>
+            </a:pPr>
+            <a:r>
+              <a:rPr lang="en-US" sz="1200" dirty="0">
+                <a:solidFill>
+                  <a:srgbClr val="64748B"/>
+                </a:solidFill>
+                <a:latin typeface="Calibri" pitchFamily="34" charset="0"/>
+                <a:ea typeface="Calibri" pitchFamily="34" charset="-122"/>
+                <a:cs typeface="Calibri" pitchFamily="34" charset="-120"/>
+              </a:rPr>
+              <a:t>5 天（模块四+五）</a:t>
+            </a:r>
+            <a:endParaRPr lang="en-US" sz="1200" dirty="0"/>
+          </a:p>
+        </p:txBody>
+      </p:sp>
+      <p:sp>
+        <p:nvSpPr>
+          <p:cNvPr id="10" name="Text 8"/>
+          <p:cNvSpPr/>
+          <p:nvPr/>
+        </p:nvSpPr>
+        <p:spPr>
+          <a:xfrm>
+            <a:off x="731520" y="2468880"/>
+            <a:ext cx="3200400" cy="365760"/>
           </a:xfrm>
           <a:prstGeom prst="rect">
             <a:avLst/>
@@ -4394,13 +4026,13 @@
             <a:r>
               <a:rPr lang="en-US" sz="1300" dirty="0">
                 <a:solidFill>
-                  <a:srgbClr val="EF4444"/>
-                </a:solidFill>
-                <a:latin typeface="Calibri" pitchFamily="34" charset="0"/>
-                <a:ea typeface="Calibri" pitchFamily="34" charset="-122"/>
-                <a:cs typeface="Calibri" pitchFamily="34" charset="-120"/>
-              </a:rPr>
-              <a:t>数据规模 15 万行</a:t>
+                  <a:srgbClr val="1E293B"/>
+                </a:solidFill>
+                <a:latin typeface="Calibri" pitchFamily="34" charset="0"/>
+                <a:ea typeface="Calibri" pitchFamily="34" charset="-122"/>
+                <a:cs typeface="Calibri" pitchFamily="34" charset="-120"/>
+              </a:rPr>
+              <a:t>• 单轮输入 + Agent 访谈</a:t>
             </a:r>
             <a:endParaRPr lang="en-US" sz="1300" dirty="0"/>
           </a:p>
@@ -4408,14 +4040,14 @@
       </p:sp>
       <p:sp>
         <p:nvSpPr>
-          <p:cNvPr id="9" name="Text 7"/>
-          <p:cNvSpPr/>
-          <p:nvPr/>
-        </p:nvSpPr>
-        <p:spPr>
-          <a:xfrm>
-            <a:off x="3474720" y="1554480"/>
-            <a:ext cx="2286000" cy="548640"/>
+          <p:cNvPr id="11" name="Text 9"/>
+          <p:cNvSpPr/>
+          <p:nvPr/>
+        </p:nvSpPr>
+        <p:spPr>
+          <a:xfrm>
+            <a:off x="731520" y="2880360"/>
+            <a:ext cx="3200400" cy="365760"/>
           </a:xfrm>
           <a:prstGeom prst="rect">
             <a:avLst/>
@@ -4433,13 +4065,13 @@
             <a:r>
               <a:rPr lang="en-US" sz="1300" dirty="0">
                 <a:solidFill>
-                  <a:srgbClr val="10B981"/>
-                </a:solidFill>
-                <a:latin typeface="Calibri" pitchFamily="34" charset="0"/>
-                <a:ea typeface="Calibri" pitchFamily="34" charset="-122"/>
-                <a:cs typeface="Calibri" pitchFamily="34" charset="-120"/>
-              </a:rPr>
-              <a:t>→ 接 2007-2019 全量</a:t>
+                  <a:srgbClr val="1E293B"/>
+                </a:solidFill>
+                <a:latin typeface="Calibri" pitchFamily="34" charset="0"/>
+                <a:ea typeface="Calibri" pitchFamily="34" charset="-122"/>
+                <a:cs typeface="Calibri" pitchFamily="34" charset="-120"/>
+              </a:rPr>
+              <a:t>• 模型推理 + 报告生成</a:t>
             </a:r>
             <a:endParaRPr lang="en-US" sz="1300" dirty="0"/>
           </a:p>
@@ -4447,14 +4079,151 @@
       </p:sp>
       <p:sp>
         <p:nvSpPr>
-          <p:cNvPr id="10" name="Shape 8"/>
-          <p:cNvSpPr/>
-          <p:nvPr/>
-        </p:nvSpPr>
-        <p:spPr>
-          <a:xfrm>
-            <a:off x="548640" y="2194560"/>
-            <a:ext cx="5303520" cy="548640"/>
+          <p:cNvPr id="12" name="Text 10"/>
+          <p:cNvSpPr/>
+          <p:nvPr/>
+        </p:nvSpPr>
+        <p:spPr>
+          <a:xfrm>
+            <a:off x="731520" y="3291840"/>
+            <a:ext cx="3200400" cy="365760"/>
+          </a:xfrm>
+          <a:prstGeom prst="rect">
+            <a:avLst/>
+          </a:prstGeom>
+          <a:noFill/>
+          <a:ln/>
+        </p:spPr>
+        <p:txBody>
+          <a:bodyPr wrap="square" lIns="0" tIns="0" rIns="0" bIns="0" rtlCol="0" anchor="ctr"/>
+          <a:lstStyle/>
+          <a:p>
+            <a:pPr indent="0" marL="0">
+              <a:buNone/>
+            </a:pPr>
+            <a:r>
+              <a:rPr lang="en-US" sz="1300" dirty="0">
+                <a:solidFill>
+                  <a:srgbClr val="1E293B"/>
+                </a:solidFill>
+                <a:latin typeface="Calibri" pitchFamily="34" charset="0"/>
+                <a:ea typeface="Calibri" pitchFamily="34" charset="-122"/>
+                <a:cs typeface="Calibri" pitchFamily="34" charset="-120"/>
+              </a:rPr>
+              <a:t>• Streamlit Web Demo</a:t>
+            </a:r>
+            <a:endParaRPr lang="en-US" sz="1300" dirty="0"/>
+          </a:p>
+        </p:txBody>
+      </p:sp>
+      <p:sp>
+        <p:nvSpPr>
+          <p:cNvPr id="13" name="Text 11"/>
+          <p:cNvSpPr/>
+          <p:nvPr/>
+        </p:nvSpPr>
+        <p:spPr>
+          <a:xfrm>
+            <a:off x="731520" y="3703320"/>
+            <a:ext cx="3200400" cy="365760"/>
+          </a:xfrm>
+          <a:prstGeom prst="rect">
+            <a:avLst/>
+          </a:prstGeom>
+          <a:noFill/>
+          <a:ln/>
+        </p:spPr>
+        <p:txBody>
+          <a:bodyPr wrap="square" lIns="0" tIns="0" rIns="0" bIns="0" rtlCol="0" anchor="ctr"/>
+          <a:lstStyle/>
+          <a:p>
+            <a:pPr indent="0" marL="0">
+              <a:buNone/>
+            </a:pPr>
+            <a:r>
+              <a:rPr lang="en-US" sz="1300" dirty="0">
+                <a:solidFill>
+                  <a:srgbClr val="1E293B"/>
+                </a:solidFill>
+                <a:latin typeface="Calibri" pitchFamily="34" charset="0"/>
+                <a:ea typeface="Calibri" pitchFamily="34" charset="-122"/>
+                <a:cs typeface="Calibri" pitchFamily="34" charset="-120"/>
+              </a:rPr>
+              <a:t>• 3 个预设 Case</a:t>
+            </a:r>
+            <a:endParaRPr lang="en-US" sz="1300" dirty="0"/>
+          </a:p>
+        </p:txBody>
+      </p:sp>
+      <p:sp>
+        <p:nvSpPr>
+          <p:cNvPr id="14" name="Shape 12"/>
+          <p:cNvSpPr/>
+          <p:nvPr/>
+        </p:nvSpPr>
+        <p:spPr>
+          <a:xfrm>
+            <a:off x="731520" y="4937760"/>
+            <a:ext cx="3200400" cy="365760"/>
+          </a:xfrm>
+          <a:prstGeom prst="rect">
+            <a:avLst/>
+          </a:prstGeom>
+          <a:solidFill>
+            <a:srgbClr val="F8FAFC"/>
+          </a:solidFill>
+          <a:ln/>
+        </p:spPr>
+      </p:sp>
+      <p:sp>
+        <p:nvSpPr>
+          <p:cNvPr id="15" name="Text 13"/>
+          <p:cNvSpPr/>
+          <p:nvPr/>
+        </p:nvSpPr>
+        <p:spPr>
+          <a:xfrm>
+            <a:off x="731520" y="4937760"/>
+            <a:ext cx="3200400" cy="365760"/>
+          </a:xfrm>
+          <a:prstGeom prst="rect">
+            <a:avLst/>
+          </a:prstGeom>
+          <a:noFill/>
+          <a:ln/>
+        </p:spPr>
+        <p:txBody>
+          <a:bodyPr wrap="square" lIns="0" tIns="0" rIns="0" bIns="0" rtlCol="0" anchor="ctr"/>
+          <a:lstStyle/>
+          <a:p>
+            <a:pPr algn="ctr" indent="0" marL="0">
+              <a:buNone/>
+            </a:pPr>
+            <a:r>
+              <a:rPr lang="en-US" sz="1300" b="1" dirty="0">
+                <a:solidFill>
+                  <a:srgbClr val="065A82"/>
+                </a:solidFill>
+                <a:latin typeface="Calibri" pitchFamily="34" charset="0"/>
+                <a:ea typeface="Calibri" pitchFamily="34" charset="-122"/>
+                <a:cs typeface="Calibri" pitchFamily="34" charset="-120"/>
+              </a:rPr>
+              <a:t>✅ 已完成</a:t>
+            </a:r>
+            <a:endParaRPr lang="en-US" sz="1300" dirty="0"/>
+          </a:p>
+        </p:txBody>
+      </p:sp>
+      <p:sp>
+        <p:nvSpPr>
+          <p:cNvPr id="16" name="Shape 14"/>
+          <p:cNvSpPr/>
+          <p:nvPr/>
+        </p:nvSpPr>
+        <p:spPr>
+          <a:xfrm>
+            <a:off x="4389120" y="1371600"/>
+            <a:ext cx="3566160" cy="4114800"/>
           </a:xfrm>
           <a:prstGeom prst="rect">
             <a:avLst/>
@@ -4468,18 +4237,123 @@
             </a:solidFill>
             <a:prstDash val="solid"/>
           </a:ln>
-        </p:spPr>
-      </p:sp>
-      <p:sp>
-        <p:nvSpPr>
-          <p:cNvPr id="11" name="Text 9"/>
-          <p:cNvSpPr/>
-          <p:nvPr/>
-        </p:nvSpPr>
-        <p:spPr>
-          <a:xfrm>
-            <a:off x="731520" y="2194560"/>
-            <a:ext cx="2743200" cy="548640"/>
+          <a:effectLst>
+            <a:outerShdw sx="100000" sy="100000" kx="0" ky="0" algn="bl" rotWithShape="0" blurRad="76200" dist="25400" dir="8100000">
+              <a:srgbClr val="000000">
+                <a:alpha val="8000"/>
+              </a:srgbClr>
+            </a:outerShdw>
+          </a:effectLst>
+        </p:spPr>
+      </p:sp>
+      <p:sp>
+        <p:nvSpPr>
+          <p:cNvPr id="17" name="Shape 15"/>
+          <p:cNvSpPr/>
+          <p:nvPr/>
+        </p:nvSpPr>
+        <p:spPr>
+          <a:xfrm>
+            <a:off x="4389120" y="1371600"/>
+            <a:ext cx="3566160" cy="548640"/>
+          </a:xfrm>
+          <a:prstGeom prst="rect">
+            <a:avLst/>
+          </a:prstGeom>
+          <a:solidFill>
+            <a:srgbClr val="1C7293"/>
+          </a:solidFill>
+          <a:ln/>
+        </p:spPr>
+      </p:sp>
+      <p:sp>
+        <p:nvSpPr>
+          <p:cNvPr id="18" name="Text 16"/>
+          <p:cNvSpPr/>
+          <p:nvPr/>
+        </p:nvSpPr>
+        <p:spPr>
+          <a:xfrm>
+            <a:off x="4572000" y="1371600"/>
+            <a:ext cx="3200400" cy="548640"/>
+          </a:xfrm>
+          <a:prstGeom prst="rect">
+            <a:avLst/>
+          </a:prstGeom>
+          <a:noFill/>
+          <a:ln/>
+        </p:spPr>
+        <p:txBody>
+          <a:bodyPr wrap="square" lIns="0" tIns="0" rIns="0" bIns="0" rtlCol="0" anchor="ctr"/>
+          <a:lstStyle/>
+          <a:p>
+            <a:pPr indent="0" marL="0">
+              <a:buNone/>
+            </a:pPr>
+            <a:r>
+              <a:rPr lang="en-US" sz="1600" b="1" dirty="0">
+                <a:solidFill>
+                  <a:srgbClr val="FFFFFF"/>
+                </a:solidFill>
+                <a:latin typeface="Calibri" pitchFamily="34" charset="0"/>
+                <a:ea typeface="Calibri" pitchFamily="34" charset="-122"/>
+                <a:cs typeface="Calibri" pitchFamily="34" charset="-120"/>
+              </a:rPr>
+              <a:t>Phase 2: 产品化</a:t>
+            </a:r>
+            <a:endParaRPr lang="en-US" sz="1600" dirty="0"/>
+          </a:p>
+        </p:txBody>
+      </p:sp>
+      <p:sp>
+        <p:nvSpPr>
+          <p:cNvPr id="19" name="Text 17"/>
+          <p:cNvSpPr/>
+          <p:nvPr/>
+        </p:nvSpPr>
+        <p:spPr>
+          <a:xfrm>
+            <a:off x="4572000" y="2011680"/>
+            <a:ext cx="3200400" cy="320040"/>
+          </a:xfrm>
+          <a:prstGeom prst="rect">
+            <a:avLst/>
+          </a:prstGeom>
+          <a:noFill/>
+          <a:ln/>
+        </p:spPr>
+        <p:txBody>
+          <a:bodyPr wrap="square" lIns="0" tIns="0" rIns="0" bIns="0" rtlCol="0" anchor="ctr"/>
+          <a:lstStyle/>
+          <a:p>
+            <a:pPr indent="0" marL="0">
+              <a:buNone/>
+            </a:pPr>
+            <a:r>
+              <a:rPr lang="en-US" sz="1200" dirty="0">
+                <a:solidFill>
+                  <a:srgbClr val="64748B"/>
+                </a:solidFill>
+                <a:latin typeface="Calibri" pitchFamily="34" charset="0"/>
+                <a:ea typeface="Calibri" pitchFamily="34" charset="-122"/>
+                <a:cs typeface="Calibri" pitchFamily="34" charset="-120"/>
+              </a:rPr>
+              <a:t>1-2 个月</a:t>
+            </a:r>
+            <a:endParaRPr lang="en-US" sz="1200" dirty="0"/>
+          </a:p>
+        </p:txBody>
+      </p:sp>
+      <p:sp>
+        <p:nvSpPr>
+          <p:cNvPr id="20" name="Text 18"/>
+          <p:cNvSpPr/>
+          <p:nvPr/>
+        </p:nvSpPr>
+        <p:spPr>
+          <a:xfrm>
+            <a:off x="4572000" y="2468880"/>
+            <a:ext cx="3200400" cy="365760"/>
           </a:xfrm>
           <a:prstGeom prst="rect">
             <a:avLst/>
@@ -4497,13 +4371,13 @@
             <a:r>
               <a:rPr lang="en-US" sz="1300" dirty="0">
                 <a:solidFill>
-                  <a:srgbClr val="EF4444"/>
-                </a:solidFill>
-                <a:latin typeface="Calibri" pitchFamily="34" charset="0"/>
-                <a:ea typeface="Calibri" pitchFamily="34" charset="-122"/>
-                <a:cs typeface="Calibri" pitchFamily="34" charset="-120"/>
-              </a:rPr>
-              <a:t>特征衍生深度不足</a:t>
+                  <a:srgbClr val="1E293B"/>
+                </a:solidFill>
+                <a:latin typeface="Calibri" pitchFamily="34" charset="0"/>
+                <a:ea typeface="Calibri" pitchFamily="34" charset="-122"/>
+                <a:cs typeface="Calibri" pitchFamily="34" charset="-120"/>
+              </a:rPr>
+              <a:t>• FastAPI + Docker</a:t>
             </a:r>
             <a:endParaRPr lang="en-US" sz="1300" dirty="0"/>
           </a:p>
@@ -4511,14 +4385,14 @@
       </p:sp>
       <p:sp>
         <p:nvSpPr>
-          <p:cNvPr id="12" name="Text 10"/>
-          <p:cNvSpPr/>
-          <p:nvPr/>
-        </p:nvSpPr>
-        <p:spPr>
-          <a:xfrm>
-            <a:off x="3474720" y="2194560"/>
-            <a:ext cx="2286000" cy="548640"/>
+          <p:cNvPr id="21" name="Text 19"/>
+          <p:cNvSpPr/>
+          <p:nvPr/>
+        </p:nvSpPr>
+        <p:spPr>
+          <a:xfrm>
+            <a:off x="4572000" y="2880360"/>
+            <a:ext cx="3200400" cy="365760"/>
           </a:xfrm>
           <a:prstGeom prst="rect">
             <a:avLst/>
@@ -4536,13 +4410,13 @@
             <a:r>
               <a:rPr lang="en-US" sz="1300" dirty="0">
                 <a:solidFill>
-                  <a:srgbClr val="10B981"/>
-                </a:solidFill>
-                <a:latin typeface="Calibri" pitchFamily="34" charset="0"/>
-                <a:ea typeface="Calibri" pitchFamily="34" charset="-122"/>
-                <a:cs typeface="Calibri" pitchFamily="34" charset="-120"/>
-              </a:rPr>
-              <a:t>→ 加衍生特征工程层</a:t>
+                  <a:srgbClr val="1E293B"/>
+                </a:solidFill>
+                <a:latin typeface="Calibri" pitchFamily="34" charset="0"/>
+                <a:ea typeface="Calibri" pitchFamily="34" charset="-122"/>
+                <a:cs typeface="Calibri" pitchFamily="34" charset="-120"/>
+              </a:rPr>
+              <a:t>• OCR 多模态采集</a:t>
             </a:r>
             <a:endParaRPr lang="en-US" sz="1300" dirty="0"/>
           </a:p>
@@ -4550,14 +4424,151 @@
       </p:sp>
       <p:sp>
         <p:nvSpPr>
-          <p:cNvPr id="13" name="Shape 11"/>
-          <p:cNvSpPr/>
-          <p:nvPr/>
-        </p:nvSpPr>
-        <p:spPr>
-          <a:xfrm>
-            <a:off x="548640" y="2834640"/>
-            <a:ext cx="5303520" cy="548640"/>
+          <p:cNvPr id="22" name="Text 20"/>
+          <p:cNvSpPr/>
+          <p:nvPr/>
+        </p:nvSpPr>
+        <p:spPr>
+          <a:xfrm>
+            <a:off x="4572000" y="3291840"/>
+            <a:ext cx="3200400" cy="365760"/>
+          </a:xfrm>
+          <a:prstGeom prst="rect">
+            <a:avLst/>
+          </a:prstGeom>
+          <a:noFill/>
+          <a:ln/>
+        </p:spPr>
+        <p:txBody>
+          <a:bodyPr wrap="square" lIns="0" tIns="0" rIns="0" bIns="0" rtlCol="0" anchor="ctr"/>
+          <a:lstStyle/>
+          <a:p>
+            <a:pPr indent="0" marL="0">
+              <a:buNone/>
+            </a:pPr>
+            <a:r>
+              <a:rPr lang="en-US" sz="1300" dirty="0">
+                <a:solidFill>
+                  <a:srgbClr val="1E293B"/>
+                </a:solidFill>
+                <a:latin typeface="Calibri" pitchFamily="34" charset="0"/>
+                <a:ea typeface="Calibri" pitchFamily="34" charset="-122"/>
+                <a:cs typeface="Calibri" pitchFamily="34" charset="-120"/>
+              </a:rPr>
+              <a:t>• 模型校准（Isotonic）</a:t>
+            </a:r>
+            <a:endParaRPr lang="en-US" sz="1300" dirty="0"/>
+          </a:p>
+        </p:txBody>
+      </p:sp>
+      <p:sp>
+        <p:nvSpPr>
+          <p:cNvPr id="23" name="Text 21"/>
+          <p:cNvSpPr/>
+          <p:nvPr/>
+        </p:nvSpPr>
+        <p:spPr>
+          <a:xfrm>
+            <a:off x="4572000" y="3703320"/>
+            <a:ext cx="3200400" cy="365760"/>
+          </a:xfrm>
+          <a:prstGeom prst="rect">
+            <a:avLst/>
+          </a:prstGeom>
+          <a:noFill/>
+          <a:ln/>
+        </p:spPr>
+        <p:txBody>
+          <a:bodyPr wrap="square" lIns="0" tIns="0" rIns="0" bIns="0" rtlCol="0" anchor="ctr"/>
+          <a:lstStyle/>
+          <a:p>
+            <a:pPr indent="0" marL="0">
+              <a:buNone/>
+            </a:pPr>
+            <a:r>
+              <a:rPr lang="en-US" sz="1300" dirty="0">
+                <a:solidFill>
+                  <a:srgbClr val="1E293B"/>
+                </a:solidFill>
+                <a:latin typeface="Calibri" pitchFamily="34" charset="0"/>
+                <a:ea typeface="Calibri" pitchFamily="34" charset="-122"/>
+                <a:cs typeface="Calibri" pitchFamily="34" charset="-120"/>
+              </a:rPr>
+              <a:t>• Word/PDF 导出</a:t>
+            </a:r>
+            <a:endParaRPr lang="en-US" sz="1300" dirty="0"/>
+          </a:p>
+        </p:txBody>
+      </p:sp>
+      <p:sp>
+        <p:nvSpPr>
+          <p:cNvPr id="24" name="Shape 22"/>
+          <p:cNvSpPr/>
+          <p:nvPr/>
+        </p:nvSpPr>
+        <p:spPr>
+          <a:xfrm>
+            <a:off x="4572000" y="4937760"/>
+            <a:ext cx="3200400" cy="365760"/>
+          </a:xfrm>
+          <a:prstGeom prst="rect">
+            <a:avLst/>
+          </a:prstGeom>
+          <a:solidFill>
+            <a:srgbClr val="F8FAFC"/>
+          </a:solidFill>
+          <a:ln/>
+        </p:spPr>
+      </p:sp>
+      <p:sp>
+        <p:nvSpPr>
+          <p:cNvPr id="25" name="Text 23"/>
+          <p:cNvSpPr/>
+          <p:nvPr/>
+        </p:nvSpPr>
+        <p:spPr>
+          <a:xfrm>
+            <a:off x="4572000" y="4937760"/>
+            <a:ext cx="3200400" cy="365760"/>
+          </a:xfrm>
+          <a:prstGeom prst="rect">
+            <a:avLst/>
+          </a:prstGeom>
+          <a:noFill/>
+          <a:ln/>
+        </p:spPr>
+        <p:txBody>
+          <a:bodyPr wrap="square" lIns="0" tIns="0" rIns="0" bIns="0" rtlCol="0" anchor="ctr"/>
+          <a:lstStyle/>
+          <a:p>
+            <a:pPr algn="ctr" indent="0" marL="0">
+              <a:buNone/>
+            </a:pPr>
+            <a:r>
+              <a:rPr lang="en-US" sz="1300" b="1" dirty="0">
+                <a:solidFill>
+                  <a:srgbClr val="1C7293"/>
+                </a:solidFill>
+                <a:latin typeface="Calibri" pitchFamily="34" charset="0"/>
+                <a:ea typeface="Calibri" pitchFamily="34" charset="-122"/>
+                <a:cs typeface="Calibri" pitchFamily="34" charset="-120"/>
+              </a:rPr>
+              <a:t>⏳ 计划中</a:t>
+            </a:r>
+            <a:endParaRPr lang="en-US" sz="1300" dirty="0"/>
+          </a:p>
+        </p:txBody>
+      </p:sp>
+      <p:sp>
+        <p:nvSpPr>
+          <p:cNvPr id="26" name="Shape 24"/>
+          <p:cNvSpPr/>
+          <p:nvPr/>
+        </p:nvSpPr>
+        <p:spPr>
+          <a:xfrm>
+            <a:off x="8229600" y="1371600"/>
+            <a:ext cx="3566160" cy="4114800"/>
           </a:xfrm>
           <a:prstGeom prst="rect">
             <a:avLst/>
@@ -4571,238 +4582,25 @@
             </a:solidFill>
             <a:prstDash val="solid"/>
           </a:ln>
-        </p:spPr>
-      </p:sp>
-      <p:sp>
-        <p:nvSpPr>
-          <p:cNvPr id="14" name="Text 12"/>
-          <p:cNvSpPr/>
-          <p:nvPr/>
-        </p:nvSpPr>
-        <p:spPr>
-          <a:xfrm>
-            <a:off x="731520" y="2834640"/>
-            <a:ext cx="2743200" cy="548640"/>
-          </a:xfrm>
-          <a:prstGeom prst="rect">
-            <a:avLst/>
-          </a:prstGeom>
-          <a:noFill/>
-          <a:ln/>
-        </p:spPr>
-        <p:txBody>
-          <a:bodyPr wrap="square" lIns="0" tIns="0" rIns="0" bIns="0" rtlCol="0" anchor="ctr"/>
-          <a:lstStyle/>
-          <a:p>
-            <a:pPr indent="0" marL="0">
-              <a:buNone/>
-            </a:pPr>
-            <a:r>
-              <a:rPr lang="en-US" sz="1300" dirty="0">
-                <a:solidFill>
-                  <a:srgbClr val="EF4444"/>
-                </a:solidFill>
-                <a:latin typeface="Calibri" pitchFamily="34" charset="0"/>
-                <a:ea typeface="Calibri" pitchFamily="34" charset="-122"/>
-                <a:cs typeface="Calibri" pitchFamily="34" charset="-120"/>
-              </a:rPr>
-              <a:t>无模型校准</a:t>
-            </a:r>
-            <a:endParaRPr lang="en-US" sz="1300" dirty="0"/>
-          </a:p>
-        </p:txBody>
-      </p:sp>
-      <p:sp>
-        <p:nvSpPr>
-          <p:cNvPr id="15" name="Text 13"/>
-          <p:cNvSpPr/>
-          <p:nvPr/>
-        </p:nvSpPr>
-        <p:spPr>
-          <a:xfrm>
-            <a:off x="3474720" y="2834640"/>
-            <a:ext cx="2286000" cy="548640"/>
-          </a:xfrm>
-          <a:prstGeom prst="rect">
-            <a:avLst/>
-          </a:prstGeom>
-          <a:noFill/>
-          <a:ln/>
-        </p:spPr>
-        <p:txBody>
-          <a:bodyPr wrap="square" lIns="0" tIns="0" rIns="0" bIns="0" rtlCol="0" anchor="ctr"/>
-          <a:lstStyle/>
-          <a:p>
-            <a:pPr indent="0" marL="0">
-              <a:buNone/>
-            </a:pPr>
-            <a:r>
-              <a:rPr lang="en-US" sz="1300" dirty="0">
-                <a:solidFill>
-                  <a:srgbClr val="10B981"/>
-                </a:solidFill>
-                <a:latin typeface="Calibri" pitchFamily="34" charset="0"/>
-                <a:ea typeface="Calibri" pitchFamily="34" charset="-122"/>
-                <a:cs typeface="Calibri" pitchFamily="34" charset="-120"/>
-              </a:rPr>
-              <a:t>→ Isotonic / Platt</a:t>
-            </a:r>
-            <a:endParaRPr lang="en-US" sz="1300" dirty="0"/>
-          </a:p>
-        </p:txBody>
-      </p:sp>
-      <p:sp>
-        <p:nvSpPr>
-          <p:cNvPr id="16" name="Shape 14"/>
-          <p:cNvSpPr/>
-          <p:nvPr/>
-        </p:nvSpPr>
-        <p:spPr>
-          <a:xfrm>
-            <a:off x="548640" y="3474720"/>
-            <a:ext cx="5303520" cy="548640"/>
-          </a:xfrm>
-          <a:prstGeom prst="rect">
-            <a:avLst/>
-          </a:prstGeom>
-          <a:solidFill>
-            <a:srgbClr val="FFFFFF"/>
-          </a:solidFill>
-          <a:ln w="12700">
-            <a:solidFill>
-              <a:srgbClr val="E2E8F0"/>
-            </a:solidFill>
-            <a:prstDash val="solid"/>
-          </a:ln>
-        </p:spPr>
-      </p:sp>
-      <p:sp>
-        <p:nvSpPr>
-          <p:cNvPr id="17" name="Text 15"/>
-          <p:cNvSpPr/>
-          <p:nvPr/>
-        </p:nvSpPr>
-        <p:spPr>
-          <a:xfrm>
-            <a:off x="731520" y="3474720"/>
-            <a:ext cx="2743200" cy="548640"/>
-          </a:xfrm>
-          <a:prstGeom prst="rect">
-            <a:avLst/>
-          </a:prstGeom>
-          <a:noFill/>
-          <a:ln/>
-        </p:spPr>
-        <p:txBody>
-          <a:bodyPr wrap="square" lIns="0" tIns="0" rIns="0" bIns="0" rtlCol="0" anchor="ctr"/>
-          <a:lstStyle/>
-          <a:p>
-            <a:pPr indent="0" marL="0">
-              <a:buNone/>
-            </a:pPr>
-            <a:r>
-              <a:rPr lang="en-US" sz="1300" dirty="0">
-                <a:solidFill>
-                  <a:srgbClr val="EF4444"/>
-                </a:solidFill>
-                <a:latin typeface="Calibri" pitchFamily="34" charset="0"/>
-                <a:ea typeface="Calibri" pitchFamily="34" charset="-122"/>
-                <a:cs typeface="Calibri" pitchFamily="34" charset="-120"/>
-              </a:rPr>
-              <a:t>仅文本对话</a:t>
-            </a:r>
-            <a:endParaRPr lang="en-US" sz="1300" dirty="0"/>
-          </a:p>
-        </p:txBody>
-      </p:sp>
-      <p:sp>
-        <p:nvSpPr>
-          <p:cNvPr id="18" name="Text 16"/>
-          <p:cNvSpPr/>
-          <p:nvPr/>
-        </p:nvSpPr>
-        <p:spPr>
-          <a:xfrm>
-            <a:off x="3474720" y="3474720"/>
-            <a:ext cx="2286000" cy="548640"/>
-          </a:xfrm>
-          <a:prstGeom prst="rect">
-            <a:avLst/>
-          </a:prstGeom>
-          <a:noFill/>
-          <a:ln/>
-        </p:spPr>
-        <p:txBody>
-          <a:bodyPr wrap="square" lIns="0" tIns="0" rIns="0" bIns="0" rtlCol="0" anchor="ctr"/>
-          <a:lstStyle/>
-          <a:p>
-            <a:pPr indent="0" marL="0">
-              <a:buNone/>
-            </a:pPr>
-            <a:r>
-              <a:rPr lang="en-US" sz="1300" dirty="0">
-                <a:solidFill>
-                  <a:srgbClr val="10B981"/>
-                </a:solidFill>
-                <a:latin typeface="Calibri" pitchFamily="34" charset="0"/>
-                <a:ea typeface="Calibri" pitchFamily="34" charset="-122"/>
-                <a:cs typeface="Calibri" pitchFamily="34" charset="-120"/>
-              </a:rPr>
-              <a:t>→ 加 OCR</a:t>
-            </a:r>
-            <a:endParaRPr lang="en-US" sz="1300" dirty="0"/>
-          </a:p>
-        </p:txBody>
-      </p:sp>
-      <p:sp>
-        <p:nvSpPr>
-          <p:cNvPr id="19" name="Text 17"/>
-          <p:cNvSpPr/>
-          <p:nvPr/>
-        </p:nvSpPr>
-        <p:spPr>
-          <a:xfrm>
-            <a:off x="6400800" y="1097280"/>
-            <a:ext cx="5029200" cy="365760"/>
-          </a:xfrm>
-          <a:prstGeom prst="rect">
-            <a:avLst/>
-          </a:prstGeom>
-          <a:noFill/>
-          <a:ln/>
-        </p:spPr>
-        <p:txBody>
-          <a:bodyPr wrap="square" lIns="0" tIns="0" rIns="0" bIns="0" rtlCol="0" anchor="ctr"/>
-          <a:lstStyle/>
-          <a:p>
-            <a:pPr indent="0" marL="0">
-              <a:buNone/>
-            </a:pPr>
-            <a:r>
-              <a:rPr lang="en-US" sz="1800" b="1" dirty="0">
-                <a:solidFill>
-                  <a:srgbClr val="21295C"/>
-                </a:solidFill>
-                <a:latin typeface="Calibri" pitchFamily="34" charset="0"/>
-                <a:ea typeface="Calibri" pitchFamily="34" charset="-122"/>
-                <a:cs typeface="Calibri" pitchFamily="34" charset="-120"/>
-              </a:rPr>
-              <a:t>Ask</a:t>
-            </a:r>
-            <a:endParaRPr lang="en-US" sz="1800" dirty="0"/>
-          </a:p>
-        </p:txBody>
-      </p:sp>
-      <p:sp>
-        <p:nvSpPr>
-          <p:cNvPr id="20" name="Shape 18"/>
-          <p:cNvSpPr/>
-          <p:nvPr/>
-        </p:nvSpPr>
-        <p:spPr>
-          <a:xfrm>
-            <a:off x="6400800" y="1554480"/>
-            <a:ext cx="5212080" cy="777240"/>
+          <a:effectLst>
+            <a:outerShdw sx="100000" sy="100000" kx="0" ky="0" algn="bl" rotWithShape="0" blurRad="76200" dist="25400" dir="8100000">
+              <a:srgbClr val="000000">
+                <a:alpha val="8000"/>
+              </a:srgbClr>
+            </a:outerShdw>
+          </a:effectLst>
+        </p:spPr>
+      </p:sp>
+      <p:sp>
+        <p:nvSpPr>
+          <p:cNvPr id="27" name="Shape 25"/>
+          <p:cNvSpPr/>
+          <p:nvPr/>
+        </p:nvSpPr>
+        <p:spPr>
+          <a:xfrm>
+            <a:off x="8229600" y="1371600"/>
+            <a:ext cx="3566160" cy="548640"/>
           </a:xfrm>
           <a:prstGeom prst="rect">
             <a:avLst/>
@@ -4815,30 +4613,30 @@
       </p:sp>
       <p:sp>
         <p:nvSpPr>
-          <p:cNvPr id="21" name="Text 19"/>
-          <p:cNvSpPr/>
-          <p:nvPr/>
-        </p:nvSpPr>
-        <p:spPr>
-          <a:xfrm>
-            <a:off x="6583680" y="1554480"/>
-            <a:ext cx="4846320" cy="777240"/>
-          </a:xfrm>
-          <a:prstGeom prst="rect">
-            <a:avLst/>
-          </a:prstGeom>
-          <a:noFill/>
-          <a:ln/>
-        </p:spPr>
-        <p:txBody>
-          <a:bodyPr wrap="square" lIns="0" tIns="0" rIns="0" bIns="0" rtlCol="0" anchor="ctr"/>
-          <a:lstStyle/>
-          <a:p>
-            <a:pPr indent="0" marL="0">
-              <a:buNone/>
-            </a:pPr>
-            <a:r>
-              <a:rPr lang="en-US" sz="1400" dirty="0">
+          <p:cNvPr id="28" name="Text 26"/>
+          <p:cNvSpPr/>
+          <p:nvPr/>
+        </p:nvSpPr>
+        <p:spPr>
+          <a:xfrm>
+            <a:off x="8412480" y="1371600"/>
+            <a:ext cx="3200400" cy="548640"/>
+          </a:xfrm>
+          <a:prstGeom prst="rect">
+            <a:avLst/>
+          </a:prstGeom>
+          <a:noFill/>
+          <a:ln/>
+        </p:spPr>
+        <p:txBody>
+          <a:bodyPr wrap="square" lIns="0" tIns="0" rIns="0" bIns="0" rtlCol="0" anchor="ctr"/>
+          <a:lstStyle/>
+          <a:p>
+            <a:pPr indent="0" marL="0">
+              <a:buNone/>
+            </a:pPr>
+            <a:r>
+              <a:rPr lang="en-US" sz="1600" b="1" dirty="0">
                 <a:solidFill>
                   <a:srgbClr val="FFFFFF"/>
                 </a:solidFill>
@@ -4846,127 +4644,302 @@
                 <a:ea typeface="Calibri" pitchFamily="34" charset="-122"/>
                 <a:cs typeface="Calibri" pitchFamily="34" charset="-120"/>
               </a:rPr>
-              <a:t>1. Agent × 风控 的产品化路径，特别是合规边界设计</a:t>
-            </a:r>
-            <a:endParaRPr lang="en-US" sz="1400" dirty="0"/>
-          </a:p>
-        </p:txBody>
-      </p:sp>
-      <p:sp>
-        <p:nvSpPr>
-          <p:cNvPr id="22" name="Shape 20"/>
-          <p:cNvSpPr/>
-          <p:nvPr/>
-        </p:nvSpPr>
-        <p:spPr>
-          <a:xfrm>
-            <a:off x="6400800" y="2468880"/>
-            <a:ext cx="5212080" cy="777240"/>
+              <a:t>Phase 3: 企业级</a:t>
+            </a:r>
+            <a:endParaRPr lang="en-US" sz="1600" dirty="0"/>
+          </a:p>
+        </p:txBody>
+      </p:sp>
+      <p:sp>
+        <p:nvSpPr>
+          <p:cNvPr id="29" name="Text 27"/>
+          <p:cNvSpPr/>
+          <p:nvPr/>
+        </p:nvSpPr>
+        <p:spPr>
+          <a:xfrm>
+            <a:off x="8412480" y="2011680"/>
+            <a:ext cx="3200400" cy="320040"/>
+          </a:xfrm>
+          <a:prstGeom prst="rect">
+            <a:avLst/>
+          </a:prstGeom>
+          <a:noFill/>
+          <a:ln/>
+        </p:spPr>
+        <p:txBody>
+          <a:bodyPr wrap="square" lIns="0" tIns="0" rIns="0" bIns="0" rtlCol="0" anchor="ctr"/>
+          <a:lstStyle/>
+          <a:p>
+            <a:pPr indent="0" marL="0">
+              <a:buNone/>
+            </a:pPr>
+            <a:r>
+              <a:rPr lang="en-US" sz="1200" dirty="0">
+                <a:solidFill>
+                  <a:srgbClr val="64748B"/>
+                </a:solidFill>
+                <a:latin typeface="Calibri" pitchFamily="34" charset="0"/>
+                <a:ea typeface="Calibri" pitchFamily="34" charset="-122"/>
+                <a:cs typeface="Calibri" pitchFamily="34" charset="-120"/>
+              </a:rPr>
+              <a:t>3-6 个月</a:t>
+            </a:r>
+            <a:endParaRPr lang="en-US" sz="1200" dirty="0"/>
+          </a:p>
+        </p:txBody>
+      </p:sp>
+      <p:sp>
+        <p:nvSpPr>
+          <p:cNvPr id="30" name="Text 28"/>
+          <p:cNvSpPr/>
+          <p:nvPr/>
+        </p:nvSpPr>
+        <p:spPr>
+          <a:xfrm>
+            <a:off x="8412480" y="2468880"/>
+            <a:ext cx="3200400" cy="365760"/>
+          </a:xfrm>
+          <a:prstGeom prst="rect">
+            <a:avLst/>
+          </a:prstGeom>
+          <a:noFill/>
+          <a:ln/>
+        </p:spPr>
+        <p:txBody>
+          <a:bodyPr wrap="square" lIns="0" tIns="0" rIns="0" bIns="0" rtlCol="0" anchor="ctr"/>
+          <a:lstStyle/>
+          <a:p>
+            <a:pPr indent="0" marL="0">
+              <a:buNone/>
+            </a:pPr>
+            <a:r>
+              <a:rPr lang="en-US" sz="1300" dirty="0">
+                <a:solidFill>
+                  <a:srgbClr val="1E293B"/>
+                </a:solidFill>
+                <a:latin typeface="Calibri" pitchFamily="34" charset="0"/>
+                <a:ea typeface="Calibri" pitchFamily="34" charset="-122"/>
+                <a:cs typeface="Calibri" pitchFamily="34" charset="-120"/>
+              </a:rPr>
+              <a:t>• 多用户并发</a:t>
+            </a:r>
+            <a:endParaRPr lang="en-US" sz="1300" dirty="0"/>
+          </a:p>
+        </p:txBody>
+      </p:sp>
+      <p:sp>
+        <p:nvSpPr>
+          <p:cNvPr id="31" name="Text 29"/>
+          <p:cNvSpPr/>
+          <p:nvPr/>
+        </p:nvSpPr>
+        <p:spPr>
+          <a:xfrm>
+            <a:off x="8412480" y="2880360"/>
+            <a:ext cx="3200400" cy="365760"/>
+          </a:xfrm>
+          <a:prstGeom prst="rect">
+            <a:avLst/>
+          </a:prstGeom>
+          <a:noFill/>
+          <a:ln/>
+        </p:spPr>
+        <p:txBody>
+          <a:bodyPr wrap="square" lIns="0" tIns="0" rIns="0" bIns="0" rtlCol="0" anchor="ctr"/>
+          <a:lstStyle/>
+          <a:p>
+            <a:pPr indent="0" marL="0">
+              <a:buNone/>
+            </a:pPr>
+            <a:r>
+              <a:rPr lang="en-US" sz="1300" dirty="0">
+                <a:solidFill>
+                  <a:srgbClr val="1E293B"/>
+                </a:solidFill>
+                <a:latin typeface="Calibri" pitchFamily="34" charset="0"/>
+                <a:ea typeface="Calibri" pitchFamily="34" charset="-122"/>
+                <a:cs typeface="Calibri" pitchFamily="34" charset="-120"/>
+              </a:rPr>
+              <a:t>• 企业级 SaaS</a:t>
+            </a:r>
+            <a:endParaRPr lang="en-US" sz="1300" dirty="0"/>
+          </a:p>
+        </p:txBody>
+      </p:sp>
+      <p:sp>
+        <p:nvSpPr>
+          <p:cNvPr id="32" name="Text 30"/>
+          <p:cNvSpPr/>
+          <p:nvPr/>
+        </p:nvSpPr>
+        <p:spPr>
+          <a:xfrm>
+            <a:off x="8412480" y="3291840"/>
+            <a:ext cx="3200400" cy="365760"/>
+          </a:xfrm>
+          <a:prstGeom prst="rect">
+            <a:avLst/>
+          </a:prstGeom>
+          <a:noFill/>
+          <a:ln/>
+        </p:spPr>
+        <p:txBody>
+          <a:bodyPr wrap="square" lIns="0" tIns="0" rIns="0" bIns="0" rtlCol="0" anchor="ctr"/>
+          <a:lstStyle/>
+          <a:p>
+            <a:pPr indent="0" marL="0">
+              <a:buNone/>
+            </a:pPr>
+            <a:r>
+              <a:rPr lang="en-US" sz="1300" dirty="0">
+                <a:solidFill>
+                  <a:srgbClr val="1E293B"/>
+                </a:solidFill>
+                <a:latin typeface="Calibri" pitchFamily="34" charset="0"/>
+                <a:ea typeface="Calibri" pitchFamily="34" charset="-122"/>
+                <a:cs typeface="Calibri" pitchFamily="34" charset="-120"/>
+              </a:rPr>
+              <a:t>• 实时交易系统对接</a:t>
+            </a:r>
+            <a:endParaRPr lang="en-US" sz="1300" dirty="0"/>
+          </a:p>
+        </p:txBody>
+      </p:sp>
+      <p:sp>
+        <p:nvSpPr>
+          <p:cNvPr id="33" name="Text 31"/>
+          <p:cNvSpPr/>
+          <p:nvPr/>
+        </p:nvSpPr>
+        <p:spPr>
+          <a:xfrm>
+            <a:off x="8412480" y="3703320"/>
+            <a:ext cx="3200400" cy="365760"/>
+          </a:xfrm>
+          <a:prstGeom prst="rect">
+            <a:avLst/>
+          </a:prstGeom>
+          <a:noFill/>
+          <a:ln/>
+        </p:spPr>
+        <p:txBody>
+          <a:bodyPr wrap="square" lIns="0" tIns="0" rIns="0" bIns="0" rtlCol="0" anchor="ctr"/>
+          <a:lstStyle/>
+          <a:p>
+            <a:pPr indent="0" marL="0">
+              <a:buNone/>
+            </a:pPr>
+            <a:r>
+              <a:rPr lang="en-US" sz="1300" dirty="0">
+                <a:solidFill>
+                  <a:srgbClr val="1E293B"/>
+                </a:solidFill>
+                <a:latin typeface="Calibri" pitchFamily="34" charset="0"/>
+                <a:ea typeface="Calibri" pitchFamily="34" charset="-122"/>
+                <a:cs typeface="Calibri" pitchFamily="34" charset="-120"/>
+              </a:rPr>
+              <a:t>• 多产品线支持</a:t>
+            </a:r>
+            <a:endParaRPr lang="en-US" sz="1300" dirty="0"/>
+          </a:p>
+        </p:txBody>
+      </p:sp>
+      <p:sp>
+        <p:nvSpPr>
+          <p:cNvPr id="34" name="Shape 32"/>
+          <p:cNvSpPr/>
+          <p:nvPr/>
+        </p:nvSpPr>
+        <p:spPr>
+          <a:xfrm>
+            <a:off x="8412480" y="4937760"/>
+            <a:ext cx="3200400" cy="365760"/>
           </a:xfrm>
           <a:prstGeom prst="rect">
             <a:avLst/>
           </a:prstGeom>
           <a:solidFill>
-            <a:srgbClr val="21295C"/>
+            <a:srgbClr val="F8FAFC"/>
           </a:solidFill>
           <a:ln/>
         </p:spPr>
       </p:sp>
       <p:sp>
         <p:nvSpPr>
-          <p:cNvPr id="23" name="Text 21"/>
-          <p:cNvSpPr/>
-          <p:nvPr/>
-        </p:nvSpPr>
-        <p:spPr>
-          <a:xfrm>
-            <a:off x="6583680" y="2468880"/>
-            <a:ext cx="4846320" cy="777240"/>
-          </a:xfrm>
-          <a:prstGeom prst="rect">
-            <a:avLst/>
-          </a:prstGeom>
-          <a:noFill/>
-          <a:ln/>
-        </p:spPr>
-        <p:txBody>
-          <a:bodyPr wrap="square" lIns="0" tIns="0" rIns="0" bIns="0" rtlCol="0" anchor="ctr"/>
-          <a:lstStyle/>
-          <a:p>
-            <a:pPr indent="0" marL="0">
-              <a:buNone/>
-            </a:pPr>
-            <a:r>
-              <a:rPr lang="en-US" sz="1400" dirty="0">
-                <a:solidFill>
-                  <a:srgbClr val="FFFFFF"/>
-                </a:solidFill>
-                <a:latin typeface="Calibri" pitchFamily="34" charset="0"/>
-                <a:ea typeface="Calibri" pitchFamily="34" charset="-122"/>
-                <a:cs typeface="Calibri" pitchFamily="34" charset="-120"/>
-              </a:rPr>
-              <a:t>2. IV/WoE+PSI 方法论在生产环境的工程化最佳实践</a:t>
-            </a:r>
-            <a:endParaRPr lang="en-US" sz="1400" dirty="0"/>
-          </a:p>
-        </p:txBody>
-      </p:sp>
-      <p:sp>
-        <p:nvSpPr>
-          <p:cNvPr id="24" name="Shape 22"/>
-          <p:cNvSpPr/>
-          <p:nvPr/>
-        </p:nvSpPr>
-        <p:spPr>
-          <a:xfrm>
-            <a:off x="6400800" y="3383280"/>
-            <a:ext cx="5212080" cy="777240"/>
-          </a:xfrm>
-          <a:prstGeom prst="rect">
-            <a:avLst/>
-          </a:prstGeom>
-          <a:solidFill>
-            <a:srgbClr val="21295C"/>
-          </a:solidFill>
-          <a:ln/>
-        </p:spPr>
-      </p:sp>
-      <p:sp>
-        <p:nvSpPr>
-          <p:cNvPr id="25" name="Text 23"/>
-          <p:cNvSpPr/>
-          <p:nvPr/>
-        </p:nvSpPr>
-        <p:spPr>
-          <a:xfrm>
-            <a:off x="6583680" y="3383280"/>
-            <a:ext cx="4846320" cy="777240"/>
-          </a:xfrm>
-          <a:prstGeom prst="rect">
-            <a:avLst/>
-          </a:prstGeom>
-          <a:noFill/>
-          <a:ln/>
-        </p:spPr>
-        <p:txBody>
-          <a:bodyPr wrap="square" lIns="0" tIns="0" rIns="0" bIns="0" rtlCol="0" anchor="ctr"/>
-          <a:lstStyle/>
-          <a:p>
-            <a:pPr indent="0" marL="0">
-              <a:buNone/>
-            </a:pPr>
-            <a:r>
-              <a:rPr lang="en-US" sz="1400" dirty="0">
-                <a:solidFill>
-                  <a:srgbClr val="FFFFFF"/>
-                </a:solidFill>
-                <a:latin typeface="Calibri" pitchFamily="34" charset="0"/>
-                <a:ea typeface="Calibri" pitchFamily="34" charset="-122"/>
-                <a:cs typeface="Calibri" pitchFamily="34" charset="-120"/>
-              </a:rPr>
-              <a:t>3. 多模态采集（OCR/语音）的落地经验</a:t>
-            </a:r>
-            <a:endParaRPr lang="en-US" sz="1400" dirty="0"/>
+          <p:cNvPr id="35" name="Text 33"/>
+          <p:cNvSpPr/>
+          <p:nvPr/>
+        </p:nvSpPr>
+        <p:spPr>
+          <a:xfrm>
+            <a:off x="8412480" y="4937760"/>
+            <a:ext cx="3200400" cy="365760"/>
+          </a:xfrm>
+          <a:prstGeom prst="rect">
+            <a:avLst/>
+          </a:prstGeom>
+          <a:noFill/>
+          <a:ln/>
+        </p:spPr>
+        <p:txBody>
+          <a:bodyPr wrap="square" lIns="0" tIns="0" rIns="0" bIns="0" rtlCol="0" anchor="ctr"/>
+          <a:lstStyle/>
+          <a:p>
+            <a:pPr algn="ctr" indent="0" marL="0">
+              <a:buNone/>
+            </a:pPr>
+            <a:r>
+              <a:rPr lang="en-US" sz="1300" b="1" dirty="0">
+                <a:solidFill>
+                  <a:srgbClr val="21295C"/>
+                </a:solidFill>
+                <a:latin typeface="Calibri" pitchFamily="34" charset="0"/>
+                <a:ea typeface="Calibri" pitchFamily="34" charset="-122"/>
+                <a:cs typeface="Calibri" pitchFamily="34" charset="-120"/>
+              </a:rPr>
+              <a:t>📋 远期</a:t>
+            </a:r>
+            <a:endParaRPr lang="en-US" sz="1300" dirty="0"/>
+          </a:p>
+        </p:txBody>
+      </p:sp>
+      <p:sp>
+        <p:nvSpPr>
+          <p:cNvPr id="36" name="Text 34"/>
+          <p:cNvSpPr/>
+          <p:nvPr/>
+        </p:nvSpPr>
+        <p:spPr>
+          <a:xfrm>
+            <a:off x="548640" y="5760720"/>
+            <a:ext cx="11064240" cy="365760"/>
+          </a:xfrm>
+          <a:prstGeom prst="rect">
+            <a:avLst/>
+          </a:prstGeom>
+          <a:noFill/>
+          <a:ln/>
+        </p:spPr>
+        <p:txBody>
+          <a:bodyPr wrap="square" lIns="0" tIns="0" rIns="0" bIns="0" rtlCol="0" anchor="ctr"/>
+          <a:lstStyle/>
+          <a:p>
+            <a:pPr algn="ctr" indent="0" marL="0">
+              <a:buNone/>
+            </a:pPr>
+            <a:r>
+              <a:rPr lang="en-US" sz="1300" i="1" dirty="0">
+                <a:solidFill>
+                  <a:srgbClr val="64748B"/>
+                </a:solidFill>
+                <a:latin typeface="Calibri" pitchFamily="34" charset="0"/>
+                <a:ea typeface="Calibri" pitchFamily="34" charset="-122"/>
+                <a:cs typeface="Calibri" pitchFamily="34" charset="-120"/>
+              </a:rPr>
+              <a:t>Phase 2 会进一步丰富信贷特征工程与多模态采集，覆盖更多消费贷细分场景。</a:t>
+            </a:r>
+            <a:endParaRPr lang="en-US" sz="1300" dirty="0"/>
           </a:p>
         </p:txBody>
       </p:sp>
@@ -4981,6 +4954,839 @@
 <file path=ppt/slides/slide13.xml><?xml version="1.0" encoding="utf-8"?>
 <p:sld xmlns:a="http://schemas.openxmlformats.org/drawingml/2006/main" xmlns:r="http://schemas.openxmlformats.org/officeDocument/2006/relationships" xmlns:p="http://schemas.openxmlformats.org/presentationml/2006/main">
   <p:cSld name="Slide 13">
+    <p:bg>
+      <p:bgPr>
+        <a:solidFill>
+          <a:srgbClr val="F8FAFC"/>
+        </a:solidFill>
+      </p:bgPr>
+    </p:bg>
+    <p:spTree>
+      <p:nvGrpSpPr>
+        <p:cNvPr id="1" name=""/>
+        <p:cNvGrpSpPr/>
+        <p:nvPr/>
+      </p:nvGrpSpPr>
+      <p:grpSpPr>
+        <a:xfrm>
+          <a:off x="0" y="0"/>
+          <a:ext cx="0" cy="0"/>
+          <a:chOff x="0" y="0"/>
+          <a:chExt cx="0" cy="0"/>
+        </a:xfrm>
+      </p:grpSpPr>
+      <p:sp>
+        <p:nvSpPr>
+          <p:cNvPr id="2" name="Shape 0"/>
+          <p:cNvSpPr/>
+          <p:nvPr/>
+        </p:nvSpPr>
+        <p:spPr>
+          <a:xfrm>
+            <a:off x="0" y="0"/>
+            <a:ext cx="12161520" cy="73152"/>
+          </a:xfrm>
+          <a:prstGeom prst="rect">
+            <a:avLst/>
+          </a:prstGeom>
+          <a:solidFill>
+            <a:srgbClr val="14B8A6"/>
+          </a:solidFill>
+          <a:ln/>
+        </p:spPr>
+      </p:sp>
+      <p:sp>
+        <p:nvSpPr>
+          <p:cNvPr id="3" name="Text 1"/>
+          <p:cNvSpPr/>
+          <p:nvPr/>
+        </p:nvSpPr>
+        <p:spPr>
+          <a:xfrm>
+            <a:off x="548640" y="274320"/>
+            <a:ext cx="10972800" cy="548640"/>
+          </a:xfrm>
+          <a:prstGeom prst="rect">
+            <a:avLst/>
+          </a:prstGeom>
+          <a:noFill/>
+          <a:ln/>
+        </p:spPr>
+        <p:txBody>
+          <a:bodyPr wrap="square" lIns="0" tIns="0" rIns="0" bIns="0" rtlCol="0" anchor="ctr"/>
+          <a:lstStyle/>
+          <a:p>
+            <a:pPr indent="0" marL="0">
+              <a:buNone/>
+            </a:pPr>
+            <a:r>
+              <a:rPr lang="en-US" sz="2800" b="1" dirty="0">
+                <a:solidFill>
+                  <a:srgbClr val="21295C"/>
+                </a:solidFill>
+                <a:latin typeface="Georgia" pitchFamily="34" charset="0"/>
+                <a:ea typeface="Georgia" pitchFamily="34" charset="-122"/>
+                <a:cs typeface="Georgia" pitchFamily="34" charset="-120"/>
+              </a:rPr>
+              <a:t>诚实短板与 Ask</a:t>
+            </a:r>
+            <a:endParaRPr lang="en-US" sz="2800" dirty="0"/>
+          </a:p>
+        </p:txBody>
+      </p:sp>
+      <p:sp>
+        <p:nvSpPr>
+          <p:cNvPr id="4" name="Text 2"/>
+          <p:cNvSpPr/>
+          <p:nvPr/>
+        </p:nvSpPr>
+        <p:spPr>
+          <a:xfrm>
+            <a:off x="457200" y="6400800"/>
+            <a:ext cx="5486400" cy="274320"/>
+          </a:xfrm>
+          <a:prstGeom prst="rect">
+            <a:avLst/>
+          </a:prstGeom>
+          <a:noFill/>
+          <a:ln/>
+        </p:spPr>
+        <p:txBody>
+          <a:bodyPr wrap="square" lIns="0" tIns="0" rIns="0" bIns="0" rtlCol="0" anchor="ctr"/>
+          <a:lstStyle/>
+          <a:p>
+            <a:pPr indent="0" marL="0">
+              <a:buNone/>
+            </a:pPr>
+            <a:r>
+              <a:rPr lang="en-US" sz="900" dirty="0">
+                <a:solidFill>
+                  <a:srgbClr val="64748B"/>
+                </a:solidFill>
+                <a:latin typeface="Calibri" pitchFamily="34" charset="0"/>
+                <a:ea typeface="Calibri" pitchFamily="34" charset="-122"/>
+                <a:cs typeface="Calibri" pitchFamily="34" charset="-120"/>
+              </a:rPr>
+              <a:t>CreditMind · AI 信贷风控大脑</a:t>
+            </a:r>
+            <a:endParaRPr lang="en-US" sz="900" dirty="0"/>
+          </a:p>
+        </p:txBody>
+      </p:sp>
+      <p:sp>
+        <p:nvSpPr>
+          <p:cNvPr id="5" name="Text 3"/>
+          <p:cNvSpPr/>
+          <p:nvPr/>
+        </p:nvSpPr>
+        <p:spPr>
+          <a:xfrm>
+            <a:off x="11247120" y="6400800"/>
+            <a:ext cx="457200" cy="274320"/>
+          </a:xfrm>
+          <a:prstGeom prst="rect">
+            <a:avLst/>
+          </a:prstGeom>
+          <a:noFill/>
+          <a:ln/>
+        </p:spPr>
+        <p:txBody>
+          <a:bodyPr wrap="square" lIns="0" tIns="0" rIns="0" bIns="0" rtlCol="0" anchor="ctr"/>
+          <a:lstStyle/>
+          <a:p>
+            <a:pPr algn="r" indent="0" marL="0">
+              <a:buNone/>
+            </a:pPr>
+            <a:r>
+              <a:rPr lang="en-US" sz="900" dirty="0">
+                <a:solidFill>
+                  <a:srgbClr val="64748B"/>
+                </a:solidFill>
+              </a:rPr>
+              <a:t>13 / 14</a:t>
+            </a:r>
+            <a:endParaRPr lang="en-US" sz="900" dirty="0"/>
+          </a:p>
+        </p:txBody>
+      </p:sp>
+      <p:sp>
+        <p:nvSpPr>
+          <p:cNvPr id="6" name="Text 4"/>
+          <p:cNvSpPr/>
+          <p:nvPr/>
+        </p:nvSpPr>
+        <p:spPr>
+          <a:xfrm>
+            <a:off x="548640" y="1097280"/>
+            <a:ext cx="5486400" cy="365760"/>
+          </a:xfrm>
+          <a:prstGeom prst="rect">
+            <a:avLst/>
+          </a:prstGeom>
+          <a:noFill/>
+          <a:ln/>
+        </p:spPr>
+        <p:txBody>
+          <a:bodyPr wrap="square" lIns="0" tIns="0" rIns="0" bIns="0" rtlCol="0" anchor="ctr"/>
+          <a:lstStyle/>
+          <a:p>
+            <a:pPr indent="0" marL="0">
+              <a:buNone/>
+            </a:pPr>
+            <a:r>
+              <a:rPr lang="en-US" sz="1800" b="1" dirty="0">
+                <a:solidFill>
+                  <a:srgbClr val="21295C"/>
+                </a:solidFill>
+                <a:latin typeface="Calibri" pitchFamily="34" charset="0"/>
+                <a:ea typeface="Calibri" pitchFamily="34" charset="-122"/>
+                <a:cs typeface="Calibri" pitchFamily="34" charset="-120"/>
+              </a:rPr>
+              <a:t>已知短板（主动说明）</a:t>
+            </a:r>
+            <a:endParaRPr lang="en-US" sz="1800" dirty="0"/>
+          </a:p>
+        </p:txBody>
+      </p:sp>
+      <p:sp>
+        <p:nvSpPr>
+          <p:cNvPr id="7" name="Shape 5"/>
+          <p:cNvSpPr/>
+          <p:nvPr/>
+        </p:nvSpPr>
+        <p:spPr>
+          <a:xfrm>
+            <a:off x="548640" y="1554480"/>
+            <a:ext cx="5303520" cy="548640"/>
+          </a:xfrm>
+          <a:prstGeom prst="rect">
+            <a:avLst/>
+          </a:prstGeom>
+          <a:solidFill>
+            <a:srgbClr val="FFFFFF"/>
+          </a:solidFill>
+          <a:ln w="12700">
+            <a:solidFill>
+              <a:srgbClr val="E2E8F0"/>
+            </a:solidFill>
+            <a:prstDash val="solid"/>
+          </a:ln>
+        </p:spPr>
+      </p:sp>
+      <p:sp>
+        <p:nvSpPr>
+          <p:cNvPr id="8" name="Text 6"/>
+          <p:cNvSpPr/>
+          <p:nvPr/>
+        </p:nvSpPr>
+        <p:spPr>
+          <a:xfrm>
+            <a:off x="731520" y="1554480"/>
+            <a:ext cx="2743200" cy="548640"/>
+          </a:xfrm>
+          <a:prstGeom prst="rect">
+            <a:avLst/>
+          </a:prstGeom>
+          <a:noFill/>
+          <a:ln/>
+        </p:spPr>
+        <p:txBody>
+          <a:bodyPr wrap="square" lIns="0" tIns="0" rIns="0" bIns="0" rtlCol="0" anchor="ctr"/>
+          <a:lstStyle/>
+          <a:p>
+            <a:pPr indent="0" marL="0">
+              <a:buNone/>
+            </a:pPr>
+            <a:r>
+              <a:rPr lang="en-US" sz="1300" dirty="0">
+                <a:solidFill>
+                  <a:srgbClr val="EF4444"/>
+                </a:solidFill>
+                <a:latin typeface="Calibri" pitchFamily="34" charset="0"/>
+                <a:ea typeface="Calibri" pitchFamily="34" charset="-122"/>
+                <a:cs typeface="Calibri" pitchFamily="34" charset="-120"/>
+              </a:rPr>
+              <a:t>数据规模 15 万行</a:t>
+            </a:r>
+            <a:endParaRPr lang="en-US" sz="1300" dirty="0"/>
+          </a:p>
+        </p:txBody>
+      </p:sp>
+      <p:sp>
+        <p:nvSpPr>
+          <p:cNvPr id="9" name="Text 7"/>
+          <p:cNvSpPr/>
+          <p:nvPr/>
+        </p:nvSpPr>
+        <p:spPr>
+          <a:xfrm>
+            <a:off x="3474720" y="1554480"/>
+            <a:ext cx="2286000" cy="548640"/>
+          </a:xfrm>
+          <a:prstGeom prst="rect">
+            <a:avLst/>
+          </a:prstGeom>
+          <a:noFill/>
+          <a:ln/>
+        </p:spPr>
+        <p:txBody>
+          <a:bodyPr wrap="square" lIns="0" tIns="0" rIns="0" bIns="0" rtlCol="0" anchor="ctr"/>
+          <a:lstStyle/>
+          <a:p>
+            <a:pPr indent="0" marL="0">
+              <a:buNone/>
+            </a:pPr>
+            <a:r>
+              <a:rPr lang="en-US" sz="1300" dirty="0">
+                <a:solidFill>
+                  <a:srgbClr val="10B981"/>
+                </a:solidFill>
+                <a:latin typeface="Calibri" pitchFamily="34" charset="0"/>
+                <a:ea typeface="Calibri" pitchFamily="34" charset="-122"/>
+                <a:cs typeface="Calibri" pitchFamily="34" charset="-120"/>
+              </a:rPr>
+              <a:t>→ 接 2007-2019 全量</a:t>
+            </a:r>
+            <a:endParaRPr lang="en-US" sz="1300" dirty="0"/>
+          </a:p>
+        </p:txBody>
+      </p:sp>
+      <p:sp>
+        <p:nvSpPr>
+          <p:cNvPr id="10" name="Shape 8"/>
+          <p:cNvSpPr/>
+          <p:nvPr/>
+        </p:nvSpPr>
+        <p:spPr>
+          <a:xfrm>
+            <a:off x="548640" y="2194560"/>
+            <a:ext cx="5303520" cy="548640"/>
+          </a:xfrm>
+          <a:prstGeom prst="rect">
+            <a:avLst/>
+          </a:prstGeom>
+          <a:solidFill>
+            <a:srgbClr val="FFFFFF"/>
+          </a:solidFill>
+          <a:ln w="12700">
+            <a:solidFill>
+              <a:srgbClr val="E2E8F0"/>
+            </a:solidFill>
+            <a:prstDash val="solid"/>
+          </a:ln>
+        </p:spPr>
+      </p:sp>
+      <p:sp>
+        <p:nvSpPr>
+          <p:cNvPr id="11" name="Text 9"/>
+          <p:cNvSpPr/>
+          <p:nvPr/>
+        </p:nvSpPr>
+        <p:spPr>
+          <a:xfrm>
+            <a:off x="731520" y="2194560"/>
+            <a:ext cx="2743200" cy="548640"/>
+          </a:xfrm>
+          <a:prstGeom prst="rect">
+            <a:avLst/>
+          </a:prstGeom>
+          <a:noFill/>
+          <a:ln/>
+        </p:spPr>
+        <p:txBody>
+          <a:bodyPr wrap="square" lIns="0" tIns="0" rIns="0" bIns="0" rtlCol="0" anchor="ctr"/>
+          <a:lstStyle/>
+          <a:p>
+            <a:pPr indent="0" marL="0">
+              <a:buNone/>
+            </a:pPr>
+            <a:r>
+              <a:rPr lang="en-US" sz="1300" dirty="0">
+                <a:solidFill>
+                  <a:srgbClr val="EF4444"/>
+                </a:solidFill>
+                <a:latin typeface="Calibri" pitchFamily="34" charset="0"/>
+                <a:ea typeface="Calibri" pitchFamily="34" charset="-122"/>
+                <a:cs typeface="Calibri" pitchFamily="34" charset="-120"/>
+              </a:rPr>
+              <a:t>特征衍生深度不足</a:t>
+            </a:r>
+            <a:endParaRPr lang="en-US" sz="1300" dirty="0"/>
+          </a:p>
+        </p:txBody>
+      </p:sp>
+      <p:sp>
+        <p:nvSpPr>
+          <p:cNvPr id="12" name="Text 10"/>
+          <p:cNvSpPr/>
+          <p:nvPr/>
+        </p:nvSpPr>
+        <p:spPr>
+          <a:xfrm>
+            <a:off x="3474720" y="2194560"/>
+            <a:ext cx="2286000" cy="548640"/>
+          </a:xfrm>
+          <a:prstGeom prst="rect">
+            <a:avLst/>
+          </a:prstGeom>
+          <a:noFill/>
+          <a:ln/>
+        </p:spPr>
+        <p:txBody>
+          <a:bodyPr wrap="square" lIns="0" tIns="0" rIns="0" bIns="0" rtlCol="0" anchor="ctr"/>
+          <a:lstStyle/>
+          <a:p>
+            <a:pPr indent="0" marL="0">
+              <a:buNone/>
+            </a:pPr>
+            <a:r>
+              <a:rPr lang="en-US" sz="1300" dirty="0">
+                <a:solidFill>
+                  <a:srgbClr val="10B981"/>
+                </a:solidFill>
+                <a:latin typeface="Calibri" pitchFamily="34" charset="0"/>
+                <a:ea typeface="Calibri" pitchFamily="34" charset="-122"/>
+                <a:cs typeface="Calibri" pitchFamily="34" charset="-120"/>
+              </a:rPr>
+              <a:t>→ 加衍生特征工程层</a:t>
+            </a:r>
+            <a:endParaRPr lang="en-US" sz="1300" dirty="0"/>
+          </a:p>
+        </p:txBody>
+      </p:sp>
+      <p:sp>
+        <p:nvSpPr>
+          <p:cNvPr id="13" name="Shape 11"/>
+          <p:cNvSpPr/>
+          <p:nvPr/>
+        </p:nvSpPr>
+        <p:spPr>
+          <a:xfrm>
+            <a:off x="548640" y="2834640"/>
+            <a:ext cx="5303520" cy="548640"/>
+          </a:xfrm>
+          <a:prstGeom prst="rect">
+            <a:avLst/>
+          </a:prstGeom>
+          <a:solidFill>
+            <a:srgbClr val="FFFFFF"/>
+          </a:solidFill>
+          <a:ln w="12700">
+            <a:solidFill>
+              <a:srgbClr val="E2E8F0"/>
+            </a:solidFill>
+            <a:prstDash val="solid"/>
+          </a:ln>
+        </p:spPr>
+      </p:sp>
+      <p:sp>
+        <p:nvSpPr>
+          <p:cNvPr id="14" name="Text 12"/>
+          <p:cNvSpPr/>
+          <p:nvPr/>
+        </p:nvSpPr>
+        <p:spPr>
+          <a:xfrm>
+            <a:off x="731520" y="2834640"/>
+            <a:ext cx="2743200" cy="548640"/>
+          </a:xfrm>
+          <a:prstGeom prst="rect">
+            <a:avLst/>
+          </a:prstGeom>
+          <a:noFill/>
+          <a:ln/>
+        </p:spPr>
+        <p:txBody>
+          <a:bodyPr wrap="square" lIns="0" tIns="0" rIns="0" bIns="0" rtlCol="0" anchor="ctr"/>
+          <a:lstStyle/>
+          <a:p>
+            <a:pPr indent="0" marL="0">
+              <a:buNone/>
+            </a:pPr>
+            <a:r>
+              <a:rPr lang="en-US" sz="1300" dirty="0">
+                <a:solidFill>
+                  <a:srgbClr val="EF4444"/>
+                </a:solidFill>
+                <a:latin typeface="Calibri" pitchFamily="34" charset="0"/>
+                <a:ea typeface="Calibri" pitchFamily="34" charset="-122"/>
+                <a:cs typeface="Calibri" pitchFamily="34" charset="-120"/>
+              </a:rPr>
+              <a:t>无模型校准</a:t>
+            </a:r>
+            <a:endParaRPr lang="en-US" sz="1300" dirty="0"/>
+          </a:p>
+        </p:txBody>
+      </p:sp>
+      <p:sp>
+        <p:nvSpPr>
+          <p:cNvPr id="15" name="Text 13"/>
+          <p:cNvSpPr/>
+          <p:nvPr/>
+        </p:nvSpPr>
+        <p:spPr>
+          <a:xfrm>
+            <a:off x="3474720" y="2834640"/>
+            <a:ext cx="2286000" cy="548640"/>
+          </a:xfrm>
+          <a:prstGeom prst="rect">
+            <a:avLst/>
+          </a:prstGeom>
+          <a:noFill/>
+          <a:ln/>
+        </p:spPr>
+        <p:txBody>
+          <a:bodyPr wrap="square" lIns="0" tIns="0" rIns="0" bIns="0" rtlCol="0" anchor="ctr"/>
+          <a:lstStyle/>
+          <a:p>
+            <a:pPr indent="0" marL="0">
+              <a:buNone/>
+            </a:pPr>
+            <a:r>
+              <a:rPr lang="en-US" sz="1300" dirty="0">
+                <a:solidFill>
+                  <a:srgbClr val="10B981"/>
+                </a:solidFill>
+                <a:latin typeface="Calibri" pitchFamily="34" charset="0"/>
+                <a:ea typeface="Calibri" pitchFamily="34" charset="-122"/>
+                <a:cs typeface="Calibri" pitchFamily="34" charset="-120"/>
+              </a:rPr>
+              <a:t>→ Isotonic / Platt</a:t>
+            </a:r>
+            <a:endParaRPr lang="en-US" sz="1300" dirty="0"/>
+          </a:p>
+        </p:txBody>
+      </p:sp>
+      <p:sp>
+        <p:nvSpPr>
+          <p:cNvPr id="16" name="Shape 14"/>
+          <p:cNvSpPr/>
+          <p:nvPr/>
+        </p:nvSpPr>
+        <p:spPr>
+          <a:xfrm>
+            <a:off x="548640" y="3474720"/>
+            <a:ext cx="5303520" cy="548640"/>
+          </a:xfrm>
+          <a:prstGeom prst="rect">
+            <a:avLst/>
+          </a:prstGeom>
+          <a:solidFill>
+            <a:srgbClr val="FFFFFF"/>
+          </a:solidFill>
+          <a:ln w="12700">
+            <a:solidFill>
+              <a:srgbClr val="E2E8F0"/>
+            </a:solidFill>
+            <a:prstDash val="solid"/>
+          </a:ln>
+        </p:spPr>
+      </p:sp>
+      <p:sp>
+        <p:nvSpPr>
+          <p:cNvPr id="17" name="Text 15"/>
+          <p:cNvSpPr/>
+          <p:nvPr/>
+        </p:nvSpPr>
+        <p:spPr>
+          <a:xfrm>
+            <a:off x="731520" y="3474720"/>
+            <a:ext cx="2743200" cy="548640"/>
+          </a:xfrm>
+          <a:prstGeom prst="rect">
+            <a:avLst/>
+          </a:prstGeom>
+          <a:noFill/>
+          <a:ln/>
+        </p:spPr>
+        <p:txBody>
+          <a:bodyPr wrap="square" lIns="0" tIns="0" rIns="0" bIns="0" rtlCol="0" anchor="ctr"/>
+          <a:lstStyle/>
+          <a:p>
+            <a:pPr indent="0" marL="0">
+              <a:buNone/>
+            </a:pPr>
+            <a:r>
+              <a:rPr lang="en-US" sz="1300" dirty="0">
+                <a:solidFill>
+                  <a:srgbClr val="EF4444"/>
+                </a:solidFill>
+                <a:latin typeface="Calibri" pitchFamily="34" charset="0"/>
+                <a:ea typeface="Calibri" pitchFamily="34" charset="-122"/>
+                <a:cs typeface="Calibri" pitchFamily="34" charset="-120"/>
+              </a:rPr>
+              <a:t>仅文本对话</a:t>
+            </a:r>
+            <a:endParaRPr lang="en-US" sz="1300" dirty="0"/>
+          </a:p>
+        </p:txBody>
+      </p:sp>
+      <p:sp>
+        <p:nvSpPr>
+          <p:cNvPr id="18" name="Text 16"/>
+          <p:cNvSpPr/>
+          <p:nvPr/>
+        </p:nvSpPr>
+        <p:spPr>
+          <a:xfrm>
+            <a:off x="3474720" y="3474720"/>
+            <a:ext cx="2286000" cy="548640"/>
+          </a:xfrm>
+          <a:prstGeom prst="rect">
+            <a:avLst/>
+          </a:prstGeom>
+          <a:noFill/>
+          <a:ln/>
+        </p:spPr>
+        <p:txBody>
+          <a:bodyPr wrap="square" lIns="0" tIns="0" rIns="0" bIns="0" rtlCol="0" anchor="ctr"/>
+          <a:lstStyle/>
+          <a:p>
+            <a:pPr indent="0" marL="0">
+              <a:buNone/>
+            </a:pPr>
+            <a:r>
+              <a:rPr lang="en-US" sz="1300" dirty="0">
+                <a:solidFill>
+                  <a:srgbClr val="10B981"/>
+                </a:solidFill>
+                <a:latin typeface="Calibri" pitchFamily="34" charset="0"/>
+                <a:ea typeface="Calibri" pitchFamily="34" charset="-122"/>
+                <a:cs typeface="Calibri" pitchFamily="34" charset="-120"/>
+              </a:rPr>
+              <a:t>→ 加 OCR</a:t>
+            </a:r>
+            <a:endParaRPr lang="en-US" sz="1300" dirty="0"/>
+          </a:p>
+        </p:txBody>
+      </p:sp>
+      <p:sp>
+        <p:nvSpPr>
+          <p:cNvPr id="19" name="Text 17"/>
+          <p:cNvSpPr/>
+          <p:nvPr/>
+        </p:nvSpPr>
+        <p:spPr>
+          <a:xfrm>
+            <a:off x="6400800" y="1097280"/>
+            <a:ext cx="5029200" cy="365760"/>
+          </a:xfrm>
+          <a:prstGeom prst="rect">
+            <a:avLst/>
+          </a:prstGeom>
+          <a:noFill/>
+          <a:ln/>
+        </p:spPr>
+        <p:txBody>
+          <a:bodyPr wrap="square" lIns="0" tIns="0" rIns="0" bIns="0" rtlCol="0" anchor="ctr"/>
+          <a:lstStyle/>
+          <a:p>
+            <a:pPr indent="0" marL="0">
+              <a:buNone/>
+            </a:pPr>
+            <a:r>
+              <a:rPr lang="en-US" sz="1800" b="1" dirty="0">
+                <a:solidFill>
+                  <a:srgbClr val="21295C"/>
+                </a:solidFill>
+                <a:latin typeface="Calibri" pitchFamily="34" charset="0"/>
+                <a:ea typeface="Calibri" pitchFamily="34" charset="-122"/>
+                <a:cs typeface="Calibri" pitchFamily="34" charset="-120"/>
+              </a:rPr>
+              <a:t>Ask</a:t>
+            </a:r>
+            <a:endParaRPr lang="en-US" sz="1800" dirty="0"/>
+          </a:p>
+        </p:txBody>
+      </p:sp>
+      <p:sp>
+        <p:nvSpPr>
+          <p:cNvPr id="20" name="Shape 18"/>
+          <p:cNvSpPr/>
+          <p:nvPr/>
+        </p:nvSpPr>
+        <p:spPr>
+          <a:xfrm>
+            <a:off x="6400800" y="1554480"/>
+            <a:ext cx="5212080" cy="777240"/>
+          </a:xfrm>
+          <a:prstGeom prst="rect">
+            <a:avLst/>
+          </a:prstGeom>
+          <a:solidFill>
+            <a:srgbClr val="21295C"/>
+          </a:solidFill>
+          <a:ln/>
+        </p:spPr>
+      </p:sp>
+      <p:sp>
+        <p:nvSpPr>
+          <p:cNvPr id="21" name="Text 19"/>
+          <p:cNvSpPr/>
+          <p:nvPr/>
+        </p:nvSpPr>
+        <p:spPr>
+          <a:xfrm>
+            <a:off x="6583680" y="1554480"/>
+            <a:ext cx="4846320" cy="777240"/>
+          </a:xfrm>
+          <a:prstGeom prst="rect">
+            <a:avLst/>
+          </a:prstGeom>
+          <a:noFill/>
+          <a:ln/>
+        </p:spPr>
+        <p:txBody>
+          <a:bodyPr wrap="square" lIns="0" tIns="0" rIns="0" bIns="0" rtlCol="0" anchor="ctr"/>
+          <a:lstStyle/>
+          <a:p>
+            <a:pPr indent="0" marL="0">
+              <a:buNone/>
+            </a:pPr>
+            <a:r>
+              <a:rPr lang="en-US" sz="1400" dirty="0">
+                <a:solidFill>
+                  <a:srgbClr val="FFFFFF"/>
+                </a:solidFill>
+                <a:latin typeface="Calibri" pitchFamily="34" charset="0"/>
+                <a:ea typeface="Calibri" pitchFamily="34" charset="-122"/>
+                <a:cs typeface="Calibri" pitchFamily="34" charset="-120"/>
+              </a:rPr>
+              <a:t>1. Agent × 风控 的产品化路径，特别是合规边界设计</a:t>
+            </a:r>
+            <a:endParaRPr lang="en-US" sz="1400" dirty="0"/>
+          </a:p>
+        </p:txBody>
+      </p:sp>
+      <p:sp>
+        <p:nvSpPr>
+          <p:cNvPr id="22" name="Shape 20"/>
+          <p:cNvSpPr/>
+          <p:nvPr/>
+        </p:nvSpPr>
+        <p:spPr>
+          <a:xfrm>
+            <a:off x="6400800" y="2468880"/>
+            <a:ext cx="5212080" cy="777240"/>
+          </a:xfrm>
+          <a:prstGeom prst="rect">
+            <a:avLst/>
+          </a:prstGeom>
+          <a:solidFill>
+            <a:srgbClr val="21295C"/>
+          </a:solidFill>
+          <a:ln/>
+        </p:spPr>
+      </p:sp>
+      <p:sp>
+        <p:nvSpPr>
+          <p:cNvPr id="23" name="Text 21"/>
+          <p:cNvSpPr/>
+          <p:nvPr/>
+        </p:nvSpPr>
+        <p:spPr>
+          <a:xfrm>
+            <a:off x="6583680" y="2468880"/>
+            <a:ext cx="4846320" cy="777240"/>
+          </a:xfrm>
+          <a:prstGeom prst="rect">
+            <a:avLst/>
+          </a:prstGeom>
+          <a:noFill/>
+          <a:ln/>
+        </p:spPr>
+        <p:txBody>
+          <a:bodyPr wrap="square" lIns="0" tIns="0" rIns="0" bIns="0" rtlCol="0" anchor="ctr"/>
+          <a:lstStyle/>
+          <a:p>
+            <a:pPr indent="0" marL="0">
+              <a:buNone/>
+            </a:pPr>
+            <a:r>
+              <a:rPr lang="en-US" sz="1400" dirty="0">
+                <a:solidFill>
+                  <a:srgbClr val="FFFFFF"/>
+                </a:solidFill>
+                <a:latin typeface="Calibri" pitchFamily="34" charset="0"/>
+                <a:ea typeface="Calibri" pitchFamily="34" charset="-122"/>
+                <a:cs typeface="Calibri" pitchFamily="34" charset="-120"/>
+              </a:rPr>
+              <a:t>2. IV/WoE+PSI 方法论在生产环境的工程化最佳实践</a:t>
+            </a:r>
+            <a:endParaRPr lang="en-US" sz="1400" dirty="0"/>
+          </a:p>
+        </p:txBody>
+      </p:sp>
+      <p:sp>
+        <p:nvSpPr>
+          <p:cNvPr id="24" name="Shape 22"/>
+          <p:cNvSpPr/>
+          <p:nvPr/>
+        </p:nvSpPr>
+        <p:spPr>
+          <a:xfrm>
+            <a:off x="6400800" y="3383280"/>
+            <a:ext cx="5212080" cy="777240"/>
+          </a:xfrm>
+          <a:prstGeom prst="rect">
+            <a:avLst/>
+          </a:prstGeom>
+          <a:solidFill>
+            <a:srgbClr val="21295C"/>
+          </a:solidFill>
+          <a:ln/>
+        </p:spPr>
+      </p:sp>
+      <p:sp>
+        <p:nvSpPr>
+          <p:cNvPr id="25" name="Text 23"/>
+          <p:cNvSpPr/>
+          <p:nvPr/>
+        </p:nvSpPr>
+        <p:spPr>
+          <a:xfrm>
+            <a:off x="6583680" y="3383280"/>
+            <a:ext cx="4846320" cy="777240"/>
+          </a:xfrm>
+          <a:prstGeom prst="rect">
+            <a:avLst/>
+          </a:prstGeom>
+          <a:noFill/>
+          <a:ln/>
+        </p:spPr>
+        <p:txBody>
+          <a:bodyPr wrap="square" lIns="0" tIns="0" rIns="0" bIns="0" rtlCol="0" anchor="ctr"/>
+          <a:lstStyle/>
+          <a:p>
+            <a:pPr indent="0" marL="0">
+              <a:buNone/>
+            </a:pPr>
+            <a:r>
+              <a:rPr lang="en-US" sz="1400" dirty="0">
+                <a:solidFill>
+                  <a:srgbClr val="FFFFFF"/>
+                </a:solidFill>
+                <a:latin typeface="Calibri" pitchFamily="34" charset="0"/>
+                <a:ea typeface="Calibri" pitchFamily="34" charset="-122"/>
+                <a:cs typeface="Calibri" pitchFamily="34" charset="-120"/>
+              </a:rPr>
+              <a:t>3. 多模态采集（OCR/语音）的落地经验</a:t>
+            </a:r>
+            <a:endParaRPr lang="en-US" sz="1400" dirty="0"/>
+          </a:p>
+        </p:txBody>
+      </p:sp>
+    </p:spTree>
+  </p:cSld>
+  <p:clrMapOvr>
+    <a:masterClrMapping/>
+  </p:clrMapOvr>
+</p:sld>
+</file>
+
+<file path=ppt/slides/slide14.xml><?xml version="1.0" encoding="utf-8"?>
+<p:sld xmlns:a="http://schemas.openxmlformats.org/drawingml/2006/main" xmlns:r="http://schemas.openxmlformats.org/officeDocument/2006/relationships" xmlns:p="http://schemas.openxmlformats.org/presentationml/2006/main">
+  <p:cSld name="Slide 14">
     <p:bg>
       <p:bgPr>
         <a:solidFill>
@@ -5381,7 +6187,7 @@
                   <a:srgbClr val="64748B"/>
                 </a:solidFill>
               </a:rPr>
-              <a:t>2 / 13</a:t>
+              <a:t>2 / 14</a:t>
             </a:r>
             <a:endParaRPr lang="en-US" sz="900" dirty="0"/>
           </a:p>
@@ -6068,7 +6874,7 @@
                   <a:srgbClr val="64748B"/>
                 </a:solidFill>
               </a:rPr>
-              <a:t>3 / 13</a:t>
+              <a:t>3 / 14</a:t>
             </a:r>
             <a:endParaRPr lang="en-US" sz="900" dirty="0"/>
           </a:p>
@@ -6995,7 +7801,7 @@
                   <a:srgbClr val="64748B"/>
                 </a:solidFill>
               </a:rPr>
-              <a:t>4 / 13</a:t>
+              <a:t>4 / 14</a:t>
             </a:r>
             <a:endParaRPr lang="en-US" sz="900" dirty="0"/>
           </a:p>
@@ -7884,7 +8690,7 @@
                   <a:srgbClr val="64748B"/>
                 </a:solidFill>
               </a:rPr>
-              <a:t>5 / 13</a:t>
+              <a:t>5 / 14</a:t>
             </a:r>
             <a:endParaRPr lang="en-US" sz="900" dirty="0"/>
           </a:p>
@@ -9149,7 +9955,7 @@
                   <a:srgbClr val="64748B"/>
                 </a:solidFill>
               </a:rPr>
-              <a:t>6 / 13</a:t>
+              <a:t>6 / 14</a:t>
             </a:r>
             <a:endParaRPr lang="en-US" sz="900" dirty="0"/>
           </a:p>
@@ -9188,7 +9994,7 @@
                 <a:ea typeface="Calibri" pitchFamily="34" charset="-122"/>
                 <a:cs typeface="Calibri" pitchFamily="34" charset="-120"/>
               </a:rPr>
-              <a:t>在 LendingClub 15 万条数据上对比三种方法论</a:t>
+              <a:t>在 LendingClub 15 万条数据上对比三种方法论 · A/B/C AUC、特征数、泄露风险、PSI 稳定性</a:t>
             </a:r>
             <a:endParaRPr lang="en-US" sz="1400" dirty="0"/>
           </a:p>
@@ -10482,7 +11288,7 @@
         </p:blipFill>
         <p:spPr>
           <a:xfrm>
-            <a:off x="1371600" y="4206240"/>
+            <a:off x="1371600" y="4297680"/>
             <a:ext cx="9418320" cy="2011680"/>
           </a:xfrm>
           <a:prstGeom prst="rect">
@@ -10650,7 +11456,7 @@
                   <a:srgbClr val="64748B"/>
                 </a:solidFill>
               </a:rPr>
-              <a:t>7 / 13</a:t>
+              <a:t>7 / 14</a:t>
             </a:r>
             <a:endParaRPr lang="en-US" sz="900" dirty="0"/>
           </a:p>
@@ -11248,7 +12054,7 @@
                 <a:ea typeface="Georgia" pitchFamily="34" charset="-122"/>
                 <a:cs typeface="Georgia" pitchFamily="34" charset="-120"/>
               </a:rPr>
-              <a:t>可解释性：SHAP Top3</a:t>
+              <a:t>违约预测模型深度</a:t>
             </a:r>
             <a:endParaRPr lang="en-US" sz="2800" dirty="0"/>
           </a:p>
@@ -11323,45 +12129,22 @@
                   <a:srgbClr val="64748B"/>
                 </a:solidFill>
               </a:rPr>
-              <a:t>8 / 13</a:t>
+              <a:t>8 / 14</a:t>
             </a:r>
             <a:endParaRPr lang="en-US" sz="900" dirty="0"/>
           </a:p>
         </p:txBody>
       </p:sp>
-      <p:pic>
-        <p:nvPicPr>
-          <p:cNvPr id="6" name="Image 0" descr="/Users/yolanda/NanTe2025/金融AIagent暑假集训/模块四/CreditMind/experiments/results/shap_top15.png">    </p:cNvPr>
-          <p:cNvPicPr>
-            <a:picLocks noChangeAspect="1"/>
-          </p:cNvPicPr>
-          <p:nvPr/>
-        </p:nvPicPr>
-        <p:blipFill>
-          <a:blip r:embed="rId1"/>
-          <a:srcRect l="0" r="0" t="0" b="0"/>
-          <a:stretch/>
-        </p:blipFill>
-        <p:spPr>
-          <a:xfrm>
-            <a:off x="548640" y="1188720"/>
-            <a:ext cx="6858000" cy="4754880"/>
-          </a:xfrm>
-          <a:prstGeom prst="rect">
-            <a:avLst/>
-          </a:prstGeom>
-        </p:spPr>
-      </p:pic>
-      <p:sp>
-        <p:nvSpPr>
-          <p:cNvPr id="7" name="Shape 4"/>
-          <p:cNvSpPr/>
-          <p:nvPr/>
-        </p:nvSpPr>
-        <p:spPr>
-          <a:xfrm>
-            <a:off x="7772400" y="1188720"/>
-            <a:ext cx="3840480" cy="4754880"/>
+      <p:sp>
+        <p:nvSpPr>
+          <p:cNvPr id="6" name="Shape 4"/>
+          <p:cNvSpPr/>
+          <p:nvPr/>
+        </p:nvSpPr>
+        <p:spPr>
+          <a:xfrm>
+            <a:off x="457200" y="1097280"/>
+            <a:ext cx="5669280" cy="5120640"/>
           </a:xfrm>
           <a:prstGeom prst="rect">
             <a:avLst/>
@@ -11386,30 +12169,50 @@
       </p:sp>
       <p:sp>
         <p:nvSpPr>
-          <p:cNvPr id="8" name="Text 5"/>
-          <p:cNvSpPr/>
-          <p:nvPr/>
-        </p:nvSpPr>
-        <p:spPr>
-          <a:xfrm>
-            <a:off x="7955280" y="1371600"/>
-            <a:ext cx="3474720" cy="365760"/>
-          </a:xfrm>
-          <a:prstGeom prst="rect">
-            <a:avLst/>
-          </a:prstGeom>
-          <a:noFill/>
-          <a:ln/>
-        </p:spPr>
-        <p:txBody>
-          <a:bodyPr wrap="square" lIns="0" tIns="0" rIns="0" bIns="0" rtlCol="0" anchor="ctr"/>
-          <a:lstStyle/>
-          <a:p>
-            <a:pPr indent="0" marL="0">
-              <a:buNone/>
-            </a:pPr>
-            <a:r>
-              <a:rPr lang="en-US" sz="1600" b="1" dirty="0">
+          <p:cNvPr id="7" name="Shape 5"/>
+          <p:cNvSpPr/>
+          <p:nvPr/>
+        </p:nvSpPr>
+        <p:spPr>
+          <a:xfrm>
+            <a:off x="457200" y="1097280"/>
+            <a:ext cx="91440" cy="5120640"/>
+          </a:xfrm>
+          <a:prstGeom prst="rect">
+            <a:avLst/>
+          </a:prstGeom>
+          <a:solidFill>
+            <a:srgbClr val="14B8A6"/>
+          </a:solidFill>
+          <a:ln/>
+        </p:spPr>
+      </p:sp>
+      <p:sp>
+        <p:nvSpPr>
+          <p:cNvPr id="8" name="Text 6"/>
+          <p:cNvSpPr/>
+          <p:nvPr/>
+        </p:nvSpPr>
+        <p:spPr>
+          <a:xfrm>
+            <a:off x="685800" y="1234440"/>
+            <a:ext cx="5394960" cy="365760"/>
+          </a:xfrm>
+          <a:prstGeom prst="rect">
+            <a:avLst/>
+          </a:prstGeom>
+          <a:noFill/>
+          <a:ln/>
+        </p:spPr>
+        <p:txBody>
+          <a:bodyPr wrap="square" lIns="0" tIns="0" rIns="0" bIns="0" rtlCol="0" anchor="ctr"/>
+          <a:lstStyle/>
+          <a:p>
+            <a:pPr indent="0" marL="0">
+              <a:buNone/>
+            </a:pPr>
+            <a:r>
+              <a:rPr lang="en-US" sz="1800" b="1" dirty="0">
                 <a:solidFill>
                   <a:srgbClr val="21295C"/>
                 </a:solidFill>
@@ -11417,22 +12220,698 @@
                 <a:ea typeface="Calibri" pitchFamily="34" charset="-122"/>
                 <a:cs typeface="Calibri" pitchFamily="34" charset="-120"/>
               </a:rPr>
-              <a:t>示例解读</a:t>
-            </a:r>
-            <a:endParaRPr lang="en-US" sz="1600" dirty="0"/>
-          </a:p>
-        </p:txBody>
-      </p:sp>
-      <p:sp>
-        <p:nvSpPr>
-          <p:cNvPr id="9" name="Text 6"/>
-          <p:cNvSpPr/>
-          <p:nvPr/>
-        </p:nvSpPr>
-        <p:spPr>
-          <a:xfrm>
-            <a:off x="7955280" y="1828800"/>
-            <a:ext cx="3474720" cy="3931920"/>
+              <a:t>方法论</a:t>
+            </a:r>
+            <a:endParaRPr lang="en-US" sz="1800" dirty="0"/>
+          </a:p>
+        </p:txBody>
+      </p:sp>
+      <p:sp>
+        <p:nvSpPr>
+          <p:cNvPr id="9" name="Text 7"/>
+          <p:cNvSpPr/>
+          <p:nvPr/>
+        </p:nvSpPr>
+        <p:spPr>
+          <a:xfrm>
+            <a:off x="731520" y="1691640"/>
+            <a:ext cx="457200" cy="640080"/>
+          </a:xfrm>
+          <a:prstGeom prst="rect">
+            <a:avLst/>
+          </a:prstGeom>
+          <a:noFill/>
+          <a:ln/>
+        </p:spPr>
+        <p:txBody>
+          <a:bodyPr wrap="square" lIns="0" tIns="0" rIns="0" bIns="0" rtlCol="0" anchor="ctr"/>
+          <a:lstStyle/>
+          <a:p>
+            <a:pPr indent="0" marL="0">
+              <a:buNone/>
+            </a:pPr>
+            <a:r>
+              <a:rPr lang="en-US" sz="2400" b="1" dirty="0">
+                <a:solidFill>
+                  <a:srgbClr val="14B8A6"/>
+                </a:solidFill>
+                <a:latin typeface="Georgia" pitchFamily="34" charset="0"/>
+                <a:ea typeface="Georgia" pitchFamily="34" charset="-122"/>
+                <a:cs typeface="Georgia" pitchFamily="34" charset="-120"/>
+              </a:rPr>
+              <a:t>①</a:t>
+            </a:r>
+            <a:endParaRPr lang="en-US" sz="2400" dirty="0"/>
+          </a:p>
+        </p:txBody>
+      </p:sp>
+      <p:sp>
+        <p:nvSpPr>
+          <p:cNvPr id="10" name="Text 8"/>
+          <p:cNvSpPr/>
+          <p:nvPr/>
+        </p:nvSpPr>
+        <p:spPr>
+          <a:xfrm>
+            <a:off x="1280160" y="1691640"/>
+            <a:ext cx="4754880" cy="320040"/>
+          </a:xfrm>
+          <a:prstGeom prst="rect">
+            <a:avLst/>
+          </a:prstGeom>
+          <a:noFill/>
+          <a:ln/>
+        </p:spPr>
+        <p:txBody>
+          <a:bodyPr wrap="square" lIns="0" tIns="0" rIns="0" bIns="0" rtlCol="0" anchor="ctr"/>
+          <a:lstStyle/>
+          <a:p>
+            <a:pPr indent="0" marL="0">
+              <a:buNone/>
+            </a:pPr>
+            <a:r>
+              <a:rPr lang="en-US" sz="1500" b="1" dirty="0">
+                <a:solidFill>
+                  <a:srgbClr val="21295C"/>
+                </a:solidFill>
+                <a:latin typeface="Calibri" pitchFamily="34" charset="0"/>
+                <a:ea typeface="Calibri" pitchFamily="34" charset="-122"/>
+                <a:cs typeface="Calibri" pitchFamily="34" charset="-120"/>
+              </a:rPr>
+              <a:t>IV 信息价值筛选</a:t>
+            </a:r>
+            <a:endParaRPr lang="en-US" sz="1500" dirty="0"/>
+          </a:p>
+        </p:txBody>
+      </p:sp>
+      <p:sp>
+        <p:nvSpPr>
+          <p:cNvPr id="11" name="Text 9"/>
+          <p:cNvSpPr/>
+          <p:nvPr/>
+        </p:nvSpPr>
+        <p:spPr>
+          <a:xfrm>
+            <a:off x="1280160" y="2011680"/>
+            <a:ext cx="4754880" cy="502920"/>
+          </a:xfrm>
+          <a:prstGeom prst="rect">
+            <a:avLst/>
+          </a:prstGeom>
+          <a:noFill/>
+          <a:ln/>
+        </p:spPr>
+        <p:txBody>
+          <a:bodyPr wrap="square" lIns="0" tIns="0" rIns="0" bIns="0" rtlCol="0" anchor="ctr"/>
+          <a:lstStyle/>
+          <a:p>
+            <a:pPr indent="0" marL="0">
+              <a:buNone/>
+            </a:pPr>
+            <a:r>
+              <a:rPr lang="en-US" sz="1200" dirty="0">
+                <a:solidFill>
+                  <a:srgbClr val="64748B"/>
+                </a:solidFill>
+                <a:latin typeface="Calibri" pitchFamily="34" charset="0"/>
+                <a:ea typeface="Calibri" pitchFamily="34" charset="-122"/>
+                <a:cs typeface="Calibri" pitchFamily="34" charset="-120"/>
+              </a:rPr>
+              <a:t>IV≥0.02，剔除预测力弱或无业务意义特征</a:t>
+            </a:r>
+            <a:endParaRPr lang="en-US" sz="1200" dirty="0"/>
+          </a:p>
+        </p:txBody>
+      </p:sp>
+      <p:sp>
+        <p:nvSpPr>
+          <p:cNvPr id="12" name="Text 10"/>
+          <p:cNvSpPr/>
+          <p:nvPr/>
+        </p:nvSpPr>
+        <p:spPr>
+          <a:xfrm>
+            <a:off x="731520" y="2560320"/>
+            <a:ext cx="457200" cy="640080"/>
+          </a:xfrm>
+          <a:prstGeom prst="rect">
+            <a:avLst/>
+          </a:prstGeom>
+          <a:noFill/>
+          <a:ln/>
+        </p:spPr>
+        <p:txBody>
+          <a:bodyPr wrap="square" lIns="0" tIns="0" rIns="0" bIns="0" rtlCol="0" anchor="ctr"/>
+          <a:lstStyle/>
+          <a:p>
+            <a:pPr indent="0" marL="0">
+              <a:buNone/>
+            </a:pPr>
+            <a:r>
+              <a:rPr lang="en-US" sz="2400" b="1" dirty="0">
+                <a:solidFill>
+                  <a:srgbClr val="14B8A6"/>
+                </a:solidFill>
+                <a:latin typeface="Georgia" pitchFamily="34" charset="0"/>
+                <a:ea typeface="Georgia" pitchFamily="34" charset="-122"/>
+                <a:cs typeface="Georgia" pitchFamily="34" charset="-120"/>
+              </a:rPr>
+              <a:t>②</a:t>
+            </a:r>
+            <a:endParaRPr lang="en-US" sz="2400" dirty="0"/>
+          </a:p>
+        </p:txBody>
+      </p:sp>
+      <p:sp>
+        <p:nvSpPr>
+          <p:cNvPr id="13" name="Text 11"/>
+          <p:cNvSpPr/>
+          <p:nvPr/>
+        </p:nvSpPr>
+        <p:spPr>
+          <a:xfrm>
+            <a:off x="1280160" y="2560320"/>
+            <a:ext cx="4754880" cy="320040"/>
+          </a:xfrm>
+          <a:prstGeom prst="rect">
+            <a:avLst/>
+          </a:prstGeom>
+          <a:noFill/>
+          <a:ln/>
+        </p:spPr>
+        <p:txBody>
+          <a:bodyPr wrap="square" lIns="0" tIns="0" rIns="0" bIns="0" rtlCol="0" anchor="ctr"/>
+          <a:lstStyle/>
+          <a:p>
+            <a:pPr indent="0" marL="0">
+              <a:buNone/>
+            </a:pPr>
+            <a:r>
+              <a:rPr lang="en-US" sz="1500" b="1" dirty="0">
+                <a:solidFill>
+                  <a:srgbClr val="21295C"/>
+                </a:solidFill>
+                <a:latin typeface="Calibri" pitchFamily="34" charset="0"/>
+                <a:ea typeface="Calibri" pitchFamily="34" charset="-122"/>
+                <a:cs typeface="Calibri" pitchFamily="34" charset="-120"/>
+              </a:rPr>
+              <a:t>WoE 证据权重分箱</a:t>
+            </a:r>
+            <a:endParaRPr lang="en-US" sz="1500" dirty="0"/>
+          </a:p>
+        </p:txBody>
+      </p:sp>
+      <p:sp>
+        <p:nvSpPr>
+          <p:cNvPr id="14" name="Text 12"/>
+          <p:cNvSpPr/>
+          <p:nvPr/>
+        </p:nvSpPr>
+        <p:spPr>
+          <a:xfrm>
+            <a:off x="1280160" y="2880360"/>
+            <a:ext cx="4754880" cy="502920"/>
+          </a:xfrm>
+          <a:prstGeom prst="rect">
+            <a:avLst/>
+          </a:prstGeom>
+          <a:noFill/>
+          <a:ln/>
+        </p:spPr>
+        <p:txBody>
+          <a:bodyPr wrap="square" lIns="0" tIns="0" rIns="0" bIns="0" rtlCol="0" anchor="ctr"/>
+          <a:lstStyle/>
+          <a:p>
+            <a:pPr indent="0" marL="0">
+              <a:buNone/>
+            </a:pPr>
+            <a:r>
+              <a:rPr lang="en-US" sz="1200" dirty="0">
+                <a:solidFill>
+                  <a:srgbClr val="64748B"/>
+                </a:solidFill>
+                <a:latin typeface="Calibri" pitchFamily="34" charset="0"/>
+                <a:ea typeface="Calibri" pitchFamily="34" charset="-122"/>
+                <a:cs typeface="Calibri" pitchFamily="34" charset="-120"/>
+              </a:rPr>
+              <a:t>连续/类别变量转单调可分箱，提升稳定性</a:t>
+            </a:r>
+            <a:endParaRPr lang="en-US" sz="1200" dirty="0"/>
+          </a:p>
+        </p:txBody>
+      </p:sp>
+      <p:sp>
+        <p:nvSpPr>
+          <p:cNvPr id="15" name="Text 13"/>
+          <p:cNvSpPr/>
+          <p:nvPr/>
+        </p:nvSpPr>
+        <p:spPr>
+          <a:xfrm>
+            <a:off x="731520" y="3429000"/>
+            <a:ext cx="457200" cy="640080"/>
+          </a:xfrm>
+          <a:prstGeom prst="rect">
+            <a:avLst/>
+          </a:prstGeom>
+          <a:noFill/>
+          <a:ln/>
+        </p:spPr>
+        <p:txBody>
+          <a:bodyPr wrap="square" lIns="0" tIns="0" rIns="0" bIns="0" rtlCol="0" anchor="ctr"/>
+          <a:lstStyle/>
+          <a:p>
+            <a:pPr indent="0" marL="0">
+              <a:buNone/>
+            </a:pPr>
+            <a:r>
+              <a:rPr lang="en-US" sz="2400" b="1" dirty="0">
+                <a:solidFill>
+                  <a:srgbClr val="14B8A6"/>
+                </a:solidFill>
+                <a:latin typeface="Georgia" pitchFamily="34" charset="0"/>
+                <a:ea typeface="Georgia" pitchFamily="34" charset="-122"/>
+                <a:cs typeface="Georgia" pitchFamily="34" charset="-120"/>
+              </a:rPr>
+              <a:t>③</a:t>
+            </a:r>
+            <a:endParaRPr lang="en-US" sz="2400" dirty="0"/>
+          </a:p>
+        </p:txBody>
+      </p:sp>
+      <p:sp>
+        <p:nvSpPr>
+          <p:cNvPr id="16" name="Text 14"/>
+          <p:cNvSpPr/>
+          <p:nvPr/>
+        </p:nvSpPr>
+        <p:spPr>
+          <a:xfrm>
+            <a:off x="1280160" y="3429000"/>
+            <a:ext cx="4754880" cy="320040"/>
+          </a:xfrm>
+          <a:prstGeom prst="rect">
+            <a:avLst/>
+          </a:prstGeom>
+          <a:noFill/>
+          <a:ln/>
+        </p:spPr>
+        <p:txBody>
+          <a:bodyPr wrap="square" lIns="0" tIns="0" rIns="0" bIns="0" rtlCol="0" anchor="ctr"/>
+          <a:lstStyle/>
+          <a:p>
+            <a:pPr indent="0" marL="0">
+              <a:buNone/>
+            </a:pPr>
+            <a:r>
+              <a:rPr lang="en-US" sz="1500" b="1" dirty="0">
+                <a:solidFill>
+                  <a:srgbClr val="21295C"/>
+                </a:solidFill>
+                <a:latin typeface="Calibri" pitchFamily="34" charset="0"/>
+                <a:ea typeface="Calibri" pitchFamily="34" charset="-122"/>
+                <a:cs typeface="Calibri" pitchFamily="34" charset="-120"/>
+              </a:rPr>
+              <a:t>PSI 群体稳定性</a:t>
+            </a:r>
+            <a:endParaRPr lang="en-US" sz="1500" dirty="0"/>
+          </a:p>
+        </p:txBody>
+      </p:sp>
+      <p:sp>
+        <p:nvSpPr>
+          <p:cNvPr id="17" name="Text 15"/>
+          <p:cNvSpPr/>
+          <p:nvPr/>
+        </p:nvSpPr>
+        <p:spPr>
+          <a:xfrm>
+            <a:off x="1280160" y="3749040"/>
+            <a:ext cx="4754880" cy="502920"/>
+          </a:xfrm>
+          <a:prstGeom prst="rect">
+            <a:avLst/>
+          </a:prstGeom>
+          <a:noFill/>
+          <a:ln/>
+        </p:spPr>
+        <p:txBody>
+          <a:bodyPr wrap="square" lIns="0" tIns="0" rIns="0" bIns="0" rtlCol="0" anchor="ctr"/>
+          <a:lstStyle/>
+          <a:p>
+            <a:pPr indent="0" marL="0">
+              <a:buNone/>
+            </a:pPr>
+            <a:r>
+              <a:rPr lang="en-US" sz="1200" dirty="0">
+                <a:solidFill>
+                  <a:srgbClr val="64748B"/>
+                </a:solidFill>
+                <a:latin typeface="Calibri" pitchFamily="34" charset="0"/>
+                <a:ea typeface="Calibri" pitchFamily="34" charset="-122"/>
+                <a:cs typeface="Calibri" pitchFamily="34" charset="-120"/>
+              </a:rPr>
+              <a:t>PSI&lt;0.25，本项目 28 个 IV 合格特征全部通过</a:t>
+            </a:r>
+            <a:endParaRPr lang="en-US" sz="1200" dirty="0"/>
+          </a:p>
+        </p:txBody>
+      </p:sp>
+      <p:sp>
+        <p:nvSpPr>
+          <p:cNvPr id="18" name="Text 16"/>
+          <p:cNvSpPr/>
+          <p:nvPr/>
+        </p:nvSpPr>
+        <p:spPr>
+          <a:xfrm>
+            <a:off x="731520" y="4297680"/>
+            <a:ext cx="457200" cy="640080"/>
+          </a:xfrm>
+          <a:prstGeom prst="rect">
+            <a:avLst/>
+          </a:prstGeom>
+          <a:noFill/>
+          <a:ln/>
+        </p:spPr>
+        <p:txBody>
+          <a:bodyPr wrap="square" lIns="0" tIns="0" rIns="0" bIns="0" rtlCol="0" anchor="ctr"/>
+          <a:lstStyle/>
+          <a:p>
+            <a:pPr indent="0" marL="0">
+              <a:buNone/>
+            </a:pPr>
+            <a:r>
+              <a:rPr lang="en-US" sz="2400" b="1" dirty="0">
+                <a:solidFill>
+                  <a:srgbClr val="14B8A6"/>
+                </a:solidFill>
+                <a:latin typeface="Georgia" pitchFamily="34" charset="0"/>
+                <a:ea typeface="Georgia" pitchFamily="34" charset="-122"/>
+                <a:cs typeface="Georgia" pitchFamily="34" charset="-120"/>
+              </a:rPr>
+              <a:t>④</a:t>
+            </a:r>
+            <a:endParaRPr lang="en-US" sz="2400" dirty="0"/>
+          </a:p>
+        </p:txBody>
+      </p:sp>
+      <p:sp>
+        <p:nvSpPr>
+          <p:cNvPr id="19" name="Text 17"/>
+          <p:cNvSpPr/>
+          <p:nvPr/>
+        </p:nvSpPr>
+        <p:spPr>
+          <a:xfrm>
+            <a:off x="1280160" y="4297680"/>
+            <a:ext cx="4754880" cy="320040"/>
+          </a:xfrm>
+          <a:prstGeom prst="rect">
+            <a:avLst/>
+          </a:prstGeom>
+          <a:noFill/>
+          <a:ln/>
+        </p:spPr>
+        <p:txBody>
+          <a:bodyPr wrap="square" lIns="0" tIns="0" rIns="0" bIns="0" rtlCol="0" anchor="ctr"/>
+          <a:lstStyle/>
+          <a:p>
+            <a:pPr indent="0" marL="0">
+              <a:buNone/>
+            </a:pPr>
+            <a:r>
+              <a:rPr lang="en-US" sz="1500" b="1" dirty="0">
+                <a:solidFill>
+                  <a:srgbClr val="21295C"/>
+                </a:solidFill>
+                <a:latin typeface="Calibri" pitchFamily="34" charset="0"/>
+                <a:ea typeface="Calibri" pitchFamily="34" charset="-122"/>
+                <a:cs typeface="Calibri" pitchFamily="34" charset="-120"/>
+              </a:rPr>
+              <a:t>贪心去共线性</a:t>
+            </a:r>
+            <a:endParaRPr lang="en-US" sz="1500" dirty="0"/>
+          </a:p>
+        </p:txBody>
+      </p:sp>
+      <p:sp>
+        <p:nvSpPr>
+          <p:cNvPr id="20" name="Text 18"/>
+          <p:cNvSpPr/>
+          <p:nvPr/>
+        </p:nvSpPr>
+        <p:spPr>
+          <a:xfrm>
+            <a:off x="1280160" y="4617720"/>
+            <a:ext cx="4754880" cy="502920"/>
+          </a:xfrm>
+          <a:prstGeom prst="rect">
+            <a:avLst/>
+          </a:prstGeom>
+          <a:noFill/>
+          <a:ln/>
+        </p:spPr>
+        <p:txBody>
+          <a:bodyPr wrap="square" lIns="0" tIns="0" rIns="0" bIns="0" rtlCol="0" anchor="ctr"/>
+          <a:lstStyle/>
+          <a:p>
+            <a:pPr indent="0" marL="0">
+              <a:buNone/>
+            </a:pPr>
+            <a:r>
+              <a:rPr lang="en-US" sz="1200" dirty="0">
+                <a:solidFill>
+                  <a:srgbClr val="64748B"/>
+                </a:solidFill>
+                <a:latin typeface="Calibri" pitchFamily="34" charset="0"/>
+                <a:ea typeface="Calibri" pitchFamily="34" charset="-122"/>
+                <a:cs typeface="Calibri" pitchFamily="34" charset="-120"/>
+              </a:rPr>
+              <a:t>|r|≥0.7 时只保留一个，最终精选 19 特征</a:t>
+            </a:r>
+            <a:endParaRPr lang="en-US" sz="1200" dirty="0"/>
+          </a:p>
+        </p:txBody>
+      </p:sp>
+      <p:sp>
+        <p:nvSpPr>
+          <p:cNvPr id="21" name="Text 19"/>
+          <p:cNvSpPr/>
+          <p:nvPr/>
+        </p:nvSpPr>
+        <p:spPr>
+          <a:xfrm>
+            <a:off x="731520" y="5166360"/>
+            <a:ext cx="457200" cy="640080"/>
+          </a:xfrm>
+          <a:prstGeom prst="rect">
+            <a:avLst/>
+          </a:prstGeom>
+          <a:noFill/>
+          <a:ln/>
+        </p:spPr>
+        <p:txBody>
+          <a:bodyPr wrap="square" lIns="0" tIns="0" rIns="0" bIns="0" rtlCol="0" anchor="ctr"/>
+          <a:lstStyle/>
+          <a:p>
+            <a:pPr indent="0" marL="0">
+              <a:buNone/>
+            </a:pPr>
+            <a:r>
+              <a:rPr lang="en-US" sz="2400" b="1" dirty="0">
+                <a:solidFill>
+                  <a:srgbClr val="14B8A6"/>
+                </a:solidFill>
+                <a:latin typeface="Georgia" pitchFamily="34" charset="0"/>
+                <a:ea typeface="Georgia" pitchFamily="34" charset="-122"/>
+                <a:cs typeface="Georgia" pitchFamily="34" charset="-120"/>
+              </a:rPr>
+              <a:t>⑤</a:t>
+            </a:r>
+            <a:endParaRPr lang="en-US" sz="2400" dirty="0"/>
+          </a:p>
+        </p:txBody>
+      </p:sp>
+      <p:sp>
+        <p:nvSpPr>
+          <p:cNvPr id="22" name="Text 20"/>
+          <p:cNvSpPr/>
+          <p:nvPr/>
+        </p:nvSpPr>
+        <p:spPr>
+          <a:xfrm>
+            <a:off x="1280160" y="5166360"/>
+            <a:ext cx="4754880" cy="320040"/>
+          </a:xfrm>
+          <a:prstGeom prst="rect">
+            <a:avLst/>
+          </a:prstGeom>
+          <a:noFill/>
+          <a:ln/>
+        </p:spPr>
+        <p:txBody>
+          <a:bodyPr wrap="square" lIns="0" tIns="0" rIns="0" bIns="0" rtlCol="0" anchor="ctr"/>
+          <a:lstStyle/>
+          <a:p>
+            <a:pPr indent="0" marL="0">
+              <a:buNone/>
+            </a:pPr>
+            <a:r>
+              <a:rPr lang="en-US" sz="1500" b="1" dirty="0">
+                <a:solidFill>
+                  <a:srgbClr val="21295C"/>
+                </a:solidFill>
+                <a:latin typeface="Calibri" pitchFamily="34" charset="0"/>
+                <a:ea typeface="Calibri" pitchFamily="34" charset="-122"/>
+                <a:cs typeface="Calibri" pitchFamily="34" charset="-120"/>
+              </a:rPr>
+              <a:t>数据泄露防护</a:t>
+            </a:r>
+            <a:endParaRPr lang="en-US" sz="1500" dirty="0"/>
+          </a:p>
+        </p:txBody>
+      </p:sp>
+      <p:sp>
+        <p:nvSpPr>
+          <p:cNvPr id="23" name="Text 21"/>
+          <p:cNvSpPr/>
+          <p:nvPr/>
+        </p:nvSpPr>
+        <p:spPr>
+          <a:xfrm>
+            <a:off x="1280160" y="5486400"/>
+            <a:ext cx="4754880" cy="502920"/>
+          </a:xfrm>
+          <a:prstGeom prst="rect">
+            <a:avLst/>
+          </a:prstGeom>
+          <a:noFill/>
+          <a:ln/>
+        </p:spPr>
+        <p:txBody>
+          <a:bodyPr wrap="square" lIns="0" tIns="0" rIns="0" bIns="0" rtlCol="0" anchor="ctr"/>
+          <a:lstStyle/>
+          <a:p>
+            <a:pPr indent="0" marL="0">
+              <a:buNone/>
+            </a:pPr>
+            <a:r>
+              <a:rPr lang="en-US" sz="1200" dirty="0">
+                <a:solidFill>
+                  <a:srgbClr val="64748B"/>
+                </a:solidFill>
+                <a:latin typeface="Calibri" pitchFamily="34" charset="0"/>
+                <a:ea typeface="Calibri" pitchFamily="34" charset="-122"/>
+                <a:cs typeface="Calibri" pitchFamily="34" charset="-120"/>
+              </a:rPr>
+              <a:t>明确排除 grade / sub_grade 等放款后字段</a:t>
+            </a:r>
+            <a:endParaRPr lang="en-US" sz="1200" dirty="0"/>
+          </a:p>
+        </p:txBody>
+      </p:sp>
+      <p:sp>
+        <p:nvSpPr>
+          <p:cNvPr id="24" name="Shape 22"/>
+          <p:cNvSpPr/>
+          <p:nvPr/>
+        </p:nvSpPr>
+        <p:spPr>
+          <a:xfrm>
+            <a:off x="6400800" y="1097280"/>
+            <a:ext cx="5303520" cy="2286000"/>
+          </a:xfrm>
+          <a:prstGeom prst="rect">
+            <a:avLst/>
+          </a:prstGeom>
+          <a:solidFill>
+            <a:srgbClr val="FFFFFF"/>
+          </a:solidFill>
+          <a:ln w="12700">
+            <a:solidFill>
+              <a:srgbClr val="E2E8F0"/>
+            </a:solidFill>
+            <a:prstDash val="solid"/>
+          </a:ln>
+          <a:effectLst>
+            <a:outerShdw sx="100000" sy="100000" kx="0" ky="0" algn="bl" rotWithShape="0" blurRad="76200" dist="25400" dir="8100000">
+              <a:srgbClr val="000000">
+                <a:alpha val="8000"/>
+              </a:srgbClr>
+            </a:outerShdw>
+          </a:effectLst>
+        </p:spPr>
+      </p:sp>
+      <p:sp>
+        <p:nvSpPr>
+          <p:cNvPr id="25" name="Shape 23"/>
+          <p:cNvSpPr/>
+          <p:nvPr/>
+        </p:nvSpPr>
+        <p:spPr>
+          <a:xfrm>
+            <a:off x="6400800" y="1097280"/>
+            <a:ext cx="91440" cy="2286000"/>
+          </a:xfrm>
+          <a:prstGeom prst="rect">
+            <a:avLst/>
+          </a:prstGeom>
+          <a:solidFill>
+            <a:srgbClr val="065A82"/>
+          </a:solidFill>
+          <a:ln/>
+        </p:spPr>
+      </p:sp>
+      <p:sp>
+        <p:nvSpPr>
+          <p:cNvPr id="26" name="Text 24"/>
+          <p:cNvSpPr/>
+          <p:nvPr/>
+        </p:nvSpPr>
+        <p:spPr>
+          <a:xfrm>
+            <a:off x="6629400" y="1234440"/>
+            <a:ext cx="5029200" cy="365760"/>
+          </a:xfrm>
+          <a:prstGeom prst="rect">
+            <a:avLst/>
+          </a:prstGeom>
+          <a:noFill/>
+          <a:ln/>
+        </p:spPr>
+        <p:txBody>
+          <a:bodyPr wrap="square" lIns="0" tIns="0" rIns="0" bIns="0" rtlCol="0" anchor="ctr"/>
+          <a:lstStyle/>
+          <a:p>
+            <a:pPr indent="0" marL="0">
+              <a:buNone/>
+            </a:pPr>
+            <a:r>
+              <a:rPr lang="en-US" sz="1800" b="1" dirty="0">
+                <a:solidFill>
+                  <a:srgbClr val="21295C"/>
+                </a:solidFill>
+                <a:latin typeface="Calibri" pitchFamily="34" charset="0"/>
+                <a:ea typeface="Calibri" pitchFamily="34" charset="-122"/>
+                <a:cs typeface="Calibri" pitchFamily="34" charset="-120"/>
+              </a:rPr>
+              <a:t>模型架构</a:t>
+            </a:r>
+            <a:endParaRPr lang="en-US" sz="1800" dirty="0"/>
+          </a:p>
+        </p:txBody>
+      </p:sp>
+      <p:sp>
+        <p:nvSpPr>
+          <p:cNvPr id="27" name="Text 25"/>
+          <p:cNvSpPr/>
+          <p:nvPr/>
+        </p:nvSpPr>
+        <p:spPr>
+          <a:xfrm>
+            <a:off x="6629400" y="1645920"/>
+            <a:ext cx="5029200" cy="1691640"/>
           </a:xfrm>
           <a:prstGeom prst="rect">
             <a:avLst/>
@@ -11448,7 +12927,21 @@
               <a:buNone/>
             </a:pPr>
             <a:r>
-              <a:rPr lang="en-US" sz="1300" dirty="0">
+              <a:rPr lang="en-US" sz="1200" dirty="0">
+                <a:solidFill>
+                  <a:srgbClr val="64748B"/>
+                </a:solidFill>
+                <a:latin typeface="Calibri" pitchFamily="34" charset="0"/>
+                <a:ea typeface="Calibri" pitchFamily="34" charset="-122"/>
+                <a:cs typeface="Calibri" pitchFamily="34" charset="-120"/>
+              </a:rPr>
+              <a:t>算法    </a:t>
+            </a:r>
+            <a:pPr indent="0" marL="0">
+              <a:buNone/>
+            </a:pPr>
+            <a:r>
+              <a:rPr lang="en-US" sz="1300" b="1" dirty="0">
                 <a:solidFill>
                   <a:srgbClr val="1E293B"/>
                 </a:solidFill>
@@ -11456,13 +12949,27 @@
                 <a:ea typeface="Calibri" pitchFamily="34" charset="-122"/>
                 <a:cs typeface="Calibri" pitchFamily="34" charset="-120"/>
               </a:rPr>
-              <a:t>"这位借款人违约概率 72%
+              <a:t>XGBoost 梯度提升树
 </a:t>
             </a:r>
             <a:pPr indent="0" marL="0">
               <a:buNone/>
             </a:pPr>
             <a:r>
+              <a:rPr lang="en-US" sz="1200" dirty="0">
+                <a:solidFill>
+                  <a:srgbClr val="64748B"/>
+                </a:solidFill>
+                <a:latin typeface="Calibri" pitchFamily="34" charset="0"/>
+                <a:ea typeface="Calibri" pitchFamily="34" charset="-122"/>
+                <a:cs typeface="Calibri" pitchFamily="34" charset="-120"/>
+              </a:rPr>
+              <a:t>特征数  </a:t>
+            </a:r>
+            <a:pPr indent="0" marL="0">
+              <a:buNone/>
+            </a:pPr>
+            <a:r>
               <a:rPr lang="en-US" sz="1300" b="1" dirty="0">
                 <a:solidFill>
                   <a:srgbClr val="1E293B"/>
@@ -11471,7 +12978,7 @@
                 <a:ea typeface="Calibri" pitchFamily="34" charset="-122"/>
                 <a:cs typeface="Calibri" pitchFamily="34" charset="-120"/>
               </a:rPr>
-              <a:t>主要风险因子：
+              <a:t>19（IV≥0.02 + PSI&lt;0.25）
 </a:t>
             </a:r>
             <a:pPr indent="0" marL="0">
@@ -11486,8 +12993,21 @@
                 <a:ea typeface="Calibri" pitchFamily="34" charset="-122"/>
                 <a:cs typeface="Calibri" pitchFamily="34" charset="-120"/>
               </a:rPr>
-              <a:t>1. int_rate（利率）13.5%
-   — 高于平均，平台已识别较高风险
+              <a:t>训练集  </a:t>
+            </a:r>
+            <a:pPr indent="0" marL="0">
+              <a:buNone/>
+            </a:pPr>
+            <a:r>
+              <a:rPr lang="en-US" sz="1300" b="1" dirty="0">
+                <a:solidFill>
+                  <a:srgbClr val="1E293B"/>
+                </a:solidFill>
+                <a:latin typeface="Calibri" pitchFamily="34" charset="0"/>
+                <a:ea typeface="Calibri" pitchFamily="34" charset="-122"/>
+                <a:cs typeface="Calibri" pitchFamily="34" charset="-120"/>
+              </a:rPr>
+              <a:t>120,000 行（80%）/ 测试 30,000 行（20%）
 </a:t>
             </a:r>
             <a:pPr indent="0" marL="0">
@@ -11502,8 +13022,21 @@
                 <a:ea typeface="Calibri" pitchFamily="34" charset="-122"/>
                 <a:cs typeface="Calibri" pitchFamily="34" charset="-120"/>
               </a:rPr>
-              <a:t>2. dti（负债收入比）35%
-   — 偏高，偿债压力大
+              <a:t>违约率  </a:t>
+            </a:r>
+            <a:pPr indent="0" marL="0">
+              <a:buNone/>
+            </a:pPr>
+            <a:r>
+              <a:rPr lang="en-US" sz="1300" b="1" dirty="0">
+                <a:solidFill>
+                  <a:srgbClr val="1E293B"/>
+                </a:solidFill>
+                <a:latin typeface="Calibri" pitchFamily="34" charset="0"/>
+                <a:ea typeface="Calibri" pitchFamily="34" charset="-122"/>
+                <a:cs typeface="Calibri" pitchFamily="34" charset="-120"/>
+              </a:rPr>
+              <a:t>14.81%（接近真实市场分布）
 </a:t>
             </a:r>
             <a:pPr indent="0" marL="0">
@@ -11518,15 +13051,211 @@
                 <a:ea typeface="Calibri" pitchFamily="34" charset="-122"/>
                 <a:cs typeface="Calibri" pitchFamily="34" charset="-120"/>
               </a:rPr>
-              <a:t>3. inq_last_6mths 5 次
-   — 频繁申贷，资金紧张信号
+              <a:t>AUC     </a:t>
+            </a:r>
+            <a:pPr indent="0" marL="0">
+              <a:buNone/>
+            </a:pPr>
+            <a:r>
+              <a:rPr lang="en-US" sz="1300" b="1" dirty="0">
+                <a:solidFill>
+                  <a:srgbClr val="14B8A6"/>
+                </a:solidFill>
+                <a:latin typeface="Calibri" pitchFamily="34" charset="0"/>
+                <a:ea typeface="Calibri" pitchFamily="34" charset="-122"/>
+                <a:cs typeface="Calibri" pitchFamily="34" charset="-120"/>
+              </a:rPr>
+              <a:t>0.7093（与 81 特征 baseline 相当）
 </a:t>
             </a:r>
             <a:pPr indent="0" marL="0">
               <a:buNone/>
             </a:pPr>
             <a:r>
-              <a:rPr lang="en-US" sz="1200" i="1" dirty="0">
+              <a:rPr lang="en-US" sz="1200" dirty="0">
+                <a:solidFill>
+                  <a:srgbClr val="64748B"/>
+                </a:solidFill>
+                <a:latin typeface="Calibri" pitchFamily="34" charset="0"/>
+                <a:ea typeface="Calibri" pitchFamily="34" charset="-122"/>
+                <a:cs typeface="Calibri" pitchFamily="34" charset="-120"/>
+              </a:rPr>
+              <a:t>可解释  </a:t>
+            </a:r>
+            <a:pPr indent="0" marL="0">
+              <a:buNone/>
+            </a:pPr>
+            <a:r>
+              <a:rPr lang="en-US" sz="1300" b="1" dirty="0">
+                <a:solidFill>
+                  <a:srgbClr val="1E293B"/>
+                </a:solidFill>
+                <a:latin typeface="Calibri" pitchFamily="34" charset="0"/>
+                <a:ea typeface="Calibri" pitchFamily="34" charset="-122"/>
+                <a:cs typeface="Calibri" pitchFamily="34" charset="-120"/>
+              </a:rPr>
+              <a:t>SHAP 全局 + 局部双解释</a:t>
+            </a:r>
+            <a:endParaRPr lang="en-US" sz="1200" dirty="0"/>
+          </a:p>
+        </p:txBody>
+      </p:sp>
+      <p:sp>
+        <p:nvSpPr>
+          <p:cNvPr id="28" name="Shape 26"/>
+          <p:cNvSpPr/>
+          <p:nvPr/>
+        </p:nvSpPr>
+        <p:spPr>
+          <a:xfrm>
+            <a:off x="6400800" y="3611880"/>
+            <a:ext cx="5303520" cy="2606040"/>
+          </a:xfrm>
+          <a:prstGeom prst="rect">
+            <a:avLst/>
+          </a:prstGeom>
+          <a:solidFill>
+            <a:srgbClr val="FFFFFF"/>
+          </a:solidFill>
+          <a:ln w="12700">
+            <a:solidFill>
+              <a:srgbClr val="E2E8F0"/>
+            </a:solidFill>
+            <a:prstDash val="solid"/>
+          </a:ln>
+          <a:effectLst>
+            <a:outerShdw sx="100000" sy="100000" kx="0" ky="0" algn="bl" rotWithShape="0" blurRad="76200" dist="25400" dir="8100000">
+              <a:srgbClr val="000000">
+                <a:alpha val="8000"/>
+              </a:srgbClr>
+            </a:outerShdw>
+          </a:effectLst>
+        </p:spPr>
+      </p:sp>
+      <p:sp>
+        <p:nvSpPr>
+          <p:cNvPr id="29" name="Shape 27"/>
+          <p:cNvSpPr/>
+          <p:nvPr/>
+        </p:nvSpPr>
+        <p:spPr>
+          <a:xfrm>
+            <a:off x="6400800" y="3611880"/>
+            <a:ext cx="91440" cy="2606040"/>
+          </a:xfrm>
+          <a:prstGeom prst="rect">
+            <a:avLst/>
+          </a:prstGeom>
+          <a:solidFill>
+            <a:srgbClr val="1C7293"/>
+          </a:solidFill>
+          <a:ln/>
+        </p:spPr>
+      </p:sp>
+      <p:sp>
+        <p:nvSpPr>
+          <p:cNvPr id="30" name="Text 28"/>
+          <p:cNvSpPr/>
+          <p:nvPr/>
+        </p:nvSpPr>
+        <p:spPr>
+          <a:xfrm>
+            <a:off x="6629400" y="3703320"/>
+            <a:ext cx="5029200" cy="365760"/>
+          </a:xfrm>
+          <a:prstGeom prst="rect">
+            <a:avLst/>
+          </a:prstGeom>
+          <a:noFill/>
+          <a:ln/>
+        </p:spPr>
+        <p:txBody>
+          <a:bodyPr wrap="square" lIns="0" tIns="0" rIns="0" bIns="0" rtlCol="0" anchor="ctr"/>
+          <a:lstStyle/>
+          <a:p>
+            <a:pPr indent="0" marL="0">
+              <a:buNone/>
+            </a:pPr>
+            <a:r>
+              <a:rPr lang="en-US" sz="1800" b="1" dirty="0">
+                <a:solidFill>
+                  <a:srgbClr val="21295C"/>
+                </a:solidFill>
+                <a:latin typeface="Calibri" pitchFamily="34" charset="0"/>
+                <a:ea typeface="Calibri" pitchFamily="34" charset="-122"/>
+                <a:cs typeface="Calibri" pitchFamily="34" charset="-120"/>
+              </a:rPr>
+              <a:t>Top 6 特征 IV 榜</a:t>
+            </a:r>
+            <a:endParaRPr lang="en-US" sz="1800" dirty="0"/>
+          </a:p>
+        </p:txBody>
+      </p:sp>
+      <p:sp>
+        <p:nvSpPr>
+          <p:cNvPr id="31" name="Text 29"/>
+          <p:cNvSpPr/>
+          <p:nvPr/>
+        </p:nvSpPr>
+        <p:spPr>
+          <a:xfrm>
+            <a:off x="6629400" y="4160520"/>
+            <a:ext cx="2194560" cy="292608"/>
+          </a:xfrm>
+          <a:prstGeom prst="rect">
+            <a:avLst/>
+          </a:prstGeom>
+          <a:noFill/>
+          <a:ln/>
+        </p:spPr>
+        <p:txBody>
+          <a:bodyPr wrap="square" lIns="0" tIns="0" rIns="0" bIns="0" rtlCol="0" anchor="ctr"/>
+          <a:lstStyle/>
+          <a:p>
+            <a:pPr indent="0" marL="0">
+              <a:buNone/>
+            </a:pPr>
+            <a:r>
+              <a:rPr lang="en-US" sz="1200" b="1" dirty="0">
+                <a:solidFill>
+                  <a:srgbClr val="1E293B"/>
+                </a:solidFill>
+                <a:latin typeface="Calibri" pitchFamily="34" charset="0"/>
+                <a:ea typeface="Calibri" pitchFamily="34" charset="-122"/>
+                <a:cs typeface="Calibri" pitchFamily="34" charset="-120"/>
+              </a:rPr>
+              <a:t>1. int_rate</a:t>
+            </a:r>
+            <a:endParaRPr lang="en-US" sz="1200" dirty="0"/>
+          </a:p>
+        </p:txBody>
+      </p:sp>
+      <p:sp>
+        <p:nvSpPr>
+          <p:cNvPr id="32" name="Text 30"/>
+          <p:cNvSpPr/>
+          <p:nvPr/>
+        </p:nvSpPr>
+        <p:spPr>
+          <a:xfrm>
+            <a:off x="8823960" y="4160520"/>
+            <a:ext cx="1097280" cy="292608"/>
+          </a:xfrm>
+          <a:prstGeom prst="rect">
+            <a:avLst/>
+          </a:prstGeom>
+          <a:noFill/>
+          <a:ln/>
+        </p:spPr>
+        <p:txBody>
+          <a:bodyPr wrap="square" lIns="0" tIns="0" rIns="0" bIns="0" rtlCol="0" anchor="ctr"/>
+          <a:lstStyle/>
+          <a:p>
+            <a:pPr indent="0" marL="0">
+              <a:buNone/>
+            </a:pPr>
+            <a:r>
+              <a:rPr lang="en-US" sz="1200" b="1" dirty="0">
                 <a:solidFill>
                   <a:srgbClr val="14B8A6"/>
                 </a:solidFill>
@@ -11534,9 +13263,633 @@
                 <a:ea typeface="Calibri" pitchFamily="34" charset="-122"/>
                 <a:cs typeface="Calibri" pitchFamily="34" charset="-120"/>
               </a:rPr>
-              <a:t>建议话术：'根据您的信用状况，建议降低申请金额或提供担保'"</a:t>
-            </a:r>
-            <a:endParaRPr lang="en-US" sz="1300" dirty="0"/>
+              <a:t>IV=0.398</a:t>
+            </a:r>
+            <a:endParaRPr lang="en-US" sz="1200" dirty="0"/>
+          </a:p>
+        </p:txBody>
+      </p:sp>
+      <p:sp>
+        <p:nvSpPr>
+          <p:cNvPr id="33" name="Text 31"/>
+          <p:cNvSpPr/>
+          <p:nvPr/>
+        </p:nvSpPr>
+        <p:spPr>
+          <a:xfrm>
+            <a:off x="9921240" y="4160520"/>
+            <a:ext cx="1691640" cy="292608"/>
+          </a:xfrm>
+          <a:prstGeom prst="rect">
+            <a:avLst/>
+          </a:prstGeom>
+          <a:noFill/>
+          <a:ln/>
+        </p:spPr>
+        <p:txBody>
+          <a:bodyPr wrap="square" lIns="0" tIns="0" rIns="0" bIns="0" rtlCol="0" anchor="ctr"/>
+          <a:lstStyle/>
+          <a:p>
+            <a:pPr indent="0" marL="0">
+              <a:buNone/>
+            </a:pPr>
+            <a:r>
+              <a:rPr lang="en-US" sz="1100" dirty="0">
+                <a:solidFill>
+                  <a:srgbClr val="64748B"/>
+                </a:solidFill>
+                <a:latin typeface="Calibri" pitchFamily="34" charset="0"/>
+                <a:ea typeface="Calibri" pitchFamily="34" charset="-122"/>
+                <a:cs typeface="Calibri" pitchFamily="34" charset="-120"/>
+              </a:rPr>
+              <a:t>贷款利率</a:t>
+            </a:r>
+            <a:endParaRPr lang="en-US" sz="1100" dirty="0"/>
+          </a:p>
+        </p:txBody>
+      </p:sp>
+      <p:sp>
+        <p:nvSpPr>
+          <p:cNvPr id="34" name="Text 32"/>
+          <p:cNvSpPr/>
+          <p:nvPr/>
+        </p:nvSpPr>
+        <p:spPr>
+          <a:xfrm>
+            <a:off x="6629400" y="4489704"/>
+            <a:ext cx="2194560" cy="292608"/>
+          </a:xfrm>
+          <a:prstGeom prst="rect">
+            <a:avLst/>
+          </a:prstGeom>
+          <a:noFill/>
+          <a:ln/>
+        </p:spPr>
+        <p:txBody>
+          <a:bodyPr wrap="square" lIns="0" tIns="0" rIns="0" bIns="0" rtlCol="0" anchor="ctr"/>
+          <a:lstStyle/>
+          <a:p>
+            <a:pPr indent="0" marL="0">
+              <a:buNone/>
+            </a:pPr>
+            <a:r>
+              <a:rPr lang="en-US" sz="1200" b="1" dirty="0">
+                <a:solidFill>
+                  <a:srgbClr val="1E293B"/>
+                </a:solidFill>
+                <a:latin typeface="Calibri" pitchFamily="34" charset="0"/>
+                <a:ea typeface="Calibri" pitchFamily="34" charset="-122"/>
+                <a:cs typeface="Calibri" pitchFamily="34" charset="-120"/>
+              </a:rPr>
+              <a:t>2. term_months</a:t>
+            </a:r>
+            <a:endParaRPr lang="en-US" sz="1200" dirty="0"/>
+          </a:p>
+        </p:txBody>
+      </p:sp>
+      <p:sp>
+        <p:nvSpPr>
+          <p:cNvPr id="35" name="Text 33"/>
+          <p:cNvSpPr/>
+          <p:nvPr/>
+        </p:nvSpPr>
+        <p:spPr>
+          <a:xfrm>
+            <a:off x="8823960" y="4489704"/>
+            <a:ext cx="1097280" cy="292608"/>
+          </a:xfrm>
+          <a:prstGeom prst="rect">
+            <a:avLst/>
+          </a:prstGeom>
+          <a:noFill/>
+          <a:ln/>
+        </p:spPr>
+        <p:txBody>
+          <a:bodyPr wrap="square" lIns="0" tIns="0" rIns="0" bIns="0" rtlCol="0" anchor="ctr"/>
+          <a:lstStyle/>
+          <a:p>
+            <a:pPr indent="0" marL="0">
+              <a:buNone/>
+            </a:pPr>
+            <a:r>
+              <a:rPr lang="en-US" sz="1200" b="1" dirty="0">
+                <a:solidFill>
+                  <a:srgbClr val="14B8A6"/>
+                </a:solidFill>
+                <a:latin typeface="Calibri" pitchFamily="34" charset="0"/>
+                <a:ea typeface="Calibri" pitchFamily="34" charset="-122"/>
+                <a:cs typeface="Calibri" pitchFamily="34" charset="-120"/>
+              </a:rPr>
+              <a:t>IV=0.160</a:t>
+            </a:r>
+            <a:endParaRPr lang="en-US" sz="1200" dirty="0"/>
+          </a:p>
+        </p:txBody>
+      </p:sp>
+      <p:sp>
+        <p:nvSpPr>
+          <p:cNvPr id="36" name="Text 34"/>
+          <p:cNvSpPr/>
+          <p:nvPr/>
+        </p:nvSpPr>
+        <p:spPr>
+          <a:xfrm>
+            <a:off x="9921240" y="4489704"/>
+            <a:ext cx="1691640" cy="292608"/>
+          </a:xfrm>
+          <a:prstGeom prst="rect">
+            <a:avLst/>
+          </a:prstGeom>
+          <a:noFill/>
+          <a:ln/>
+        </p:spPr>
+        <p:txBody>
+          <a:bodyPr wrap="square" lIns="0" tIns="0" rIns="0" bIns="0" rtlCol="0" anchor="ctr"/>
+          <a:lstStyle/>
+          <a:p>
+            <a:pPr indent="0" marL="0">
+              <a:buNone/>
+            </a:pPr>
+            <a:r>
+              <a:rPr lang="en-US" sz="1100" dirty="0">
+                <a:solidFill>
+                  <a:srgbClr val="64748B"/>
+                </a:solidFill>
+                <a:latin typeface="Calibri" pitchFamily="34" charset="0"/>
+                <a:ea typeface="Calibri" pitchFamily="34" charset="-122"/>
+                <a:cs typeface="Calibri" pitchFamily="34" charset="-120"/>
+              </a:rPr>
+              <a:t>贷款期限</a:t>
+            </a:r>
+            <a:endParaRPr lang="en-US" sz="1100" dirty="0"/>
+          </a:p>
+        </p:txBody>
+      </p:sp>
+      <p:sp>
+        <p:nvSpPr>
+          <p:cNvPr id="37" name="Text 35"/>
+          <p:cNvSpPr/>
+          <p:nvPr/>
+        </p:nvSpPr>
+        <p:spPr>
+          <a:xfrm>
+            <a:off x="6629400" y="4818888"/>
+            <a:ext cx="2194560" cy="292608"/>
+          </a:xfrm>
+          <a:prstGeom prst="rect">
+            <a:avLst/>
+          </a:prstGeom>
+          <a:noFill/>
+          <a:ln/>
+        </p:spPr>
+        <p:txBody>
+          <a:bodyPr wrap="square" lIns="0" tIns="0" rIns="0" bIns="0" rtlCol="0" anchor="ctr"/>
+          <a:lstStyle/>
+          <a:p>
+            <a:pPr indent="0" marL="0">
+              <a:buNone/>
+            </a:pPr>
+            <a:r>
+              <a:rPr lang="en-US" sz="1200" b="1" dirty="0">
+                <a:solidFill>
+                  <a:srgbClr val="1E293B"/>
+                </a:solidFill>
+                <a:latin typeface="Calibri" pitchFamily="34" charset="0"/>
+                <a:ea typeface="Calibri" pitchFamily="34" charset="-122"/>
+                <a:cs typeface="Calibri" pitchFamily="34" charset="-120"/>
+              </a:rPr>
+              <a:t>3. tot_hi_cred_lim</a:t>
+            </a:r>
+            <a:endParaRPr lang="en-US" sz="1200" dirty="0"/>
+          </a:p>
+        </p:txBody>
+      </p:sp>
+      <p:sp>
+        <p:nvSpPr>
+          <p:cNvPr id="38" name="Text 36"/>
+          <p:cNvSpPr/>
+          <p:nvPr/>
+        </p:nvSpPr>
+        <p:spPr>
+          <a:xfrm>
+            <a:off x="8823960" y="4818888"/>
+            <a:ext cx="1097280" cy="292608"/>
+          </a:xfrm>
+          <a:prstGeom prst="rect">
+            <a:avLst/>
+          </a:prstGeom>
+          <a:noFill/>
+          <a:ln/>
+        </p:spPr>
+        <p:txBody>
+          <a:bodyPr wrap="square" lIns="0" tIns="0" rIns="0" bIns="0" rtlCol="0" anchor="ctr"/>
+          <a:lstStyle/>
+          <a:p>
+            <a:pPr indent="0" marL="0">
+              <a:buNone/>
+            </a:pPr>
+            <a:r>
+              <a:rPr lang="en-US" sz="1200" b="1" dirty="0">
+                <a:solidFill>
+                  <a:srgbClr val="14B8A6"/>
+                </a:solidFill>
+                <a:latin typeface="Calibri" pitchFamily="34" charset="0"/>
+                <a:ea typeface="Calibri" pitchFamily="34" charset="-122"/>
+                <a:cs typeface="Calibri" pitchFamily="34" charset="-120"/>
+              </a:rPr>
+              <a:t>IV=0.057</a:t>
+            </a:r>
+            <a:endParaRPr lang="en-US" sz="1200" dirty="0"/>
+          </a:p>
+        </p:txBody>
+      </p:sp>
+      <p:sp>
+        <p:nvSpPr>
+          <p:cNvPr id="39" name="Text 37"/>
+          <p:cNvSpPr/>
+          <p:nvPr/>
+        </p:nvSpPr>
+        <p:spPr>
+          <a:xfrm>
+            <a:off x="9921240" y="4818888"/>
+            <a:ext cx="1691640" cy="292608"/>
+          </a:xfrm>
+          <a:prstGeom prst="rect">
+            <a:avLst/>
+          </a:prstGeom>
+          <a:noFill/>
+          <a:ln/>
+        </p:spPr>
+        <p:txBody>
+          <a:bodyPr wrap="square" lIns="0" tIns="0" rIns="0" bIns="0" rtlCol="0" anchor="ctr"/>
+          <a:lstStyle/>
+          <a:p>
+            <a:pPr indent="0" marL="0">
+              <a:buNone/>
+            </a:pPr>
+            <a:r>
+              <a:rPr lang="en-US" sz="1100" dirty="0">
+                <a:solidFill>
+                  <a:srgbClr val="64748B"/>
+                </a:solidFill>
+                <a:latin typeface="Calibri" pitchFamily="34" charset="0"/>
+                <a:ea typeface="Calibri" pitchFamily="34" charset="-122"/>
+                <a:cs typeface="Calibri" pitchFamily="34" charset="-120"/>
+              </a:rPr>
+              <a:t>总高信用额度</a:t>
+            </a:r>
+            <a:endParaRPr lang="en-US" sz="1100" dirty="0"/>
+          </a:p>
+        </p:txBody>
+      </p:sp>
+      <p:sp>
+        <p:nvSpPr>
+          <p:cNvPr id="40" name="Text 38"/>
+          <p:cNvSpPr/>
+          <p:nvPr/>
+        </p:nvSpPr>
+        <p:spPr>
+          <a:xfrm>
+            <a:off x="6629400" y="5148072"/>
+            <a:ext cx="2194560" cy="292608"/>
+          </a:xfrm>
+          <a:prstGeom prst="rect">
+            <a:avLst/>
+          </a:prstGeom>
+          <a:noFill/>
+          <a:ln/>
+        </p:spPr>
+        <p:txBody>
+          <a:bodyPr wrap="square" lIns="0" tIns="0" rIns="0" bIns="0" rtlCol="0" anchor="ctr"/>
+          <a:lstStyle/>
+          <a:p>
+            <a:pPr indent="0" marL="0">
+              <a:buNone/>
+            </a:pPr>
+            <a:r>
+              <a:rPr lang="en-US" sz="1200" b="1" dirty="0">
+                <a:solidFill>
+                  <a:srgbClr val="1E293B"/>
+                </a:solidFill>
+                <a:latin typeface="Calibri" pitchFamily="34" charset="0"/>
+                <a:ea typeface="Calibri" pitchFamily="34" charset="-122"/>
+                <a:cs typeface="Calibri" pitchFamily="34" charset="-120"/>
+              </a:rPr>
+              <a:t>4. loan_amnt</a:t>
+            </a:r>
+            <a:endParaRPr lang="en-US" sz="1200" dirty="0"/>
+          </a:p>
+        </p:txBody>
+      </p:sp>
+      <p:sp>
+        <p:nvSpPr>
+          <p:cNvPr id="41" name="Text 39"/>
+          <p:cNvSpPr/>
+          <p:nvPr/>
+        </p:nvSpPr>
+        <p:spPr>
+          <a:xfrm>
+            <a:off x="8823960" y="5148072"/>
+            <a:ext cx="1097280" cy="292608"/>
+          </a:xfrm>
+          <a:prstGeom prst="rect">
+            <a:avLst/>
+          </a:prstGeom>
+          <a:noFill/>
+          <a:ln/>
+        </p:spPr>
+        <p:txBody>
+          <a:bodyPr wrap="square" lIns="0" tIns="0" rIns="0" bIns="0" rtlCol="0" anchor="ctr"/>
+          <a:lstStyle/>
+          <a:p>
+            <a:pPr indent="0" marL="0">
+              <a:buNone/>
+            </a:pPr>
+            <a:r>
+              <a:rPr lang="en-US" sz="1200" b="1" dirty="0">
+                <a:solidFill>
+                  <a:srgbClr val="14B8A6"/>
+                </a:solidFill>
+                <a:latin typeface="Calibri" pitchFamily="34" charset="0"/>
+                <a:ea typeface="Calibri" pitchFamily="34" charset="-122"/>
+                <a:cs typeface="Calibri" pitchFamily="34" charset="-120"/>
+              </a:rPr>
+              <a:t>IV=0.056</a:t>
+            </a:r>
+            <a:endParaRPr lang="en-US" sz="1200" dirty="0"/>
+          </a:p>
+        </p:txBody>
+      </p:sp>
+      <p:sp>
+        <p:nvSpPr>
+          <p:cNvPr id="42" name="Text 40"/>
+          <p:cNvSpPr/>
+          <p:nvPr/>
+        </p:nvSpPr>
+        <p:spPr>
+          <a:xfrm>
+            <a:off x="9921240" y="5148072"/>
+            <a:ext cx="1691640" cy="292608"/>
+          </a:xfrm>
+          <a:prstGeom prst="rect">
+            <a:avLst/>
+          </a:prstGeom>
+          <a:noFill/>
+          <a:ln/>
+        </p:spPr>
+        <p:txBody>
+          <a:bodyPr wrap="square" lIns="0" tIns="0" rIns="0" bIns="0" rtlCol="0" anchor="ctr"/>
+          <a:lstStyle/>
+          <a:p>
+            <a:pPr indent="0" marL="0">
+              <a:buNone/>
+            </a:pPr>
+            <a:r>
+              <a:rPr lang="en-US" sz="1100" dirty="0">
+                <a:solidFill>
+                  <a:srgbClr val="64748B"/>
+                </a:solidFill>
+                <a:latin typeface="Calibri" pitchFamily="34" charset="0"/>
+                <a:ea typeface="Calibri" pitchFamily="34" charset="-122"/>
+                <a:cs typeface="Calibri" pitchFamily="34" charset="-120"/>
+              </a:rPr>
+              <a:t>申请金额</a:t>
+            </a:r>
+            <a:endParaRPr lang="en-US" sz="1100" dirty="0"/>
+          </a:p>
+        </p:txBody>
+      </p:sp>
+      <p:sp>
+        <p:nvSpPr>
+          <p:cNvPr id="43" name="Text 41"/>
+          <p:cNvSpPr/>
+          <p:nvPr/>
+        </p:nvSpPr>
+        <p:spPr>
+          <a:xfrm>
+            <a:off x="6629400" y="5477256"/>
+            <a:ext cx="2194560" cy="292608"/>
+          </a:xfrm>
+          <a:prstGeom prst="rect">
+            <a:avLst/>
+          </a:prstGeom>
+          <a:noFill/>
+          <a:ln/>
+        </p:spPr>
+        <p:txBody>
+          <a:bodyPr wrap="square" lIns="0" tIns="0" rIns="0" bIns="0" rtlCol="0" anchor="ctr"/>
+          <a:lstStyle/>
+          <a:p>
+            <a:pPr indent="0" marL="0">
+              <a:buNone/>
+            </a:pPr>
+            <a:r>
+              <a:rPr lang="en-US" sz="1200" b="1" dirty="0">
+                <a:solidFill>
+                  <a:srgbClr val="1E293B"/>
+                </a:solidFill>
+                <a:latin typeface="Calibri" pitchFamily="34" charset="0"/>
+                <a:ea typeface="Calibri" pitchFamily="34" charset="-122"/>
+                <a:cs typeface="Calibri" pitchFamily="34" charset="-120"/>
+              </a:rPr>
+              <a:t>5. open_rv_24m</a:t>
+            </a:r>
+            <a:endParaRPr lang="en-US" sz="1200" dirty="0"/>
+          </a:p>
+        </p:txBody>
+      </p:sp>
+      <p:sp>
+        <p:nvSpPr>
+          <p:cNvPr id="44" name="Text 42"/>
+          <p:cNvSpPr/>
+          <p:nvPr/>
+        </p:nvSpPr>
+        <p:spPr>
+          <a:xfrm>
+            <a:off x="8823960" y="5477256"/>
+            <a:ext cx="1097280" cy="292608"/>
+          </a:xfrm>
+          <a:prstGeom prst="rect">
+            <a:avLst/>
+          </a:prstGeom>
+          <a:noFill/>
+          <a:ln/>
+        </p:spPr>
+        <p:txBody>
+          <a:bodyPr wrap="square" lIns="0" tIns="0" rIns="0" bIns="0" rtlCol="0" anchor="ctr"/>
+          <a:lstStyle/>
+          <a:p>
+            <a:pPr indent="0" marL="0">
+              <a:buNone/>
+            </a:pPr>
+            <a:r>
+              <a:rPr lang="en-US" sz="1200" b="1" dirty="0">
+                <a:solidFill>
+                  <a:srgbClr val="14B8A6"/>
+                </a:solidFill>
+                <a:latin typeface="Calibri" pitchFamily="34" charset="0"/>
+                <a:ea typeface="Calibri" pitchFamily="34" charset="-122"/>
+                <a:cs typeface="Calibri" pitchFamily="34" charset="-120"/>
+              </a:rPr>
+              <a:t>IV=0.047</a:t>
+            </a:r>
+            <a:endParaRPr lang="en-US" sz="1200" dirty="0"/>
+          </a:p>
+        </p:txBody>
+      </p:sp>
+      <p:sp>
+        <p:nvSpPr>
+          <p:cNvPr id="45" name="Text 43"/>
+          <p:cNvSpPr/>
+          <p:nvPr/>
+        </p:nvSpPr>
+        <p:spPr>
+          <a:xfrm>
+            <a:off x="9921240" y="5477256"/>
+            <a:ext cx="1691640" cy="292608"/>
+          </a:xfrm>
+          <a:prstGeom prst="rect">
+            <a:avLst/>
+          </a:prstGeom>
+          <a:noFill/>
+          <a:ln/>
+        </p:spPr>
+        <p:txBody>
+          <a:bodyPr wrap="square" lIns="0" tIns="0" rIns="0" bIns="0" rtlCol="0" anchor="ctr"/>
+          <a:lstStyle/>
+          <a:p>
+            <a:pPr indent="0" marL="0">
+              <a:buNone/>
+            </a:pPr>
+            <a:r>
+              <a:rPr lang="en-US" sz="1100" dirty="0">
+                <a:solidFill>
+                  <a:srgbClr val="64748B"/>
+                </a:solidFill>
+                <a:latin typeface="Calibri" pitchFamily="34" charset="0"/>
+                <a:ea typeface="Calibri" pitchFamily="34" charset="-122"/>
+                <a:cs typeface="Calibri" pitchFamily="34" charset="-120"/>
+              </a:rPr>
+              <a:t>24月内新开循环账户</a:t>
+            </a:r>
+            <a:endParaRPr lang="en-US" sz="1100" dirty="0"/>
+          </a:p>
+        </p:txBody>
+      </p:sp>
+      <p:sp>
+        <p:nvSpPr>
+          <p:cNvPr id="46" name="Text 44"/>
+          <p:cNvSpPr/>
+          <p:nvPr/>
+        </p:nvSpPr>
+        <p:spPr>
+          <a:xfrm>
+            <a:off x="6629400" y="5806440"/>
+            <a:ext cx="2194560" cy="292608"/>
+          </a:xfrm>
+          <a:prstGeom prst="rect">
+            <a:avLst/>
+          </a:prstGeom>
+          <a:noFill/>
+          <a:ln/>
+        </p:spPr>
+        <p:txBody>
+          <a:bodyPr wrap="square" lIns="0" tIns="0" rIns="0" bIns="0" rtlCol="0" anchor="ctr"/>
+          <a:lstStyle/>
+          <a:p>
+            <a:pPr indent="0" marL="0">
+              <a:buNone/>
+            </a:pPr>
+            <a:r>
+              <a:rPr lang="en-US" sz="1200" b="1" dirty="0">
+                <a:solidFill>
+                  <a:srgbClr val="1E293B"/>
+                </a:solidFill>
+                <a:latin typeface="Calibri" pitchFamily="34" charset="0"/>
+                <a:ea typeface="Calibri" pitchFamily="34" charset="-122"/>
+                <a:cs typeface="Calibri" pitchFamily="34" charset="-120"/>
+              </a:rPr>
+              <a:t>6. home_ownership</a:t>
+            </a:r>
+            <a:endParaRPr lang="en-US" sz="1200" dirty="0"/>
+          </a:p>
+        </p:txBody>
+      </p:sp>
+      <p:sp>
+        <p:nvSpPr>
+          <p:cNvPr id="47" name="Text 45"/>
+          <p:cNvSpPr/>
+          <p:nvPr/>
+        </p:nvSpPr>
+        <p:spPr>
+          <a:xfrm>
+            <a:off x="8823960" y="5806440"/>
+            <a:ext cx="1097280" cy="292608"/>
+          </a:xfrm>
+          <a:prstGeom prst="rect">
+            <a:avLst/>
+          </a:prstGeom>
+          <a:noFill/>
+          <a:ln/>
+        </p:spPr>
+        <p:txBody>
+          <a:bodyPr wrap="square" lIns="0" tIns="0" rIns="0" bIns="0" rtlCol="0" anchor="ctr"/>
+          <a:lstStyle/>
+          <a:p>
+            <a:pPr indent="0" marL="0">
+              <a:buNone/>
+            </a:pPr>
+            <a:r>
+              <a:rPr lang="en-US" sz="1200" b="1" dirty="0">
+                <a:solidFill>
+                  <a:srgbClr val="14B8A6"/>
+                </a:solidFill>
+                <a:latin typeface="Calibri" pitchFamily="34" charset="0"/>
+                <a:ea typeface="Calibri" pitchFamily="34" charset="-122"/>
+                <a:cs typeface="Calibri" pitchFamily="34" charset="-120"/>
+              </a:rPr>
+              <a:t>IV=0.039</a:t>
+            </a:r>
+            <a:endParaRPr lang="en-US" sz="1200" dirty="0"/>
+          </a:p>
+        </p:txBody>
+      </p:sp>
+      <p:sp>
+        <p:nvSpPr>
+          <p:cNvPr id="48" name="Text 46"/>
+          <p:cNvSpPr/>
+          <p:nvPr/>
+        </p:nvSpPr>
+        <p:spPr>
+          <a:xfrm>
+            <a:off x="9921240" y="5806440"/>
+            <a:ext cx="1691640" cy="292608"/>
+          </a:xfrm>
+          <a:prstGeom prst="rect">
+            <a:avLst/>
+          </a:prstGeom>
+          <a:noFill/>
+          <a:ln/>
+        </p:spPr>
+        <p:txBody>
+          <a:bodyPr wrap="square" lIns="0" tIns="0" rIns="0" bIns="0" rtlCol="0" anchor="ctr"/>
+          <a:lstStyle/>
+          <a:p>
+            <a:pPr indent="0" marL="0">
+              <a:buNone/>
+            </a:pPr>
+            <a:r>
+              <a:rPr lang="en-US" sz="1100" dirty="0">
+                <a:solidFill>
+                  <a:srgbClr val="64748B"/>
+                </a:solidFill>
+                <a:latin typeface="Calibri" pitchFamily="34" charset="0"/>
+                <a:ea typeface="Calibri" pitchFamily="34" charset="-122"/>
+                <a:cs typeface="Calibri" pitchFamily="34" charset="-120"/>
+              </a:rPr>
+              <a:t>房屋所有权</a:t>
+            </a:r>
+            <a:endParaRPr lang="en-US" sz="1100" dirty="0"/>
           </a:p>
         </p:txBody>
       </p:sp>
@@ -11554,7 +13907,7 @@
     <p:bg>
       <p:bgPr>
         <a:solidFill>
-          <a:srgbClr val="21295C"/>
+          <a:srgbClr val="F8FAFC"/>
         </a:solidFill>
       </p:bgPr>
     </p:bg>
@@ -11581,7 +13934,7 @@
         <p:spPr>
           <a:xfrm>
             <a:off x="0" y="0"/>
-            <a:ext cx="12161520" cy="137160"/>
+            <a:ext cx="12161520" cy="73152"/>
           </a:xfrm>
           <a:prstGeom prst="rect">
             <a:avLst/>
@@ -11600,34 +13953,34 @@
         </p:nvSpPr>
         <p:spPr>
           <a:xfrm>
-            <a:off x="548640" y="365760"/>
-            <a:ext cx="10972800" cy="640080"/>
-          </a:xfrm>
-          <a:prstGeom prst="rect">
-            <a:avLst/>
-          </a:prstGeom>
-          <a:noFill/>
-          <a:ln/>
-        </p:spPr>
-        <p:txBody>
-          <a:bodyPr wrap="square" lIns="0" tIns="0" rIns="0" bIns="0" rtlCol="0" anchor="ctr"/>
-          <a:lstStyle/>
-          <a:p>
-            <a:pPr indent="0" marL="0">
-              <a:buNone/>
-            </a:pPr>
-            <a:r>
-              <a:rPr lang="en-US" sz="3200" b="1" dirty="0">
-                <a:solidFill>
-                  <a:srgbClr val="FFFFFF"/>
+            <a:off x="548640" y="274320"/>
+            <a:ext cx="10972800" cy="548640"/>
+          </a:xfrm>
+          <a:prstGeom prst="rect">
+            <a:avLst/>
+          </a:prstGeom>
+          <a:noFill/>
+          <a:ln/>
+        </p:spPr>
+        <p:txBody>
+          <a:bodyPr wrap="square" lIns="0" tIns="0" rIns="0" bIns="0" rtlCol="0" anchor="ctr"/>
+          <a:lstStyle/>
+          <a:p>
+            <a:pPr indent="0" marL="0">
+              <a:buNone/>
+            </a:pPr>
+            <a:r>
+              <a:rPr lang="en-US" sz="2800" b="1" dirty="0">
+                <a:solidFill>
+                  <a:srgbClr val="21295C"/>
                 </a:solidFill>
                 <a:latin typeface="Georgia" pitchFamily="34" charset="0"/>
                 <a:ea typeface="Georgia" pitchFamily="34" charset="-122"/>
                 <a:cs typeface="Georgia" pitchFamily="34" charset="-120"/>
               </a:rPr>
-              <a:t>现场 Demo</a:t>
-            </a:r>
-            <a:endParaRPr lang="en-US" sz="3200" dirty="0"/>
+              <a:t>可解释性：SHAP Top3</a:t>
+            </a:r>
+            <a:endParaRPr lang="en-US" sz="2800" dirty="0"/>
           </a:p>
         </p:txBody>
       </p:sp>
@@ -11639,24 +13992,271 @@
         </p:nvSpPr>
         <p:spPr>
           <a:xfrm>
-            <a:off x="548640" y="1005840"/>
-            <a:ext cx="10972800" cy="457200"/>
-          </a:xfrm>
-          <a:prstGeom prst="rect">
-            <a:avLst/>
-          </a:prstGeom>
-          <a:noFill/>
-          <a:ln/>
-        </p:spPr>
-        <p:txBody>
-          <a:bodyPr wrap="square" lIns="0" tIns="0" rIns="0" bIns="0" rtlCol="0" anchor="ctr"/>
-          <a:lstStyle/>
-          <a:p>
-            <a:pPr indent="0" marL="0">
-              <a:buNone/>
-            </a:pPr>
-            <a:r>
-              <a:rPr lang="en-US" sz="1800" dirty="0">
+            <a:off x="457200" y="6400800"/>
+            <a:ext cx="5486400" cy="274320"/>
+          </a:xfrm>
+          <a:prstGeom prst="rect">
+            <a:avLst/>
+          </a:prstGeom>
+          <a:noFill/>
+          <a:ln/>
+        </p:spPr>
+        <p:txBody>
+          <a:bodyPr wrap="square" lIns="0" tIns="0" rIns="0" bIns="0" rtlCol="0" anchor="ctr"/>
+          <a:lstStyle/>
+          <a:p>
+            <a:pPr indent="0" marL="0">
+              <a:buNone/>
+            </a:pPr>
+            <a:r>
+              <a:rPr lang="en-US" sz="900" dirty="0">
+                <a:solidFill>
+                  <a:srgbClr val="64748B"/>
+                </a:solidFill>
+                <a:latin typeface="Calibri" pitchFamily="34" charset="0"/>
+                <a:ea typeface="Calibri" pitchFamily="34" charset="-122"/>
+                <a:cs typeface="Calibri" pitchFamily="34" charset="-120"/>
+              </a:rPr>
+              <a:t>CreditMind · AI 信贷风控大脑</a:t>
+            </a:r>
+            <a:endParaRPr lang="en-US" sz="900" dirty="0"/>
+          </a:p>
+        </p:txBody>
+      </p:sp>
+      <p:sp>
+        <p:nvSpPr>
+          <p:cNvPr id="5" name="Text 3"/>
+          <p:cNvSpPr/>
+          <p:nvPr/>
+        </p:nvSpPr>
+        <p:spPr>
+          <a:xfrm>
+            <a:off x="11247120" y="6400800"/>
+            <a:ext cx="457200" cy="274320"/>
+          </a:xfrm>
+          <a:prstGeom prst="rect">
+            <a:avLst/>
+          </a:prstGeom>
+          <a:noFill/>
+          <a:ln/>
+        </p:spPr>
+        <p:txBody>
+          <a:bodyPr wrap="square" lIns="0" tIns="0" rIns="0" bIns="0" rtlCol="0" anchor="ctr"/>
+          <a:lstStyle/>
+          <a:p>
+            <a:pPr algn="r" indent="0" marL="0">
+              <a:buNone/>
+            </a:pPr>
+            <a:r>
+              <a:rPr lang="en-US" sz="900" dirty="0">
+                <a:solidFill>
+                  <a:srgbClr val="64748B"/>
+                </a:solidFill>
+              </a:rPr>
+              <a:t>9 / 14</a:t>
+            </a:r>
+            <a:endParaRPr lang="en-US" sz="900" dirty="0"/>
+          </a:p>
+        </p:txBody>
+      </p:sp>
+      <p:pic>
+        <p:nvPicPr>
+          <p:cNvPr id="6" name="Image 0" descr="/Users/yolanda/NanTe2025/金融AIagent暑假集训/模块四/CreditMind/experiments/results/shap_top15.png">    </p:cNvPr>
+          <p:cNvPicPr>
+            <a:picLocks noChangeAspect="1"/>
+          </p:cNvPicPr>
+          <p:nvPr/>
+        </p:nvPicPr>
+        <p:blipFill>
+          <a:blip r:embed="rId1"/>
+          <a:srcRect l="0" r="0" t="0" b="0"/>
+          <a:stretch/>
+        </p:blipFill>
+        <p:spPr>
+          <a:xfrm>
+            <a:off x="548640" y="1188720"/>
+            <a:ext cx="6858000" cy="4754880"/>
+          </a:xfrm>
+          <a:prstGeom prst="rect">
+            <a:avLst/>
+          </a:prstGeom>
+        </p:spPr>
+      </p:pic>
+      <p:sp>
+        <p:nvSpPr>
+          <p:cNvPr id="7" name="Shape 4"/>
+          <p:cNvSpPr/>
+          <p:nvPr/>
+        </p:nvSpPr>
+        <p:spPr>
+          <a:xfrm>
+            <a:off x="7772400" y="1188720"/>
+            <a:ext cx="3840480" cy="4754880"/>
+          </a:xfrm>
+          <a:prstGeom prst="rect">
+            <a:avLst/>
+          </a:prstGeom>
+          <a:solidFill>
+            <a:srgbClr val="FFFFFF"/>
+          </a:solidFill>
+          <a:ln w="12700">
+            <a:solidFill>
+              <a:srgbClr val="E2E8F0"/>
+            </a:solidFill>
+            <a:prstDash val="solid"/>
+          </a:ln>
+          <a:effectLst>
+            <a:outerShdw sx="100000" sy="100000" kx="0" ky="0" algn="bl" rotWithShape="0" blurRad="76200" dist="25400" dir="8100000">
+              <a:srgbClr val="000000">
+                <a:alpha val="8000"/>
+              </a:srgbClr>
+            </a:outerShdw>
+          </a:effectLst>
+        </p:spPr>
+      </p:sp>
+      <p:sp>
+        <p:nvSpPr>
+          <p:cNvPr id="8" name="Text 5"/>
+          <p:cNvSpPr/>
+          <p:nvPr/>
+        </p:nvSpPr>
+        <p:spPr>
+          <a:xfrm>
+            <a:off x="7955280" y="1371600"/>
+            <a:ext cx="3474720" cy="365760"/>
+          </a:xfrm>
+          <a:prstGeom prst="rect">
+            <a:avLst/>
+          </a:prstGeom>
+          <a:noFill/>
+          <a:ln/>
+        </p:spPr>
+        <p:txBody>
+          <a:bodyPr wrap="square" lIns="0" tIns="0" rIns="0" bIns="0" rtlCol="0" anchor="ctr"/>
+          <a:lstStyle/>
+          <a:p>
+            <a:pPr indent="0" marL="0">
+              <a:buNone/>
+            </a:pPr>
+            <a:r>
+              <a:rPr lang="en-US" sz="1600" b="1" dirty="0">
+                <a:solidFill>
+                  <a:srgbClr val="21295C"/>
+                </a:solidFill>
+                <a:latin typeface="Calibri" pitchFamily="34" charset="0"/>
+                <a:ea typeface="Calibri" pitchFamily="34" charset="-122"/>
+                <a:cs typeface="Calibri" pitchFamily="34" charset="-120"/>
+              </a:rPr>
+              <a:t>示例解读</a:t>
+            </a:r>
+            <a:endParaRPr lang="en-US" sz="1600" dirty="0"/>
+          </a:p>
+        </p:txBody>
+      </p:sp>
+      <p:sp>
+        <p:nvSpPr>
+          <p:cNvPr id="9" name="Text 6"/>
+          <p:cNvSpPr/>
+          <p:nvPr/>
+        </p:nvSpPr>
+        <p:spPr>
+          <a:xfrm>
+            <a:off x="7955280" y="1828800"/>
+            <a:ext cx="3474720" cy="3931920"/>
+          </a:xfrm>
+          <a:prstGeom prst="rect">
+            <a:avLst/>
+          </a:prstGeom>
+          <a:noFill/>
+          <a:ln/>
+        </p:spPr>
+        <p:txBody>
+          <a:bodyPr wrap="square" lIns="0" tIns="0" rIns="0" bIns="0" rtlCol="0" anchor="t"/>
+          <a:lstStyle/>
+          <a:p>
+            <a:pPr indent="0" marL="0">
+              <a:buNone/>
+            </a:pPr>
+            <a:r>
+              <a:rPr lang="en-US" sz="1300" dirty="0">
+                <a:solidFill>
+                  <a:srgbClr val="1E293B"/>
+                </a:solidFill>
+                <a:latin typeface="Calibri" pitchFamily="34" charset="0"/>
+                <a:ea typeface="Calibri" pitchFamily="34" charset="-122"/>
+                <a:cs typeface="Calibri" pitchFamily="34" charset="-120"/>
+              </a:rPr>
+              <a:t>"这位借款人违约概率 72%
+</a:t>
+            </a:r>
+            <a:pPr indent="0" marL="0">
+              <a:buNone/>
+            </a:pPr>
+            <a:r>
+              <a:rPr lang="en-US" sz="1300" b="1" dirty="0">
+                <a:solidFill>
+                  <a:srgbClr val="1E293B"/>
+                </a:solidFill>
+                <a:latin typeface="Calibri" pitchFamily="34" charset="0"/>
+                <a:ea typeface="Calibri" pitchFamily="34" charset="-122"/>
+                <a:cs typeface="Calibri" pitchFamily="34" charset="-120"/>
+              </a:rPr>
+              <a:t>主要风险因子：
+</a:t>
+            </a:r>
+            <a:pPr indent="0" marL="0">
+              <a:buNone/>
+            </a:pPr>
+            <a:r>
+              <a:rPr lang="en-US" sz="1200" dirty="0">
+                <a:solidFill>
+                  <a:srgbClr val="64748B"/>
+                </a:solidFill>
+                <a:latin typeface="Calibri" pitchFamily="34" charset="0"/>
+                <a:ea typeface="Calibri" pitchFamily="34" charset="-122"/>
+                <a:cs typeface="Calibri" pitchFamily="34" charset="-120"/>
+              </a:rPr>
+              <a:t>1. int_rate（利率）13.5%
+   — 高于平均，平台已识别较高风险
+</a:t>
+            </a:r>
+            <a:pPr indent="0" marL="0">
+              <a:buNone/>
+            </a:pPr>
+            <a:r>
+              <a:rPr lang="en-US" sz="1200" dirty="0">
+                <a:solidFill>
+                  <a:srgbClr val="64748B"/>
+                </a:solidFill>
+                <a:latin typeface="Calibri" pitchFamily="34" charset="0"/>
+                <a:ea typeface="Calibri" pitchFamily="34" charset="-122"/>
+                <a:cs typeface="Calibri" pitchFamily="34" charset="-120"/>
+              </a:rPr>
+              <a:t>2. dti（负债收入比）35%
+   — 偏高，偿债压力大
+</a:t>
+            </a:r>
+            <a:pPr indent="0" marL="0">
+              <a:buNone/>
+            </a:pPr>
+            <a:r>
+              <a:rPr lang="en-US" sz="1200" dirty="0">
+                <a:solidFill>
+                  <a:srgbClr val="64748B"/>
+                </a:solidFill>
+                <a:latin typeface="Calibri" pitchFamily="34" charset="0"/>
+                <a:ea typeface="Calibri" pitchFamily="34" charset="-122"/>
+                <a:cs typeface="Calibri" pitchFamily="34" charset="-120"/>
+              </a:rPr>
+              <a:t>3. inq_last_6mths 5 次
+   — 频繁申贷，资金紧张信号
+</a:t>
+            </a:r>
+            <a:pPr indent="0" marL="0">
+              <a:buNone/>
+            </a:pPr>
+            <a:r>
+              <a:rPr lang="en-US" sz="1200" i="1" dirty="0">
                 <a:solidFill>
                   <a:srgbClr val="14B8A6"/>
                 </a:solidFill>
@@ -11664,596 +14264,9 @@
                 <a:ea typeface="Calibri" pitchFamily="34" charset="-122"/>
                 <a:cs typeface="Calibri" pitchFamily="34" charset="-120"/>
               </a:rPr>
-              <a:t>35 岁深圳电商老板借 20 万</a:t>
-            </a:r>
-            <a:endParaRPr lang="en-US" sz="1800" dirty="0"/>
-          </a:p>
-        </p:txBody>
-      </p:sp>
-      <p:sp>
-        <p:nvSpPr>
-          <p:cNvPr id="5" name="Shape 3"/>
-          <p:cNvSpPr/>
-          <p:nvPr/>
-        </p:nvSpPr>
-        <p:spPr>
-          <a:xfrm>
-            <a:off x="914400" y="1828800"/>
-            <a:ext cx="640080" cy="640080"/>
-          </a:xfrm>
-          <a:prstGeom prst="ellipse">
-            <a:avLst/>
-          </a:prstGeom>
-          <a:solidFill>
-            <a:srgbClr val="14B8A6"/>
-          </a:solidFill>
-          <a:ln/>
-        </p:spPr>
-      </p:sp>
-      <p:sp>
-        <p:nvSpPr>
-          <p:cNvPr id="6" name="Text 4"/>
-          <p:cNvSpPr/>
-          <p:nvPr/>
-        </p:nvSpPr>
-        <p:spPr>
-          <a:xfrm>
-            <a:off x="914400" y="1828800"/>
-            <a:ext cx="640080" cy="640080"/>
-          </a:xfrm>
-          <a:prstGeom prst="rect">
-            <a:avLst/>
-          </a:prstGeom>
-          <a:noFill/>
-          <a:ln/>
-        </p:spPr>
-        <p:txBody>
-          <a:bodyPr wrap="square" lIns="0" tIns="0" rIns="0" bIns="0" rtlCol="0" anchor="ctr"/>
-          <a:lstStyle/>
-          <a:p>
-            <a:pPr algn="ctr" indent="0" marL="0">
-              <a:buNone/>
-            </a:pPr>
-            <a:r>
-              <a:rPr lang="en-US" sz="2400" b="1" dirty="0">
-                <a:solidFill>
-                  <a:srgbClr val="21295C"/>
-                </a:solidFill>
-                <a:latin typeface="Georgia" pitchFamily="34" charset="0"/>
-                <a:ea typeface="Georgia" pitchFamily="34" charset="-122"/>
-                <a:cs typeface="Georgia" pitchFamily="34" charset="-120"/>
-              </a:rPr>
-              <a:t>1</a:t>
-            </a:r>
-            <a:endParaRPr lang="en-US" sz="2400" dirty="0"/>
-          </a:p>
-        </p:txBody>
-      </p:sp>
-      <p:sp>
-        <p:nvSpPr>
-          <p:cNvPr id="7" name="Text 5"/>
-          <p:cNvSpPr/>
-          <p:nvPr/>
-        </p:nvSpPr>
-        <p:spPr>
-          <a:xfrm>
-            <a:off x="1828800" y="1828800"/>
-            <a:ext cx="3657600" cy="320040"/>
-          </a:xfrm>
-          <a:prstGeom prst="rect">
-            <a:avLst/>
-          </a:prstGeom>
-          <a:noFill/>
-          <a:ln/>
-        </p:spPr>
-        <p:txBody>
-          <a:bodyPr wrap="square" lIns="0" tIns="0" rIns="0" bIns="0" rtlCol="0" anchor="ctr"/>
-          <a:lstStyle/>
-          <a:p>
-            <a:pPr indent="0" marL="0">
-              <a:buNone/>
-            </a:pPr>
-            <a:r>
-              <a:rPr lang="en-US" sz="1800" b="1" dirty="0">
-                <a:solidFill>
-                  <a:srgbClr val="FFFFFF"/>
-                </a:solidFill>
-                <a:latin typeface="Calibri" pitchFamily="34" charset="0"/>
-                <a:ea typeface="Calibri" pitchFamily="34" charset="-122"/>
-                <a:cs typeface="Calibri" pitchFamily="34" charset="-120"/>
-              </a:rPr>
-              <a:t>启动 Agent</a:t>
-            </a:r>
-            <a:endParaRPr lang="en-US" sz="1800" dirty="0"/>
-          </a:p>
-        </p:txBody>
-      </p:sp>
-      <p:sp>
-        <p:nvSpPr>
-          <p:cNvPr id="8" name="Text 6"/>
-          <p:cNvSpPr/>
-          <p:nvPr/>
-        </p:nvSpPr>
-        <p:spPr>
-          <a:xfrm>
-            <a:off x="1828800" y="2148840"/>
-            <a:ext cx="7315200" cy="320040"/>
-          </a:xfrm>
-          <a:prstGeom prst="rect">
-            <a:avLst/>
-          </a:prstGeom>
-          <a:noFill/>
-          <a:ln/>
-        </p:spPr>
-        <p:txBody>
-          <a:bodyPr wrap="square" lIns="0" tIns="0" rIns="0" bIns="0" rtlCol="0" anchor="ctr"/>
-          <a:lstStyle/>
-          <a:p>
-            <a:pPr indent="0" marL="0">
-              <a:buNone/>
-            </a:pPr>
-            <a:r>
-              <a:rPr lang="en-US" sz="1400" dirty="0">
-                <a:solidFill>
-                  <a:srgbClr val="E2E8F0"/>
-                </a:solidFill>
-                <a:latin typeface="Calibri" pitchFamily="34" charset="0"/>
-                <a:ea typeface="Calibri" pitchFamily="34" charset="-122"/>
-                <a:cs typeface="Calibri" pitchFamily="34" charset="-120"/>
-              </a:rPr>
-              <a:t>输入客户基本信息</a:t>
-            </a:r>
-            <a:endParaRPr lang="en-US" sz="1400" dirty="0"/>
-          </a:p>
-        </p:txBody>
-      </p:sp>
-      <p:sp>
-        <p:nvSpPr>
-          <p:cNvPr id="9" name="Shape 7"/>
-          <p:cNvSpPr/>
-          <p:nvPr/>
-        </p:nvSpPr>
-        <p:spPr>
-          <a:xfrm>
-            <a:off x="914400" y="2834640"/>
-            <a:ext cx="640080" cy="640080"/>
-          </a:xfrm>
-          <a:prstGeom prst="ellipse">
-            <a:avLst/>
-          </a:prstGeom>
-          <a:solidFill>
-            <a:srgbClr val="14B8A6"/>
-          </a:solidFill>
-          <a:ln/>
-        </p:spPr>
-      </p:sp>
-      <p:sp>
-        <p:nvSpPr>
-          <p:cNvPr id="10" name="Text 8"/>
-          <p:cNvSpPr/>
-          <p:nvPr/>
-        </p:nvSpPr>
-        <p:spPr>
-          <a:xfrm>
-            <a:off x="914400" y="2834640"/>
-            <a:ext cx="640080" cy="640080"/>
-          </a:xfrm>
-          <a:prstGeom prst="rect">
-            <a:avLst/>
-          </a:prstGeom>
-          <a:noFill/>
-          <a:ln/>
-        </p:spPr>
-        <p:txBody>
-          <a:bodyPr wrap="square" lIns="0" tIns="0" rIns="0" bIns="0" rtlCol="0" anchor="ctr"/>
-          <a:lstStyle/>
-          <a:p>
-            <a:pPr algn="ctr" indent="0" marL="0">
-              <a:buNone/>
-            </a:pPr>
-            <a:r>
-              <a:rPr lang="en-US" sz="2400" b="1" dirty="0">
-                <a:solidFill>
-                  <a:srgbClr val="21295C"/>
-                </a:solidFill>
-                <a:latin typeface="Georgia" pitchFamily="34" charset="0"/>
-                <a:ea typeface="Georgia" pitchFamily="34" charset="-122"/>
-                <a:cs typeface="Georgia" pitchFamily="34" charset="-120"/>
-              </a:rPr>
-              <a:t>2</a:t>
-            </a:r>
-            <a:endParaRPr lang="en-US" sz="2400" dirty="0"/>
-          </a:p>
-        </p:txBody>
-      </p:sp>
-      <p:sp>
-        <p:nvSpPr>
-          <p:cNvPr id="11" name="Text 9"/>
-          <p:cNvSpPr/>
-          <p:nvPr/>
-        </p:nvSpPr>
-        <p:spPr>
-          <a:xfrm>
-            <a:off x="1828800" y="2834640"/>
-            <a:ext cx="3657600" cy="320040"/>
-          </a:xfrm>
-          <a:prstGeom prst="rect">
-            <a:avLst/>
-          </a:prstGeom>
-          <a:noFill/>
-          <a:ln/>
-        </p:spPr>
-        <p:txBody>
-          <a:bodyPr wrap="square" lIns="0" tIns="0" rIns="0" bIns="0" rtlCol="0" anchor="ctr"/>
-          <a:lstStyle/>
-          <a:p>
-            <a:pPr indent="0" marL="0">
-              <a:buNone/>
-            </a:pPr>
-            <a:r>
-              <a:rPr lang="en-US" sz="1800" b="1" dirty="0">
-                <a:solidFill>
-                  <a:srgbClr val="FFFFFF"/>
-                </a:solidFill>
-                <a:latin typeface="Calibri" pitchFamily="34" charset="0"/>
-                <a:ea typeface="Calibri" pitchFamily="34" charset="-122"/>
-                <a:cs typeface="Calibri" pitchFamily="34" charset="-120"/>
-              </a:rPr>
-              <a:t>多轮访谈</a:t>
-            </a:r>
-            <a:endParaRPr lang="en-US" sz="1800" dirty="0"/>
-          </a:p>
-        </p:txBody>
-      </p:sp>
-      <p:sp>
-        <p:nvSpPr>
-          <p:cNvPr id="12" name="Text 10"/>
-          <p:cNvSpPr/>
-          <p:nvPr/>
-        </p:nvSpPr>
-        <p:spPr>
-          <a:xfrm>
-            <a:off x="1828800" y="3154680"/>
-            <a:ext cx="7315200" cy="320040"/>
-          </a:xfrm>
-          <a:prstGeom prst="rect">
-            <a:avLst/>
-          </a:prstGeom>
-          <a:noFill/>
-          <a:ln/>
-        </p:spPr>
-        <p:txBody>
-          <a:bodyPr wrap="square" lIns="0" tIns="0" rIns="0" bIns="0" rtlCol="0" anchor="ctr"/>
-          <a:lstStyle/>
-          <a:p>
-            <a:pPr indent="0" marL="0">
-              <a:buNone/>
-            </a:pPr>
-            <a:r>
-              <a:rPr lang="en-US" sz="1400" dirty="0">
-                <a:solidFill>
-                  <a:srgbClr val="E2E8F0"/>
-                </a:solidFill>
-                <a:latin typeface="Calibri" pitchFamily="34" charset="0"/>
-                <a:ea typeface="Calibri" pitchFamily="34" charset="-122"/>
-                <a:cs typeface="Calibri" pitchFamily="34" charset="-120"/>
-              </a:rPr>
-              <a:t>Agent 自动提问 19 项特征</a:t>
-            </a:r>
-            <a:endParaRPr lang="en-US" sz="1400" dirty="0"/>
-          </a:p>
-        </p:txBody>
-      </p:sp>
-      <p:sp>
-        <p:nvSpPr>
-          <p:cNvPr id="13" name="Shape 11"/>
-          <p:cNvSpPr/>
-          <p:nvPr/>
-        </p:nvSpPr>
-        <p:spPr>
-          <a:xfrm>
-            <a:off x="914400" y="3840480"/>
-            <a:ext cx="640080" cy="640080"/>
-          </a:xfrm>
-          <a:prstGeom prst="ellipse">
-            <a:avLst/>
-          </a:prstGeom>
-          <a:solidFill>
-            <a:srgbClr val="14B8A6"/>
-          </a:solidFill>
-          <a:ln/>
-        </p:spPr>
-      </p:sp>
-      <p:sp>
-        <p:nvSpPr>
-          <p:cNvPr id="14" name="Text 12"/>
-          <p:cNvSpPr/>
-          <p:nvPr/>
-        </p:nvSpPr>
-        <p:spPr>
-          <a:xfrm>
-            <a:off x="914400" y="3840480"/>
-            <a:ext cx="640080" cy="640080"/>
-          </a:xfrm>
-          <a:prstGeom prst="rect">
-            <a:avLst/>
-          </a:prstGeom>
-          <a:noFill/>
-          <a:ln/>
-        </p:spPr>
-        <p:txBody>
-          <a:bodyPr wrap="square" lIns="0" tIns="0" rIns="0" bIns="0" rtlCol="0" anchor="ctr"/>
-          <a:lstStyle/>
-          <a:p>
-            <a:pPr algn="ctr" indent="0" marL="0">
-              <a:buNone/>
-            </a:pPr>
-            <a:r>
-              <a:rPr lang="en-US" sz="2400" b="1" dirty="0">
-                <a:solidFill>
-                  <a:srgbClr val="21295C"/>
-                </a:solidFill>
-                <a:latin typeface="Georgia" pitchFamily="34" charset="0"/>
-                <a:ea typeface="Georgia" pitchFamily="34" charset="-122"/>
-                <a:cs typeface="Georgia" pitchFamily="34" charset="-120"/>
-              </a:rPr>
-              <a:t>3</a:t>
-            </a:r>
-            <a:endParaRPr lang="en-US" sz="2400" dirty="0"/>
-          </a:p>
-        </p:txBody>
-      </p:sp>
-      <p:sp>
-        <p:nvSpPr>
-          <p:cNvPr id="15" name="Text 13"/>
-          <p:cNvSpPr/>
-          <p:nvPr/>
-        </p:nvSpPr>
-        <p:spPr>
-          <a:xfrm>
-            <a:off x="1828800" y="3840480"/>
-            <a:ext cx="3657600" cy="320040"/>
-          </a:xfrm>
-          <a:prstGeom prst="rect">
-            <a:avLst/>
-          </a:prstGeom>
-          <a:noFill/>
-          <a:ln/>
-        </p:spPr>
-        <p:txBody>
-          <a:bodyPr wrap="square" lIns="0" tIns="0" rIns="0" bIns="0" rtlCol="0" anchor="ctr"/>
-          <a:lstStyle/>
-          <a:p>
-            <a:pPr indent="0" marL="0">
-              <a:buNone/>
-            </a:pPr>
-            <a:r>
-              <a:rPr lang="en-US" sz="1800" b="1" dirty="0">
-                <a:solidFill>
-                  <a:srgbClr val="FFFFFF"/>
-                </a:solidFill>
-                <a:latin typeface="Calibri" pitchFamily="34" charset="0"/>
-                <a:ea typeface="Calibri" pitchFamily="34" charset="-122"/>
-                <a:cs typeface="Calibri" pitchFamily="34" charset="-120"/>
-              </a:rPr>
-              <a:t>模型推理</a:t>
-            </a:r>
-            <a:endParaRPr lang="en-US" sz="1800" dirty="0"/>
-          </a:p>
-        </p:txBody>
-      </p:sp>
-      <p:sp>
-        <p:nvSpPr>
-          <p:cNvPr id="16" name="Text 14"/>
-          <p:cNvSpPr/>
-          <p:nvPr/>
-        </p:nvSpPr>
-        <p:spPr>
-          <a:xfrm>
-            <a:off x="1828800" y="4160520"/>
-            <a:ext cx="7315200" cy="320040"/>
-          </a:xfrm>
-          <a:prstGeom prst="rect">
-            <a:avLst/>
-          </a:prstGeom>
-          <a:noFill/>
-          <a:ln/>
-        </p:spPr>
-        <p:txBody>
-          <a:bodyPr wrap="square" lIns="0" tIns="0" rIns="0" bIns="0" rtlCol="0" anchor="ctr"/>
-          <a:lstStyle/>
-          <a:p>
-            <a:pPr indent="0" marL="0">
-              <a:buNone/>
-            </a:pPr>
-            <a:r>
-              <a:rPr lang="en-US" sz="1400" dirty="0">
-                <a:solidFill>
-                  <a:srgbClr val="E2E8F0"/>
-                </a:solidFill>
-                <a:latin typeface="Calibri" pitchFamily="34" charset="0"/>
-                <a:ea typeface="Calibri" pitchFamily="34" charset="-122"/>
-                <a:cs typeface="Calibri" pitchFamily="34" charset="-120"/>
-              </a:rPr>
-              <a:t>实时输出违约概率</a:t>
-            </a:r>
-            <a:endParaRPr lang="en-US" sz="1400" dirty="0"/>
-          </a:p>
-        </p:txBody>
-      </p:sp>
-      <p:sp>
-        <p:nvSpPr>
-          <p:cNvPr id="17" name="Shape 15"/>
-          <p:cNvSpPr/>
-          <p:nvPr/>
-        </p:nvSpPr>
-        <p:spPr>
-          <a:xfrm>
-            <a:off x="914400" y="4846320"/>
-            <a:ext cx="640080" cy="640080"/>
-          </a:xfrm>
-          <a:prstGeom prst="ellipse">
-            <a:avLst/>
-          </a:prstGeom>
-          <a:solidFill>
-            <a:srgbClr val="14B8A6"/>
-          </a:solidFill>
-          <a:ln/>
-        </p:spPr>
-      </p:sp>
-      <p:sp>
-        <p:nvSpPr>
-          <p:cNvPr id="18" name="Text 16"/>
-          <p:cNvSpPr/>
-          <p:nvPr/>
-        </p:nvSpPr>
-        <p:spPr>
-          <a:xfrm>
-            <a:off x="914400" y="4846320"/>
-            <a:ext cx="640080" cy="640080"/>
-          </a:xfrm>
-          <a:prstGeom prst="rect">
-            <a:avLst/>
-          </a:prstGeom>
-          <a:noFill/>
-          <a:ln/>
-        </p:spPr>
-        <p:txBody>
-          <a:bodyPr wrap="square" lIns="0" tIns="0" rIns="0" bIns="0" rtlCol="0" anchor="ctr"/>
-          <a:lstStyle/>
-          <a:p>
-            <a:pPr algn="ctr" indent="0" marL="0">
-              <a:buNone/>
-            </a:pPr>
-            <a:r>
-              <a:rPr lang="en-US" sz="2400" b="1" dirty="0">
-                <a:solidFill>
-                  <a:srgbClr val="21295C"/>
-                </a:solidFill>
-                <a:latin typeface="Georgia" pitchFamily="34" charset="0"/>
-                <a:ea typeface="Georgia" pitchFamily="34" charset="-122"/>
-                <a:cs typeface="Georgia" pitchFamily="34" charset="-120"/>
-              </a:rPr>
-              <a:t>4</a:t>
-            </a:r>
-            <a:endParaRPr lang="en-US" sz="2400" dirty="0"/>
-          </a:p>
-        </p:txBody>
-      </p:sp>
-      <p:sp>
-        <p:nvSpPr>
-          <p:cNvPr id="19" name="Text 17"/>
-          <p:cNvSpPr/>
-          <p:nvPr/>
-        </p:nvSpPr>
-        <p:spPr>
-          <a:xfrm>
-            <a:off x="1828800" y="4846320"/>
-            <a:ext cx="3657600" cy="320040"/>
-          </a:xfrm>
-          <a:prstGeom prst="rect">
-            <a:avLst/>
-          </a:prstGeom>
-          <a:noFill/>
-          <a:ln/>
-        </p:spPr>
-        <p:txBody>
-          <a:bodyPr wrap="square" lIns="0" tIns="0" rIns="0" bIns="0" rtlCol="0" anchor="ctr"/>
-          <a:lstStyle/>
-          <a:p>
-            <a:pPr indent="0" marL="0">
-              <a:buNone/>
-            </a:pPr>
-            <a:r>
-              <a:rPr lang="en-US" sz="1800" b="1" dirty="0">
-                <a:solidFill>
-                  <a:srgbClr val="FFFFFF"/>
-                </a:solidFill>
-                <a:latin typeface="Calibri" pitchFamily="34" charset="0"/>
-                <a:ea typeface="Calibri" pitchFamily="34" charset="-122"/>
-                <a:cs typeface="Calibri" pitchFamily="34" charset="-120"/>
-              </a:rPr>
-              <a:t>报告生成</a:t>
-            </a:r>
-            <a:endParaRPr lang="en-US" sz="1800" dirty="0"/>
-          </a:p>
-        </p:txBody>
-      </p:sp>
-      <p:sp>
-        <p:nvSpPr>
-          <p:cNvPr id="20" name="Text 18"/>
-          <p:cNvSpPr/>
-          <p:nvPr/>
-        </p:nvSpPr>
-        <p:spPr>
-          <a:xfrm>
-            <a:off x="1828800" y="5166360"/>
-            <a:ext cx="7315200" cy="320040"/>
-          </a:xfrm>
-          <a:prstGeom prst="rect">
-            <a:avLst/>
-          </a:prstGeom>
-          <a:noFill/>
-          <a:ln/>
-        </p:spPr>
-        <p:txBody>
-          <a:bodyPr wrap="square" lIns="0" tIns="0" rIns="0" bIns="0" rtlCol="0" anchor="ctr"/>
-          <a:lstStyle/>
-          <a:p>
-            <a:pPr indent="0" marL="0">
-              <a:buNone/>
-            </a:pPr>
-            <a:r>
-              <a:rPr lang="en-US" sz="1400" dirty="0">
-                <a:solidFill>
-                  <a:srgbClr val="E2E8F0"/>
-                </a:solidFill>
-                <a:latin typeface="Calibri" pitchFamily="34" charset="0"/>
-                <a:ea typeface="Calibri" pitchFamily="34" charset="-122"/>
-                <a:cs typeface="Calibri" pitchFamily="34" charset="-120"/>
-              </a:rPr>
-              <a:t>Markdown 尽调报告 + SHAP Top3</a:t>
-            </a:r>
-            <a:endParaRPr lang="en-US" sz="1400" dirty="0"/>
-          </a:p>
-        </p:txBody>
-      </p:sp>
-      <p:sp>
-        <p:nvSpPr>
-          <p:cNvPr id="21" name="Text 19"/>
-          <p:cNvSpPr/>
-          <p:nvPr/>
-        </p:nvSpPr>
-        <p:spPr>
-          <a:xfrm>
-            <a:off x="548640" y="5943600"/>
-            <a:ext cx="10972800" cy="365760"/>
-          </a:xfrm>
-          <a:prstGeom prst="rect">
-            <a:avLst/>
-          </a:prstGeom>
-          <a:noFill/>
-          <a:ln/>
-        </p:spPr>
-        <p:txBody>
-          <a:bodyPr wrap="square" lIns="0" tIns="0" rIns="0" bIns="0" rtlCol="0" anchor="ctr"/>
-          <a:lstStyle/>
-          <a:p>
-            <a:pPr indent="0" marL="0">
-              <a:buNone/>
-            </a:pPr>
-            <a:r>
-              <a:rPr lang="en-US" sz="1400" i="1" dirty="0">
-                <a:solidFill>
-                  <a:srgbClr val="14B8A6"/>
-                </a:solidFill>
-                <a:latin typeface="Calibri" pitchFamily="34" charset="0"/>
-                <a:ea typeface="Calibri" pitchFamily="34" charset="-122"/>
-                <a:cs typeface="Calibri" pitchFamily="34" charset="-120"/>
-              </a:rPr>
-              <a:t>预期时长：5-10 分钟</a:t>
-            </a:r>
-            <a:endParaRPr lang="en-US" sz="1400" dirty="0"/>
+              <a:t>建议话术：'根据您的信用状况，建议降低申请金额或提供担保'"</a:t>
+            </a:r>
+            <a:endParaRPr lang="en-US" sz="1300" dirty="0"/>
           </a:p>
         </p:txBody>
       </p:sp>

--- a/CreditMind-Pitch-Deck.pptx
+++ b/CreditMind-Pitch-Deck.pptx
@@ -12144,7 +12144,7 @@
         <p:spPr>
           <a:xfrm>
             <a:off x="457200" y="1097280"/>
-            <a:ext cx="5669280" cy="5120640"/>
+            <a:ext cx="5669280" cy="4114800"/>
           </a:xfrm>
           <a:prstGeom prst="rect">
             <a:avLst/>
@@ -12176,7 +12176,7 @@
         <p:spPr>
           <a:xfrm>
             <a:off x="457200" y="1097280"/>
-            <a:ext cx="91440" cy="5120640"/>
+            <a:ext cx="91440" cy="4114800"/>
           </a:xfrm>
           <a:prstGeom prst="rect">
             <a:avLst/>
@@ -12235,23 +12235,23 @@
         <p:spPr>
           <a:xfrm>
             <a:off x="731520" y="1691640"/>
-            <a:ext cx="457200" cy="640080"/>
-          </a:xfrm>
-          <a:prstGeom prst="rect">
-            <a:avLst/>
-          </a:prstGeom>
-          <a:noFill/>
-          <a:ln/>
-        </p:spPr>
-        <p:txBody>
-          <a:bodyPr wrap="square" lIns="0" tIns="0" rIns="0" bIns="0" rtlCol="0" anchor="ctr"/>
-          <a:lstStyle/>
-          <a:p>
-            <a:pPr indent="0" marL="0">
-              <a:buNone/>
-            </a:pPr>
-            <a:r>
-              <a:rPr lang="en-US" sz="2400" b="1" dirty="0">
+            <a:ext cx="457200" cy="548640"/>
+          </a:xfrm>
+          <a:prstGeom prst="rect">
+            <a:avLst/>
+          </a:prstGeom>
+          <a:noFill/>
+          <a:ln/>
+        </p:spPr>
+        <p:txBody>
+          <a:bodyPr wrap="square" lIns="0" tIns="0" rIns="0" bIns="0" rtlCol="0" anchor="ctr"/>
+          <a:lstStyle/>
+          <a:p>
+            <a:pPr indent="0" marL="0">
+              <a:buNone/>
+            </a:pPr>
+            <a:r>
+              <a:rPr lang="en-US" sz="2200" b="1" dirty="0">
                 <a:solidFill>
                   <a:srgbClr val="14B8A6"/>
                 </a:solidFill>
@@ -12261,7 +12261,7 @@
               </a:rPr>
               <a:t>①</a:t>
             </a:r>
-            <a:endParaRPr lang="en-US" sz="2400" dirty="0"/>
+            <a:endParaRPr lang="en-US" sz="2200" dirty="0"/>
           </a:p>
         </p:txBody>
       </p:sp>
@@ -12274,23 +12274,23 @@
         <p:spPr>
           <a:xfrm>
             <a:off x="1280160" y="1691640"/>
-            <a:ext cx="4754880" cy="320040"/>
-          </a:xfrm>
-          <a:prstGeom prst="rect">
-            <a:avLst/>
-          </a:prstGeom>
-          <a:noFill/>
-          <a:ln/>
-        </p:spPr>
-        <p:txBody>
-          <a:bodyPr wrap="square" lIns="0" tIns="0" rIns="0" bIns="0" rtlCol="0" anchor="ctr"/>
-          <a:lstStyle/>
-          <a:p>
-            <a:pPr indent="0" marL="0">
-              <a:buNone/>
-            </a:pPr>
-            <a:r>
-              <a:rPr lang="en-US" sz="1500" b="1" dirty="0">
+            <a:ext cx="4754880" cy="274320"/>
+          </a:xfrm>
+          <a:prstGeom prst="rect">
+            <a:avLst/>
+          </a:prstGeom>
+          <a:noFill/>
+          <a:ln/>
+        </p:spPr>
+        <p:txBody>
+          <a:bodyPr wrap="square" lIns="0" tIns="0" rIns="0" bIns="0" rtlCol="0" anchor="ctr"/>
+          <a:lstStyle/>
+          <a:p>
+            <a:pPr indent="0" marL="0">
+              <a:buNone/>
+            </a:pPr>
+            <a:r>
+              <a:rPr lang="en-US" sz="1400" b="1" dirty="0">
                 <a:solidFill>
                   <a:srgbClr val="21295C"/>
                 </a:solidFill>
@@ -12300,7 +12300,7 @@
               </a:rPr>
               <a:t>IV 信息价值筛选</a:t>
             </a:r>
-            <a:endParaRPr lang="en-US" sz="1500" dirty="0"/>
+            <a:endParaRPr lang="en-US" sz="1400" dirty="0"/>
           </a:p>
         </p:txBody>
       </p:sp>
@@ -12312,24 +12312,24 @@
         </p:nvSpPr>
         <p:spPr>
           <a:xfrm>
-            <a:off x="1280160" y="2011680"/>
-            <a:ext cx="4754880" cy="502920"/>
-          </a:xfrm>
-          <a:prstGeom prst="rect">
-            <a:avLst/>
-          </a:prstGeom>
-          <a:noFill/>
-          <a:ln/>
-        </p:spPr>
-        <p:txBody>
-          <a:bodyPr wrap="square" lIns="0" tIns="0" rIns="0" bIns="0" rtlCol="0" anchor="ctr"/>
-          <a:lstStyle/>
-          <a:p>
-            <a:pPr indent="0" marL="0">
-              <a:buNone/>
-            </a:pPr>
-            <a:r>
-              <a:rPr lang="en-US" sz="1200" dirty="0">
+            <a:off x="1280160" y="1965960"/>
+            <a:ext cx="4754880" cy="411480"/>
+          </a:xfrm>
+          <a:prstGeom prst="rect">
+            <a:avLst/>
+          </a:prstGeom>
+          <a:noFill/>
+          <a:ln/>
+        </p:spPr>
+        <p:txBody>
+          <a:bodyPr wrap="square" lIns="0" tIns="0" rIns="0" bIns="0" rtlCol="0" anchor="ctr"/>
+          <a:lstStyle/>
+          <a:p>
+            <a:pPr indent="0" marL="0">
+              <a:buNone/>
+            </a:pPr>
+            <a:r>
+              <a:rPr lang="en-US" sz="1100" dirty="0">
                 <a:solidFill>
                   <a:srgbClr val="64748B"/>
                 </a:solidFill>
@@ -12339,7 +12339,7 @@
               </a:rPr>
               <a:t>IV≥0.02，剔除预测力弱或无业务意义特征</a:t>
             </a:r>
-            <a:endParaRPr lang="en-US" sz="1200" dirty="0"/>
+            <a:endParaRPr lang="en-US" sz="1100" dirty="0"/>
           </a:p>
         </p:txBody>
       </p:sp>
@@ -12351,24 +12351,24 @@
         </p:nvSpPr>
         <p:spPr>
           <a:xfrm>
-            <a:off x="731520" y="2560320"/>
-            <a:ext cx="457200" cy="640080"/>
-          </a:xfrm>
-          <a:prstGeom prst="rect">
-            <a:avLst/>
-          </a:prstGeom>
-          <a:noFill/>
-          <a:ln/>
-        </p:spPr>
-        <p:txBody>
-          <a:bodyPr wrap="square" lIns="0" tIns="0" rIns="0" bIns="0" rtlCol="0" anchor="ctr"/>
-          <a:lstStyle/>
-          <a:p>
-            <a:pPr indent="0" marL="0">
-              <a:buNone/>
-            </a:pPr>
-            <a:r>
-              <a:rPr lang="en-US" sz="2400" b="1" dirty="0">
+            <a:off x="731520" y="2404872"/>
+            <a:ext cx="457200" cy="548640"/>
+          </a:xfrm>
+          <a:prstGeom prst="rect">
+            <a:avLst/>
+          </a:prstGeom>
+          <a:noFill/>
+          <a:ln/>
+        </p:spPr>
+        <p:txBody>
+          <a:bodyPr wrap="square" lIns="0" tIns="0" rIns="0" bIns="0" rtlCol="0" anchor="ctr"/>
+          <a:lstStyle/>
+          <a:p>
+            <a:pPr indent="0" marL="0">
+              <a:buNone/>
+            </a:pPr>
+            <a:r>
+              <a:rPr lang="en-US" sz="2200" b="1" dirty="0">
                 <a:solidFill>
                   <a:srgbClr val="14B8A6"/>
                 </a:solidFill>
@@ -12378,7 +12378,7 @@
               </a:rPr>
               <a:t>②</a:t>
             </a:r>
-            <a:endParaRPr lang="en-US" sz="2400" dirty="0"/>
+            <a:endParaRPr lang="en-US" sz="2200" dirty="0"/>
           </a:p>
         </p:txBody>
       </p:sp>
@@ -12390,24 +12390,24 @@
         </p:nvSpPr>
         <p:spPr>
           <a:xfrm>
-            <a:off x="1280160" y="2560320"/>
-            <a:ext cx="4754880" cy="320040"/>
-          </a:xfrm>
-          <a:prstGeom prst="rect">
-            <a:avLst/>
-          </a:prstGeom>
-          <a:noFill/>
-          <a:ln/>
-        </p:spPr>
-        <p:txBody>
-          <a:bodyPr wrap="square" lIns="0" tIns="0" rIns="0" bIns="0" rtlCol="0" anchor="ctr"/>
-          <a:lstStyle/>
-          <a:p>
-            <a:pPr indent="0" marL="0">
-              <a:buNone/>
-            </a:pPr>
-            <a:r>
-              <a:rPr lang="en-US" sz="1500" b="1" dirty="0">
+            <a:off x="1280160" y="2404872"/>
+            <a:ext cx="4754880" cy="274320"/>
+          </a:xfrm>
+          <a:prstGeom prst="rect">
+            <a:avLst/>
+          </a:prstGeom>
+          <a:noFill/>
+          <a:ln/>
+        </p:spPr>
+        <p:txBody>
+          <a:bodyPr wrap="square" lIns="0" tIns="0" rIns="0" bIns="0" rtlCol="0" anchor="ctr"/>
+          <a:lstStyle/>
+          <a:p>
+            <a:pPr indent="0" marL="0">
+              <a:buNone/>
+            </a:pPr>
+            <a:r>
+              <a:rPr lang="en-US" sz="1400" b="1" dirty="0">
                 <a:solidFill>
                   <a:srgbClr val="21295C"/>
                 </a:solidFill>
@@ -12417,7 +12417,7 @@
               </a:rPr>
               <a:t>WoE 证据权重分箱</a:t>
             </a:r>
-            <a:endParaRPr lang="en-US" sz="1500" dirty="0"/>
+            <a:endParaRPr lang="en-US" sz="1400" dirty="0"/>
           </a:p>
         </p:txBody>
       </p:sp>
@@ -12429,24 +12429,24 @@
         </p:nvSpPr>
         <p:spPr>
           <a:xfrm>
-            <a:off x="1280160" y="2880360"/>
-            <a:ext cx="4754880" cy="502920"/>
-          </a:xfrm>
-          <a:prstGeom prst="rect">
-            <a:avLst/>
-          </a:prstGeom>
-          <a:noFill/>
-          <a:ln/>
-        </p:spPr>
-        <p:txBody>
-          <a:bodyPr wrap="square" lIns="0" tIns="0" rIns="0" bIns="0" rtlCol="0" anchor="ctr"/>
-          <a:lstStyle/>
-          <a:p>
-            <a:pPr indent="0" marL="0">
-              <a:buNone/>
-            </a:pPr>
-            <a:r>
-              <a:rPr lang="en-US" sz="1200" dirty="0">
+            <a:off x="1280160" y="2679192"/>
+            <a:ext cx="4754880" cy="411480"/>
+          </a:xfrm>
+          <a:prstGeom prst="rect">
+            <a:avLst/>
+          </a:prstGeom>
+          <a:noFill/>
+          <a:ln/>
+        </p:spPr>
+        <p:txBody>
+          <a:bodyPr wrap="square" lIns="0" tIns="0" rIns="0" bIns="0" rtlCol="0" anchor="ctr"/>
+          <a:lstStyle/>
+          <a:p>
+            <a:pPr indent="0" marL="0">
+              <a:buNone/>
+            </a:pPr>
+            <a:r>
+              <a:rPr lang="en-US" sz="1100" dirty="0">
                 <a:solidFill>
                   <a:srgbClr val="64748B"/>
                 </a:solidFill>
@@ -12456,7 +12456,7 @@
               </a:rPr>
               <a:t>连续/类别变量转单调可分箱，提升稳定性</a:t>
             </a:r>
-            <a:endParaRPr lang="en-US" sz="1200" dirty="0"/>
+            <a:endParaRPr lang="en-US" sz="1100" dirty="0"/>
           </a:p>
         </p:txBody>
       </p:sp>
@@ -12468,24 +12468,24 @@
         </p:nvSpPr>
         <p:spPr>
           <a:xfrm>
-            <a:off x="731520" y="3429000"/>
-            <a:ext cx="457200" cy="640080"/>
-          </a:xfrm>
-          <a:prstGeom prst="rect">
-            <a:avLst/>
-          </a:prstGeom>
-          <a:noFill/>
-          <a:ln/>
-        </p:spPr>
-        <p:txBody>
-          <a:bodyPr wrap="square" lIns="0" tIns="0" rIns="0" bIns="0" rtlCol="0" anchor="ctr"/>
-          <a:lstStyle/>
-          <a:p>
-            <a:pPr indent="0" marL="0">
-              <a:buNone/>
-            </a:pPr>
-            <a:r>
-              <a:rPr lang="en-US" sz="2400" b="1" dirty="0">
+            <a:off x="731520" y="3118104"/>
+            <a:ext cx="457200" cy="548640"/>
+          </a:xfrm>
+          <a:prstGeom prst="rect">
+            <a:avLst/>
+          </a:prstGeom>
+          <a:noFill/>
+          <a:ln/>
+        </p:spPr>
+        <p:txBody>
+          <a:bodyPr wrap="square" lIns="0" tIns="0" rIns="0" bIns="0" rtlCol="0" anchor="ctr"/>
+          <a:lstStyle/>
+          <a:p>
+            <a:pPr indent="0" marL="0">
+              <a:buNone/>
+            </a:pPr>
+            <a:r>
+              <a:rPr lang="en-US" sz="2200" b="1" dirty="0">
                 <a:solidFill>
                   <a:srgbClr val="14B8A6"/>
                 </a:solidFill>
@@ -12495,7 +12495,7 @@
               </a:rPr>
               <a:t>③</a:t>
             </a:r>
-            <a:endParaRPr lang="en-US" sz="2400" dirty="0"/>
+            <a:endParaRPr lang="en-US" sz="2200" dirty="0"/>
           </a:p>
         </p:txBody>
       </p:sp>
@@ -12507,24 +12507,24 @@
         </p:nvSpPr>
         <p:spPr>
           <a:xfrm>
-            <a:off x="1280160" y="3429000"/>
-            <a:ext cx="4754880" cy="320040"/>
-          </a:xfrm>
-          <a:prstGeom prst="rect">
-            <a:avLst/>
-          </a:prstGeom>
-          <a:noFill/>
-          <a:ln/>
-        </p:spPr>
-        <p:txBody>
-          <a:bodyPr wrap="square" lIns="0" tIns="0" rIns="0" bIns="0" rtlCol="0" anchor="ctr"/>
-          <a:lstStyle/>
-          <a:p>
-            <a:pPr indent="0" marL="0">
-              <a:buNone/>
-            </a:pPr>
-            <a:r>
-              <a:rPr lang="en-US" sz="1500" b="1" dirty="0">
+            <a:off x="1280160" y="3118104"/>
+            <a:ext cx="4754880" cy="274320"/>
+          </a:xfrm>
+          <a:prstGeom prst="rect">
+            <a:avLst/>
+          </a:prstGeom>
+          <a:noFill/>
+          <a:ln/>
+        </p:spPr>
+        <p:txBody>
+          <a:bodyPr wrap="square" lIns="0" tIns="0" rIns="0" bIns="0" rtlCol="0" anchor="ctr"/>
+          <a:lstStyle/>
+          <a:p>
+            <a:pPr indent="0" marL="0">
+              <a:buNone/>
+            </a:pPr>
+            <a:r>
+              <a:rPr lang="en-US" sz="1400" b="1" dirty="0">
                 <a:solidFill>
                   <a:srgbClr val="21295C"/>
                 </a:solidFill>
@@ -12534,7 +12534,7 @@
               </a:rPr>
               <a:t>PSI 群体稳定性</a:t>
             </a:r>
-            <a:endParaRPr lang="en-US" sz="1500" dirty="0"/>
+            <a:endParaRPr lang="en-US" sz="1400" dirty="0"/>
           </a:p>
         </p:txBody>
       </p:sp>
@@ -12546,24 +12546,24 @@
         </p:nvSpPr>
         <p:spPr>
           <a:xfrm>
-            <a:off x="1280160" y="3749040"/>
-            <a:ext cx="4754880" cy="502920"/>
-          </a:xfrm>
-          <a:prstGeom prst="rect">
-            <a:avLst/>
-          </a:prstGeom>
-          <a:noFill/>
-          <a:ln/>
-        </p:spPr>
-        <p:txBody>
-          <a:bodyPr wrap="square" lIns="0" tIns="0" rIns="0" bIns="0" rtlCol="0" anchor="ctr"/>
-          <a:lstStyle/>
-          <a:p>
-            <a:pPr indent="0" marL="0">
-              <a:buNone/>
-            </a:pPr>
-            <a:r>
-              <a:rPr lang="en-US" sz="1200" dirty="0">
+            <a:off x="1280160" y="3392424"/>
+            <a:ext cx="4754880" cy="411480"/>
+          </a:xfrm>
+          <a:prstGeom prst="rect">
+            <a:avLst/>
+          </a:prstGeom>
+          <a:noFill/>
+          <a:ln/>
+        </p:spPr>
+        <p:txBody>
+          <a:bodyPr wrap="square" lIns="0" tIns="0" rIns="0" bIns="0" rtlCol="0" anchor="ctr"/>
+          <a:lstStyle/>
+          <a:p>
+            <a:pPr indent="0" marL="0">
+              <a:buNone/>
+            </a:pPr>
+            <a:r>
+              <a:rPr lang="en-US" sz="1100" dirty="0">
                 <a:solidFill>
                   <a:srgbClr val="64748B"/>
                 </a:solidFill>
@@ -12573,7 +12573,7 @@
               </a:rPr>
               <a:t>PSI&lt;0.25，本项目 28 个 IV 合格特征全部通过</a:t>
             </a:r>
-            <a:endParaRPr lang="en-US" sz="1200" dirty="0"/>
+            <a:endParaRPr lang="en-US" sz="1100" dirty="0"/>
           </a:p>
         </p:txBody>
       </p:sp>
@@ -12585,24 +12585,24 @@
         </p:nvSpPr>
         <p:spPr>
           <a:xfrm>
-            <a:off x="731520" y="4297680"/>
-            <a:ext cx="457200" cy="640080"/>
-          </a:xfrm>
-          <a:prstGeom prst="rect">
-            <a:avLst/>
-          </a:prstGeom>
-          <a:noFill/>
-          <a:ln/>
-        </p:spPr>
-        <p:txBody>
-          <a:bodyPr wrap="square" lIns="0" tIns="0" rIns="0" bIns="0" rtlCol="0" anchor="ctr"/>
-          <a:lstStyle/>
-          <a:p>
-            <a:pPr indent="0" marL="0">
-              <a:buNone/>
-            </a:pPr>
-            <a:r>
-              <a:rPr lang="en-US" sz="2400" b="1" dirty="0">
+            <a:off x="731520" y="3831336"/>
+            <a:ext cx="457200" cy="548640"/>
+          </a:xfrm>
+          <a:prstGeom prst="rect">
+            <a:avLst/>
+          </a:prstGeom>
+          <a:noFill/>
+          <a:ln/>
+        </p:spPr>
+        <p:txBody>
+          <a:bodyPr wrap="square" lIns="0" tIns="0" rIns="0" bIns="0" rtlCol="0" anchor="ctr"/>
+          <a:lstStyle/>
+          <a:p>
+            <a:pPr indent="0" marL="0">
+              <a:buNone/>
+            </a:pPr>
+            <a:r>
+              <a:rPr lang="en-US" sz="2200" b="1" dirty="0">
                 <a:solidFill>
                   <a:srgbClr val="14B8A6"/>
                 </a:solidFill>
@@ -12612,7 +12612,7 @@
               </a:rPr>
               <a:t>④</a:t>
             </a:r>
-            <a:endParaRPr lang="en-US" sz="2400" dirty="0"/>
+            <a:endParaRPr lang="en-US" sz="2200" dirty="0"/>
           </a:p>
         </p:txBody>
       </p:sp>
@@ -12624,24 +12624,24 @@
         </p:nvSpPr>
         <p:spPr>
           <a:xfrm>
-            <a:off x="1280160" y="4297680"/>
-            <a:ext cx="4754880" cy="320040"/>
-          </a:xfrm>
-          <a:prstGeom prst="rect">
-            <a:avLst/>
-          </a:prstGeom>
-          <a:noFill/>
-          <a:ln/>
-        </p:spPr>
-        <p:txBody>
-          <a:bodyPr wrap="square" lIns="0" tIns="0" rIns="0" bIns="0" rtlCol="0" anchor="ctr"/>
-          <a:lstStyle/>
-          <a:p>
-            <a:pPr indent="0" marL="0">
-              <a:buNone/>
-            </a:pPr>
-            <a:r>
-              <a:rPr lang="en-US" sz="1500" b="1" dirty="0">
+            <a:off x="1280160" y="3831336"/>
+            <a:ext cx="4754880" cy="274320"/>
+          </a:xfrm>
+          <a:prstGeom prst="rect">
+            <a:avLst/>
+          </a:prstGeom>
+          <a:noFill/>
+          <a:ln/>
+        </p:spPr>
+        <p:txBody>
+          <a:bodyPr wrap="square" lIns="0" tIns="0" rIns="0" bIns="0" rtlCol="0" anchor="ctr"/>
+          <a:lstStyle/>
+          <a:p>
+            <a:pPr indent="0" marL="0">
+              <a:buNone/>
+            </a:pPr>
+            <a:r>
+              <a:rPr lang="en-US" sz="1400" b="1" dirty="0">
                 <a:solidFill>
                   <a:srgbClr val="21295C"/>
                 </a:solidFill>
@@ -12651,7 +12651,7 @@
               </a:rPr>
               <a:t>贪心去共线性</a:t>
             </a:r>
-            <a:endParaRPr lang="en-US" sz="1500" dirty="0"/>
+            <a:endParaRPr lang="en-US" sz="1400" dirty="0"/>
           </a:p>
         </p:txBody>
       </p:sp>
@@ -12663,24 +12663,24 @@
         </p:nvSpPr>
         <p:spPr>
           <a:xfrm>
-            <a:off x="1280160" y="4617720"/>
-            <a:ext cx="4754880" cy="502920"/>
-          </a:xfrm>
-          <a:prstGeom prst="rect">
-            <a:avLst/>
-          </a:prstGeom>
-          <a:noFill/>
-          <a:ln/>
-        </p:spPr>
-        <p:txBody>
-          <a:bodyPr wrap="square" lIns="0" tIns="0" rIns="0" bIns="0" rtlCol="0" anchor="ctr"/>
-          <a:lstStyle/>
-          <a:p>
-            <a:pPr indent="0" marL="0">
-              <a:buNone/>
-            </a:pPr>
-            <a:r>
-              <a:rPr lang="en-US" sz="1200" dirty="0">
+            <a:off x="1280160" y="4105656"/>
+            <a:ext cx="4754880" cy="411480"/>
+          </a:xfrm>
+          <a:prstGeom prst="rect">
+            <a:avLst/>
+          </a:prstGeom>
+          <a:noFill/>
+          <a:ln/>
+        </p:spPr>
+        <p:txBody>
+          <a:bodyPr wrap="square" lIns="0" tIns="0" rIns="0" bIns="0" rtlCol="0" anchor="ctr"/>
+          <a:lstStyle/>
+          <a:p>
+            <a:pPr indent="0" marL="0">
+              <a:buNone/>
+            </a:pPr>
+            <a:r>
+              <a:rPr lang="en-US" sz="1100" dirty="0">
                 <a:solidFill>
                   <a:srgbClr val="64748B"/>
                 </a:solidFill>
@@ -12690,7 +12690,7 @@
               </a:rPr>
               <a:t>|r|≥0.7 时只保留一个，最终精选 19 特征</a:t>
             </a:r>
-            <a:endParaRPr lang="en-US" sz="1200" dirty="0"/>
+            <a:endParaRPr lang="en-US" sz="1100" dirty="0"/>
           </a:p>
         </p:txBody>
       </p:sp>
@@ -12702,24 +12702,24 @@
         </p:nvSpPr>
         <p:spPr>
           <a:xfrm>
-            <a:off x="731520" y="5166360"/>
-            <a:ext cx="457200" cy="640080"/>
-          </a:xfrm>
-          <a:prstGeom prst="rect">
-            <a:avLst/>
-          </a:prstGeom>
-          <a:noFill/>
-          <a:ln/>
-        </p:spPr>
-        <p:txBody>
-          <a:bodyPr wrap="square" lIns="0" tIns="0" rIns="0" bIns="0" rtlCol="0" anchor="ctr"/>
-          <a:lstStyle/>
-          <a:p>
-            <a:pPr indent="0" marL="0">
-              <a:buNone/>
-            </a:pPr>
-            <a:r>
-              <a:rPr lang="en-US" sz="2400" b="1" dirty="0">
+            <a:off x="731520" y="4544568"/>
+            <a:ext cx="457200" cy="548640"/>
+          </a:xfrm>
+          <a:prstGeom prst="rect">
+            <a:avLst/>
+          </a:prstGeom>
+          <a:noFill/>
+          <a:ln/>
+        </p:spPr>
+        <p:txBody>
+          <a:bodyPr wrap="square" lIns="0" tIns="0" rIns="0" bIns="0" rtlCol="0" anchor="ctr"/>
+          <a:lstStyle/>
+          <a:p>
+            <a:pPr indent="0" marL="0">
+              <a:buNone/>
+            </a:pPr>
+            <a:r>
+              <a:rPr lang="en-US" sz="2200" b="1" dirty="0">
                 <a:solidFill>
                   <a:srgbClr val="14B8A6"/>
                 </a:solidFill>
@@ -12729,7 +12729,7 @@
               </a:rPr>
               <a:t>⑤</a:t>
             </a:r>
-            <a:endParaRPr lang="en-US" sz="2400" dirty="0"/>
+            <a:endParaRPr lang="en-US" sz="2200" dirty="0"/>
           </a:p>
         </p:txBody>
       </p:sp>
@@ -12741,24 +12741,24 @@
         </p:nvSpPr>
         <p:spPr>
           <a:xfrm>
-            <a:off x="1280160" y="5166360"/>
-            <a:ext cx="4754880" cy="320040"/>
-          </a:xfrm>
-          <a:prstGeom prst="rect">
-            <a:avLst/>
-          </a:prstGeom>
-          <a:noFill/>
-          <a:ln/>
-        </p:spPr>
-        <p:txBody>
-          <a:bodyPr wrap="square" lIns="0" tIns="0" rIns="0" bIns="0" rtlCol="0" anchor="ctr"/>
-          <a:lstStyle/>
-          <a:p>
-            <a:pPr indent="0" marL="0">
-              <a:buNone/>
-            </a:pPr>
-            <a:r>
-              <a:rPr lang="en-US" sz="1500" b="1" dirty="0">
+            <a:off x="1280160" y="4544568"/>
+            <a:ext cx="4754880" cy="274320"/>
+          </a:xfrm>
+          <a:prstGeom prst="rect">
+            <a:avLst/>
+          </a:prstGeom>
+          <a:noFill/>
+          <a:ln/>
+        </p:spPr>
+        <p:txBody>
+          <a:bodyPr wrap="square" lIns="0" tIns="0" rIns="0" bIns="0" rtlCol="0" anchor="ctr"/>
+          <a:lstStyle/>
+          <a:p>
+            <a:pPr indent="0" marL="0">
+              <a:buNone/>
+            </a:pPr>
+            <a:r>
+              <a:rPr lang="en-US" sz="1400" b="1" dirty="0">
                 <a:solidFill>
                   <a:srgbClr val="21295C"/>
                 </a:solidFill>
@@ -12768,7 +12768,7 @@
               </a:rPr>
               <a:t>数据泄露防护</a:t>
             </a:r>
-            <a:endParaRPr lang="en-US" sz="1500" dirty="0"/>
+            <a:endParaRPr lang="en-US" sz="1400" dirty="0"/>
           </a:p>
         </p:txBody>
       </p:sp>
@@ -12780,24 +12780,24 @@
         </p:nvSpPr>
         <p:spPr>
           <a:xfrm>
-            <a:off x="1280160" y="5486400"/>
-            <a:ext cx="4754880" cy="502920"/>
-          </a:xfrm>
-          <a:prstGeom prst="rect">
-            <a:avLst/>
-          </a:prstGeom>
-          <a:noFill/>
-          <a:ln/>
-        </p:spPr>
-        <p:txBody>
-          <a:bodyPr wrap="square" lIns="0" tIns="0" rIns="0" bIns="0" rtlCol="0" anchor="ctr"/>
-          <a:lstStyle/>
-          <a:p>
-            <a:pPr indent="0" marL="0">
-              <a:buNone/>
-            </a:pPr>
-            <a:r>
-              <a:rPr lang="en-US" sz="1200" dirty="0">
+            <a:off x="1280160" y="4818888"/>
+            <a:ext cx="4754880" cy="411480"/>
+          </a:xfrm>
+          <a:prstGeom prst="rect">
+            <a:avLst/>
+          </a:prstGeom>
+          <a:noFill/>
+          <a:ln/>
+        </p:spPr>
+        <p:txBody>
+          <a:bodyPr wrap="square" lIns="0" tIns="0" rIns="0" bIns="0" rtlCol="0" anchor="ctr"/>
+          <a:lstStyle/>
+          <a:p>
+            <a:pPr indent="0" marL="0">
+              <a:buNone/>
+            </a:pPr>
+            <a:r>
+              <a:rPr lang="en-US" sz="1100" dirty="0">
                 <a:solidFill>
                   <a:srgbClr val="64748B"/>
                 </a:solidFill>
@@ -12807,13 +12807,188 @@
               </a:rPr>
               <a:t>明确排除 grade / sub_grade 等放款后字段</a:t>
             </a:r>
-            <a:endParaRPr lang="en-US" sz="1200" dirty="0"/>
+            <a:endParaRPr lang="en-US" sz="1100" dirty="0"/>
           </a:p>
         </p:txBody>
       </p:sp>
       <p:sp>
         <p:nvSpPr>
           <p:cNvPr id="24" name="Shape 22"/>
+          <p:cNvSpPr/>
+          <p:nvPr/>
+        </p:nvSpPr>
+        <p:spPr>
+          <a:xfrm>
+            <a:off x="457200" y="5349240"/>
+            <a:ext cx="5669280" cy="868680"/>
+          </a:xfrm>
+          <a:prstGeom prst="rect">
+            <a:avLst/>
+          </a:prstGeom>
+          <a:solidFill>
+            <a:srgbClr val="F0F9FF"/>
+          </a:solidFill>
+          <a:ln w="12700">
+            <a:solidFill>
+              <a:srgbClr val="14B8A6"/>
+            </a:solidFill>
+            <a:prstDash val="solid"/>
+          </a:ln>
+        </p:spPr>
+      </p:sp>
+      <p:sp>
+        <p:nvSpPr>
+          <p:cNvPr id="25" name="Text 23"/>
+          <p:cNvSpPr/>
+          <p:nvPr/>
+        </p:nvSpPr>
+        <p:spPr>
+          <a:xfrm>
+            <a:off x="594360" y="5394960"/>
+            <a:ext cx="5486400" cy="228600"/>
+          </a:xfrm>
+          <a:prstGeom prst="rect">
+            <a:avLst/>
+          </a:prstGeom>
+          <a:noFill/>
+          <a:ln/>
+        </p:spPr>
+        <p:txBody>
+          <a:bodyPr wrap="square" lIns="0" tIns="0" rIns="0" bIns="0" rtlCol="0" anchor="ctr"/>
+          <a:lstStyle/>
+          <a:p>
+            <a:pPr indent="0" marL="0">
+              <a:buNone/>
+            </a:pPr>
+            <a:r>
+              <a:rPr lang="en-US" sz="1100" b="1" dirty="0">
+                <a:solidFill>
+                  <a:srgbClr val="21295C"/>
+                </a:solidFill>
+                <a:latin typeface="Calibri" pitchFamily="34" charset="0"/>
+                <a:ea typeface="Calibri" pitchFamily="34" charset="-122"/>
+                <a:cs typeface="Calibri" pitchFamily="34" charset="-120"/>
+              </a:rPr>
+              <a:t>相对原模型的改进（迁移 DianJin skill）</a:t>
+            </a:r>
+            <a:endParaRPr lang="en-US" sz="1100" dirty="0"/>
+          </a:p>
+        </p:txBody>
+      </p:sp>
+      <p:sp>
+        <p:nvSpPr>
+          <p:cNvPr id="26" name="Text 24"/>
+          <p:cNvSpPr/>
+          <p:nvPr/>
+        </p:nvSpPr>
+        <p:spPr>
+          <a:xfrm>
+            <a:off x="594360" y="5623560"/>
+            <a:ext cx="5486400" cy="548640"/>
+          </a:xfrm>
+          <a:prstGeom prst="rect">
+            <a:avLst/>
+          </a:prstGeom>
+          <a:noFill/>
+          <a:ln/>
+        </p:spPr>
+        <p:txBody>
+          <a:bodyPr wrap="square" lIns="0" tIns="0" rIns="0" bIns="0" rtlCol="0" anchor="t"/>
+          <a:lstStyle/>
+          <a:p>
+            <a:pPr indent="0" marL="0">
+              <a:buNone/>
+            </a:pPr>
+            <a:r>
+              <a:rPr lang="en-US" sz="900" dirty="0">
+                <a:solidFill>
+                  <a:srgbClr val="64748B"/>
+                </a:solidFill>
+                <a:latin typeface="Calibri" pitchFamily="34" charset="0"/>
+                <a:ea typeface="Calibri" pitchFamily="34" charset="-122"/>
+                <a:cs typeface="Calibri" pitchFamily="34" charset="-120"/>
+              </a:rPr>
+              <a:t>V1.ipynb </a:t>
+            </a:r>
+            <a:pPr indent="0" marL="0">
+              <a:buNone/>
+            </a:pPr>
+            <a:r>
+              <a:rPr lang="en-US" sz="900" dirty="0">
+                <a:solidFill>
+                  <a:srgbClr val="1E293B"/>
+                </a:solidFill>
+                <a:latin typeface="Calibri" pitchFamily="34" charset="0"/>
+                <a:ea typeface="Calibri" pitchFamily="34" charset="-122"/>
+                <a:cs typeface="Calibri" pitchFamily="34" charset="-120"/>
+              </a:rPr>
+              <a:t>相关性排序 → 贪心去共线
+</a:t>
+            </a:r>
+            <a:pPr indent="0" marL="0">
+              <a:buNone/>
+            </a:pPr>
+            <a:r>
+              <a:rPr lang="en-US" sz="900" dirty="0">
+                <a:solidFill>
+                  <a:srgbClr val="64748B"/>
+                </a:solidFill>
+                <a:latin typeface="Calibri" pitchFamily="34" charset="0"/>
+                <a:ea typeface="Calibri" pitchFamily="34" charset="-122"/>
+                <a:cs typeface="Calibri" pitchFamily="34" charset="-120"/>
+              </a:rPr>
+              <a:t>V2.md     </a:t>
+            </a:r>
+            <a:pPr indent="0" marL="0">
+              <a:buNone/>
+            </a:pPr>
+            <a:r>
+              <a:rPr lang="en-US" sz="900" dirty="0">
+                <a:solidFill>
+                  <a:srgbClr val="1E293B"/>
+                </a:solidFill>
+                <a:latin typeface="Calibri" pitchFamily="34" charset="0"/>
+                <a:ea typeface="Calibri" pitchFamily="34" charset="-122"/>
+                <a:cs typeface="Calibri" pitchFamily="34" charset="-120"/>
+              </a:rPr>
+              <a:t>IV/WoE+PSI+四套方案+SafetyGate
+</a:t>
+            </a:r>
+            <a:pPr indent="0" marL="0">
+              <a:buNone/>
+            </a:pPr>
+            <a:r>
+              <a:rPr lang="en-US" sz="900" b="1" dirty="0">
+                <a:solidFill>
+                  <a:srgbClr val="14B8A6"/>
+                </a:solidFill>
+                <a:latin typeface="Calibri" pitchFamily="34" charset="0"/>
+                <a:ea typeface="Calibri" pitchFamily="34" charset="-122"/>
+                <a:cs typeface="Calibri" pitchFamily="34" charset="-120"/>
+              </a:rPr>
+              <a:t>CreditMind</a:t>
+            </a:r>
+            <a:pPr indent="0" marL="0">
+              <a:buNone/>
+            </a:pPr>
+            <a:r>
+              <a:rPr lang="en-US" sz="900" dirty="0">
+                <a:solidFill>
+                  <a:srgbClr val="1E293B"/>
+                </a:solidFill>
+                <a:latin typeface="Calibri" pitchFamily="34" charset="0"/>
+                <a:ea typeface="Calibri" pitchFamily="34" charset="-122"/>
+                <a:cs typeface="Calibri" pitchFamily="34" charset="-120"/>
+              </a:rPr>
+              <a:t> 工程化精选 19 特征 + Agent 推理 + SHAP 双解释 + 泄露排除</a:t>
+            </a:r>
+            <a:endParaRPr lang="en-US" sz="900" dirty="0"/>
+          </a:p>
+        </p:txBody>
+      </p:sp>
+      <p:sp>
+        <p:nvSpPr>
+          <p:cNvPr id="27" name="Shape 25"/>
           <p:cNvSpPr/>
           <p:nvPr/>
         </p:nvSpPr>
@@ -12845,7 +13020,7 @@
       </p:sp>
       <p:sp>
         <p:nvSpPr>
-          <p:cNvPr id="25" name="Shape 23"/>
+          <p:cNvPr id="28" name="Shape 26"/>
           <p:cNvSpPr/>
           <p:nvPr/>
         </p:nvSpPr>
@@ -12865,7 +13040,7 @@
       </p:sp>
       <p:sp>
         <p:nvSpPr>
-          <p:cNvPr id="26" name="Text 24"/>
+          <p:cNvPr id="29" name="Text 27"/>
           <p:cNvSpPr/>
           <p:nvPr/>
         </p:nvSpPr>
@@ -12904,7 +13079,7 @@
       </p:sp>
       <p:sp>
         <p:nvSpPr>
-          <p:cNvPr id="27" name="Text 25"/>
+          <p:cNvPr id="30" name="Text 28"/>
           <p:cNvSpPr/>
           <p:nvPr/>
         </p:nvSpPr>
@@ -13102,7 +13277,7 @@
       </p:sp>
       <p:sp>
         <p:nvSpPr>
-          <p:cNvPr id="28" name="Shape 26"/>
+          <p:cNvPr id="31" name="Shape 29"/>
           <p:cNvSpPr/>
           <p:nvPr/>
         </p:nvSpPr>
@@ -13134,7 +13309,7 @@
       </p:sp>
       <p:sp>
         <p:nvSpPr>
-          <p:cNvPr id="29" name="Shape 27"/>
+          <p:cNvPr id="32" name="Shape 30"/>
           <p:cNvSpPr/>
           <p:nvPr/>
         </p:nvSpPr>
@@ -13154,7 +13329,7 @@
       </p:sp>
       <p:sp>
         <p:nvSpPr>
-          <p:cNvPr id="30" name="Text 28"/>
+          <p:cNvPr id="33" name="Text 31"/>
           <p:cNvSpPr/>
           <p:nvPr/>
         </p:nvSpPr>
@@ -13193,7 +13368,7 @@
       </p:sp>
       <p:sp>
         <p:nvSpPr>
-          <p:cNvPr id="31" name="Text 29"/>
+          <p:cNvPr id="34" name="Text 32"/>
           <p:cNvSpPr/>
           <p:nvPr/>
         </p:nvSpPr>
@@ -13232,7 +13407,7 @@
       </p:sp>
       <p:sp>
         <p:nvSpPr>
-          <p:cNvPr id="32" name="Text 30"/>
+          <p:cNvPr id="35" name="Text 33"/>
           <p:cNvSpPr/>
           <p:nvPr/>
         </p:nvSpPr>
@@ -13271,7 +13446,7 @@
       </p:sp>
       <p:sp>
         <p:nvSpPr>
-          <p:cNvPr id="33" name="Text 31"/>
+          <p:cNvPr id="36" name="Text 34"/>
           <p:cNvSpPr/>
           <p:nvPr/>
         </p:nvSpPr>
@@ -13310,7 +13485,7 @@
       </p:sp>
       <p:sp>
         <p:nvSpPr>
-          <p:cNvPr id="34" name="Text 32"/>
+          <p:cNvPr id="37" name="Text 35"/>
           <p:cNvSpPr/>
           <p:nvPr/>
         </p:nvSpPr>
@@ -13349,7 +13524,7 @@
       </p:sp>
       <p:sp>
         <p:nvSpPr>
-          <p:cNvPr id="35" name="Text 33"/>
+          <p:cNvPr id="38" name="Text 36"/>
           <p:cNvSpPr/>
           <p:nvPr/>
         </p:nvSpPr>
@@ -13388,7 +13563,7 @@
       </p:sp>
       <p:sp>
         <p:nvSpPr>
-          <p:cNvPr id="36" name="Text 34"/>
+          <p:cNvPr id="39" name="Text 37"/>
           <p:cNvSpPr/>
           <p:nvPr/>
         </p:nvSpPr>
@@ -13427,7 +13602,7 @@
       </p:sp>
       <p:sp>
         <p:nvSpPr>
-          <p:cNvPr id="37" name="Text 35"/>
+          <p:cNvPr id="40" name="Text 38"/>
           <p:cNvSpPr/>
           <p:nvPr/>
         </p:nvSpPr>
@@ -13466,7 +13641,7 @@
       </p:sp>
       <p:sp>
         <p:nvSpPr>
-          <p:cNvPr id="38" name="Text 36"/>
+          <p:cNvPr id="41" name="Text 39"/>
           <p:cNvSpPr/>
           <p:nvPr/>
         </p:nvSpPr>
@@ -13505,7 +13680,7 @@
       </p:sp>
       <p:sp>
         <p:nvSpPr>
-          <p:cNvPr id="39" name="Text 37"/>
+          <p:cNvPr id="42" name="Text 40"/>
           <p:cNvSpPr/>
           <p:nvPr/>
         </p:nvSpPr>
@@ -13544,7 +13719,7 @@
       </p:sp>
       <p:sp>
         <p:nvSpPr>
-          <p:cNvPr id="40" name="Text 38"/>
+          <p:cNvPr id="43" name="Text 41"/>
           <p:cNvSpPr/>
           <p:nvPr/>
         </p:nvSpPr>
@@ -13583,7 +13758,7 @@
       </p:sp>
       <p:sp>
         <p:nvSpPr>
-          <p:cNvPr id="41" name="Text 39"/>
+          <p:cNvPr id="44" name="Text 42"/>
           <p:cNvSpPr/>
           <p:nvPr/>
         </p:nvSpPr>
@@ -13622,7 +13797,7 @@
       </p:sp>
       <p:sp>
         <p:nvSpPr>
-          <p:cNvPr id="42" name="Text 40"/>
+          <p:cNvPr id="45" name="Text 43"/>
           <p:cNvSpPr/>
           <p:nvPr/>
         </p:nvSpPr>
@@ -13661,7 +13836,7 @@
       </p:sp>
       <p:sp>
         <p:nvSpPr>
-          <p:cNvPr id="43" name="Text 41"/>
+          <p:cNvPr id="46" name="Text 44"/>
           <p:cNvSpPr/>
           <p:nvPr/>
         </p:nvSpPr>
@@ -13700,7 +13875,7 @@
       </p:sp>
       <p:sp>
         <p:nvSpPr>
-          <p:cNvPr id="44" name="Text 42"/>
+          <p:cNvPr id="47" name="Text 45"/>
           <p:cNvSpPr/>
           <p:nvPr/>
         </p:nvSpPr>
@@ -13739,7 +13914,7 @@
       </p:sp>
       <p:sp>
         <p:nvSpPr>
-          <p:cNvPr id="45" name="Text 43"/>
+          <p:cNvPr id="48" name="Text 46"/>
           <p:cNvSpPr/>
           <p:nvPr/>
         </p:nvSpPr>
@@ -13778,7 +13953,7 @@
       </p:sp>
       <p:sp>
         <p:nvSpPr>
-          <p:cNvPr id="46" name="Text 44"/>
+          <p:cNvPr id="49" name="Text 47"/>
           <p:cNvSpPr/>
           <p:nvPr/>
         </p:nvSpPr>
@@ -13817,7 +13992,7 @@
       </p:sp>
       <p:sp>
         <p:nvSpPr>
-          <p:cNvPr id="47" name="Text 45"/>
+          <p:cNvPr id="50" name="Text 48"/>
           <p:cNvSpPr/>
           <p:nvPr/>
         </p:nvSpPr>
@@ -13856,7 +14031,7 @@
       </p:sp>
       <p:sp>
         <p:nvSpPr>
-          <p:cNvPr id="48" name="Text 46"/>
+          <p:cNvPr id="51" name="Text 49"/>
           <p:cNvSpPr/>
           <p:nvPr/>
         </p:nvSpPr>

--- a/CreditMind-Pitch-Deck.pptx
+++ b/CreditMind-Pitch-Deck.pptx
@@ -18,10 +18,9 @@
     <p:sldId id="266" r:id="rId12"/>
     <p:sldId id="267" r:id="rId13"/>
     <p:sldId id="268" r:id="rId14"/>
-    <p:sldId id="269" r:id="rId15"/>
   </p:sldIdLst>
   <p:notesMasterIdLst>
-    <p:notesMasterId r:id="rId16"/>
+    <p:notesMasterId r:id="rId15"/>
   </p:notesMasterIdLst>
   <p:sldSz cx="12192000" cy="6858000"/>
   <p:notesSz cx="6858000" cy="12192000"/>
@@ -891,94 +890,6 @@
             <a:fld id="{F7021451-1387-4CA6-816F-3879F97B5CBC}" type="slidenum">
               <a:rPr lang="en-US"/>
               <a:t>13</a:t>
-            </a:fld>
-            <a:endParaRPr lang="en-US"/>
-          </a:p>
-        </p:txBody>
-      </p:sp>
-    </p:spTree>
-    <p:extLst>
-      <p:ext uri="{BB962C8B-B14F-4D97-AF65-F5344CB8AC3E}">
-        <p14:creationId xmlns:p14="http://schemas.microsoft.com/office/powerpoint/2010/main" val="1024086991"/>
-      </p:ext>
-    </p:extLst>
-  </p:cSld>
-  <p:clrMapOvr>
-    <a:masterClrMapping/>
-  </p:clrMapOvr>
-</p:notes>
-</file>
-
-<file path=ppt/notesSlides/notesSlide14.xml><?xml version="1.0" encoding="utf-8"?>
-<p:notes xmlns:a="http://schemas.openxmlformats.org/drawingml/2006/main" xmlns:r="http://schemas.openxmlformats.org/officeDocument/2006/relationships" xmlns:p="http://schemas.openxmlformats.org/presentationml/2006/main">
-  <p:cSld>
-    <p:spTree>
-      <p:nvGrpSpPr>
-        <p:cNvPr id="1" name=""/>
-        <p:cNvGrpSpPr/>
-        <p:nvPr/>
-      </p:nvGrpSpPr>
-      <p:grpSpPr>
-        <a:xfrm>
-          <a:off x="0" y="0"/>
-          <a:ext cx="0" cy="0"/>
-          <a:chOff x="0" y="0"/>
-          <a:chExt cx="0" cy="0"/>
-        </a:xfrm>
-      </p:grpSpPr>
-      <p:sp>
-        <p:nvSpPr>
-          <p:cNvPr id="2" name="Slide Image Placeholder 1"/>
-          <p:cNvSpPr>
-            <a:spLocks noGrp="1" noRot="1" noChangeAspect="1"/>
-          </p:cNvSpPr>
-          <p:nvPr>
-            <p:ph type="sldImg"/>
-          </p:nvPr>
-        </p:nvSpPr>
-        <p:spPr/>
-      </p:sp>
-      <p:sp>
-        <p:nvSpPr>
-          <p:cNvPr id="3" name="Notes Placeholder 2"/>
-          <p:cNvSpPr>
-            <a:spLocks noGrp="1"/>
-          </p:cNvSpPr>
-          <p:nvPr>
-            <p:ph type="body" idx="1"/>
-          </p:nvPr>
-        </p:nvSpPr>
-        <p:spPr/>
-        <p:txBody>
-          <a:bodyPr/>
-          <a:lstStyle/>
-          <a:p>
-            <a:r>
-              <a:rPr lang="en-US" dirty="0"/>
-              <a:t/>
-            </a:r>
-            <a:endParaRPr lang="en-US" dirty="0"/>
-          </a:p>
-        </p:txBody>
-      </p:sp>
-      <p:sp>
-        <p:nvSpPr>
-          <p:cNvPr id="4" name="Slide Number Placeholder 3"/>
-          <p:cNvSpPr>
-            <a:spLocks noGrp="1"/>
-          </p:cNvSpPr>
-          <p:nvPr>
-            <p:ph type="sldNum" sz="quarter" idx="10"/>
-          </p:nvPr>
-        </p:nvSpPr>
-        <p:spPr/>
-        <p:txBody>
-          <a:bodyPr/>
-          <a:lstStyle/>
-          <a:p>
-            <a:fld id="{F7021451-1387-4CA6-816F-3879F97B5CBC}" type="slidenum">
-              <a:rPr lang="en-US"/>
-              <a:t>14</a:t>
             </a:fld>
             <a:endParaRPr lang="en-US"/>
           </a:p>
@@ -3131,7 +3042,7 @@
                 <a:ea typeface="Georgia" pitchFamily="34" charset="-122"/>
                 <a:cs typeface="Georgia" pitchFamily="34" charset="-120"/>
               </a:rPr>
-              <a:t>团队与学术背书</a:t>
+              <a:t>Roadmap</a:t>
             </a:r>
             <a:endParaRPr lang="en-US" sz="2800" dirty="0"/>
           </a:p>
@@ -3206,7 +3117,7 @@
                   <a:srgbClr val="64748B"/>
                 </a:solidFill>
               </a:rPr>
-              <a:t>11 / 14</a:t>
+              <a:t>11 / 13</a:t>
             </a:r>
             <a:endParaRPr lang="en-US" sz="900" dirty="0"/>
           </a:p>
@@ -3220,335 +3131,8 @@
         </p:nvSpPr>
         <p:spPr>
           <a:xfrm>
-            <a:off x="914400" y="1371600"/>
-            <a:ext cx="2011680" cy="2011680"/>
-          </a:xfrm>
-          <a:prstGeom prst="ellipse">
-            <a:avLst/>
-          </a:prstGeom>
-          <a:solidFill>
-            <a:srgbClr val="065A82"/>
-          </a:solidFill>
-          <a:ln/>
-        </p:spPr>
-      </p:sp>
-      <p:sp>
-        <p:nvSpPr>
-          <p:cNvPr id="7" name="Text 5"/>
-          <p:cNvSpPr/>
-          <p:nvPr/>
-        </p:nvSpPr>
-        <p:spPr>
-          <a:xfrm>
-            <a:off x="914400" y="1371600"/>
-            <a:ext cx="2011680" cy="2011680"/>
-          </a:xfrm>
-          <a:prstGeom prst="rect">
-            <a:avLst/>
-          </a:prstGeom>
-          <a:noFill/>
-          <a:ln/>
-        </p:spPr>
-        <p:txBody>
-          <a:bodyPr wrap="square" lIns="0" tIns="0" rIns="0" bIns="0" rtlCol="0" anchor="ctr"/>
-          <a:lstStyle/>
-          <a:p>
-            <a:pPr algn="ctr" indent="0" marL="0">
-              <a:buNone/>
-            </a:pPr>
-            <a:r>
-              <a:rPr lang="en-US" sz="2800" b="1" dirty="0">
-                <a:solidFill>
-                  <a:srgbClr val="FFFFFF"/>
-                </a:solidFill>
-                <a:latin typeface="Georgia" pitchFamily="34" charset="0"/>
-                <a:ea typeface="Georgia" pitchFamily="34" charset="-122"/>
-                <a:cs typeface="Georgia" pitchFamily="34" charset="-120"/>
-              </a:rPr>
-              <a:t>尹</a:t>
-            </a:r>
-            <a:endParaRPr lang="en-US" sz="2800" dirty="0"/>
-          </a:p>
-          <a:p>
-            <a:pPr algn="ctr" indent="0" marL="0">
-              <a:buNone/>
-            </a:pPr>
-            <a:r>
-              <a:rPr lang="en-US" sz="2800" b="1" dirty="0">
-                <a:solidFill>
-                  <a:srgbClr val="FFFFFF"/>
-                </a:solidFill>
-                <a:latin typeface="Georgia" pitchFamily="34" charset="0"/>
-                <a:ea typeface="Georgia" pitchFamily="34" charset="-122"/>
-                <a:cs typeface="Georgia" pitchFamily="34" charset="-120"/>
-              </a:rPr>
-              <a:t>红</a:t>
-            </a:r>
-            <a:endParaRPr lang="en-US" sz="2800" dirty="0"/>
-          </a:p>
-          <a:p>
-            <a:pPr algn="ctr" indent="0" marL="0">
-              <a:buNone/>
-            </a:pPr>
-            <a:r>
-              <a:rPr lang="en-US" sz="2800" b="1" dirty="0">
-                <a:solidFill>
-                  <a:srgbClr val="FFFFFF"/>
-                </a:solidFill>
-                <a:latin typeface="Georgia" pitchFamily="34" charset="0"/>
-                <a:ea typeface="Georgia" pitchFamily="34" charset="-122"/>
-                <a:cs typeface="Georgia" pitchFamily="34" charset="-120"/>
-              </a:rPr>
-              <a:t>艳</a:t>
-            </a:r>
-            <a:endParaRPr lang="en-US" sz="2800" dirty="0"/>
-          </a:p>
-        </p:txBody>
-      </p:sp>
-      <p:sp>
-        <p:nvSpPr>
-          <p:cNvPr id="8" name="Text 6"/>
-          <p:cNvSpPr/>
-          <p:nvPr/>
-        </p:nvSpPr>
-        <p:spPr>
-          <a:xfrm>
-            <a:off x="3200400" y="1371600"/>
-            <a:ext cx="7772400" cy="457200"/>
-          </a:xfrm>
-          <a:prstGeom prst="rect">
-            <a:avLst/>
-          </a:prstGeom>
-          <a:noFill/>
-          <a:ln/>
-        </p:spPr>
-        <p:txBody>
-          <a:bodyPr wrap="square" lIns="0" tIns="0" rIns="0" bIns="0" rtlCol="0" anchor="ctr"/>
-          <a:lstStyle/>
-          <a:p>
-            <a:pPr indent="0" marL="0">
-              <a:buNone/>
-            </a:pPr>
-            <a:r>
-              <a:rPr lang="en-US" sz="2400" b="1" dirty="0">
-                <a:solidFill>
-                  <a:srgbClr val="21295C"/>
-                </a:solidFill>
-                <a:latin typeface="Georgia" pitchFamily="34" charset="0"/>
-                <a:ea typeface="Georgia" pitchFamily="34" charset="-122"/>
-                <a:cs typeface="Georgia" pitchFamily="34" charset="-120"/>
-              </a:rPr>
-              <a:t>尹红艳（Yolanda）</a:t>
-            </a:r>
-            <a:endParaRPr lang="en-US" sz="2400" dirty="0"/>
-          </a:p>
-        </p:txBody>
-      </p:sp>
-      <p:sp>
-        <p:nvSpPr>
-          <p:cNvPr id="9" name="Text 7"/>
-          <p:cNvSpPr/>
-          <p:nvPr/>
-        </p:nvSpPr>
-        <p:spPr>
-          <a:xfrm>
-            <a:off x="3200400" y="1828800"/>
-            <a:ext cx="7772400" cy="365760"/>
-          </a:xfrm>
-          <a:prstGeom prst="rect">
-            <a:avLst/>
-          </a:prstGeom>
-          <a:noFill/>
-          <a:ln/>
-        </p:spPr>
-        <p:txBody>
-          <a:bodyPr wrap="square" lIns="0" tIns="0" rIns="0" bIns="0" rtlCol="0" anchor="ctr"/>
-          <a:lstStyle/>
-          <a:p>
-            <a:pPr indent="0" marL="0">
-              <a:buNone/>
-            </a:pPr>
-            <a:r>
-              <a:rPr lang="en-US" sz="1400" dirty="0">
-                <a:solidFill>
-                  <a:srgbClr val="64748B"/>
-                </a:solidFill>
-                <a:latin typeface="Calibri" pitchFamily="34" charset="0"/>
-                <a:ea typeface="Calibri" pitchFamily="34" charset="-122"/>
-                <a:cs typeface="Calibri" pitchFamily="34" charset="-120"/>
-              </a:rPr>
-              <a:t>深圳大学南特金融科技学院 · 金融科技与风险控制硕士（2025.09 入学）</a:t>
-            </a:r>
-            <a:endParaRPr lang="en-US" sz="1400" dirty="0"/>
-          </a:p>
-        </p:txBody>
-      </p:sp>
-      <p:sp>
-        <p:nvSpPr>
-          <p:cNvPr id="10" name="Text 8"/>
-          <p:cNvSpPr/>
-          <p:nvPr/>
-        </p:nvSpPr>
-        <p:spPr>
-          <a:xfrm>
-            <a:off x="3200400" y="2377440"/>
-            <a:ext cx="7772400" cy="365760"/>
-          </a:xfrm>
-          <a:prstGeom prst="rect">
-            <a:avLst/>
-          </a:prstGeom>
-          <a:noFill/>
-          <a:ln/>
-        </p:spPr>
-        <p:txBody>
-          <a:bodyPr wrap="square" lIns="0" tIns="0" rIns="0" bIns="0" rtlCol="0" anchor="ctr"/>
-          <a:lstStyle/>
-          <a:p>
-            <a:pPr indent="0" marL="0">
-              <a:buNone/>
-            </a:pPr>
-            <a:r>
-              <a:rPr lang="en-US" sz="1400" dirty="0">
-                <a:solidFill>
-                  <a:srgbClr val="1E293B"/>
-                </a:solidFill>
-                <a:latin typeface="Calibri" pitchFamily="34" charset="0"/>
-                <a:ea typeface="Calibri" pitchFamily="34" charset="-122"/>
-                <a:cs typeface="Calibri" pitchFamily="34" charset="-120"/>
-              </a:rPr>
-              <a:t>🎓 深圳大学南特金融科技学院 · 金融科技与风险控制硕士</a:t>
-            </a:r>
-            <a:endParaRPr lang="en-US" sz="1400" dirty="0"/>
-          </a:p>
-        </p:txBody>
-      </p:sp>
-      <p:sp>
-        <p:nvSpPr>
-          <p:cNvPr id="11" name="Text 9"/>
-          <p:cNvSpPr/>
-          <p:nvPr/>
-        </p:nvSpPr>
-        <p:spPr>
-          <a:xfrm>
-            <a:off x="3200400" y="2788920"/>
-            <a:ext cx="7772400" cy="365760"/>
-          </a:xfrm>
-          <a:prstGeom prst="rect">
-            <a:avLst/>
-          </a:prstGeom>
-          <a:noFill/>
-          <a:ln/>
-        </p:spPr>
-        <p:txBody>
-          <a:bodyPr wrap="square" lIns="0" tIns="0" rIns="0" bIns="0" rtlCol="0" anchor="ctr"/>
-          <a:lstStyle/>
-          <a:p>
-            <a:pPr indent="0" marL="0">
-              <a:buNone/>
-            </a:pPr>
-            <a:r>
-              <a:rPr lang="en-US" sz="1400" dirty="0">
-                <a:solidFill>
-                  <a:srgbClr val="1E293B"/>
-                </a:solidFill>
-                <a:latin typeface="Calibri" pitchFamily="34" charset="0"/>
-                <a:ea typeface="Calibri" pitchFamily="34" charset="-122"/>
-                <a:cs typeface="Calibri" pitchFamily="34" charset="-120"/>
-              </a:rPr>
-              <a:t>📜 CFA 持证 · CQF 考生 · PMP 认证 · 腾讯云 AI 认证</a:t>
-            </a:r>
-            <a:endParaRPr lang="en-US" sz="1400" dirty="0"/>
-          </a:p>
-        </p:txBody>
-      </p:sp>
-      <p:sp>
-        <p:nvSpPr>
-          <p:cNvPr id="12" name="Text 10"/>
-          <p:cNvSpPr/>
-          <p:nvPr/>
-        </p:nvSpPr>
-        <p:spPr>
-          <a:xfrm>
-            <a:off x="3200400" y="3200400"/>
-            <a:ext cx="7772400" cy="365760"/>
-          </a:xfrm>
-          <a:prstGeom prst="rect">
-            <a:avLst/>
-          </a:prstGeom>
-          <a:noFill/>
-          <a:ln/>
-        </p:spPr>
-        <p:txBody>
-          <a:bodyPr wrap="square" lIns="0" tIns="0" rIns="0" bIns="0" rtlCol="0" anchor="ctr"/>
-          <a:lstStyle/>
-          <a:p>
-            <a:pPr indent="0" marL="0">
-              <a:buNone/>
-            </a:pPr>
-            <a:r>
-              <a:rPr lang="en-US" sz="1400" dirty="0">
-                <a:solidFill>
-                  <a:srgbClr val="1E293B"/>
-                </a:solidFill>
-                <a:latin typeface="Calibri" pitchFamily="34" charset="0"/>
-                <a:ea typeface="Calibri" pitchFamily="34" charset="-122"/>
-                <a:cs typeface="Calibri" pitchFamily="34" charset="-120"/>
-              </a:rPr>
-              <a:t>💼 5 年家族办公室渠道经理 + 5 年万科/招商地产 ERP 业务分析师</a:t>
-            </a:r>
-            <a:endParaRPr lang="en-US" sz="1400" dirty="0"/>
-          </a:p>
-        </p:txBody>
-      </p:sp>
-      <p:sp>
-        <p:nvSpPr>
-          <p:cNvPr id="13" name="Text 11"/>
-          <p:cNvSpPr/>
-          <p:nvPr/>
-        </p:nvSpPr>
-        <p:spPr>
-          <a:xfrm>
-            <a:off x="3200400" y="3611880"/>
-            <a:ext cx="7772400" cy="365760"/>
-          </a:xfrm>
-          <a:prstGeom prst="rect">
-            <a:avLst/>
-          </a:prstGeom>
-          <a:noFill/>
-          <a:ln/>
-        </p:spPr>
-        <p:txBody>
-          <a:bodyPr wrap="square" lIns="0" tIns="0" rIns="0" bIns="0" rtlCol="0" anchor="ctr"/>
-          <a:lstStyle/>
-          <a:p>
-            <a:pPr indent="0" marL="0">
-              <a:buNone/>
-            </a:pPr>
-            <a:r>
-              <a:rPr lang="en-US" sz="1400" dirty="0">
-                <a:solidFill>
-                  <a:srgbClr val="1E293B"/>
-                </a:solidFill>
-                <a:latin typeface="Calibri" pitchFamily="34" charset="0"/>
-                <a:ea typeface="Calibri" pitchFamily="34" charset="-122"/>
-                <a:cs typeface="Calibri" pitchFamily="34" charset="-120"/>
-              </a:rPr>
-              <a:t>🔬 硕士课题：信贷违约预测模型（本项目核心引擎）</a:t>
-            </a:r>
-            <a:endParaRPr lang="en-US" sz="1400" dirty="0"/>
-          </a:p>
-        </p:txBody>
-      </p:sp>
-      <p:sp>
-        <p:nvSpPr>
-          <p:cNvPr id="14" name="Shape 12"/>
-          <p:cNvSpPr/>
-          <p:nvPr/>
-        </p:nvSpPr>
-        <p:spPr>
-          <a:xfrm>
-            <a:off x="914400" y="4572000"/>
-            <a:ext cx="10332720" cy="1371600"/>
+            <a:off x="548640" y="1371600"/>
+            <a:ext cx="3566160" cy="4114800"/>
           </a:xfrm>
           <a:prstGeom prst="rect">
             <a:avLst/>
@@ -3573,34 +3157,34 @@
       </p:sp>
       <p:sp>
         <p:nvSpPr>
-          <p:cNvPr id="15" name="Shape 13"/>
-          <p:cNvSpPr/>
-          <p:nvPr/>
-        </p:nvSpPr>
-        <p:spPr>
-          <a:xfrm>
-            <a:off x="914400" y="4572000"/>
-            <a:ext cx="91440" cy="1371600"/>
+          <p:cNvPr id="7" name="Shape 5"/>
+          <p:cNvSpPr/>
+          <p:nvPr/>
+        </p:nvSpPr>
+        <p:spPr>
+          <a:xfrm>
+            <a:off x="548640" y="1371600"/>
+            <a:ext cx="3566160" cy="548640"/>
           </a:xfrm>
           <a:prstGeom prst="rect">
             <a:avLst/>
           </a:prstGeom>
           <a:solidFill>
-            <a:srgbClr val="14B8A6"/>
+            <a:srgbClr val="065A82"/>
           </a:solidFill>
           <a:ln/>
         </p:spPr>
       </p:sp>
       <p:sp>
         <p:nvSpPr>
-          <p:cNvPr id="16" name="Text 14"/>
-          <p:cNvSpPr/>
-          <p:nvPr/>
-        </p:nvSpPr>
-        <p:spPr>
-          <a:xfrm>
-            <a:off x="1188720" y="4663440"/>
-            <a:ext cx="9784080" cy="365760"/>
+          <p:cNvPr id="8" name="Text 6"/>
+          <p:cNvSpPr/>
+          <p:nvPr/>
+        </p:nvSpPr>
+        <p:spPr>
+          <a:xfrm>
+            <a:off x="731520" y="1371600"/>
+            <a:ext cx="3200400" cy="548640"/>
           </a:xfrm>
           <a:prstGeom prst="rect">
             <a:avLst/>
@@ -3618,44 +3202,988 @@
             <a:r>
               <a:rPr lang="en-US" sz="1600" b="1" dirty="0">
                 <a:solidFill>
+                  <a:srgbClr val="FFFFFF"/>
+                </a:solidFill>
+                <a:latin typeface="Calibri" pitchFamily="34" charset="0"/>
+                <a:ea typeface="Calibri" pitchFamily="34" charset="-122"/>
+                <a:cs typeface="Calibri" pitchFamily="34" charset="-120"/>
+              </a:rPr>
+              <a:t>Phase 1: MVP</a:t>
+            </a:r>
+            <a:endParaRPr lang="en-US" sz="1600" dirty="0"/>
+          </a:p>
+        </p:txBody>
+      </p:sp>
+      <p:sp>
+        <p:nvSpPr>
+          <p:cNvPr id="9" name="Text 7"/>
+          <p:cNvSpPr/>
+          <p:nvPr/>
+        </p:nvSpPr>
+        <p:spPr>
+          <a:xfrm>
+            <a:off x="731520" y="2011680"/>
+            <a:ext cx="3200400" cy="320040"/>
+          </a:xfrm>
+          <a:prstGeom prst="rect">
+            <a:avLst/>
+          </a:prstGeom>
+          <a:noFill/>
+          <a:ln/>
+        </p:spPr>
+        <p:txBody>
+          <a:bodyPr wrap="square" lIns="0" tIns="0" rIns="0" bIns="0" rtlCol="0" anchor="ctr"/>
+          <a:lstStyle/>
+          <a:p>
+            <a:pPr indent="0" marL="0">
+              <a:buNone/>
+            </a:pPr>
+            <a:r>
+              <a:rPr lang="en-US" sz="1200" dirty="0">
+                <a:solidFill>
+                  <a:srgbClr val="64748B"/>
+                </a:solidFill>
+                <a:latin typeface="Calibri" pitchFamily="34" charset="0"/>
+                <a:ea typeface="Calibri" pitchFamily="34" charset="-122"/>
+                <a:cs typeface="Calibri" pitchFamily="34" charset="-120"/>
+              </a:rPr>
+              <a:t>5 天（模块四+五）</a:t>
+            </a:r>
+            <a:endParaRPr lang="en-US" sz="1200" dirty="0"/>
+          </a:p>
+        </p:txBody>
+      </p:sp>
+      <p:sp>
+        <p:nvSpPr>
+          <p:cNvPr id="10" name="Text 8"/>
+          <p:cNvSpPr/>
+          <p:nvPr/>
+        </p:nvSpPr>
+        <p:spPr>
+          <a:xfrm>
+            <a:off x="731520" y="2468880"/>
+            <a:ext cx="3200400" cy="365760"/>
+          </a:xfrm>
+          <a:prstGeom prst="rect">
+            <a:avLst/>
+          </a:prstGeom>
+          <a:noFill/>
+          <a:ln/>
+        </p:spPr>
+        <p:txBody>
+          <a:bodyPr wrap="square" lIns="0" tIns="0" rIns="0" bIns="0" rtlCol="0" anchor="ctr"/>
+          <a:lstStyle/>
+          <a:p>
+            <a:pPr indent="0" marL="0">
+              <a:buNone/>
+            </a:pPr>
+            <a:r>
+              <a:rPr lang="en-US" sz="1300" dirty="0">
+                <a:solidFill>
+                  <a:srgbClr val="1E293B"/>
+                </a:solidFill>
+                <a:latin typeface="Calibri" pitchFamily="34" charset="0"/>
+                <a:ea typeface="Calibri" pitchFamily="34" charset="-122"/>
+                <a:cs typeface="Calibri" pitchFamily="34" charset="-120"/>
+              </a:rPr>
+              <a:t>• 单轮输入 + Agent 访谈</a:t>
+            </a:r>
+            <a:endParaRPr lang="en-US" sz="1300" dirty="0"/>
+          </a:p>
+        </p:txBody>
+      </p:sp>
+      <p:sp>
+        <p:nvSpPr>
+          <p:cNvPr id="11" name="Text 9"/>
+          <p:cNvSpPr/>
+          <p:nvPr/>
+        </p:nvSpPr>
+        <p:spPr>
+          <a:xfrm>
+            <a:off x="731520" y="2880360"/>
+            <a:ext cx="3200400" cy="365760"/>
+          </a:xfrm>
+          <a:prstGeom prst="rect">
+            <a:avLst/>
+          </a:prstGeom>
+          <a:noFill/>
+          <a:ln/>
+        </p:spPr>
+        <p:txBody>
+          <a:bodyPr wrap="square" lIns="0" tIns="0" rIns="0" bIns="0" rtlCol="0" anchor="ctr"/>
+          <a:lstStyle/>
+          <a:p>
+            <a:pPr indent="0" marL="0">
+              <a:buNone/>
+            </a:pPr>
+            <a:r>
+              <a:rPr lang="en-US" sz="1300" dirty="0">
+                <a:solidFill>
+                  <a:srgbClr val="1E293B"/>
+                </a:solidFill>
+                <a:latin typeface="Calibri" pitchFamily="34" charset="0"/>
+                <a:ea typeface="Calibri" pitchFamily="34" charset="-122"/>
+                <a:cs typeface="Calibri" pitchFamily="34" charset="-120"/>
+              </a:rPr>
+              <a:t>• 模型推理 + 报告生成</a:t>
+            </a:r>
+            <a:endParaRPr lang="en-US" sz="1300" dirty="0"/>
+          </a:p>
+        </p:txBody>
+      </p:sp>
+      <p:sp>
+        <p:nvSpPr>
+          <p:cNvPr id="12" name="Text 10"/>
+          <p:cNvSpPr/>
+          <p:nvPr/>
+        </p:nvSpPr>
+        <p:spPr>
+          <a:xfrm>
+            <a:off x="731520" y="3291840"/>
+            <a:ext cx="3200400" cy="365760"/>
+          </a:xfrm>
+          <a:prstGeom prst="rect">
+            <a:avLst/>
+          </a:prstGeom>
+          <a:noFill/>
+          <a:ln/>
+        </p:spPr>
+        <p:txBody>
+          <a:bodyPr wrap="square" lIns="0" tIns="0" rIns="0" bIns="0" rtlCol="0" anchor="ctr"/>
+          <a:lstStyle/>
+          <a:p>
+            <a:pPr indent="0" marL="0">
+              <a:buNone/>
+            </a:pPr>
+            <a:r>
+              <a:rPr lang="en-US" sz="1300" dirty="0">
+                <a:solidFill>
+                  <a:srgbClr val="1E293B"/>
+                </a:solidFill>
+                <a:latin typeface="Calibri" pitchFamily="34" charset="0"/>
+                <a:ea typeface="Calibri" pitchFamily="34" charset="-122"/>
+                <a:cs typeface="Calibri" pitchFamily="34" charset="-120"/>
+              </a:rPr>
+              <a:t>• Streamlit Web Demo</a:t>
+            </a:r>
+            <a:endParaRPr lang="en-US" sz="1300" dirty="0"/>
+          </a:p>
+        </p:txBody>
+      </p:sp>
+      <p:sp>
+        <p:nvSpPr>
+          <p:cNvPr id="13" name="Text 11"/>
+          <p:cNvSpPr/>
+          <p:nvPr/>
+        </p:nvSpPr>
+        <p:spPr>
+          <a:xfrm>
+            <a:off x="731520" y="3703320"/>
+            <a:ext cx="3200400" cy="365760"/>
+          </a:xfrm>
+          <a:prstGeom prst="rect">
+            <a:avLst/>
+          </a:prstGeom>
+          <a:noFill/>
+          <a:ln/>
+        </p:spPr>
+        <p:txBody>
+          <a:bodyPr wrap="square" lIns="0" tIns="0" rIns="0" bIns="0" rtlCol="0" anchor="ctr"/>
+          <a:lstStyle/>
+          <a:p>
+            <a:pPr indent="0" marL="0">
+              <a:buNone/>
+            </a:pPr>
+            <a:r>
+              <a:rPr lang="en-US" sz="1300" dirty="0">
+                <a:solidFill>
+                  <a:srgbClr val="1E293B"/>
+                </a:solidFill>
+                <a:latin typeface="Calibri" pitchFamily="34" charset="0"/>
+                <a:ea typeface="Calibri" pitchFamily="34" charset="-122"/>
+                <a:cs typeface="Calibri" pitchFamily="34" charset="-120"/>
+              </a:rPr>
+              <a:t>• 3 个预设 Case</a:t>
+            </a:r>
+            <a:endParaRPr lang="en-US" sz="1300" dirty="0"/>
+          </a:p>
+        </p:txBody>
+      </p:sp>
+      <p:sp>
+        <p:nvSpPr>
+          <p:cNvPr id="14" name="Shape 12"/>
+          <p:cNvSpPr/>
+          <p:nvPr/>
+        </p:nvSpPr>
+        <p:spPr>
+          <a:xfrm>
+            <a:off x="731520" y="4937760"/>
+            <a:ext cx="3200400" cy="365760"/>
+          </a:xfrm>
+          <a:prstGeom prst="rect">
+            <a:avLst/>
+          </a:prstGeom>
+          <a:solidFill>
+            <a:srgbClr val="F8FAFC"/>
+          </a:solidFill>
+          <a:ln/>
+        </p:spPr>
+      </p:sp>
+      <p:sp>
+        <p:nvSpPr>
+          <p:cNvPr id="15" name="Text 13"/>
+          <p:cNvSpPr/>
+          <p:nvPr/>
+        </p:nvSpPr>
+        <p:spPr>
+          <a:xfrm>
+            <a:off x="731520" y="4937760"/>
+            <a:ext cx="3200400" cy="365760"/>
+          </a:xfrm>
+          <a:prstGeom prst="rect">
+            <a:avLst/>
+          </a:prstGeom>
+          <a:noFill/>
+          <a:ln/>
+        </p:spPr>
+        <p:txBody>
+          <a:bodyPr wrap="square" lIns="0" tIns="0" rIns="0" bIns="0" rtlCol="0" anchor="ctr"/>
+          <a:lstStyle/>
+          <a:p>
+            <a:pPr algn="ctr" indent="0" marL="0">
+              <a:buNone/>
+            </a:pPr>
+            <a:r>
+              <a:rPr lang="en-US" sz="1300" b="1" dirty="0">
+                <a:solidFill>
+                  <a:srgbClr val="065A82"/>
+                </a:solidFill>
+                <a:latin typeface="Calibri" pitchFamily="34" charset="0"/>
+                <a:ea typeface="Calibri" pitchFamily="34" charset="-122"/>
+                <a:cs typeface="Calibri" pitchFamily="34" charset="-120"/>
+              </a:rPr>
+              <a:t>✅ 已完成</a:t>
+            </a:r>
+            <a:endParaRPr lang="en-US" sz="1300" dirty="0"/>
+          </a:p>
+        </p:txBody>
+      </p:sp>
+      <p:sp>
+        <p:nvSpPr>
+          <p:cNvPr id="16" name="Shape 14"/>
+          <p:cNvSpPr/>
+          <p:nvPr/>
+        </p:nvSpPr>
+        <p:spPr>
+          <a:xfrm>
+            <a:off x="4389120" y="1371600"/>
+            <a:ext cx="3566160" cy="4114800"/>
+          </a:xfrm>
+          <a:prstGeom prst="rect">
+            <a:avLst/>
+          </a:prstGeom>
+          <a:solidFill>
+            <a:srgbClr val="FFFFFF"/>
+          </a:solidFill>
+          <a:ln w="12700">
+            <a:solidFill>
+              <a:srgbClr val="E2E8F0"/>
+            </a:solidFill>
+            <a:prstDash val="solid"/>
+          </a:ln>
+          <a:effectLst>
+            <a:outerShdw sx="100000" sy="100000" kx="0" ky="0" algn="bl" rotWithShape="0" blurRad="76200" dist="25400" dir="8100000">
+              <a:srgbClr val="000000">
+                <a:alpha val="8000"/>
+              </a:srgbClr>
+            </a:outerShdw>
+          </a:effectLst>
+        </p:spPr>
+      </p:sp>
+      <p:sp>
+        <p:nvSpPr>
+          <p:cNvPr id="17" name="Shape 15"/>
+          <p:cNvSpPr/>
+          <p:nvPr/>
+        </p:nvSpPr>
+        <p:spPr>
+          <a:xfrm>
+            <a:off x="4389120" y="1371600"/>
+            <a:ext cx="3566160" cy="548640"/>
+          </a:xfrm>
+          <a:prstGeom prst="rect">
+            <a:avLst/>
+          </a:prstGeom>
+          <a:solidFill>
+            <a:srgbClr val="1C7293"/>
+          </a:solidFill>
+          <a:ln/>
+        </p:spPr>
+      </p:sp>
+      <p:sp>
+        <p:nvSpPr>
+          <p:cNvPr id="18" name="Text 16"/>
+          <p:cNvSpPr/>
+          <p:nvPr/>
+        </p:nvSpPr>
+        <p:spPr>
+          <a:xfrm>
+            <a:off x="4572000" y="1371600"/>
+            <a:ext cx="3200400" cy="548640"/>
+          </a:xfrm>
+          <a:prstGeom prst="rect">
+            <a:avLst/>
+          </a:prstGeom>
+          <a:noFill/>
+          <a:ln/>
+        </p:spPr>
+        <p:txBody>
+          <a:bodyPr wrap="square" lIns="0" tIns="0" rIns="0" bIns="0" rtlCol="0" anchor="ctr"/>
+          <a:lstStyle/>
+          <a:p>
+            <a:pPr indent="0" marL="0">
+              <a:buNone/>
+            </a:pPr>
+            <a:r>
+              <a:rPr lang="en-US" sz="1600" b="1" dirty="0">
+                <a:solidFill>
+                  <a:srgbClr val="FFFFFF"/>
+                </a:solidFill>
+                <a:latin typeface="Calibri" pitchFamily="34" charset="0"/>
+                <a:ea typeface="Calibri" pitchFamily="34" charset="-122"/>
+                <a:cs typeface="Calibri" pitchFamily="34" charset="-120"/>
+              </a:rPr>
+              <a:t>Phase 2: 产品化</a:t>
+            </a:r>
+            <a:endParaRPr lang="en-US" sz="1600" dirty="0"/>
+          </a:p>
+        </p:txBody>
+      </p:sp>
+      <p:sp>
+        <p:nvSpPr>
+          <p:cNvPr id="19" name="Text 17"/>
+          <p:cNvSpPr/>
+          <p:nvPr/>
+        </p:nvSpPr>
+        <p:spPr>
+          <a:xfrm>
+            <a:off x="4572000" y="2011680"/>
+            <a:ext cx="3200400" cy="320040"/>
+          </a:xfrm>
+          <a:prstGeom prst="rect">
+            <a:avLst/>
+          </a:prstGeom>
+          <a:noFill/>
+          <a:ln/>
+        </p:spPr>
+        <p:txBody>
+          <a:bodyPr wrap="square" lIns="0" tIns="0" rIns="0" bIns="0" rtlCol="0" anchor="ctr"/>
+          <a:lstStyle/>
+          <a:p>
+            <a:pPr indent="0" marL="0">
+              <a:buNone/>
+            </a:pPr>
+            <a:r>
+              <a:rPr lang="en-US" sz="1200" dirty="0">
+                <a:solidFill>
+                  <a:srgbClr val="64748B"/>
+                </a:solidFill>
+                <a:latin typeface="Calibri" pitchFamily="34" charset="0"/>
+                <a:ea typeface="Calibri" pitchFamily="34" charset="-122"/>
+                <a:cs typeface="Calibri" pitchFamily="34" charset="-120"/>
+              </a:rPr>
+              <a:t>1-2 个月</a:t>
+            </a:r>
+            <a:endParaRPr lang="en-US" sz="1200" dirty="0"/>
+          </a:p>
+        </p:txBody>
+      </p:sp>
+      <p:sp>
+        <p:nvSpPr>
+          <p:cNvPr id="20" name="Text 18"/>
+          <p:cNvSpPr/>
+          <p:nvPr/>
+        </p:nvSpPr>
+        <p:spPr>
+          <a:xfrm>
+            <a:off x="4572000" y="2468880"/>
+            <a:ext cx="3200400" cy="365760"/>
+          </a:xfrm>
+          <a:prstGeom prst="rect">
+            <a:avLst/>
+          </a:prstGeom>
+          <a:noFill/>
+          <a:ln/>
+        </p:spPr>
+        <p:txBody>
+          <a:bodyPr wrap="square" lIns="0" tIns="0" rIns="0" bIns="0" rtlCol="0" anchor="ctr"/>
+          <a:lstStyle/>
+          <a:p>
+            <a:pPr indent="0" marL="0">
+              <a:buNone/>
+            </a:pPr>
+            <a:r>
+              <a:rPr lang="en-US" sz="1300" dirty="0">
+                <a:solidFill>
+                  <a:srgbClr val="1E293B"/>
+                </a:solidFill>
+                <a:latin typeface="Calibri" pitchFamily="34" charset="0"/>
+                <a:ea typeface="Calibri" pitchFamily="34" charset="-122"/>
+                <a:cs typeface="Calibri" pitchFamily="34" charset="-120"/>
+              </a:rPr>
+              <a:t>• FastAPI + Docker</a:t>
+            </a:r>
+            <a:endParaRPr lang="en-US" sz="1300" dirty="0"/>
+          </a:p>
+        </p:txBody>
+      </p:sp>
+      <p:sp>
+        <p:nvSpPr>
+          <p:cNvPr id="21" name="Text 19"/>
+          <p:cNvSpPr/>
+          <p:nvPr/>
+        </p:nvSpPr>
+        <p:spPr>
+          <a:xfrm>
+            <a:off x="4572000" y="2880360"/>
+            <a:ext cx="3200400" cy="365760"/>
+          </a:xfrm>
+          <a:prstGeom prst="rect">
+            <a:avLst/>
+          </a:prstGeom>
+          <a:noFill/>
+          <a:ln/>
+        </p:spPr>
+        <p:txBody>
+          <a:bodyPr wrap="square" lIns="0" tIns="0" rIns="0" bIns="0" rtlCol="0" anchor="ctr"/>
+          <a:lstStyle/>
+          <a:p>
+            <a:pPr indent="0" marL="0">
+              <a:buNone/>
+            </a:pPr>
+            <a:r>
+              <a:rPr lang="en-US" sz="1300" dirty="0">
+                <a:solidFill>
+                  <a:srgbClr val="1E293B"/>
+                </a:solidFill>
+                <a:latin typeface="Calibri" pitchFamily="34" charset="0"/>
+                <a:ea typeface="Calibri" pitchFamily="34" charset="-122"/>
+                <a:cs typeface="Calibri" pitchFamily="34" charset="-120"/>
+              </a:rPr>
+              <a:t>• OCR 多模态采集</a:t>
+            </a:r>
+            <a:endParaRPr lang="en-US" sz="1300" dirty="0"/>
+          </a:p>
+        </p:txBody>
+      </p:sp>
+      <p:sp>
+        <p:nvSpPr>
+          <p:cNvPr id="22" name="Text 20"/>
+          <p:cNvSpPr/>
+          <p:nvPr/>
+        </p:nvSpPr>
+        <p:spPr>
+          <a:xfrm>
+            <a:off x="4572000" y="3291840"/>
+            <a:ext cx="3200400" cy="365760"/>
+          </a:xfrm>
+          <a:prstGeom prst="rect">
+            <a:avLst/>
+          </a:prstGeom>
+          <a:noFill/>
+          <a:ln/>
+        </p:spPr>
+        <p:txBody>
+          <a:bodyPr wrap="square" lIns="0" tIns="0" rIns="0" bIns="0" rtlCol="0" anchor="ctr"/>
+          <a:lstStyle/>
+          <a:p>
+            <a:pPr indent="0" marL="0">
+              <a:buNone/>
+            </a:pPr>
+            <a:r>
+              <a:rPr lang="en-US" sz="1300" dirty="0">
+                <a:solidFill>
+                  <a:srgbClr val="1E293B"/>
+                </a:solidFill>
+                <a:latin typeface="Calibri" pitchFamily="34" charset="0"/>
+                <a:ea typeface="Calibri" pitchFamily="34" charset="-122"/>
+                <a:cs typeface="Calibri" pitchFamily="34" charset="-120"/>
+              </a:rPr>
+              <a:t>• 模型校准（Isotonic）</a:t>
+            </a:r>
+            <a:endParaRPr lang="en-US" sz="1300" dirty="0"/>
+          </a:p>
+        </p:txBody>
+      </p:sp>
+      <p:sp>
+        <p:nvSpPr>
+          <p:cNvPr id="23" name="Text 21"/>
+          <p:cNvSpPr/>
+          <p:nvPr/>
+        </p:nvSpPr>
+        <p:spPr>
+          <a:xfrm>
+            <a:off x="4572000" y="3703320"/>
+            <a:ext cx="3200400" cy="365760"/>
+          </a:xfrm>
+          <a:prstGeom prst="rect">
+            <a:avLst/>
+          </a:prstGeom>
+          <a:noFill/>
+          <a:ln/>
+        </p:spPr>
+        <p:txBody>
+          <a:bodyPr wrap="square" lIns="0" tIns="0" rIns="0" bIns="0" rtlCol="0" anchor="ctr"/>
+          <a:lstStyle/>
+          <a:p>
+            <a:pPr indent="0" marL="0">
+              <a:buNone/>
+            </a:pPr>
+            <a:r>
+              <a:rPr lang="en-US" sz="1300" dirty="0">
+                <a:solidFill>
+                  <a:srgbClr val="1E293B"/>
+                </a:solidFill>
+                <a:latin typeface="Calibri" pitchFamily="34" charset="0"/>
+                <a:ea typeface="Calibri" pitchFamily="34" charset="-122"/>
+                <a:cs typeface="Calibri" pitchFamily="34" charset="-120"/>
+              </a:rPr>
+              <a:t>• Word/PDF 导出</a:t>
+            </a:r>
+            <a:endParaRPr lang="en-US" sz="1300" dirty="0"/>
+          </a:p>
+        </p:txBody>
+      </p:sp>
+      <p:sp>
+        <p:nvSpPr>
+          <p:cNvPr id="24" name="Shape 22"/>
+          <p:cNvSpPr/>
+          <p:nvPr/>
+        </p:nvSpPr>
+        <p:spPr>
+          <a:xfrm>
+            <a:off x="4572000" y="4937760"/>
+            <a:ext cx="3200400" cy="365760"/>
+          </a:xfrm>
+          <a:prstGeom prst="rect">
+            <a:avLst/>
+          </a:prstGeom>
+          <a:solidFill>
+            <a:srgbClr val="F8FAFC"/>
+          </a:solidFill>
+          <a:ln/>
+        </p:spPr>
+      </p:sp>
+      <p:sp>
+        <p:nvSpPr>
+          <p:cNvPr id="25" name="Text 23"/>
+          <p:cNvSpPr/>
+          <p:nvPr/>
+        </p:nvSpPr>
+        <p:spPr>
+          <a:xfrm>
+            <a:off x="4572000" y="4937760"/>
+            <a:ext cx="3200400" cy="365760"/>
+          </a:xfrm>
+          <a:prstGeom prst="rect">
+            <a:avLst/>
+          </a:prstGeom>
+          <a:noFill/>
+          <a:ln/>
+        </p:spPr>
+        <p:txBody>
+          <a:bodyPr wrap="square" lIns="0" tIns="0" rIns="0" bIns="0" rtlCol="0" anchor="ctr"/>
+          <a:lstStyle/>
+          <a:p>
+            <a:pPr algn="ctr" indent="0" marL="0">
+              <a:buNone/>
+            </a:pPr>
+            <a:r>
+              <a:rPr lang="en-US" sz="1300" b="1" dirty="0">
+                <a:solidFill>
+                  <a:srgbClr val="1C7293"/>
+                </a:solidFill>
+                <a:latin typeface="Calibri" pitchFamily="34" charset="0"/>
+                <a:ea typeface="Calibri" pitchFamily="34" charset="-122"/>
+                <a:cs typeface="Calibri" pitchFamily="34" charset="-120"/>
+              </a:rPr>
+              <a:t>⏳ 计划中</a:t>
+            </a:r>
+            <a:endParaRPr lang="en-US" sz="1300" dirty="0"/>
+          </a:p>
+        </p:txBody>
+      </p:sp>
+      <p:sp>
+        <p:nvSpPr>
+          <p:cNvPr id="26" name="Shape 24"/>
+          <p:cNvSpPr/>
+          <p:nvPr/>
+        </p:nvSpPr>
+        <p:spPr>
+          <a:xfrm>
+            <a:off x="8229600" y="1371600"/>
+            <a:ext cx="3566160" cy="4114800"/>
+          </a:xfrm>
+          <a:prstGeom prst="rect">
+            <a:avLst/>
+          </a:prstGeom>
+          <a:solidFill>
+            <a:srgbClr val="FFFFFF"/>
+          </a:solidFill>
+          <a:ln w="12700">
+            <a:solidFill>
+              <a:srgbClr val="E2E8F0"/>
+            </a:solidFill>
+            <a:prstDash val="solid"/>
+          </a:ln>
+          <a:effectLst>
+            <a:outerShdw sx="100000" sy="100000" kx="0" ky="0" algn="bl" rotWithShape="0" blurRad="76200" dist="25400" dir="8100000">
+              <a:srgbClr val="000000">
+                <a:alpha val="8000"/>
+              </a:srgbClr>
+            </a:outerShdw>
+          </a:effectLst>
+        </p:spPr>
+      </p:sp>
+      <p:sp>
+        <p:nvSpPr>
+          <p:cNvPr id="27" name="Shape 25"/>
+          <p:cNvSpPr/>
+          <p:nvPr/>
+        </p:nvSpPr>
+        <p:spPr>
+          <a:xfrm>
+            <a:off x="8229600" y="1371600"/>
+            <a:ext cx="3566160" cy="548640"/>
+          </a:xfrm>
+          <a:prstGeom prst="rect">
+            <a:avLst/>
+          </a:prstGeom>
+          <a:solidFill>
+            <a:srgbClr val="21295C"/>
+          </a:solidFill>
+          <a:ln/>
+        </p:spPr>
+      </p:sp>
+      <p:sp>
+        <p:nvSpPr>
+          <p:cNvPr id="28" name="Text 26"/>
+          <p:cNvSpPr/>
+          <p:nvPr/>
+        </p:nvSpPr>
+        <p:spPr>
+          <a:xfrm>
+            <a:off x="8412480" y="1371600"/>
+            <a:ext cx="3200400" cy="548640"/>
+          </a:xfrm>
+          <a:prstGeom prst="rect">
+            <a:avLst/>
+          </a:prstGeom>
+          <a:noFill/>
+          <a:ln/>
+        </p:spPr>
+        <p:txBody>
+          <a:bodyPr wrap="square" lIns="0" tIns="0" rIns="0" bIns="0" rtlCol="0" anchor="ctr"/>
+          <a:lstStyle/>
+          <a:p>
+            <a:pPr indent="0" marL="0">
+              <a:buNone/>
+            </a:pPr>
+            <a:r>
+              <a:rPr lang="en-US" sz="1600" b="1" dirty="0">
+                <a:solidFill>
+                  <a:srgbClr val="FFFFFF"/>
+                </a:solidFill>
+                <a:latin typeface="Calibri" pitchFamily="34" charset="0"/>
+                <a:ea typeface="Calibri" pitchFamily="34" charset="-122"/>
+                <a:cs typeface="Calibri" pitchFamily="34" charset="-120"/>
+              </a:rPr>
+              <a:t>Phase 3: 企业级</a:t>
+            </a:r>
+            <a:endParaRPr lang="en-US" sz="1600" dirty="0"/>
+          </a:p>
+        </p:txBody>
+      </p:sp>
+      <p:sp>
+        <p:nvSpPr>
+          <p:cNvPr id="29" name="Text 27"/>
+          <p:cNvSpPr/>
+          <p:nvPr/>
+        </p:nvSpPr>
+        <p:spPr>
+          <a:xfrm>
+            <a:off x="8412480" y="2011680"/>
+            <a:ext cx="3200400" cy="320040"/>
+          </a:xfrm>
+          <a:prstGeom prst="rect">
+            <a:avLst/>
+          </a:prstGeom>
+          <a:noFill/>
+          <a:ln/>
+        </p:spPr>
+        <p:txBody>
+          <a:bodyPr wrap="square" lIns="0" tIns="0" rIns="0" bIns="0" rtlCol="0" anchor="ctr"/>
+          <a:lstStyle/>
+          <a:p>
+            <a:pPr indent="0" marL="0">
+              <a:buNone/>
+            </a:pPr>
+            <a:r>
+              <a:rPr lang="en-US" sz="1200" dirty="0">
+                <a:solidFill>
+                  <a:srgbClr val="64748B"/>
+                </a:solidFill>
+                <a:latin typeface="Calibri" pitchFamily="34" charset="0"/>
+                <a:ea typeface="Calibri" pitchFamily="34" charset="-122"/>
+                <a:cs typeface="Calibri" pitchFamily="34" charset="-120"/>
+              </a:rPr>
+              <a:t>3-6 个月</a:t>
+            </a:r>
+            <a:endParaRPr lang="en-US" sz="1200" dirty="0"/>
+          </a:p>
+        </p:txBody>
+      </p:sp>
+      <p:sp>
+        <p:nvSpPr>
+          <p:cNvPr id="30" name="Text 28"/>
+          <p:cNvSpPr/>
+          <p:nvPr/>
+        </p:nvSpPr>
+        <p:spPr>
+          <a:xfrm>
+            <a:off x="8412480" y="2468880"/>
+            <a:ext cx="3200400" cy="365760"/>
+          </a:xfrm>
+          <a:prstGeom prst="rect">
+            <a:avLst/>
+          </a:prstGeom>
+          <a:noFill/>
+          <a:ln/>
+        </p:spPr>
+        <p:txBody>
+          <a:bodyPr wrap="square" lIns="0" tIns="0" rIns="0" bIns="0" rtlCol="0" anchor="ctr"/>
+          <a:lstStyle/>
+          <a:p>
+            <a:pPr indent="0" marL="0">
+              <a:buNone/>
+            </a:pPr>
+            <a:r>
+              <a:rPr lang="en-US" sz="1300" dirty="0">
+                <a:solidFill>
+                  <a:srgbClr val="1E293B"/>
+                </a:solidFill>
+                <a:latin typeface="Calibri" pitchFamily="34" charset="0"/>
+                <a:ea typeface="Calibri" pitchFamily="34" charset="-122"/>
+                <a:cs typeface="Calibri" pitchFamily="34" charset="-120"/>
+              </a:rPr>
+              <a:t>• 多用户并发</a:t>
+            </a:r>
+            <a:endParaRPr lang="en-US" sz="1300" dirty="0"/>
+          </a:p>
+        </p:txBody>
+      </p:sp>
+      <p:sp>
+        <p:nvSpPr>
+          <p:cNvPr id="31" name="Text 29"/>
+          <p:cNvSpPr/>
+          <p:nvPr/>
+        </p:nvSpPr>
+        <p:spPr>
+          <a:xfrm>
+            <a:off x="8412480" y="2880360"/>
+            <a:ext cx="3200400" cy="365760"/>
+          </a:xfrm>
+          <a:prstGeom prst="rect">
+            <a:avLst/>
+          </a:prstGeom>
+          <a:noFill/>
+          <a:ln/>
+        </p:spPr>
+        <p:txBody>
+          <a:bodyPr wrap="square" lIns="0" tIns="0" rIns="0" bIns="0" rtlCol="0" anchor="ctr"/>
+          <a:lstStyle/>
+          <a:p>
+            <a:pPr indent="0" marL="0">
+              <a:buNone/>
+            </a:pPr>
+            <a:r>
+              <a:rPr lang="en-US" sz="1300" dirty="0">
+                <a:solidFill>
+                  <a:srgbClr val="1E293B"/>
+                </a:solidFill>
+                <a:latin typeface="Calibri" pitchFamily="34" charset="0"/>
+                <a:ea typeface="Calibri" pitchFamily="34" charset="-122"/>
+                <a:cs typeface="Calibri" pitchFamily="34" charset="-120"/>
+              </a:rPr>
+              <a:t>• 企业级 SaaS</a:t>
+            </a:r>
+            <a:endParaRPr lang="en-US" sz="1300" dirty="0"/>
+          </a:p>
+        </p:txBody>
+      </p:sp>
+      <p:sp>
+        <p:nvSpPr>
+          <p:cNvPr id="32" name="Text 30"/>
+          <p:cNvSpPr/>
+          <p:nvPr/>
+        </p:nvSpPr>
+        <p:spPr>
+          <a:xfrm>
+            <a:off x="8412480" y="3291840"/>
+            <a:ext cx="3200400" cy="365760"/>
+          </a:xfrm>
+          <a:prstGeom prst="rect">
+            <a:avLst/>
+          </a:prstGeom>
+          <a:noFill/>
+          <a:ln/>
+        </p:spPr>
+        <p:txBody>
+          <a:bodyPr wrap="square" lIns="0" tIns="0" rIns="0" bIns="0" rtlCol="0" anchor="ctr"/>
+          <a:lstStyle/>
+          <a:p>
+            <a:pPr indent="0" marL="0">
+              <a:buNone/>
+            </a:pPr>
+            <a:r>
+              <a:rPr lang="en-US" sz="1300" dirty="0">
+                <a:solidFill>
+                  <a:srgbClr val="1E293B"/>
+                </a:solidFill>
+                <a:latin typeface="Calibri" pitchFamily="34" charset="0"/>
+                <a:ea typeface="Calibri" pitchFamily="34" charset="-122"/>
+                <a:cs typeface="Calibri" pitchFamily="34" charset="-120"/>
+              </a:rPr>
+              <a:t>• 实时交易系统对接</a:t>
+            </a:r>
+            <a:endParaRPr lang="en-US" sz="1300" dirty="0"/>
+          </a:p>
+        </p:txBody>
+      </p:sp>
+      <p:sp>
+        <p:nvSpPr>
+          <p:cNvPr id="33" name="Text 31"/>
+          <p:cNvSpPr/>
+          <p:nvPr/>
+        </p:nvSpPr>
+        <p:spPr>
+          <a:xfrm>
+            <a:off x="8412480" y="3703320"/>
+            <a:ext cx="3200400" cy="365760"/>
+          </a:xfrm>
+          <a:prstGeom prst="rect">
+            <a:avLst/>
+          </a:prstGeom>
+          <a:noFill/>
+          <a:ln/>
+        </p:spPr>
+        <p:txBody>
+          <a:bodyPr wrap="square" lIns="0" tIns="0" rIns="0" bIns="0" rtlCol="0" anchor="ctr"/>
+          <a:lstStyle/>
+          <a:p>
+            <a:pPr indent="0" marL="0">
+              <a:buNone/>
+            </a:pPr>
+            <a:r>
+              <a:rPr lang="en-US" sz="1300" dirty="0">
+                <a:solidFill>
+                  <a:srgbClr val="1E293B"/>
+                </a:solidFill>
+                <a:latin typeface="Calibri" pitchFamily="34" charset="0"/>
+                <a:ea typeface="Calibri" pitchFamily="34" charset="-122"/>
+                <a:cs typeface="Calibri" pitchFamily="34" charset="-120"/>
+              </a:rPr>
+              <a:t>• 多产品线支持</a:t>
+            </a:r>
+            <a:endParaRPr lang="en-US" sz="1300" dirty="0"/>
+          </a:p>
+        </p:txBody>
+      </p:sp>
+      <p:sp>
+        <p:nvSpPr>
+          <p:cNvPr id="34" name="Shape 32"/>
+          <p:cNvSpPr/>
+          <p:nvPr/>
+        </p:nvSpPr>
+        <p:spPr>
+          <a:xfrm>
+            <a:off x="8412480" y="4937760"/>
+            <a:ext cx="3200400" cy="365760"/>
+          </a:xfrm>
+          <a:prstGeom prst="rect">
+            <a:avLst/>
+          </a:prstGeom>
+          <a:solidFill>
+            <a:srgbClr val="F8FAFC"/>
+          </a:solidFill>
+          <a:ln/>
+        </p:spPr>
+      </p:sp>
+      <p:sp>
+        <p:nvSpPr>
+          <p:cNvPr id="35" name="Text 33"/>
+          <p:cNvSpPr/>
+          <p:nvPr/>
+        </p:nvSpPr>
+        <p:spPr>
+          <a:xfrm>
+            <a:off x="8412480" y="4937760"/>
+            <a:ext cx="3200400" cy="365760"/>
+          </a:xfrm>
+          <a:prstGeom prst="rect">
+            <a:avLst/>
+          </a:prstGeom>
+          <a:noFill/>
+          <a:ln/>
+        </p:spPr>
+        <p:txBody>
+          <a:bodyPr wrap="square" lIns="0" tIns="0" rIns="0" bIns="0" rtlCol="0" anchor="ctr"/>
+          <a:lstStyle/>
+          <a:p>
+            <a:pPr algn="ctr" indent="0" marL="0">
+              <a:buNone/>
+            </a:pPr>
+            <a:r>
+              <a:rPr lang="en-US" sz="1300" b="1" dirty="0">
+                <a:solidFill>
                   <a:srgbClr val="21295C"/>
                 </a:solidFill>
                 <a:latin typeface="Calibri" pitchFamily="34" charset="0"/>
                 <a:ea typeface="Calibri" pitchFamily="34" charset="-122"/>
                 <a:cs typeface="Calibri" pitchFamily="34" charset="-120"/>
               </a:rPr>
-              <a:t>学术 IP</a:t>
-            </a:r>
-            <a:endParaRPr lang="en-US" sz="1600" dirty="0"/>
-          </a:p>
-        </p:txBody>
-      </p:sp>
-      <p:sp>
-        <p:nvSpPr>
-          <p:cNvPr id="17" name="Text 15"/>
-          <p:cNvSpPr/>
-          <p:nvPr/>
-        </p:nvSpPr>
-        <p:spPr>
-          <a:xfrm>
-            <a:off x="1188720" y="5029200"/>
-            <a:ext cx="9784080" cy="1097280"/>
-          </a:xfrm>
-          <a:prstGeom prst="rect">
-            <a:avLst/>
-          </a:prstGeom>
-          <a:noFill/>
-          <a:ln/>
-        </p:spPr>
-        <p:txBody>
-          <a:bodyPr wrap="square" lIns="0" tIns="0" rIns="0" bIns="0" rtlCol="0" anchor="ctr"/>
-          <a:lstStyle/>
-          <a:p>
-            <a:pPr indent="0" marL="0">
-              <a:buNone/>
-            </a:pPr>
-            <a:r>
-              <a:rPr lang="en-US" sz="1300" dirty="0">
+              <a:t>📋 远期</a:t>
+            </a:r>
+            <a:endParaRPr lang="en-US" sz="1300" dirty="0"/>
+          </a:p>
+        </p:txBody>
+      </p:sp>
+      <p:sp>
+        <p:nvSpPr>
+          <p:cNvPr id="36" name="Text 34"/>
+          <p:cNvSpPr/>
+          <p:nvPr/>
+        </p:nvSpPr>
+        <p:spPr>
+          <a:xfrm>
+            <a:off x="548640" y="5760720"/>
+            <a:ext cx="11064240" cy="365760"/>
+          </a:xfrm>
+          <a:prstGeom prst="rect">
+            <a:avLst/>
+          </a:prstGeom>
+          <a:noFill/>
+          <a:ln/>
+        </p:spPr>
+        <p:txBody>
+          <a:bodyPr wrap="square" lIns="0" tIns="0" rIns="0" bIns="0" rtlCol="0" anchor="ctr"/>
+          <a:lstStyle/>
+          <a:p>
+            <a:pPr algn="ctr" indent="0" marL="0">
+              <a:buNone/>
+            </a:pPr>
+            <a:r>
+              <a:rPr lang="en-US" sz="1300" i="1" dirty="0">
                 <a:solidFill>
                   <a:srgbClr val="64748B"/>
                 </a:solidFill>
@@ -3663,41 +4191,7 @@
                 <a:ea typeface="Calibri" pitchFamily="34" charset="-122"/>
                 <a:cs typeface="Calibri" pitchFamily="34" charset="-120"/>
               </a:rPr>
-              <a:t>硕士课题方向：信贷违约预测模型</a:t>
-            </a:r>
-            <a:endParaRPr lang="en-US" sz="1300" dirty="0"/>
-          </a:p>
-          <a:p>
-            <a:pPr indent="0" marL="0">
-              <a:buNone/>
-            </a:pPr>
-            <a:r>
-              <a:rPr lang="en-US" sz="1300" dirty="0">
-                <a:solidFill>
-                  <a:srgbClr val="64748B"/>
-                </a:solidFill>
-                <a:latin typeface="Calibri" pitchFamily="34" charset="0"/>
-                <a:ea typeface="Calibri" pitchFamily="34" charset="-122"/>
-                <a:cs typeface="Calibri" pitchFamily="34" charset="-120"/>
-              </a:rPr>
-              <a:t>已完成：LendingClub 2018-2019 数据完整建模流程（V1.ipynb + V2.md）</a:t>
-            </a:r>
-            <a:endParaRPr lang="en-US" sz="1300" dirty="0"/>
-          </a:p>
-          <a:p>
-            <a:pPr indent="0" marL="0">
-              <a:buNone/>
-            </a:pPr>
-            <a:r>
-              <a:rPr lang="en-US" sz="1300" dirty="0">
-                <a:solidFill>
-                  <a:srgbClr val="64748B"/>
-                </a:solidFill>
-                <a:latin typeface="Calibri" pitchFamily="34" charset="0"/>
-                <a:ea typeface="Calibri" pitchFamily="34" charset="-122"/>
-                <a:cs typeface="Calibri" pitchFamily="34" charset="-120"/>
-              </a:rPr>
-              <a:t>本次路演核心：把课题成果产品化为 CreditMind Agent</a:t>
+              <a:t>Phase 2 会进一步丰富信贷特征工程与多模态采集，覆盖更多消费贷细分场景。</a:t>
             </a:r>
             <a:endParaRPr lang="en-US" sz="1300" dirty="0"/>
           </a:p>
@@ -3788,7 +4282,7 @@
                 <a:ea typeface="Georgia" pitchFamily="34" charset="-122"/>
                 <a:cs typeface="Georgia" pitchFamily="34" charset="-120"/>
               </a:rPr>
-              <a:t>Roadmap</a:t>
+              <a:t>诚实短板与 Ask</a:t>
             </a:r>
             <a:endParaRPr lang="en-US" sz="2800" dirty="0"/>
           </a:p>
@@ -3863,7 +4357,7 @@
                   <a:srgbClr val="64748B"/>
                 </a:solidFill>
               </a:rPr>
-              <a:t>12 / 14</a:t>
+              <a:t>12 / 13</a:t>
             </a:r>
             <a:endParaRPr lang="en-US" sz="900" dirty="0"/>
           </a:p>
@@ -3871,14 +4365,53 @@
       </p:sp>
       <p:sp>
         <p:nvSpPr>
-          <p:cNvPr id="6" name="Shape 4"/>
-          <p:cNvSpPr/>
-          <p:nvPr/>
-        </p:nvSpPr>
-        <p:spPr>
-          <a:xfrm>
-            <a:off x="548640" y="1371600"/>
-            <a:ext cx="3566160" cy="4114800"/>
+          <p:cNvPr id="6" name="Text 4"/>
+          <p:cNvSpPr/>
+          <p:nvPr/>
+        </p:nvSpPr>
+        <p:spPr>
+          <a:xfrm>
+            <a:off x="548640" y="1097280"/>
+            <a:ext cx="5486400" cy="365760"/>
+          </a:xfrm>
+          <a:prstGeom prst="rect">
+            <a:avLst/>
+          </a:prstGeom>
+          <a:noFill/>
+          <a:ln/>
+        </p:spPr>
+        <p:txBody>
+          <a:bodyPr wrap="square" lIns="0" tIns="0" rIns="0" bIns="0" rtlCol="0" anchor="ctr"/>
+          <a:lstStyle/>
+          <a:p>
+            <a:pPr indent="0" marL="0">
+              <a:buNone/>
+            </a:pPr>
+            <a:r>
+              <a:rPr lang="en-US" sz="1800" b="1" dirty="0">
+                <a:solidFill>
+                  <a:srgbClr val="21295C"/>
+                </a:solidFill>
+                <a:latin typeface="Calibri" pitchFamily="34" charset="0"/>
+                <a:ea typeface="Calibri" pitchFamily="34" charset="-122"/>
+                <a:cs typeface="Calibri" pitchFamily="34" charset="-120"/>
+              </a:rPr>
+              <a:t>已知短板（主动说明）</a:t>
+            </a:r>
+            <a:endParaRPr lang="en-US" sz="1800" dirty="0"/>
+          </a:p>
+        </p:txBody>
+      </p:sp>
+      <p:sp>
+        <p:nvSpPr>
+          <p:cNvPr id="7" name="Shape 5"/>
+          <p:cNvSpPr/>
+          <p:nvPr/>
+        </p:nvSpPr>
+        <p:spPr>
+          <a:xfrm>
+            <a:off x="548640" y="1554480"/>
+            <a:ext cx="5303520" cy="548640"/>
           </a:xfrm>
           <a:prstGeom prst="rect">
             <a:avLst/>
@@ -3892,33 +4425,6 @@
             </a:solidFill>
             <a:prstDash val="solid"/>
           </a:ln>
-          <a:effectLst>
-            <a:outerShdw sx="100000" sy="100000" kx="0" ky="0" algn="bl" rotWithShape="0" blurRad="76200" dist="25400" dir="8100000">
-              <a:srgbClr val="000000">
-                <a:alpha val="8000"/>
-              </a:srgbClr>
-            </a:outerShdw>
-          </a:effectLst>
-        </p:spPr>
-      </p:sp>
-      <p:sp>
-        <p:nvSpPr>
-          <p:cNvPr id="7" name="Shape 5"/>
-          <p:cNvSpPr/>
-          <p:nvPr/>
-        </p:nvSpPr>
-        <p:spPr>
-          <a:xfrm>
-            <a:off x="548640" y="1371600"/>
-            <a:ext cx="3566160" cy="548640"/>
-          </a:xfrm>
-          <a:prstGeom prst="rect">
-            <a:avLst/>
-          </a:prstGeom>
-          <a:solidFill>
-            <a:srgbClr val="065A82"/>
-          </a:solidFill>
-          <a:ln/>
         </p:spPr>
       </p:sp>
       <p:sp>
@@ -3929,34 +4435,34 @@
         </p:nvSpPr>
         <p:spPr>
           <a:xfrm>
-            <a:off x="731520" y="1371600"/>
-            <a:ext cx="3200400" cy="548640"/>
-          </a:xfrm>
-          <a:prstGeom prst="rect">
-            <a:avLst/>
-          </a:prstGeom>
-          <a:noFill/>
-          <a:ln/>
-        </p:spPr>
-        <p:txBody>
-          <a:bodyPr wrap="square" lIns="0" tIns="0" rIns="0" bIns="0" rtlCol="0" anchor="ctr"/>
-          <a:lstStyle/>
-          <a:p>
-            <a:pPr indent="0" marL="0">
-              <a:buNone/>
-            </a:pPr>
-            <a:r>
-              <a:rPr lang="en-US" sz="1600" b="1" dirty="0">
-                <a:solidFill>
-                  <a:srgbClr val="FFFFFF"/>
-                </a:solidFill>
-                <a:latin typeface="Calibri" pitchFamily="34" charset="0"/>
-                <a:ea typeface="Calibri" pitchFamily="34" charset="-122"/>
-                <a:cs typeface="Calibri" pitchFamily="34" charset="-120"/>
-              </a:rPr>
-              <a:t>Phase 1: MVP</a:t>
-            </a:r>
-            <a:endParaRPr lang="en-US" sz="1600" dirty="0"/>
+            <a:off x="731520" y="1554480"/>
+            <a:ext cx="2743200" cy="548640"/>
+          </a:xfrm>
+          <a:prstGeom prst="rect">
+            <a:avLst/>
+          </a:prstGeom>
+          <a:noFill/>
+          <a:ln/>
+        </p:spPr>
+        <p:txBody>
+          <a:bodyPr wrap="square" lIns="0" tIns="0" rIns="0" bIns="0" rtlCol="0" anchor="ctr"/>
+          <a:lstStyle/>
+          <a:p>
+            <a:pPr indent="0" marL="0">
+              <a:buNone/>
+            </a:pPr>
+            <a:r>
+              <a:rPr lang="en-US" sz="1300" dirty="0">
+                <a:solidFill>
+                  <a:srgbClr val="EF4444"/>
+                </a:solidFill>
+                <a:latin typeface="Calibri" pitchFamily="34" charset="0"/>
+                <a:ea typeface="Calibri" pitchFamily="34" charset="-122"/>
+                <a:cs typeface="Calibri" pitchFamily="34" charset="-120"/>
+              </a:rPr>
+              <a:t>数据规模 15 万行</a:t>
+            </a:r>
+            <a:endParaRPr lang="en-US" sz="1300" dirty="0"/>
           </a:p>
         </p:txBody>
       </p:sp>
@@ -3968,47 +4474,8 @@
         </p:nvSpPr>
         <p:spPr>
           <a:xfrm>
-            <a:off x="731520" y="2011680"/>
-            <a:ext cx="3200400" cy="320040"/>
-          </a:xfrm>
-          <a:prstGeom prst="rect">
-            <a:avLst/>
-          </a:prstGeom>
-          <a:noFill/>
-          <a:ln/>
-        </p:spPr>
-        <p:txBody>
-          <a:bodyPr wrap="square" lIns="0" tIns="0" rIns="0" bIns="0" rtlCol="0" anchor="ctr"/>
-          <a:lstStyle/>
-          <a:p>
-            <a:pPr indent="0" marL="0">
-              <a:buNone/>
-            </a:pPr>
-            <a:r>
-              <a:rPr lang="en-US" sz="1200" dirty="0">
-                <a:solidFill>
-                  <a:srgbClr val="64748B"/>
-                </a:solidFill>
-                <a:latin typeface="Calibri" pitchFamily="34" charset="0"/>
-                <a:ea typeface="Calibri" pitchFamily="34" charset="-122"/>
-                <a:cs typeface="Calibri" pitchFamily="34" charset="-120"/>
-              </a:rPr>
-              <a:t>5 天（模块四+五）</a:t>
-            </a:r>
-            <a:endParaRPr lang="en-US" sz="1200" dirty="0"/>
-          </a:p>
-        </p:txBody>
-      </p:sp>
-      <p:sp>
-        <p:nvSpPr>
-          <p:cNvPr id="10" name="Text 8"/>
-          <p:cNvSpPr/>
-          <p:nvPr/>
-        </p:nvSpPr>
-        <p:spPr>
-          <a:xfrm>
-            <a:off x="731520" y="2468880"/>
-            <a:ext cx="3200400" cy="365760"/>
+            <a:off x="3474720" y="1554480"/>
+            <a:ext cx="2286000" cy="548640"/>
           </a:xfrm>
           <a:prstGeom prst="rect">
             <a:avLst/>
@@ -4026,13 +4493,13 @@
             <a:r>
               <a:rPr lang="en-US" sz="1300" dirty="0">
                 <a:solidFill>
-                  <a:srgbClr val="1E293B"/>
-                </a:solidFill>
-                <a:latin typeface="Calibri" pitchFamily="34" charset="0"/>
-                <a:ea typeface="Calibri" pitchFamily="34" charset="-122"/>
-                <a:cs typeface="Calibri" pitchFamily="34" charset="-120"/>
-              </a:rPr>
-              <a:t>• 单轮输入 + Agent 访谈</a:t>
+                  <a:srgbClr val="10B981"/>
+                </a:solidFill>
+                <a:latin typeface="Calibri" pitchFamily="34" charset="0"/>
+                <a:ea typeface="Calibri" pitchFamily="34" charset="-122"/>
+                <a:cs typeface="Calibri" pitchFamily="34" charset="-120"/>
+              </a:rPr>
+              <a:t>→ 接 2007-2019 全量</a:t>
             </a:r>
             <a:endParaRPr lang="en-US" sz="1300" dirty="0"/>
           </a:p>
@@ -4040,190 +4507,14 @@
       </p:sp>
       <p:sp>
         <p:nvSpPr>
-          <p:cNvPr id="11" name="Text 9"/>
-          <p:cNvSpPr/>
-          <p:nvPr/>
-        </p:nvSpPr>
-        <p:spPr>
-          <a:xfrm>
-            <a:off x="731520" y="2880360"/>
-            <a:ext cx="3200400" cy="365760"/>
-          </a:xfrm>
-          <a:prstGeom prst="rect">
-            <a:avLst/>
-          </a:prstGeom>
-          <a:noFill/>
-          <a:ln/>
-        </p:spPr>
-        <p:txBody>
-          <a:bodyPr wrap="square" lIns="0" tIns="0" rIns="0" bIns="0" rtlCol="0" anchor="ctr"/>
-          <a:lstStyle/>
-          <a:p>
-            <a:pPr indent="0" marL="0">
-              <a:buNone/>
-            </a:pPr>
-            <a:r>
-              <a:rPr lang="en-US" sz="1300" dirty="0">
-                <a:solidFill>
-                  <a:srgbClr val="1E293B"/>
-                </a:solidFill>
-                <a:latin typeface="Calibri" pitchFamily="34" charset="0"/>
-                <a:ea typeface="Calibri" pitchFamily="34" charset="-122"/>
-                <a:cs typeface="Calibri" pitchFamily="34" charset="-120"/>
-              </a:rPr>
-              <a:t>• 模型推理 + 报告生成</a:t>
-            </a:r>
-            <a:endParaRPr lang="en-US" sz="1300" dirty="0"/>
-          </a:p>
-        </p:txBody>
-      </p:sp>
-      <p:sp>
-        <p:nvSpPr>
-          <p:cNvPr id="12" name="Text 10"/>
-          <p:cNvSpPr/>
-          <p:nvPr/>
-        </p:nvSpPr>
-        <p:spPr>
-          <a:xfrm>
-            <a:off x="731520" y="3291840"/>
-            <a:ext cx="3200400" cy="365760"/>
-          </a:xfrm>
-          <a:prstGeom prst="rect">
-            <a:avLst/>
-          </a:prstGeom>
-          <a:noFill/>
-          <a:ln/>
-        </p:spPr>
-        <p:txBody>
-          <a:bodyPr wrap="square" lIns="0" tIns="0" rIns="0" bIns="0" rtlCol="0" anchor="ctr"/>
-          <a:lstStyle/>
-          <a:p>
-            <a:pPr indent="0" marL="0">
-              <a:buNone/>
-            </a:pPr>
-            <a:r>
-              <a:rPr lang="en-US" sz="1300" dirty="0">
-                <a:solidFill>
-                  <a:srgbClr val="1E293B"/>
-                </a:solidFill>
-                <a:latin typeface="Calibri" pitchFamily="34" charset="0"/>
-                <a:ea typeface="Calibri" pitchFamily="34" charset="-122"/>
-                <a:cs typeface="Calibri" pitchFamily="34" charset="-120"/>
-              </a:rPr>
-              <a:t>• Streamlit Web Demo</a:t>
-            </a:r>
-            <a:endParaRPr lang="en-US" sz="1300" dirty="0"/>
-          </a:p>
-        </p:txBody>
-      </p:sp>
-      <p:sp>
-        <p:nvSpPr>
-          <p:cNvPr id="13" name="Text 11"/>
-          <p:cNvSpPr/>
-          <p:nvPr/>
-        </p:nvSpPr>
-        <p:spPr>
-          <a:xfrm>
-            <a:off x="731520" y="3703320"/>
-            <a:ext cx="3200400" cy="365760"/>
-          </a:xfrm>
-          <a:prstGeom prst="rect">
-            <a:avLst/>
-          </a:prstGeom>
-          <a:noFill/>
-          <a:ln/>
-        </p:spPr>
-        <p:txBody>
-          <a:bodyPr wrap="square" lIns="0" tIns="0" rIns="0" bIns="0" rtlCol="0" anchor="ctr"/>
-          <a:lstStyle/>
-          <a:p>
-            <a:pPr indent="0" marL="0">
-              <a:buNone/>
-            </a:pPr>
-            <a:r>
-              <a:rPr lang="en-US" sz="1300" dirty="0">
-                <a:solidFill>
-                  <a:srgbClr val="1E293B"/>
-                </a:solidFill>
-                <a:latin typeface="Calibri" pitchFamily="34" charset="0"/>
-                <a:ea typeface="Calibri" pitchFamily="34" charset="-122"/>
-                <a:cs typeface="Calibri" pitchFamily="34" charset="-120"/>
-              </a:rPr>
-              <a:t>• 3 个预设 Case</a:t>
-            </a:r>
-            <a:endParaRPr lang="en-US" sz="1300" dirty="0"/>
-          </a:p>
-        </p:txBody>
-      </p:sp>
-      <p:sp>
-        <p:nvSpPr>
-          <p:cNvPr id="14" name="Shape 12"/>
-          <p:cNvSpPr/>
-          <p:nvPr/>
-        </p:nvSpPr>
-        <p:spPr>
-          <a:xfrm>
-            <a:off x="731520" y="4937760"/>
-            <a:ext cx="3200400" cy="365760"/>
-          </a:xfrm>
-          <a:prstGeom prst="rect">
-            <a:avLst/>
-          </a:prstGeom>
-          <a:solidFill>
-            <a:srgbClr val="F8FAFC"/>
-          </a:solidFill>
-          <a:ln/>
-        </p:spPr>
-      </p:sp>
-      <p:sp>
-        <p:nvSpPr>
-          <p:cNvPr id="15" name="Text 13"/>
-          <p:cNvSpPr/>
-          <p:nvPr/>
-        </p:nvSpPr>
-        <p:spPr>
-          <a:xfrm>
-            <a:off x="731520" y="4937760"/>
-            <a:ext cx="3200400" cy="365760"/>
-          </a:xfrm>
-          <a:prstGeom prst="rect">
-            <a:avLst/>
-          </a:prstGeom>
-          <a:noFill/>
-          <a:ln/>
-        </p:spPr>
-        <p:txBody>
-          <a:bodyPr wrap="square" lIns="0" tIns="0" rIns="0" bIns="0" rtlCol="0" anchor="ctr"/>
-          <a:lstStyle/>
-          <a:p>
-            <a:pPr algn="ctr" indent="0" marL="0">
-              <a:buNone/>
-            </a:pPr>
-            <a:r>
-              <a:rPr lang="en-US" sz="1300" b="1" dirty="0">
-                <a:solidFill>
-                  <a:srgbClr val="065A82"/>
-                </a:solidFill>
-                <a:latin typeface="Calibri" pitchFamily="34" charset="0"/>
-                <a:ea typeface="Calibri" pitchFamily="34" charset="-122"/>
-                <a:cs typeface="Calibri" pitchFamily="34" charset="-120"/>
-              </a:rPr>
-              <a:t>✅ 已完成</a:t>
-            </a:r>
-            <a:endParaRPr lang="en-US" sz="1300" dirty="0"/>
-          </a:p>
-        </p:txBody>
-      </p:sp>
-      <p:sp>
-        <p:nvSpPr>
-          <p:cNvPr id="16" name="Shape 14"/>
-          <p:cNvSpPr/>
-          <p:nvPr/>
-        </p:nvSpPr>
-        <p:spPr>
-          <a:xfrm>
-            <a:off x="4389120" y="1371600"/>
-            <a:ext cx="3566160" cy="4114800"/>
+          <p:cNvPr id="10" name="Shape 8"/>
+          <p:cNvSpPr/>
+          <p:nvPr/>
+        </p:nvSpPr>
+        <p:spPr>
+          <a:xfrm>
+            <a:off x="548640" y="2194560"/>
+            <a:ext cx="5303520" cy="548640"/>
           </a:xfrm>
           <a:prstGeom prst="rect">
             <a:avLst/>
@@ -4237,123 +4528,18 @@
             </a:solidFill>
             <a:prstDash val="solid"/>
           </a:ln>
-          <a:effectLst>
-            <a:outerShdw sx="100000" sy="100000" kx="0" ky="0" algn="bl" rotWithShape="0" blurRad="76200" dist="25400" dir="8100000">
-              <a:srgbClr val="000000">
-                <a:alpha val="8000"/>
-              </a:srgbClr>
-            </a:outerShdw>
-          </a:effectLst>
-        </p:spPr>
-      </p:sp>
-      <p:sp>
-        <p:nvSpPr>
-          <p:cNvPr id="17" name="Shape 15"/>
-          <p:cNvSpPr/>
-          <p:nvPr/>
-        </p:nvSpPr>
-        <p:spPr>
-          <a:xfrm>
-            <a:off x="4389120" y="1371600"/>
-            <a:ext cx="3566160" cy="548640"/>
-          </a:xfrm>
-          <a:prstGeom prst="rect">
-            <a:avLst/>
-          </a:prstGeom>
-          <a:solidFill>
-            <a:srgbClr val="1C7293"/>
-          </a:solidFill>
-          <a:ln/>
-        </p:spPr>
-      </p:sp>
-      <p:sp>
-        <p:nvSpPr>
-          <p:cNvPr id="18" name="Text 16"/>
-          <p:cNvSpPr/>
-          <p:nvPr/>
-        </p:nvSpPr>
-        <p:spPr>
-          <a:xfrm>
-            <a:off x="4572000" y="1371600"/>
-            <a:ext cx="3200400" cy="548640"/>
-          </a:xfrm>
-          <a:prstGeom prst="rect">
-            <a:avLst/>
-          </a:prstGeom>
-          <a:noFill/>
-          <a:ln/>
-        </p:spPr>
-        <p:txBody>
-          <a:bodyPr wrap="square" lIns="0" tIns="0" rIns="0" bIns="0" rtlCol="0" anchor="ctr"/>
-          <a:lstStyle/>
-          <a:p>
-            <a:pPr indent="0" marL="0">
-              <a:buNone/>
-            </a:pPr>
-            <a:r>
-              <a:rPr lang="en-US" sz="1600" b="1" dirty="0">
-                <a:solidFill>
-                  <a:srgbClr val="FFFFFF"/>
-                </a:solidFill>
-                <a:latin typeface="Calibri" pitchFamily="34" charset="0"/>
-                <a:ea typeface="Calibri" pitchFamily="34" charset="-122"/>
-                <a:cs typeface="Calibri" pitchFamily="34" charset="-120"/>
-              </a:rPr>
-              <a:t>Phase 2: 产品化</a:t>
-            </a:r>
-            <a:endParaRPr lang="en-US" sz="1600" dirty="0"/>
-          </a:p>
-        </p:txBody>
-      </p:sp>
-      <p:sp>
-        <p:nvSpPr>
-          <p:cNvPr id="19" name="Text 17"/>
-          <p:cNvSpPr/>
-          <p:nvPr/>
-        </p:nvSpPr>
-        <p:spPr>
-          <a:xfrm>
-            <a:off x="4572000" y="2011680"/>
-            <a:ext cx="3200400" cy="320040"/>
-          </a:xfrm>
-          <a:prstGeom prst="rect">
-            <a:avLst/>
-          </a:prstGeom>
-          <a:noFill/>
-          <a:ln/>
-        </p:spPr>
-        <p:txBody>
-          <a:bodyPr wrap="square" lIns="0" tIns="0" rIns="0" bIns="0" rtlCol="0" anchor="ctr"/>
-          <a:lstStyle/>
-          <a:p>
-            <a:pPr indent="0" marL="0">
-              <a:buNone/>
-            </a:pPr>
-            <a:r>
-              <a:rPr lang="en-US" sz="1200" dirty="0">
-                <a:solidFill>
-                  <a:srgbClr val="64748B"/>
-                </a:solidFill>
-                <a:latin typeface="Calibri" pitchFamily="34" charset="0"/>
-                <a:ea typeface="Calibri" pitchFamily="34" charset="-122"/>
-                <a:cs typeface="Calibri" pitchFamily="34" charset="-120"/>
-              </a:rPr>
-              <a:t>1-2 个月</a:t>
-            </a:r>
-            <a:endParaRPr lang="en-US" sz="1200" dirty="0"/>
-          </a:p>
-        </p:txBody>
-      </p:sp>
-      <p:sp>
-        <p:nvSpPr>
-          <p:cNvPr id="20" name="Text 18"/>
-          <p:cNvSpPr/>
-          <p:nvPr/>
-        </p:nvSpPr>
-        <p:spPr>
-          <a:xfrm>
-            <a:off x="4572000" y="2468880"/>
-            <a:ext cx="3200400" cy="365760"/>
+        </p:spPr>
+      </p:sp>
+      <p:sp>
+        <p:nvSpPr>
+          <p:cNvPr id="11" name="Text 9"/>
+          <p:cNvSpPr/>
+          <p:nvPr/>
+        </p:nvSpPr>
+        <p:spPr>
+          <a:xfrm>
+            <a:off x="731520" y="2194560"/>
+            <a:ext cx="2743200" cy="548640"/>
           </a:xfrm>
           <a:prstGeom prst="rect">
             <a:avLst/>
@@ -4371,13 +4557,13 @@
             <a:r>
               <a:rPr lang="en-US" sz="1300" dirty="0">
                 <a:solidFill>
-                  <a:srgbClr val="1E293B"/>
-                </a:solidFill>
-                <a:latin typeface="Calibri" pitchFamily="34" charset="0"/>
-                <a:ea typeface="Calibri" pitchFamily="34" charset="-122"/>
-                <a:cs typeface="Calibri" pitchFamily="34" charset="-120"/>
-              </a:rPr>
-              <a:t>• FastAPI + Docker</a:t>
+                  <a:srgbClr val="EF4444"/>
+                </a:solidFill>
+                <a:latin typeface="Calibri" pitchFamily="34" charset="0"/>
+                <a:ea typeface="Calibri" pitchFamily="34" charset="-122"/>
+                <a:cs typeface="Calibri" pitchFamily="34" charset="-120"/>
+              </a:rPr>
+              <a:t>特征衍生深度不足</a:t>
             </a:r>
             <a:endParaRPr lang="en-US" sz="1300" dirty="0"/>
           </a:p>
@@ -4385,14 +4571,14 @@
       </p:sp>
       <p:sp>
         <p:nvSpPr>
-          <p:cNvPr id="21" name="Text 19"/>
-          <p:cNvSpPr/>
-          <p:nvPr/>
-        </p:nvSpPr>
-        <p:spPr>
-          <a:xfrm>
-            <a:off x="4572000" y="2880360"/>
-            <a:ext cx="3200400" cy="365760"/>
+          <p:cNvPr id="12" name="Text 10"/>
+          <p:cNvSpPr/>
+          <p:nvPr/>
+        </p:nvSpPr>
+        <p:spPr>
+          <a:xfrm>
+            <a:off x="3474720" y="2194560"/>
+            <a:ext cx="2286000" cy="548640"/>
           </a:xfrm>
           <a:prstGeom prst="rect">
             <a:avLst/>
@@ -4410,13 +4596,13 @@
             <a:r>
               <a:rPr lang="en-US" sz="1300" dirty="0">
                 <a:solidFill>
-                  <a:srgbClr val="1E293B"/>
-                </a:solidFill>
-                <a:latin typeface="Calibri" pitchFamily="34" charset="0"/>
-                <a:ea typeface="Calibri" pitchFamily="34" charset="-122"/>
-                <a:cs typeface="Calibri" pitchFamily="34" charset="-120"/>
-              </a:rPr>
-              <a:t>• OCR 多模态采集</a:t>
+                  <a:srgbClr val="10B981"/>
+                </a:solidFill>
+                <a:latin typeface="Calibri" pitchFamily="34" charset="0"/>
+                <a:ea typeface="Calibri" pitchFamily="34" charset="-122"/>
+                <a:cs typeface="Calibri" pitchFamily="34" charset="-120"/>
+              </a:rPr>
+              <a:t>→ 加衍生特征工程层</a:t>
             </a:r>
             <a:endParaRPr lang="en-US" sz="1300" dirty="0"/>
           </a:p>
@@ -4424,151 +4610,14 @@
       </p:sp>
       <p:sp>
         <p:nvSpPr>
-          <p:cNvPr id="22" name="Text 20"/>
-          <p:cNvSpPr/>
-          <p:nvPr/>
-        </p:nvSpPr>
-        <p:spPr>
-          <a:xfrm>
-            <a:off x="4572000" y="3291840"/>
-            <a:ext cx="3200400" cy="365760"/>
-          </a:xfrm>
-          <a:prstGeom prst="rect">
-            <a:avLst/>
-          </a:prstGeom>
-          <a:noFill/>
-          <a:ln/>
-        </p:spPr>
-        <p:txBody>
-          <a:bodyPr wrap="square" lIns="0" tIns="0" rIns="0" bIns="0" rtlCol="0" anchor="ctr"/>
-          <a:lstStyle/>
-          <a:p>
-            <a:pPr indent="0" marL="0">
-              <a:buNone/>
-            </a:pPr>
-            <a:r>
-              <a:rPr lang="en-US" sz="1300" dirty="0">
-                <a:solidFill>
-                  <a:srgbClr val="1E293B"/>
-                </a:solidFill>
-                <a:latin typeface="Calibri" pitchFamily="34" charset="0"/>
-                <a:ea typeface="Calibri" pitchFamily="34" charset="-122"/>
-                <a:cs typeface="Calibri" pitchFamily="34" charset="-120"/>
-              </a:rPr>
-              <a:t>• 模型校准（Isotonic）</a:t>
-            </a:r>
-            <a:endParaRPr lang="en-US" sz="1300" dirty="0"/>
-          </a:p>
-        </p:txBody>
-      </p:sp>
-      <p:sp>
-        <p:nvSpPr>
-          <p:cNvPr id="23" name="Text 21"/>
-          <p:cNvSpPr/>
-          <p:nvPr/>
-        </p:nvSpPr>
-        <p:spPr>
-          <a:xfrm>
-            <a:off x="4572000" y="3703320"/>
-            <a:ext cx="3200400" cy="365760"/>
-          </a:xfrm>
-          <a:prstGeom prst="rect">
-            <a:avLst/>
-          </a:prstGeom>
-          <a:noFill/>
-          <a:ln/>
-        </p:spPr>
-        <p:txBody>
-          <a:bodyPr wrap="square" lIns="0" tIns="0" rIns="0" bIns="0" rtlCol="0" anchor="ctr"/>
-          <a:lstStyle/>
-          <a:p>
-            <a:pPr indent="0" marL="0">
-              <a:buNone/>
-            </a:pPr>
-            <a:r>
-              <a:rPr lang="en-US" sz="1300" dirty="0">
-                <a:solidFill>
-                  <a:srgbClr val="1E293B"/>
-                </a:solidFill>
-                <a:latin typeface="Calibri" pitchFamily="34" charset="0"/>
-                <a:ea typeface="Calibri" pitchFamily="34" charset="-122"/>
-                <a:cs typeface="Calibri" pitchFamily="34" charset="-120"/>
-              </a:rPr>
-              <a:t>• Word/PDF 导出</a:t>
-            </a:r>
-            <a:endParaRPr lang="en-US" sz="1300" dirty="0"/>
-          </a:p>
-        </p:txBody>
-      </p:sp>
-      <p:sp>
-        <p:nvSpPr>
-          <p:cNvPr id="24" name="Shape 22"/>
-          <p:cNvSpPr/>
-          <p:nvPr/>
-        </p:nvSpPr>
-        <p:spPr>
-          <a:xfrm>
-            <a:off x="4572000" y="4937760"/>
-            <a:ext cx="3200400" cy="365760"/>
-          </a:xfrm>
-          <a:prstGeom prst="rect">
-            <a:avLst/>
-          </a:prstGeom>
-          <a:solidFill>
-            <a:srgbClr val="F8FAFC"/>
-          </a:solidFill>
-          <a:ln/>
-        </p:spPr>
-      </p:sp>
-      <p:sp>
-        <p:nvSpPr>
-          <p:cNvPr id="25" name="Text 23"/>
-          <p:cNvSpPr/>
-          <p:nvPr/>
-        </p:nvSpPr>
-        <p:spPr>
-          <a:xfrm>
-            <a:off x="4572000" y="4937760"/>
-            <a:ext cx="3200400" cy="365760"/>
-          </a:xfrm>
-          <a:prstGeom prst="rect">
-            <a:avLst/>
-          </a:prstGeom>
-          <a:noFill/>
-          <a:ln/>
-        </p:spPr>
-        <p:txBody>
-          <a:bodyPr wrap="square" lIns="0" tIns="0" rIns="0" bIns="0" rtlCol="0" anchor="ctr"/>
-          <a:lstStyle/>
-          <a:p>
-            <a:pPr algn="ctr" indent="0" marL="0">
-              <a:buNone/>
-            </a:pPr>
-            <a:r>
-              <a:rPr lang="en-US" sz="1300" b="1" dirty="0">
-                <a:solidFill>
-                  <a:srgbClr val="1C7293"/>
-                </a:solidFill>
-                <a:latin typeface="Calibri" pitchFamily="34" charset="0"/>
-                <a:ea typeface="Calibri" pitchFamily="34" charset="-122"/>
-                <a:cs typeface="Calibri" pitchFamily="34" charset="-120"/>
-              </a:rPr>
-              <a:t>⏳ 计划中</a:t>
-            </a:r>
-            <a:endParaRPr lang="en-US" sz="1300" dirty="0"/>
-          </a:p>
-        </p:txBody>
-      </p:sp>
-      <p:sp>
-        <p:nvSpPr>
-          <p:cNvPr id="26" name="Shape 24"/>
-          <p:cNvSpPr/>
-          <p:nvPr/>
-        </p:nvSpPr>
-        <p:spPr>
-          <a:xfrm>
-            <a:off x="8229600" y="1371600"/>
-            <a:ext cx="3566160" cy="4114800"/>
+          <p:cNvPr id="13" name="Shape 11"/>
+          <p:cNvSpPr/>
+          <p:nvPr/>
+        </p:nvSpPr>
+        <p:spPr>
+          <a:xfrm>
+            <a:off x="548640" y="2834640"/>
+            <a:ext cx="5303520" cy="548640"/>
           </a:xfrm>
           <a:prstGeom prst="rect">
             <a:avLst/>
@@ -4582,25 +4631,238 @@
             </a:solidFill>
             <a:prstDash val="solid"/>
           </a:ln>
-          <a:effectLst>
-            <a:outerShdw sx="100000" sy="100000" kx="0" ky="0" algn="bl" rotWithShape="0" blurRad="76200" dist="25400" dir="8100000">
-              <a:srgbClr val="000000">
-                <a:alpha val="8000"/>
-              </a:srgbClr>
-            </a:outerShdw>
-          </a:effectLst>
-        </p:spPr>
-      </p:sp>
-      <p:sp>
-        <p:nvSpPr>
-          <p:cNvPr id="27" name="Shape 25"/>
-          <p:cNvSpPr/>
-          <p:nvPr/>
-        </p:nvSpPr>
-        <p:spPr>
-          <a:xfrm>
-            <a:off x="8229600" y="1371600"/>
-            <a:ext cx="3566160" cy="548640"/>
+        </p:spPr>
+      </p:sp>
+      <p:sp>
+        <p:nvSpPr>
+          <p:cNvPr id="14" name="Text 12"/>
+          <p:cNvSpPr/>
+          <p:nvPr/>
+        </p:nvSpPr>
+        <p:spPr>
+          <a:xfrm>
+            <a:off x="731520" y="2834640"/>
+            <a:ext cx="2743200" cy="548640"/>
+          </a:xfrm>
+          <a:prstGeom prst="rect">
+            <a:avLst/>
+          </a:prstGeom>
+          <a:noFill/>
+          <a:ln/>
+        </p:spPr>
+        <p:txBody>
+          <a:bodyPr wrap="square" lIns="0" tIns="0" rIns="0" bIns="0" rtlCol="0" anchor="ctr"/>
+          <a:lstStyle/>
+          <a:p>
+            <a:pPr indent="0" marL="0">
+              <a:buNone/>
+            </a:pPr>
+            <a:r>
+              <a:rPr lang="en-US" sz="1300" dirty="0">
+                <a:solidFill>
+                  <a:srgbClr val="EF4444"/>
+                </a:solidFill>
+                <a:latin typeface="Calibri" pitchFamily="34" charset="0"/>
+                <a:ea typeface="Calibri" pitchFamily="34" charset="-122"/>
+                <a:cs typeface="Calibri" pitchFamily="34" charset="-120"/>
+              </a:rPr>
+              <a:t>无模型校准</a:t>
+            </a:r>
+            <a:endParaRPr lang="en-US" sz="1300" dirty="0"/>
+          </a:p>
+        </p:txBody>
+      </p:sp>
+      <p:sp>
+        <p:nvSpPr>
+          <p:cNvPr id="15" name="Text 13"/>
+          <p:cNvSpPr/>
+          <p:nvPr/>
+        </p:nvSpPr>
+        <p:spPr>
+          <a:xfrm>
+            <a:off x="3474720" y="2834640"/>
+            <a:ext cx="2286000" cy="548640"/>
+          </a:xfrm>
+          <a:prstGeom prst="rect">
+            <a:avLst/>
+          </a:prstGeom>
+          <a:noFill/>
+          <a:ln/>
+        </p:spPr>
+        <p:txBody>
+          <a:bodyPr wrap="square" lIns="0" tIns="0" rIns="0" bIns="0" rtlCol="0" anchor="ctr"/>
+          <a:lstStyle/>
+          <a:p>
+            <a:pPr indent="0" marL="0">
+              <a:buNone/>
+            </a:pPr>
+            <a:r>
+              <a:rPr lang="en-US" sz="1300" dirty="0">
+                <a:solidFill>
+                  <a:srgbClr val="10B981"/>
+                </a:solidFill>
+                <a:latin typeface="Calibri" pitchFamily="34" charset="0"/>
+                <a:ea typeface="Calibri" pitchFamily="34" charset="-122"/>
+                <a:cs typeface="Calibri" pitchFamily="34" charset="-120"/>
+              </a:rPr>
+              <a:t>→ Isotonic / Platt</a:t>
+            </a:r>
+            <a:endParaRPr lang="en-US" sz="1300" dirty="0"/>
+          </a:p>
+        </p:txBody>
+      </p:sp>
+      <p:sp>
+        <p:nvSpPr>
+          <p:cNvPr id="16" name="Shape 14"/>
+          <p:cNvSpPr/>
+          <p:nvPr/>
+        </p:nvSpPr>
+        <p:spPr>
+          <a:xfrm>
+            <a:off x="548640" y="3474720"/>
+            <a:ext cx="5303520" cy="548640"/>
+          </a:xfrm>
+          <a:prstGeom prst="rect">
+            <a:avLst/>
+          </a:prstGeom>
+          <a:solidFill>
+            <a:srgbClr val="FFFFFF"/>
+          </a:solidFill>
+          <a:ln w="12700">
+            <a:solidFill>
+              <a:srgbClr val="E2E8F0"/>
+            </a:solidFill>
+            <a:prstDash val="solid"/>
+          </a:ln>
+        </p:spPr>
+      </p:sp>
+      <p:sp>
+        <p:nvSpPr>
+          <p:cNvPr id="17" name="Text 15"/>
+          <p:cNvSpPr/>
+          <p:nvPr/>
+        </p:nvSpPr>
+        <p:spPr>
+          <a:xfrm>
+            <a:off x="731520" y="3474720"/>
+            <a:ext cx="2743200" cy="548640"/>
+          </a:xfrm>
+          <a:prstGeom prst="rect">
+            <a:avLst/>
+          </a:prstGeom>
+          <a:noFill/>
+          <a:ln/>
+        </p:spPr>
+        <p:txBody>
+          <a:bodyPr wrap="square" lIns="0" tIns="0" rIns="0" bIns="0" rtlCol="0" anchor="ctr"/>
+          <a:lstStyle/>
+          <a:p>
+            <a:pPr indent="0" marL="0">
+              <a:buNone/>
+            </a:pPr>
+            <a:r>
+              <a:rPr lang="en-US" sz="1300" dirty="0">
+                <a:solidFill>
+                  <a:srgbClr val="EF4444"/>
+                </a:solidFill>
+                <a:latin typeface="Calibri" pitchFamily="34" charset="0"/>
+                <a:ea typeface="Calibri" pitchFamily="34" charset="-122"/>
+                <a:cs typeface="Calibri" pitchFamily="34" charset="-120"/>
+              </a:rPr>
+              <a:t>仅文本对话</a:t>
+            </a:r>
+            <a:endParaRPr lang="en-US" sz="1300" dirty="0"/>
+          </a:p>
+        </p:txBody>
+      </p:sp>
+      <p:sp>
+        <p:nvSpPr>
+          <p:cNvPr id="18" name="Text 16"/>
+          <p:cNvSpPr/>
+          <p:nvPr/>
+        </p:nvSpPr>
+        <p:spPr>
+          <a:xfrm>
+            <a:off x="3474720" y="3474720"/>
+            <a:ext cx="2286000" cy="548640"/>
+          </a:xfrm>
+          <a:prstGeom prst="rect">
+            <a:avLst/>
+          </a:prstGeom>
+          <a:noFill/>
+          <a:ln/>
+        </p:spPr>
+        <p:txBody>
+          <a:bodyPr wrap="square" lIns="0" tIns="0" rIns="0" bIns="0" rtlCol="0" anchor="ctr"/>
+          <a:lstStyle/>
+          <a:p>
+            <a:pPr indent="0" marL="0">
+              <a:buNone/>
+            </a:pPr>
+            <a:r>
+              <a:rPr lang="en-US" sz="1300" dirty="0">
+                <a:solidFill>
+                  <a:srgbClr val="10B981"/>
+                </a:solidFill>
+                <a:latin typeface="Calibri" pitchFamily="34" charset="0"/>
+                <a:ea typeface="Calibri" pitchFamily="34" charset="-122"/>
+                <a:cs typeface="Calibri" pitchFamily="34" charset="-120"/>
+              </a:rPr>
+              <a:t>→ 加 OCR</a:t>
+            </a:r>
+            <a:endParaRPr lang="en-US" sz="1300" dirty="0"/>
+          </a:p>
+        </p:txBody>
+      </p:sp>
+      <p:sp>
+        <p:nvSpPr>
+          <p:cNvPr id="19" name="Text 17"/>
+          <p:cNvSpPr/>
+          <p:nvPr/>
+        </p:nvSpPr>
+        <p:spPr>
+          <a:xfrm>
+            <a:off x="6400800" y="1097280"/>
+            <a:ext cx="5029200" cy="365760"/>
+          </a:xfrm>
+          <a:prstGeom prst="rect">
+            <a:avLst/>
+          </a:prstGeom>
+          <a:noFill/>
+          <a:ln/>
+        </p:spPr>
+        <p:txBody>
+          <a:bodyPr wrap="square" lIns="0" tIns="0" rIns="0" bIns="0" rtlCol="0" anchor="ctr"/>
+          <a:lstStyle/>
+          <a:p>
+            <a:pPr indent="0" marL="0">
+              <a:buNone/>
+            </a:pPr>
+            <a:r>
+              <a:rPr lang="en-US" sz="1800" b="1" dirty="0">
+                <a:solidFill>
+                  <a:srgbClr val="21295C"/>
+                </a:solidFill>
+                <a:latin typeface="Calibri" pitchFamily="34" charset="0"/>
+                <a:ea typeface="Calibri" pitchFamily="34" charset="-122"/>
+                <a:cs typeface="Calibri" pitchFamily="34" charset="-120"/>
+              </a:rPr>
+              <a:t>Ask</a:t>
+            </a:r>
+            <a:endParaRPr lang="en-US" sz="1800" dirty="0"/>
+          </a:p>
+        </p:txBody>
+      </p:sp>
+      <p:sp>
+        <p:nvSpPr>
+          <p:cNvPr id="20" name="Shape 18"/>
+          <p:cNvSpPr/>
+          <p:nvPr/>
+        </p:nvSpPr>
+        <p:spPr>
+          <a:xfrm>
+            <a:off x="6400800" y="1554480"/>
+            <a:ext cx="5212080" cy="777240"/>
           </a:xfrm>
           <a:prstGeom prst="rect">
             <a:avLst/>
@@ -4613,30 +4875,30 @@
       </p:sp>
       <p:sp>
         <p:nvSpPr>
-          <p:cNvPr id="28" name="Text 26"/>
-          <p:cNvSpPr/>
-          <p:nvPr/>
-        </p:nvSpPr>
-        <p:spPr>
-          <a:xfrm>
-            <a:off x="8412480" y="1371600"/>
-            <a:ext cx="3200400" cy="548640"/>
-          </a:xfrm>
-          <a:prstGeom prst="rect">
-            <a:avLst/>
-          </a:prstGeom>
-          <a:noFill/>
-          <a:ln/>
-        </p:spPr>
-        <p:txBody>
-          <a:bodyPr wrap="square" lIns="0" tIns="0" rIns="0" bIns="0" rtlCol="0" anchor="ctr"/>
-          <a:lstStyle/>
-          <a:p>
-            <a:pPr indent="0" marL="0">
-              <a:buNone/>
-            </a:pPr>
-            <a:r>
-              <a:rPr lang="en-US" sz="1600" b="1" dirty="0">
+          <p:cNvPr id="21" name="Text 19"/>
+          <p:cNvSpPr/>
+          <p:nvPr/>
+        </p:nvSpPr>
+        <p:spPr>
+          <a:xfrm>
+            <a:off x="6583680" y="1554480"/>
+            <a:ext cx="4846320" cy="777240"/>
+          </a:xfrm>
+          <a:prstGeom prst="rect">
+            <a:avLst/>
+          </a:prstGeom>
+          <a:noFill/>
+          <a:ln/>
+        </p:spPr>
+        <p:txBody>
+          <a:bodyPr wrap="square" lIns="0" tIns="0" rIns="0" bIns="0" rtlCol="0" anchor="ctr"/>
+          <a:lstStyle/>
+          <a:p>
+            <a:pPr indent="0" marL="0">
+              <a:buNone/>
+            </a:pPr>
+            <a:r>
+              <a:rPr lang="en-US" sz="1400" dirty="0">
                 <a:solidFill>
                   <a:srgbClr val="FFFFFF"/>
                 </a:solidFill>
@@ -4644,302 +4906,127 @@
                 <a:ea typeface="Calibri" pitchFamily="34" charset="-122"/>
                 <a:cs typeface="Calibri" pitchFamily="34" charset="-120"/>
               </a:rPr>
-              <a:t>Phase 3: 企业级</a:t>
-            </a:r>
-            <a:endParaRPr lang="en-US" sz="1600" dirty="0"/>
-          </a:p>
-        </p:txBody>
-      </p:sp>
-      <p:sp>
-        <p:nvSpPr>
-          <p:cNvPr id="29" name="Text 27"/>
-          <p:cNvSpPr/>
-          <p:nvPr/>
-        </p:nvSpPr>
-        <p:spPr>
-          <a:xfrm>
-            <a:off x="8412480" y="2011680"/>
-            <a:ext cx="3200400" cy="320040"/>
-          </a:xfrm>
-          <a:prstGeom prst="rect">
-            <a:avLst/>
-          </a:prstGeom>
-          <a:noFill/>
-          <a:ln/>
-        </p:spPr>
-        <p:txBody>
-          <a:bodyPr wrap="square" lIns="0" tIns="0" rIns="0" bIns="0" rtlCol="0" anchor="ctr"/>
-          <a:lstStyle/>
-          <a:p>
-            <a:pPr indent="0" marL="0">
-              <a:buNone/>
-            </a:pPr>
-            <a:r>
-              <a:rPr lang="en-US" sz="1200" dirty="0">
-                <a:solidFill>
-                  <a:srgbClr val="64748B"/>
-                </a:solidFill>
-                <a:latin typeface="Calibri" pitchFamily="34" charset="0"/>
-                <a:ea typeface="Calibri" pitchFamily="34" charset="-122"/>
-                <a:cs typeface="Calibri" pitchFamily="34" charset="-120"/>
-              </a:rPr>
-              <a:t>3-6 个月</a:t>
-            </a:r>
-            <a:endParaRPr lang="en-US" sz="1200" dirty="0"/>
-          </a:p>
-        </p:txBody>
-      </p:sp>
-      <p:sp>
-        <p:nvSpPr>
-          <p:cNvPr id="30" name="Text 28"/>
-          <p:cNvSpPr/>
-          <p:nvPr/>
-        </p:nvSpPr>
-        <p:spPr>
-          <a:xfrm>
-            <a:off x="8412480" y="2468880"/>
-            <a:ext cx="3200400" cy="365760"/>
-          </a:xfrm>
-          <a:prstGeom prst="rect">
-            <a:avLst/>
-          </a:prstGeom>
-          <a:noFill/>
-          <a:ln/>
-        </p:spPr>
-        <p:txBody>
-          <a:bodyPr wrap="square" lIns="0" tIns="0" rIns="0" bIns="0" rtlCol="0" anchor="ctr"/>
-          <a:lstStyle/>
-          <a:p>
-            <a:pPr indent="0" marL="0">
-              <a:buNone/>
-            </a:pPr>
-            <a:r>
-              <a:rPr lang="en-US" sz="1300" dirty="0">
-                <a:solidFill>
-                  <a:srgbClr val="1E293B"/>
-                </a:solidFill>
-                <a:latin typeface="Calibri" pitchFamily="34" charset="0"/>
-                <a:ea typeface="Calibri" pitchFamily="34" charset="-122"/>
-                <a:cs typeface="Calibri" pitchFamily="34" charset="-120"/>
-              </a:rPr>
-              <a:t>• 多用户并发</a:t>
-            </a:r>
-            <a:endParaRPr lang="en-US" sz="1300" dirty="0"/>
-          </a:p>
-        </p:txBody>
-      </p:sp>
-      <p:sp>
-        <p:nvSpPr>
-          <p:cNvPr id="31" name="Text 29"/>
-          <p:cNvSpPr/>
-          <p:nvPr/>
-        </p:nvSpPr>
-        <p:spPr>
-          <a:xfrm>
-            <a:off x="8412480" y="2880360"/>
-            <a:ext cx="3200400" cy="365760"/>
-          </a:xfrm>
-          <a:prstGeom prst="rect">
-            <a:avLst/>
-          </a:prstGeom>
-          <a:noFill/>
-          <a:ln/>
-        </p:spPr>
-        <p:txBody>
-          <a:bodyPr wrap="square" lIns="0" tIns="0" rIns="0" bIns="0" rtlCol="0" anchor="ctr"/>
-          <a:lstStyle/>
-          <a:p>
-            <a:pPr indent="0" marL="0">
-              <a:buNone/>
-            </a:pPr>
-            <a:r>
-              <a:rPr lang="en-US" sz="1300" dirty="0">
-                <a:solidFill>
-                  <a:srgbClr val="1E293B"/>
-                </a:solidFill>
-                <a:latin typeface="Calibri" pitchFamily="34" charset="0"/>
-                <a:ea typeface="Calibri" pitchFamily="34" charset="-122"/>
-                <a:cs typeface="Calibri" pitchFamily="34" charset="-120"/>
-              </a:rPr>
-              <a:t>• 企业级 SaaS</a:t>
-            </a:r>
-            <a:endParaRPr lang="en-US" sz="1300" dirty="0"/>
-          </a:p>
-        </p:txBody>
-      </p:sp>
-      <p:sp>
-        <p:nvSpPr>
-          <p:cNvPr id="32" name="Text 30"/>
-          <p:cNvSpPr/>
-          <p:nvPr/>
-        </p:nvSpPr>
-        <p:spPr>
-          <a:xfrm>
-            <a:off x="8412480" y="3291840"/>
-            <a:ext cx="3200400" cy="365760"/>
-          </a:xfrm>
-          <a:prstGeom prst="rect">
-            <a:avLst/>
-          </a:prstGeom>
-          <a:noFill/>
-          <a:ln/>
-        </p:spPr>
-        <p:txBody>
-          <a:bodyPr wrap="square" lIns="0" tIns="0" rIns="0" bIns="0" rtlCol="0" anchor="ctr"/>
-          <a:lstStyle/>
-          <a:p>
-            <a:pPr indent="0" marL="0">
-              <a:buNone/>
-            </a:pPr>
-            <a:r>
-              <a:rPr lang="en-US" sz="1300" dirty="0">
-                <a:solidFill>
-                  <a:srgbClr val="1E293B"/>
-                </a:solidFill>
-                <a:latin typeface="Calibri" pitchFamily="34" charset="0"/>
-                <a:ea typeface="Calibri" pitchFamily="34" charset="-122"/>
-                <a:cs typeface="Calibri" pitchFamily="34" charset="-120"/>
-              </a:rPr>
-              <a:t>• 实时交易系统对接</a:t>
-            </a:r>
-            <a:endParaRPr lang="en-US" sz="1300" dirty="0"/>
-          </a:p>
-        </p:txBody>
-      </p:sp>
-      <p:sp>
-        <p:nvSpPr>
-          <p:cNvPr id="33" name="Text 31"/>
-          <p:cNvSpPr/>
-          <p:nvPr/>
-        </p:nvSpPr>
-        <p:spPr>
-          <a:xfrm>
-            <a:off x="8412480" y="3703320"/>
-            <a:ext cx="3200400" cy="365760"/>
-          </a:xfrm>
-          <a:prstGeom prst="rect">
-            <a:avLst/>
-          </a:prstGeom>
-          <a:noFill/>
-          <a:ln/>
-        </p:spPr>
-        <p:txBody>
-          <a:bodyPr wrap="square" lIns="0" tIns="0" rIns="0" bIns="0" rtlCol="0" anchor="ctr"/>
-          <a:lstStyle/>
-          <a:p>
-            <a:pPr indent="0" marL="0">
-              <a:buNone/>
-            </a:pPr>
-            <a:r>
-              <a:rPr lang="en-US" sz="1300" dirty="0">
-                <a:solidFill>
-                  <a:srgbClr val="1E293B"/>
-                </a:solidFill>
-                <a:latin typeface="Calibri" pitchFamily="34" charset="0"/>
-                <a:ea typeface="Calibri" pitchFamily="34" charset="-122"/>
-                <a:cs typeface="Calibri" pitchFamily="34" charset="-120"/>
-              </a:rPr>
-              <a:t>• 多产品线支持</a:t>
-            </a:r>
-            <a:endParaRPr lang="en-US" sz="1300" dirty="0"/>
-          </a:p>
-        </p:txBody>
-      </p:sp>
-      <p:sp>
-        <p:nvSpPr>
-          <p:cNvPr id="34" name="Shape 32"/>
-          <p:cNvSpPr/>
-          <p:nvPr/>
-        </p:nvSpPr>
-        <p:spPr>
-          <a:xfrm>
-            <a:off x="8412480" y="4937760"/>
-            <a:ext cx="3200400" cy="365760"/>
+              <a:t>1. Agent × 风控 的产品化路径，特别是合规边界设计</a:t>
+            </a:r>
+            <a:endParaRPr lang="en-US" sz="1400" dirty="0"/>
+          </a:p>
+        </p:txBody>
+      </p:sp>
+      <p:sp>
+        <p:nvSpPr>
+          <p:cNvPr id="22" name="Shape 20"/>
+          <p:cNvSpPr/>
+          <p:nvPr/>
+        </p:nvSpPr>
+        <p:spPr>
+          <a:xfrm>
+            <a:off x="6400800" y="2468880"/>
+            <a:ext cx="5212080" cy="777240"/>
           </a:xfrm>
           <a:prstGeom prst="rect">
             <a:avLst/>
           </a:prstGeom>
           <a:solidFill>
-            <a:srgbClr val="F8FAFC"/>
+            <a:srgbClr val="21295C"/>
           </a:solidFill>
           <a:ln/>
         </p:spPr>
       </p:sp>
       <p:sp>
         <p:nvSpPr>
-          <p:cNvPr id="35" name="Text 33"/>
-          <p:cNvSpPr/>
-          <p:nvPr/>
-        </p:nvSpPr>
-        <p:spPr>
-          <a:xfrm>
-            <a:off x="8412480" y="4937760"/>
-            <a:ext cx="3200400" cy="365760"/>
-          </a:xfrm>
-          <a:prstGeom prst="rect">
-            <a:avLst/>
-          </a:prstGeom>
-          <a:noFill/>
-          <a:ln/>
-        </p:spPr>
-        <p:txBody>
-          <a:bodyPr wrap="square" lIns="0" tIns="0" rIns="0" bIns="0" rtlCol="0" anchor="ctr"/>
-          <a:lstStyle/>
-          <a:p>
-            <a:pPr algn="ctr" indent="0" marL="0">
-              <a:buNone/>
-            </a:pPr>
-            <a:r>
-              <a:rPr lang="en-US" sz="1300" b="1" dirty="0">
-                <a:solidFill>
-                  <a:srgbClr val="21295C"/>
-                </a:solidFill>
-                <a:latin typeface="Calibri" pitchFamily="34" charset="0"/>
-                <a:ea typeface="Calibri" pitchFamily="34" charset="-122"/>
-                <a:cs typeface="Calibri" pitchFamily="34" charset="-120"/>
-              </a:rPr>
-              <a:t>📋 远期</a:t>
-            </a:r>
-            <a:endParaRPr lang="en-US" sz="1300" dirty="0"/>
-          </a:p>
-        </p:txBody>
-      </p:sp>
-      <p:sp>
-        <p:nvSpPr>
-          <p:cNvPr id="36" name="Text 34"/>
-          <p:cNvSpPr/>
-          <p:nvPr/>
-        </p:nvSpPr>
-        <p:spPr>
-          <a:xfrm>
-            <a:off x="548640" y="5760720"/>
-            <a:ext cx="11064240" cy="365760"/>
-          </a:xfrm>
-          <a:prstGeom prst="rect">
-            <a:avLst/>
-          </a:prstGeom>
-          <a:noFill/>
-          <a:ln/>
-        </p:spPr>
-        <p:txBody>
-          <a:bodyPr wrap="square" lIns="0" tIns="0" rIns="0" bIns="0" rtlCol="0" anchor="ctr"/>
-          <a:lstStyle/>
-          <a:p>
-            <a:pPr algn="ctr" indent="0" marL="0">
-              <a:buNone/>
-            </a:pPr>
-            <a:r>
-              <a:rPr lang="en-US" sz="1300" i="1" dirty="0">
-                <a:solidFill>
-                  <a:srgbClr val="64748B"/>
-                </a:solidFill>
-                <a:latin typeface="Calibri" pitchFamily="34" charset="0"/>
-                <a:ea typeface="Calibri" pitchFamily="34" charset="-122"/>
-                <a:cs typeface="Calibri" pitchFamily="34" charset="-120"/>
-              </a:rPr>
-              <a:t>Phase 2 会进一步丰富信贷特征工程与多模态采集，覆盖更多消费贷细分场景。</a:t>
-            </a:r>
-            <a:endParaRPr lang="en-US" sz="1300" dirty="0"/>
+          <p:cNvPr id="23" name="Text 21"/>
+          <p:cNvSpPr/>
+          <p:nvPr/>
+        </p:nvSpPr>
+        <p:spPr>
+          <a:xfrm>
+            <a:off x="6583680" y="2468880"/>
+            <a:ext cx="4846320" cy="777240"/>
+          </a:xfrm>
+          <a:prstGeom prst="rect">
+            <a:avLst/>
+          </a:prstGeom>
+          <a:noFill/>
+          <a:ln/>
+        </p:spPr>
+        <p:txBody>
+          <a:bodyPr wrap="square" lIns="0" tIns="0" rIns="0" bIns="0" rtlCol="0" anchor="ctr"/>
+          <a:lstStyle/>
+          <a:p>
+            <a:pPr indent="0" marL="0">
+              <a:buNone/>
+            </a:pPr>
+            <a:r>
+              <a:rPr lang="en-US" sz="1400" dirty="0">
+                <a:solidFill>
+                  <a:srgbClr val="FFFFFF"/>
+                </a:solidFill>
+                <a:latin typeface="Calibri" pitchFamily="34" charset="0"/>
+                <a:ea typeface="Calibri" pitchFamily="34" charset="-122"/>
+                <a:cs typeface="Calibri" pitchFamily="34" charset="-120"/>
+              </a:rPr>
+              <a:t>2. IV/WoE+PSI 方法论在生产环境的工程化最佳实践</a:t>
+            </a:r>
+            <a:endParaRPr lang="en-US" sz="1400" dirty="0"/>
+          </a:p>
+        </p:txBody>
+      </p:sp>
+      <p:sp>
+        <p:nvSpPr>
+          <p:cNvPr id="24" name="Shape 22"/>
+          <p:cNvSpPr/>
+          <p:nvPr/>
+        </p:nvSpPr>
+        <p:spPr>
+          <a:xfrm>
+            <a:off x="6400800" y="3383280"/>
+            <a:ext cx="5212080" cy="777240"/>
+          </a:xfrm>
+          <a:prstGeom prst="rect">
+            <a:avLst/>
+          </a:prstGeom>
+          <a:solidFill>
+            <a:srgbClr val="21295C"/>
+          </a:solidFill>
+          <a:ln/>
+        </p:spPr>
+      </p:sp>
+      <p:sp>
+        <p:nvSpPr>
+          <p:cNvPr id="25" name="Text 23"/>
+          <p:cNvSpPr/>
+          <p:nvPr/>
+        </p:nvSpPr>
+        <p:spPr>
+          <a:xfrm>
+            <a:off x="6583680" y="3383280"/>
+            <a:ext cx="4846320" cy="777240"/>
+          </a:xfrm>
+          <a:prstGeom prst="rect">
+            <a:avLst/>
+          </a:prstGeom>
+          <a:noFill/>
+          <a:ln/>
+        </p:spPr>
+        <p:txBody>
+          <a:bodyPr wrap="square" lIns="0" tIns="0" rIns="0" bIns="0" rtlCol="0" anchor="ctr"/>
+          <a:lstStyle/>
+          <a:p>
+            <a:pPr indent="0" marL="0">
+              <a:buNone/>
+            </a:pPr>
+            <a:r>
+              <a:rPr lang="en-US" sz="1400" dirty="0">
+                <a:solidFill>
+                  <a:srgbClr val="FFFFFF"/>
+                </a:solidFill>
+                <a:latin typeface="Calibri" pitchFamily="34" charset="0"/>
+                <a:ea typeface="Calibri" pitchFamily="34" charset="-122"/>
+                <a:cs typeface="Calibri" pitchFamily="34" charset="-120"/>
+              </a:rPr>
+              <a:t>3. 多模态采集（OCR/语音）的落地经验</a:t>
+            </a:r>
+            <a:endParaRPr lang="en-US" sz="1400" dirty="0"/>
           </a:p>
         </p:txBody>
       </p:sp>
@@ -4954,839 +5041,6 @@
 <file path=ppt/slides/slide13.xml><?xml version="1.0" encoding="utf-8"?>
 <p:sld xmlns:a="http://schemas.openxmlformats.org/drawingml/2006/main" xmlns:r="http://schemas.openxmlformats.org/officeDocument/2006/relationships" xmlns:p="http://schemas.openxmlformats.org/presentationml/2006/main">
   <p:cSld name="Slide 13">
-    <p:bg>
-      <p:bgPr>
-        <a:solidFill>
-          <a:srgbClr val="F8FAFC"/>
-        </a:solidFill>
-      </p:bgPr>
-    </p:bg>
-    <p:spTree>
-      <p:nvGrpSpPr>
-        <p:cNvPr id="1" name=""/>
-        <p:cNvGrpSpPr/>
-        <p:nvPr/>
-      </p:nvGrpSpPr>
-      <p:grpSpPr>
-        <a:xfrm>
-          <a:off x="0" y="0"/>
-          <a:ext cx="0" cy="0"/>
-          <a:chOff x="0" y="0"/>
-          <a:chExt cx="0" cy="0"/>
-        </a:xfrm>
-      </p:grpSpPr>
-      <p:sp>
-        <p:nvSpPr>
-          <p:cNvPr id="2" name="Shape 0"/>
-          <p:cNvSpPr/>
-          <p:nvPr/>
-        </p:nvSpPr>
-        <p:spPr>
-          <a:xfrm>
-            <a:off x="0" y="0"/>
-            <a:ext cx="12161520" cy="73152"/>
-          </a:xfrm>
-          <a:prstGeom prst="rect">
-            <a:avLst/>
-          </a:prstGeom>
-          <a:solidFill>
-            <a:srgbClr val="14B8A6"/>
-          </a:solidFill>
-          <a:ln/>
-        </p:spPr>
-      </p:sp>
-      <p:sp>
-        <p:nvSpPr>
-          <p:cNvPr id="3" name="Text 1"/>
-          <p:cNvSpPr/>
-          <p:nvPr/>
-        </p:nvSpPr>
-        <p:spPr>
-          <a:xfrm>
-            <a:off x="548640" y="274320"/>
-            <a:ext cx="10972800" cy="548640"/>
-          </a:xfrm>
-          <a:prstGeom prst="rect">
-            <a:avLst/>
-          </a:prstGeom>
-          <a:noFill/>
-          <a:ln/>
-        </p:spPr>
-        <p:txBody>
-          <a:bodyPr wrap="square" lIns="0" tIns="0" rIns="0" bIns="0" rtlCol="0" anchor="ctr"/>
-          <a:lstStyle/>
-          <a:p>
-            <a:pPr indent="0" marL="0">
-              <a:buNone/>
-            </a:pPr>
-            <a:r>
-              <a:rPr lang="en-US" sz="2800" b="1" dirty="0">
-                <a:solidFill>
-                  <a:srgbClr val="21295C"/>
-                </a:solidFill>
-                <a:latin typeface="Georgia" pitchFamily="34" charset="0"/>
-                <a:ea typeface="Georgia" pitchFamily="34" charset="-122"/>
-                <a:cs typeface="Georgia" pitchFamily="34" charset="-120"/>
-              </a:rPr>
-              <a:t>诚实短板与 Ask</a:t>
-            </a:r>
-            <a:endParaRPr lang="en-US" sz="2800" dirty="0"/>
-          </a:p>
-        </p:txBody>
-      </p:sp>
-      <p:sp>
-        <p:nvSpPr>
-          <p:cNvPr id="4" name="Text 2"/>
-          <p:cNvSpPr/>
-          <p:nvPr/>
-        </p:nvSpPr>
-        <p:spPr>
-          <a:xfrm>
-            <a:off x="457200" y="6400800"/>
-            <a:ext cx="5486400" cy="274320"/>
-          </a:xfrm>
-          <a:prstGeom prst="rect">
-            <a:avLst/>
-          </a:prstGeom>
-          <a:noFill/>
-          <a:ln/>
-        </p:spPr>
-        <p:txBody>
-          <a:bodyPr wrap="square" lIns="0" tIns="0" rIns="0" bIns="0" rtlCol="0" anchor="ctr"/>
-          <a:lstStyle/>
-          <a:p>
-            <a:pPr indent="0" marL="0">
-              <a:buNone/>
-            </a:pPr>
-            <a:r>
-              <a:rPr lang="en-US" sz="900" dirty="0">
-                <a:solidFill>
-                  <a:srgbClr val="64748B"/>
-                </a:solidFill>
-                <a:latin typeface="Calibri" pitchFamily="34" charset="0"/>
-                <a:ea typeface="Calibri" pitchFamily="34" charset="-122"/>
-                <a:cs typeface="Calibri" pitchFamily="34" charset="-120"/>
-              </a:rPr>
-              <a:t>CreditMind · AI 信贷风控大脑</a:t>
-            </a:r>
-            <a:endParaRPr lang="en-US" sz="900" dirty="0"/>
-          </a:p>
-        </p:txBody>
-      </p:sp>
-      <p:sp>
-        <p:nvSpPr>
-          <p:cNvPr id="5" name="Text 3"/>
-          <p:cNvSpPr/>
-          <p:nvPr/>
-        </p:nvSpPr>
-        <p:spPr>
-          <a:xfrm>
-            <a:off x="11247120" y="6400800"/>
-            <a:ext cx="457200" cy="274320"/>
-          </a:xfrm>
-          <a:prstGeom prst="rect">
-            <a:avLst/>
-          </a:prstGeom>
-          <a:noFill/>
-          <a:ln/>
-        </p:spPr>
-        <p:txBody>
-          <a:bodyPr wrap="square" lIns="0" tIns="0" rIns="0" bIns="0" rtlCol="0" anchor="ctr"/>
-          <a:lstStyle/>
-          <a:p>
-            <a:pPr algn="r" indent="0" marL="0">
-              <a:buNone/>
-            </a:pPr>
-            <a:r>
-              <a:rPr lang="en-US" sz="900" dirty="0">
-                <a:solidFill>
-                  <a:srgbClr val="64748B"/>
-                </a:solidFill>
-              </a:rPr>
-              <a:t>13 / 14</a:t>
-            </a:r>
-            <a:endParaRPr lang="en-US" sz="900" dirty="0"/>
-          </a:p>
-        </p:txBody>
-      </p:sp>
-      <p:sp>
-        <p:nvSpPr>
-          <p:cNvPr id="6" name="Text 4"/>
-          <p:cNvSpPr/>
-          <p:nvPr/>
-        </p:nvSpPr>
-        <p:spPr>
-          <a:xfrm>
-            <a:off x="548640" y="1097280"/>
-            <a:ext cx="5486400" cy="365760"/>
-          </a:xfrm>
-          <a:prstGeom prst="rect">
-            <a:avLst/>
-          </a:prstGeom>
-          <a:noFill/>
-          <a:ln/>
-        </p:spPr>
-        <p:txBody>
-          <a:bodyPr wrap="square" lIns="0" tIns="0" rIns="0" bIns="0" rtlCol="0" anchor="ctr"/>
-          <a:lstStyle/>
-          <a:p>
-            <a:pPr indent="0" marL="0">
-              <a:buNone/>
-            </a:pPr>
-            <a:r>
-              <a:rPr lang="en-US" sz="1800" b="1" dirty="0">
-                <a:solidFill>
-                  <a:srgbClr val="21295C"/>
-                </a:solidFill>
-                <a:latin typeface="Calibri" pitchFamily="34" charset="0"/>
-                <a:ea typeface="Calibri" pitchFamily="34" charset="-122"/>
-                <a:cs typeface="Calibri" pitchFamily="34" charset="-120"/>
-              </a:rPr>
-              <a:t>已知短板（主动说明）</a:t>
-            </a:r>
-            <a:endParaRPr lang="en-US" sz="1800" dirty="0"/>
-          </a:p>
-        </p:txBody>
-      </p:sp>
-      <p:sp>
-        <p:nvSpPr>
-          <p:cNvPr id="7" name="Shape 5"/>
-          <p:cNvSpPr/>
-          <p:nvPr/>
-        </p:nvSpPr>
-        <p:spPr>
-          <a:xfrm>
-            <a:off x="548640" y="1554480"/>
-            <a:ext cx="5303520" cy="548640"/>
-          </a:xfrm>
-          <a:prstGeom prst="rect">
-            <a:avLst/>
-          </a:prstGeom>
-          <a:solidFill>
-            <a:srgbClr val="FFFFFF"/>
-          </a:solidFill>
-          <a:ln w="12700">
-            <a:solidFill>
-              <a:srgbClr val="E2E8F0"/>
-            </a:solidFill>
-            <a:prstDash val="solid"/>
-          </a:ln>
-        </p:spPr>
-      </p:sp>
-      <p:sp>
-        <p:nvSpPr>
-          <p:cNvPr id="8" name="Text 6"/>
-          <p:cNvSpPr/>
-          <p:nvPr/>
-        </p:nvSpPr>
-        <p:spPr>
-          <a:xfrm>
-            <a:off x="731520" y="1554480"/>
-            <a:ext cx="2743200" cy="548640"/>
-          </a:xfrm>
-          <a:prstGeom prst="rect">
-            <a:avLst/>
-          </a:prstGeom>
-          <a:noFill/>
-          <a:ln/>
-        </p:spPr>
-        <p:txBody>
-          <a:bodyPr wrap="square" lIns="0" tIns="0" rIns="0" bIns="0" rtlCol="0" anchor="ctr"/>
-          <a:lstStyle/>
-          <a:p>
-            <a:pPr indent="0" marL="0">
-              <a:buNone/>
-            </a:pPr>
-            <a:r>
-              <a:rPr lang="en-US" sz="1300" dirty="0">
-                <a:solidFill>
-                  <a:srgbClr val="EF4444"/>
-                </a:solidFill>
-                <a:latin typeface="Calibri" pitchFamily="34" charset="0"/>
-                <a:ea typeface="Calibri" pitchFamily="34" charset="-122"/>
-                <a:cs typeface="Calibri" pitchFamily="34" charset="-120"/>
-              </a:rPr>
-              <a:t>数据规模 15 万行</a:t>
-            </a:r>
-            <a:endParaRPr lang="en-US" sz="1300" dirty="0"/>
-          </a:p>
-        </p:txBody>
-      </p:sp>
-      <p:sp>
-        <p:nvSpPr>
-          <p:cNvPr id="9" name="Text 7"/>
-          <p:cNvSpPr/>
-          <p:nvPr/>
-        </p:nvSpPr>
-        <p:spPr>
-          <a:xfrm>
-            <a:off x="3474720" y="1554480"/>
-            <a:ext cx="2286000" cy="548640"/>
-          </a:xfrm>
-          <a:prstGeom prst="rect">
-            <a:avLst/>
-          </a:prstGeom>
-          <a:noFill/>
-          <a:ln/>
-        </p:spPr>
-        <p:txBody>
-          <a:bodyPr wrap="square" lIns="0" tIns="0" rIns="0" bIns="0" rtlCol="0" anchor="ctr"/>
-          <a:lstStyle/>
-          <a:p>
-            <a:pPr indent="0" marL="0">
-              <a:buNone/>
-            </a:pPr>
-            <a:r>
-              <a:rPr lang="en-US" sz="1300" dirty="0">
-                <a:solidFill>
-                  <a:srgbClr val="10B981"/>
-                </a:solidFill>
-                <a:latin typeface="Calibri" pitchFamily="34" charset="0"/>
-                <a:ea typeface="Calibri" pitchFamily="34" charset="-122"/>
-                <a:cs typeface="Calibri" pitchFamily="34" charset="-120"/>
-              </a:rPr>
-              <a:t>→ 接 2007-2019 全量</a:t>
-            </a:r>
-            <a:endParaRPr lang="en-US" sz="1300" dirty="0"/>
-          </a:p>
-        </p:txBody>
-      </p:sp>
-      <p:sp>
-        <p:nvSpPr>
-          <p:cNvPr id="10" name="Shape 8"/>
-          <p:cNvSpPr/>
-          <p:nvPr/>
-        </p:nvSpPr>
-        <p:spPr>
-          <a:xfrm>
-            <a:off x="548640" y="2194560"/>
-            <a:ext cx="5303520" cy="548640"/>
-          </a:xfrm>
-          <a:prstGeom prst="rect">
-            <a:avLst/>
-          </a:prstGeom>
-          <a:solidFill>
-            <a:srgbClr val="FFFFFF"/>
-          </a:solidFill>
-          <a:ln w="12700">
-            <a:solidFill>
-              <a:srgbClr val="E2E8F0"/>
-            </a:solidFill>
-            <a:prstDash val="solid"/>
-          </a:ln>
-        </p:spPr>
-      </p:sp>
-      <p:sp>
-        <p:nvSpPr>
-          <p:cNvPr id="11" name="Text 9"/>
-          <p:cNvSpPr/>
-          <p:nvPr/>
-        </p:nvSpPr>
-        <p:spPr>
-          <a:xfrm>
-            <a:off x="731520" y="2194560"/>
-            <a:ext cx="2743200" cy="548640"/>
-          </a:xfrm>
-          <a:prstGeom prst="rect">
-            <a:avLst/>
-          </a:prstGeom>
-          <a:noFill/>
-          <a:ln/>
-        </p:spPr>
-        <p:txBody>
-          <a:bodyPr wrap="square" lIns="0" tIns="0" rIns="0" bIns="0" rtlCol="0" anchor="ctr"/>
-          <a:lstStyle/>
-          <a:p>
-            <a:pPr indent="0" marL="0">
-              <a:buNone/>
-            </a:pPr>
-            <a:r>
-              <a:rPr lang="en-US" sz="1300" dirty="0">
-                <a:solidFill>
-                  <a:srgbClr val="EF4444"/>
-                </a:solidFill>
-                <a:latin typeface="Calibri" pitchFamily="34" charset="0"/>
-                <a:ea typeface="Calibri" pitchFamily="34" charset="-122"/>
-                <a:cs typeface="Calibri" pitchFamily="34" charset="-120"/>
-              </a:rPr>
-              <a:t>特征衍生深度不足</a:t>
-            </a:r>
-            <a:endParaRPr lang="en-US" sz="1300" dirty="0"/>
-          </a:p>
-        </p:txBody>
-      </p:sp>
-      <p:sp>
-        <p:nvSpPr>
-          <p:cNvPr id="12" name="Text 10"/>
-          <p:cNvSpPr/>
-          <p:nvPr/>
-        </p:nvSpPr>
-        <p:spPr>
-          <a:xfrm>
-            <a:off x="3474720" y="2194560"/>
-            <a:ext cx="2286000" cy="548640"/>
-          </a:xfrm>
-          <a:prstGeom prst="rect">
-            <a:avLst/>
-          </a:prstGeom>
-          <a:noFill/>
-          <a:ln/>
-        </p:spPr>
-        <p:txBody>
-          <a:bodyPr wrap="square" lIns="0" tIns="0" rIns="0" bIns="0" rtlCol="0" anchor="ctr"/>
-          <a:lstStyle/>
-          <a:p>
-            <a:pPr indent="0" marL="0">
-              <a:buNone/>
-            </a:pPr>
-            <a:r>
-              <a:rPr lang="en-US" sz="1300" dirty="0">
-                <a:solidFill>
-                  <a:srgbClr val="10B981"/>
-                </a:solidFill>
-                <a:latin typeface="Calibri" pitchFamily="34" charset="0"/>
-                <a:ea typeface="Calibri" pitchFamily="34" charset="-122"/>
-                <a:cs typeface="Calibri" pitchFamily="34" charset="-120"/>
-              </a:rPr>
-              <a:t>→ 加衍生特征工程层</a:t>
-            </a:r>
-            <a:endParaRPr lang="en-US" sz="1300" dirty="0"/>
-          </a:p>
-        </p:txBody>
-      </p:sp>
-      <p:sp>
-        <p:nvSpPr>
-          <p:cNvPr id="13" name="Shape 11"/>
-          <p:cNvSpPr/>
-          <p:nvPr/>
-        </p:nvSpPr>
-        <p:spPr>
-          <a:xfrm>
-            <a:off x="548640" y="2834640"/>
-            <a:ext cx="5303520" cy="548640"/>
-          </a:xfrm>
-          <a:prstGeom prst="rect">
-            <a:avLst/>
-          </a:prstGeom>
-          <a:solidFill>
-            <a:srgbClr val="FFFFFF"/>
-          </a:solidFill>
-          <a:ln w="12700">
-            <a:solidFill>
-              <a:srgbClr val="E2E8F0"/>
-            </a:solidFill>
-            <a:prstDash val="solid"/>
-          </a:ln>
-        </p:spPr>
-      </p:sp>
-      <p:sp>
-        <p:nvSpPr>
-          <p:cNvPr id="14" name="Text 12"/>
-          <p:cNvSpPr/>
-          <p:nvPr/>
-        </p:nvSpPr>
-        <p:spPr>
-          <a:xfrm>
-            <a:off x="731520" y="2834640"/>
-            <a:ext cx="2743200" cy="548640"/>
-          </a:xfrm>
-          <a:prstGeom prst="rect">
-            <a:avLst/>
-          </a:prstGeom>
-          <a:noFill/>
-          <a:ln/>
-        </p:spPr>
-        <p:txBody>
-          <a:bodyPr wrap="square" lIns="0" tIns="0" rIns="0" bIns="0" rtlCol="0" anchor="ctr"/>
-          <a:lstStyle/>
-          <a:p>
-            <a:pPr indent="0" marL="0">
-              <a:buNone/>
-            </a:pPr>
-            <a:r>
-              <a:rPr lang="en-US" sz="1300" dirty="0">
-                <a:solidFill>
-                  <a:srgbClr val="EF4444"/>
-                </a:solidFill>
-                <a:latin typeface="Calibri" pitchFamily="34" charset="0"/>
-                <a:ea typeface="Calibri" pitchFamily="34" charset="-122"/>
-                <a:cs typeface="Calibri" pitchFamily="34" charset="-120"/>
-              </a:rPr>
-              <a:t>无模型校准</a:t>
-            </a:r>
-            <a:endParaRPr lang="en-US" sz="1300" dirty="0"/>
-          </a:p>
-        </p:txBody>
-      </p:sp>
-      <p:sp>
-        <p:nvSpPr>
-          <p:cNvPr id="15" name="Text 13"/>
-          <p:cNvSpPr/>
-          <p:nvPr/>
-        </p:nvSpPr>
-        <p:spPr>
-          <a:xfrm>
-            <a:off x="3474720" y="2834640"/>
-            <a:ext cx="2286000" cy="548640"/>
-          </a:xfrm>
-          <a:prstGeom prst="rect">
-            <a:avLst/>
-          </a:prstGeom>
-          <a:noFill/>
-          <a:ln/>
-        </p:spPr>
-        <p:txBody>
-          <a:bodyPr wrap="square" lIns="0" tIns="0" rIns="0" bIns="0" rtlCol="0" anchor="ctr"/>
-          <a:lstStyle/>
-          <a:p>
-            <a:pPr indent="0" marL="0">
-              <a:buNone/>
-            </a:pPr>
-            <a:r>
-              <a:rPr lang="en-US" sz="1300" dirty="0">
-                <a:solidFill>
-                  <a:srgbClr val="10B981"/>
-                </a:solidFill>
-                <a:latin typeface="Calibri" pitchFamily="34" charset="0"/>
-                <a:ea typeface="Calibri" pitchFamily="34" charset="-122"/>
-                <a:cs typeface="Calibri" pitchFamily="34" charset="-120"/>
-              </a:rPr>
-              <a:t>→ Isotonic / Platt</a:t>
-            </a:r>
-            <a:endParaRPr lang="en-US" sz="1300" dirty="0"/>
-          </a:p>
-        </p:txBody>
-      </p:sp>
-      <p:sp>
-        <p:nvSpPr>
-          <p:cNvPr id="16" name="Shape 14"/>
-          <p:cNvSpPr/>
-          <p:nvPr/>
-        </p:nvSpPr>
-        <p:spPr>
-          <a:xfrm>
-            <a:off x="548640" y="3474720"/>
-            <a:ext cx="5303520" cy="548640"/>
-          </a:xfrm>
-          <a:prstGeom prst="rect">
-            <a:avLst/>
-          </a:prstGeom>
-          <a:solidFill>
-            <a:srgbClr val="FFFFFF"/>
-          </a:solidFill>
-          <a:ln w="12700">
-            <a:solidFill>
-              <a:srgbClr val="E2E8F0"/>
-            </a:solidFill>
-            <a:prstDash val="solid"/>
-          </a:ln>
-        </p:spPr>
-      </p:sp>
-      <p:sp>
-        <p:nvSpPr>
-          <p:cNvPr id="17" name="Text 15"/>
-          <p:cNvSpPr/>
-          <p:nvPr/>
-        </p:nvSpPr>
-        <p:spPr>
-          <a:xfrm>
-            <a:off x="731520" y="3474720"/>
-            <a:ext cx="2743200" cy="548640"/>
-          </a:xfrm>
-          <a:prstGeom prst="rect">
-            <a:avLst/>
-          </a:prstGeom>
-          <a:noFill/>
-          <a:ln/>
-        </p:spPr>
-        <p:txBody>
-          <a:bodyPr wrap="square" lIns="0" tIns="0" rIns="0" bIns="0" rtlCol="0" anchor="ctr"/>
-          <a:lstStyle/>
-          <a:p>
-            <a:pPr indent="0" marL="0">
-              <a:buNone/>
-            </a:pPr>
-            <a:r>
-              <a:rPr lang="en-US" sz="1300" dirty="0">
-                <a:solidFill>
-                  <a:srgbClr val="EF4444"/>
-                </a:solidFill>
-                <a:latin typeface="Calibri" pitchFamily="34" charset="0"/>
-                <a:ea typeface="Calibri" pitchFamily="34" charset="-122"/>
-                <a:cs typeface="Calibri" pitchFamily="34" charset="-120"/>
-              </a:rPr>
-              <a:t>仅文本对话</a:t>
-            </a:r>
-            <a:endParaRPr lang="en-US" sz="1300" dirty="0"/>
-          </a:p>
-        </p:txBody>
-      </p:sp>
-      <p:sp>
-        <p:nvSpPr>
-          <p:cNvPr id="18" name="Text 16"/>
-          <p:cNvSpPr/>
-          <p:nvPr/>
-        </p:nvSpPr>
-        <p:spPr>
-          <a:xfrm>
-            <a:off x="3474720" y="3474720"/>
-            <a:ext cx="2286000" cy="548640"/>
-          </a:xfrm>
-          <a:prstGeom prst="rect">
-            <a:avLst/>
-          </a:prstGeom>
-          <a:noFill/>
-          <a:ln/>
-        </p:spPr>
-        <p:txBody>
-          <a:bodyPr wrap="square" lIns="0" tIns="0" rIns="0" bIns="0" rtlCol="0" anchor="ctr"/>
-          <a:lstStyle/>
-          <a:p>
-            <a:pPr indent="0" marL="0">
-              <a:buNone/>
-            </a:pPr>
-            <a:r>
-              <a:rPr lang="en-US" sz="1300" dirty="0">
-                <a:solidFill>
-                  <a:srgbClr val="10B981"/>
-                </a:solidFill>
-                <a:latin typeface="Calibri" pitchFamily="34" charset="0"/>
-                <a:ea typeface="Calibri" pitchFamily="34" charset="-122"/>
-                <a:cs typeface="Calibri" pitchFamily="34" charset="-120"/>
-              </a:rPr>
-              <a:t>→ 加 OCR</a:t>
-            </a:r>
-            <a:endParaRPr lang="en-US" sz="1300" dirty="0"/>
-          </a:p>
-        </p:txBody>
-      </p:sp>
-      <p:sp>
-        <p:nvSpPr>
-          <p:cNvPr id="19" name="Text 17"/>
-          <p:cNvSpPr/>
-          <p:nvPr/>
-        </p:nvSpPr>
-        <p:spPr>
-          <a:xfrm>
-            <a:off x="6400800" y="1097280"/>
-            <a:ext cx="5029200" cy="365760"/>
-          </a:xfrm>
-          <a:prstGeom prst="rect">
-            <a:avLst/>
-          </a:prstGeom>
-          <a:noFill/>
-          <a:ln/>
-        </p:spPr>
-        <p:txBody>
-          <a:bodyPr wrap="square" lIns="0" tIns="0" rIns="0" bIns="0" rtlCol="0" anchor="ctr"/>
-          <a:lstStyle/>
-          <a:p>
-            <a:pPr indent="0" marL="0">
-              <a:buNone/>
-            </a:pPr>
-            <a:r>
-              <a:rPr lang="en-US" sz="1800" b="1" dirty="0">
-                <a:solidFill>
-                  <a:srgbClr val="21295C"/>
-                </a:solidFill>
-                <a:latin typeface="Calibri" pitchFamily="34" charset="0"/>
-                <a:ea typeface="Calibri" pitchFamily="34" charset="-122"/>
-                <a:cs typeface="Calibri" pitchFamily="34" charset="-120"/>
-              </a:rPr>
-              <a:t>Ask</a:t>
-            </a:r>
-            <a:endParaRPr lang="en-US" sz="1800" dirty="0"/>
-          </a:p>
-        </p:txBody>
-      </p:sp>
-      <p:sp>
-        <p:nvSpPr>
-          <p:cNvPr id="20" name="Shape 18"/>
-          <p:cNvSpPr/>
-          <p:nvPr/>
-        </p:nvSpPr>
-        <p:spPr>
-          <a:xfrm>
-            <a:off x="6400800" y="1554480"/>
-            <a:ext cx="5212080" cy="777240"/>
-          </a:xfrm>
-          <a:prstGeom prst="rect">
-            <a:avLst/>
-          </a:prstGeom>
-          <a:solidFill>
-            <a:srgbClr val="21295C"/>
-          </a:solidFill>
-          <a:ln/>
-        </p:spPr>
-      </p:sp>
-      <p:sp>
-        <p:nvSpPr>
-          <p:cNvPr id="21" name="Text 19"/>
-          <p:cNvSpPr/>
-          <p:nvPr/>
-        </p:nvSpPr>
-        <p:spPr>
-          <a:xfrm>
-            <a:off x="6583680" y="1554480"/>
-            <a:ext cx="4846320" cy="777240"/>
-          </a:xfrm>
-          <a:prstGeom prst="rect">
-            <a:avLst/>
-          </a:prstGeom>
-          <a:noFill/>
-          <a:ln/>
-        </p:spPr>
-        <p:txBody>
-          <a:bodyPr wrap="square" lIns="0" tIns="0" rIns="0" bIns="0" rtlCol="0" anchor="ctr"/>
-          <a:lstStyle/>
-          <a:p>
-            <a:pPr indent="0" marL="0">
-              <a:buNone/>
-            </a:pPr>
-            <a:r>
-              <a:rPr lang="en-US" sz="1400" dirty="0">
-                <a:solidFill>
-                  <a:srgbClr val="FFFFFF"/>
-                </a:solidFill>
-                <a:latin typeface="Calibri" pitchFamily="34" charset="0"/>
-                <a:ea typeface="Calibri" pitchFamily="34" charset="-122"/>
-                <a:cs typeface="Calibri" pitchFamily="34" charset="-120"/>
-              </a:rPr>
-              <a:t>1. Agent × 风控 的产品化路径，特别是合规边界设计</a:t>
-            </a:r>
-            <a:endParaRPr lang="en-US" sz="1400" dirty="0"/>
-          </a:p>
-        </p:txBody>
-      </p:sp>
-      <p:sp>
-        <p:nvSpPr>
-          <p:cNvPr id="22" name="Shape 20"/>
-          <p:cNvSpPr/>
-          <p:nvPr/>
-        </p:nvSpPr>
-        <p:spPr>
-          <a:xfrm>
-            <a:off x="6400800" y="2468880"/>
-            <a:ext cx="5212080" cy="777240"/>
-          </a:xfrm>
-          <a:prstGeom prst="rect">
-            <a:avLst/>
-          </a:prstGeom>
-          <a:solidFill>
-            <a:srgbClr val="21295C"/>
-          </a:solidFill>
-          <a:ln/>
-        </p:spPr>
-      </p:sp>
-      <p:sp>
-        <p:nvSpPr>
-          <p:cNvPr id="23" name="Text 21"/>
-          <p:cNvSpPr/>
-          <p:nvPr/>
-        </p:nvSpPr>
-        <p:spPr>
-          <a:xfrm>
-            <a:off x="6583680" y="2468880"/>
-            <a:ext cx="4846320" cy="777240"/>
-          </a:xfrm>
-          <a:prstGeom prst="rect">
-            <a:avLst/>
-          </a:prstGeom>
-          <a:noFill/>
-          <a:ln/>
-        </p:spPr>
-        <p:txBody>
-          <a:bodyPr wrap="square" lIns="0" tIns="0" rIns="0" bIns="0" rtlCol="0" anchor="ctr"/>
-          <a:lstStyle/>
-          <a:p>
-            <a:pPr indent="0" marL="0">
-              <a:buNone/>
-            </a:pPr>
-            <a:r>
-              <a:rPr lang="en-US" sz="1400" dirty="0">
-                <a:solidFill>
-                  <a:srgbClr val="FFFFFF"/>
-                </a:solidFill>
-                <a:latin typeface="Calibri" pitchFamily="34" charset="0"/>
-                <a:ea typeface="Calibri" pitchFamily="34" charset="-122"/>
-                <a:cs typeface="Calibri" pitchFamily="34" charset="-120"/>
-              </a:rPr>
-              <a:t>2. IV/WoE+PSI 方法论在生产环境的工程化最佳实践</a:t>
-            </a:r>
-            <a:endParaRPr lang="en-US" sz="1400" dirty="0"/>
-          </a:p>
-        </p:txBody>
-      </p:sp>
-      <p:sp>
-        <p:nvSpPr>
-          <p:cNvPr id="24" name="Shape 22"/>
-          <p:cNvSpPr/>
-          <p:nvPr/>
-        </p:nvSpPr>
-        <p:spPr>
-          <a:xfrm>
-            <a:off x="6400800" y="3383280"/>
-            <a:ext cx="5212080" cy="777240"/>
-          </a:xfrm>
-          <a:prstGeom prst="rect">
-            <a:avLst/>
-          </a:prstGeom>
-          <a:solidFill>
-            <a:srgbClr val="21295C"/>
-          </a:solidFill>
-          <a:ln/>
-        </p:spPr>
-      </p:sp>
-      <p:sp>
-        <p:nvSpPr>
-          <p:cNvPr id="25" name="Text 23"/>
-          <p:cNvSpPr/>
-          <p:nvPr/>
-        </p:nvSpPr>
-        <p:spPr>
-          <a:xfrm>
-            <a:off x="6583680" y="3383280"/>
-            <a:ext cx="4846320" cy="777240"/>
-          </a:xfrm>
-          <a:prstGeom prst="rect">
-            <a:avLst/>
-          </a:prstGeom>
-          <a:noFill/>
-          <a:ln/>
-        </p:spPr>
-        <p:txBody>
-          <a:bodyPr wrap="square" lIns="0" tIns="0" rIns="0" bIns="0" rtlCol="0" anchor="ctr"/>
-          <a:lstStyle/>
-          <a:p>
-            <a:pPr indent="0" marL="0">
-              <a:buNone/>
-            </a:pPr>
-            <a:r>
-              <a:rPr lang="en-US" sz="1400" dirty="0">
-                <a:solidFill>
-                  <a:srgbClr val="FFFFFF"/>
-                </a:solidFill>
-                <a:latin typeface="Calibri" pitchFamily="34" charset="0"/>
-                <a:ea typeface="Calibri" pitchFamily="34" charset="-122"/>
-                <a:cs typeface="Calibri" pitchFamily="34" charset="-120"/>
-              </a:rPr>
-              <a:t>3. 多模态采集（OCR/语音）的落地经验</a:t>
-            </a:r>
-            <a:endParaRPr lang="en-US" sz="1400" dirty="0"/>
-          </a:p>
-        </p:txBody>
-      </p:sp>
-    </p:spTree>
-  </p:cSld>
-  <p:clrMapOvr>
-    <a:masterClrMapping/>
-  </p:clrMapOvr>
-</p:sld>
-</file>
-
-<file path=ppt/slides/slide14.xml><?xml version="1.0" encoding="utf-8"?>
-<p:sld xmlns:a="http://schemas.openxmlformats.org/drawingml/2006/main" xmlns:r="http://schemas.openxmlformats.org/officeDocument/2006/relationships" xmlns:p="http://schemas.openxmlformats.org/presentationml/2006/main">
-  <p:cSld name="Slide 14">
     <p:bg>
       <p:bgPr>
         <a:solidFill>
@@ -6187,7 +5441,7 @@
                   <a:srgbClr val="64748B"/>
                 </a:solidFill>
               </a:rPr>
-              <a:t>2 / 14</a:t>
+              <a:t>2 / 13</a:t>
             </a:r>
             <a:endParaRPr lang="en-US" sz="900" dirty="0"/>
           </a:p>
@@ -6874,7 +6128,7 @@
                   <a:srgbClr val="64748B"/>
                 </a:solidFill>
               </a:rPr>
-              <a:t>3 / 14</a:t>
+              <a:t>3 / 13</a:t>
             </a:r>
             <a:endParaRPr lang="en-US" sz="900" dirty="0"/>
           </a:p>
@@ -7801,7 +7055,7 @@
                   <a:srgbClr val="64748B"/>
                 </a:solidFill>
               </a:rPr>
-              <a:t>4 / 14</a:t>
+              <a:t>4 / 13</a:t>
             </a:r>
             <a:endParaRPr lang="en-US" sz="900" dirty="0"/>
           </a:p>
@@ -8690,7 +7944,7 @@
                   <a:srgbClr val="64748B"/>
                 </a:solidFill>
               </a:rPr>
-              <a:t>5 / 14</a:t>
+              <a:t>5 / 13</a:t>
             </a:r>
             <a:endParaRPr lang="en-US" sz="900" dirty="0"/>
           </a:p>
@@ -9955,7 +9209,7 @@
                   <a:srgbClr val="64748B"/>
                 </a:solidFill>
               </a:rPr>
-              <a:t>6 / 14</a:t>
+              <a:t>6 / 13</a:t>
             </a:r>
             <a:endParaRPr lang="en-US" sz="900" dirty="0"/>
           </a:p>
@@ -11456,7 +10710,7 @@
                   <a:srgbClr val="64748B"/>
                 </a:solidFill>
               </a:rPr>
-              <a:t>7 / 14</a:t>
+              <a:t>7 / 13</a:t>
             </a:r>
             <a:endParaRPr lang="en-US" sz="900" dirty="0"/>
           </a:p>
@@ -12129,7 +11383,7 @@
                   <a:srgbClr val="64748B"/>
                 </a:solidFill>
               </a:rPr>
-              <a:t>8 / 14</a:t>
+              <a:t>8 / 13</a:t>
             </a:r>
             <a:endParaRPr lang="en-US" sz="900" dirty="0"/>
           </a:p>
@@ -14228,7 +13482,7 @@
                   <a:srgbClr val="64748B"/>
                 </a:solidFill>
               </a:rPr>
-              <a:t>9 / 14</a:t>
+              <a:t>9 / 13</a:t>
             </a:r>
             <a:endParaRPr lang="en-US" sz="900" dirty="0"/>
           </a:p>
